--- a/docs/대회/제출/AI-Builder-Cup-제출-초안.pptx
+++ b/docs/대회/제출/AI-Builder-Cup-제출-초안.pptx
@@ -6926,7 +6926,7 @@
                 </a:solidFill>
                 <a:latin typeface="Google Sans Flex"/>
               </a:rPr>
-              <a:t> [Team name]</a:t>
+              <a:t> COPYBARA</a:t>
             </a:r>
             <a:endParaRPr sz="1800">
               <a:latin typeface="Google Sans Flex"/>
@@ -6963,7 +6963,7 @@
                 </a:solidFill>
                 <a:latin typeface="Google Sans Flex"/>
               </a:rPr>
-              <a:t> [Team leader]</a:t>
+              <a:t> TBD</a:t>
             </a:r>
             <a:endParaRPr sz="1800">
               <a:latin typeface="Google Sans Flex"/>
@@ -7278,10 +7278,12 @@
             </a:avLst>
           </a:prstGeom>
           <a:solidFill>
-            <a:srgbClr val="F1F3F4"/>
+            <a:srgbClr val="FFFFFF"/>
           </a:solidFill>
-          <a:ln>
-            <a:noFill/>
+          <a:ln w="9525">
+            <a:solidFill>
+              <a:srgbClr val="DADCE0"/>
+            </a:solidFill>
           </a:ln>
           <a:effectLst/>
         </p:spPr>
@@ -7292,7 +7294,7 @@
           <a:fillRef idx="3">
             <a:schemeClr val="accent1"/>
           </a:fillRef>
-          <a:effectRef idx="2">
+          <a:effectRef idx="0">
             <a:schemeClr val="accent1"/>
           </a:effectRef>
           <a:fontRef idx="minor">
@@ -7400,10 +7402,12 @@
             </a:avLst>
           </a:prstGeom>
           <a:solidFill>
-            <a:srgbClr val="F1F3F4"/>
+            <a:srgbClr val="FFFFFF"/>
           </a:solidFill>
-          <a:ln>
-            <a:noFill/>
+          <a:ln w="9525">
+            <a:solidFill>
+              <a:srgbClr val="DADCE0"/>
+            </a:solidFill>
           </a:ln>
           <a:effectLst/>
         </p:spPr>
@@ -7414,7 +7418,7 @@
           <a:fillRef idx="3">
             <a:schemeClr val="accent1"/>
           </a:fillRef>
-          <a:effectRef idx="2">
+          <a:effectRef idx="0">
             <a:schemeClr val="accent1"/>
           </a:effectRef>
           <a:fontRef idx="minor">
@@ -7522,10 +7526,12 @@
             </a:avLst>
           </a:prstGeom>
           <a:solidFill>
-            <a:srgbClr val="F1F3F4"/>
+            <a:srgbClr val="FFFFFF"/>
           </a:solidFill>
-          <a:ln>
-            <a:noFill/>
+          <a:ln w="9525">
+            <a:solidFill>
+              <a:srgbClr val="DADCE0"/>
+            </a:solidFill>
           </a:ln>
           <a:effectLst/>
         </p:spPr>
@@ -7536,7 +7542,7 @@
           <a:fillRef idx="3">
             <a:schemeClr val="accent1"/>
           </a:fillRef>
-          <a:effectRef idx="2">
+          <a:effectRef idx="0">
             <a:schemeClr val="accent1"/>
           </a:effectRef>
           <a:fontRef idx="minor">
@@ -7843,7 +7849,7 @@
           <a:fillRef idx="3">
             <a:schemeClr val="accent1"/>
           </a:fillRef>
-          <a:effectRef idx="2">
+          <a:effectRef idx="0">
             <a:schemeClr val="accent1"/>
           </a:effectRef>
           <a:fontRef idx="minor">
@@ -8151,7 +8157,7 @@
             </a:avLst>
           </a:prstGeom>
           <a:solidFill>
-            <a:srgbClr val="F1F3F4"/>
+            <a:srgbClr val="FFFFFF"/>
           </a:solidFill>
           <a:ln w="12700">
             <a:solidFill>
@@ -8168,7 +8174,7 @@
           <a:fillRef idx="3">
             <a:schemeClr val="accent1"/>
           </a:fillRef>
-          <a:effectRef idx="2">
+          <a:effectRef idx="0">
             <a:schemeClr val="accent1"/>
           </a:effectRef>
           <a:fontRef idx="minor">
@@ -8276,7 +8282,7 @@
             </a:avLst>
           </a:prstGeom>
           <a:solidFill>
-            <a:srgbClr val="F1F3F4"/>
+            <a:srgbClr val="FFFFFF"/>
           </a:solidFill>
           <a:ln w="12700">
             <a:solidFill>
@@ -8293,7 +8299,7 @@
           <a:fillRef idx="3">
             <a:schemeClr val="accent1"/>
           </a:fillRef>
-          <a:effectRef idx="2">
+          <a:effectRef idx="0">
             <a:schemeClr val="accent1"/>
           </a:effectRef>
           <a:fontRef idx="minor">
@@ -8401,7 +8407,7 @@
             </a:avLst>
           </a:prstGeom>
           <a:solidFill>
-            <a:srgbClr val="F1F3F4"/>
+            <a:srgbClr val="FFFFFF"/>
           </a:solidFill>
           <a:ln w="12700">
             <a:solidFill>
@@ -8418,7 +8424,7 @@
           <a:fillRef idx="3">
             <a:schemeClr val="accent1"/>
           </a:fillRef>
-          <a:effectRef idx="2">
+          <a:effectRef idx="0">
             <a:schemeClr val="accent1"/>
           </a:effectRef>
           <a:fontRef idx="minor">
@@ -8526,7 +8532,7 @@
             </a:avLst>
           </a:prstGeom>
           <a:solidFill>
-            <a:srgbClr val="F1F3F4"/>
+            <a:srgbClr val="FFFFFF"/>
           </a:solidFill>
           <a:ln w="12700">
             <a:solidFill>
@@ -8543,7 +8549,7 @@
           <a:fillRef idx="3">
             <a:schemeClr val="accent1"/>
           </a:fillRef>
-          <a:effectRef idx="2">
+          <a:effectRef idx="0">
             <a:schemeClr val="accent1"/>
           </a:effectRef>
           <a:fontRef idx="minor">
@@ -8826,10 +8832,12 @@
             </a:avLst>
           </a:prstGeom>
           <a:solidFill>
-            <a:srgbClr val="F1F3F4"/>
+            <a:srgbClr val="FFFFFF"/>
           </a:solidFill>
-          <a:ln>
-            <a:noFill/>
+          <a:ln w="9525">
+            <a:solidFill>
+              <a:srgbClr val="DADCE0"/>
+            </a:solidFill>
           </a:ln>
           <a:effectLst/>
         </p:spPr>
@@ -8840,7 +8848,7 @@
           <a:fillRef idx="3">
             <a:schemeClr val="accent1"/>
           </a:fillRef>
-          <a:effectRef idx="2">
+          <a:effectRef idx="0">
             <a:schemeClr val="accent1"/>
           </a:effectRef>
           <a:fontRef idx="minor">
@@ -8964,10 +8972,12 @@
             </a:avLst>
           </a:prstGeom>
           <a:solidFill>
-            <a:srgbClr val="F1F3F4"/>
+            <a:srgbClr val="FFFFFF"/>
           </a:solidFill>
-          <a:ln>
-            <a:noFill/>
+          <a:ln w="9525">
+            <a:solidFill>
+              <a:srgbClr val="DADCE0"/>
+            </a:solidFill>
           </a:ln>
           <a:effectLst/>
         </p:spPr>
@@ -8978,7 +8988,7 @@
           <a:fillRef idx="3">
             <a:schemeClr val="accent1"/>
           </a:fillRef>
-          <a:effectRef idx="2">
+          <a:effectRef idx="0">
             <a:schemeClr val="accent1"/>
           </a:effectRef>
           <a:fontRef idx="minor">
@@ -9102,10 +9112,12 @@
             </a:avLst>
           </a:prstGeom>
           <a:solidFill>
-            <a:srgbClr val="F1F3F4"/>
+            <a:srgbClr val="FFFFFF"/>
           </a:solidFill>
-          <a:ln>
-            <a:noFill/>
+          <a:ln w="9525">
+            <a:solidFill>
+              <a:srgbClr val="DADCE0"/>
+            </a:solidFill>
           </a:ln>
           <a:effectLst/>
         </p:spPr>
@@ -9116,7 +9128,7 @@
           <a:fillRef idx="3">
             <a:schemeClr val="accent1"/>
           </a:fillRef>
-          <a:effectRef idx="2">
+          <a:effectRef idx="0">
             <a:schemeClr val="accent1"/>
           </a:effectRef>
           <a:fontRef idx="minor">
@@ -9240,10 +9252,12 @@
             </a:avLst>
           </a:prstGeom>
           <a:solidFill>
-            <a:srgbClr val="F1F3F4"/>
+            <a:srgbClr val="FFFFFF"/>
           </a:solidFill>
-          <a:ln>
-            <a:noFill/>
+          <a:ln w="9525">
+            <a:solidFill>
+              <a:srgbClr val="DADCE0"/>
+            </a:solidFill>
           </a:ln>
           <a:effectLst/>
         </p:spPr>
@@ -9254,7 +9268,7 @@
           <a:fillRef idx="3">
             <a:schemeClr val="accent1"/>
           </a:fillRef>
-          <a:effectRef idx="2">
+          <a:effectRef idx="0">
             <a:schemeClr val="accent1"/>
           </a:effectRef>
           <a:fontRef idx="minor">
@@ -9795,7 +9809,7 @@
         <p:spPr>
           <a:xfrm>
             <a:off x="365760" y="1188720"/>
-            <a:ext cx="2697480" cy="3291840"/>
+            <a:ext cx="2697480" cy="3108960"/>
           </a:xfrm>
           <a:prstGeom prst="roundRect">
             <a:avLst>
@@ -9803,10 +9817,12 @@
             </a:avLst>
           </a:prstGeom>
           <a:solidFill>
-            <a:srgbClr val="F1F3F4"/>
+            <a:srgbClr val="FFFFFF"/>
           </a:solidFill>
-          <a:ln>
-            <a:noFill/>
+          <a:ln w="9525">
+            <a:solidFill>
+              <a:srgbClr val="DADCE0"/>
+            </a:solidFill>
           </a:ln>
           <a:effectLst/>
         </p:spPr>
@@ -9817,7 +9833,7 @@
           <a:fillRef idx="3">
             <a:schemeClr val="accent1"/>
           </a:fillRef>
-          <a:effectRef idx="2">
+          <a:effectRef idx="0">
             <a:schemeClr val="accent1"/>
           </a:effectRef>
           <a:fontRef idx="minor">
@@ -9931,7 +9947,7 @@
         <p:spPr>
           <a:xfrm>
             <a:off x="548640" y="1828800"/>
-            <a:ext cx="2377440" cy="2560320"/>
+            <a:ext cx="2377440" cy="2468880"/>
           </a:xfrm>
           <a:prstGeom prst="rect">
             <a:avLst/>
@@ -10050,42 +10066,6 @@
           </a:p>
         </p:txBody>
       </p:sp>
-      <p:cxnSp>
-        <p:nvCxnSpPr>
-          <p:cNvPr id="156" name="Connector 155"/>
-          <p:cNvCxnSpPr/>
-          <p:nvPr/>
-        </p:nvCxnSpPr>
-        <p:spPr>
-          <a:xfrm>
-            <a:off x="3081528" y="2834640"/>
-            <a:ext cx="100584" cy="0"/>
-          </a:xfrm>
-          <a:prstGeom prst="line">
-            <a:avLst/>
-          </a:prstGeom>
-          <a:ln w="15875">
-            <a:solidFill>
-              <a:srgbClr val="5F6368"/>
-            </a:solidFill>
-            <a:tailEnd type="triangle" w="med" len="med"/>
-          </a:ln>
-        </p:spPr>
-        <p:style>
-          <a:lnRef idx="2">
-            <a:schemeClr val="accent1"/>
-          </a:lnRef>
-          <a:fillRef idx="0">
-            <a:schemeClr val="accent1"/>
-          </a:fillRef>
-          <a:effectRef idx="1">
-            <a:schemeClr val="accent1"/>
-          </a:effectRef>
-          <a:fontRef idx="minor">
-            <a:schemeClr val="tx1"/>
-          </a:fontRef>
-        </p:style>
-      </p:cxnSp>
       <p:sp>
         <p:nvSpPr>
           <p:cNvPr id="157" name="Rounded Rectangle 156"/>
@@ -10095,7 +10075,7 @@
         <p:spPr>
           <a:xfrm>
             <a:off x="3200400" y="1188720"/>
-            <a:ext cx="2697480" cy="3291840"/>
+            <a:ext cx="2697480" cy="3108960"/>
           </a:xfrm>
           <a:prstGeom prst="roundRect">
             <a:avLst>
@@ -10103,10 +10083,12 @@
             </a:avLst>
           </a:prstGeom>
           <a:solidFill>
-            <a:srgbClr val="F1F3F4"/>
+            <a:srgbClr val="FFFFFF"/>
           </a:solidFill>
-          <a:ln>
-            <a:noFill/>
+          <a:ln w="9525">
+            <a:solidFill>
+              <a:srgbClr val="DADCE0"/>
+            </a:solidFill>
           </a:ln>
           <a:effectLst/>
         </p:spPr>
@@ -10117,7 +10099,7 @@
           <a:fillRef idx="3">
             <a:schemeClr val="accent1"/>
           </a:fillRef>
-          <a:effectRef idx="2">
+          <a:effectRef idx="0">
             <a:schemeClr val="accent1"/>
           </a:effectRef>
           <a:fontRef idx="minor">
@@ -10231,7 +10213,7 @@
         <p:spPr>
           <a:xfrm>
             <a:off x="3383280" y="1828800"/>
-            <a:ext cx="2377440" cy="2560320"/>
+            <a:ext cx="2377440" cy="2468880"/>
           </a:xfrm>
           <a:prstGeom prst="rect">
             <a:avLst/>
@@ -10308,42 +10290,6 @@
           </a:p>
         </p:txBody>
       </p:sp>
-      <p:cxnSp>
-        <p:nvCxnSpPr>
-          <p:cNvPr id="161" name="Connector 160"/>
-          <p:cNvCxnSpPr/>
-          <p:nvPr/>
-        </p:nvCxnSpPr>
-        <p:spPr>
-          <a:xfrm>
-            <a:off x="5916168" y="2834640"/>
-            <a:ext cx="100584" cy="0"/>
-          </a:xfrm>
-          <a:prstGeom prst="line">
-            <a:avLst/>
-          </a:prstGeom>
-          <a:ln w="15875">
-            <a:solidFill>
-              <a:srgbClr val="5F6368"/>
-            </a:solidFill>
-            <a:tailEnd type="triangle" w="med" len="med"/>
-          </a:ln>
-        </p:spPr>
-        <p:style>
-          <a:lnRef idx="2">
-            <a:schemeClr val="accent1"/>
-          </a:lnRef>
-          <a:fillRef idx="0">
-            <a:schemeClr val="accent1"/>
-          </a:fillRef>
-          <a:effectRef idx="1">
-            <a:schemeClr val="accent1"/>
-          </a:effectRef>
-          <a:fontRef idx="minor">
-            <a:schemeClr val="tx1"/>
-          </a:fontRef>
-        </p:style>
-      </p:cxnSp>
       <p:sp>
         <p:nvSpPr>
           <p:cNvPr id="162" name="Rounded Rectangle 161"/>
@@ -10353,7 +10299,7 @@
         <p:spPr>
           <a:xfrm>
             <a:off x="6035040" y="1188720"/>
-            <a:ext cx="2697480" cy="3291840"/>
+            <a:ext cx="2697480" cy="3108960"/>
           </a:xfrm>
           <a:prstGeom prst="roundRect">
             <a:avLst>
@@ -10361,10 +10307,12 @@
             </a:avLst>
           </a:prstGeom>
           <a:solidFill>
-            <a:srgbClr val="F1F3F4"/>
+            <a:srgbClr val="FFFFFF"/>
           </a:solidFill>
-          <a:ln>
-            <a:noFill/>
+          <a:ln w="9525">
+            <a:solidFill>
+              <a:srgbClr val="DADCE0"/>
+            </a:solidFill>
           </a:ln>
           <a:effectLst/>
         </p:spPr>
@@ -10375,7 +10323,7 @@
           <a:fillRef idx="3">
             <a:schemeClr val="accent1"/>
           </a:fillRef>
-          <a:effectRef idx="2">
+          <a:effectRef idx="0">
             <a:schemeClr val="accent1"/>
           </a:effectRef>
           <a:fontRef idx="minor">
@@ -10489,7 +10437,7 @@
         <p:spPr>
           <a:xfrm>
             <a:off x="6217920" y="1828800"/>
-            <a:ext cx="2377440" cy="2560320"/>
+            <a:ext cx="2377440" cy="2468880"/>
           </a:xfrm>
           <a:prstGeom prst="rect">
             <a:avLst/>
@@ -10909,10 +10857,12 @@
             </a:avLst>
           </a:prstGeom>
           <a:solidFill>
-            <a:srgbClr val="F1F3F4"/>
+            <a:srgbClr val="FFFFFF"/>
           </a:solidFill>
-          <a:ln>
-            <a:noFill/>
+          <a:ln w="9525">
+            <a:solidFill>
+              <a:srgbClr val="DADCE0"/>
+            </a:solidFill>
           </a:ln>
           <a:effectLst/>
         </p:spPr>
@@ -10923,7 +10873,7 @@
           <a:fillRef idx="3">
             <a:schemeClr val="accent1"/>
           </a:fillRef>
-          <a:effectRef idx="2">
+          <a:effectRef idx="0">
             <a:schemeClr val="accent1"/>
           </a:effectRef>
           <a:fontRef idx="minor">
@@ -11290,10 +11240,12 @@
             </a:avLst>
           </a:prstGeom>
           <a:solidFill>
-            <a:srgbClr val="F1F3F4"/>
+            <a:srgbClr val="FFFFFF"/>
           </a:solidFill>
-          <a:ln>
-            <a:noFill/>
+          <a:ln w="9525">
+            <a:solidFill>
+              <a:srgbClr val="DADCE0"/>
+            </a:solidFill>
           </a:ln>
           <a:effectLst/>
         </p:spPr>
@@ -11304,7 +11256,7 @@
           <a:fillRef idx="3">
             <a:schemeClr val="accent1"/>
           </a:fillRef>
-          <a:effectRef idx="2">
+          <a:effectRef idx="0">
             <a:schemeClr val="accent1"/>
           </a:effectRef>
           <a:fontRef idx="minor">
@@ -11533,10 +11485,12 @@
             </a:avLst>
           </a:prstGeom>
           <a:solidFill>
-            <a:srgbClr val="F1F3F4"/>
+            <a:srgbClr val="FFFFFF"/>
           </a:solidFill>
-          <a:ln>
-            <a:noFill/>
+          <a:ln w="9525">
+            <a:solidFill>
+              <a:srgbClr val="DADCE0"/>
+            </a:solidFill>
           </a:ln>
           <a:effectLst/>
         </p:spPr>
@@ -11547,7 +11501,7 @@
           <a:fillRef idx="3">
             <a:schemeClr val="accent1"/>
           </a:fillRef>
-          <a:effectRef idx="2">
+          <a:effectRef idx="0">
             <a:schemeClr val="accent1"/>
           </a:effectRef>
           <a:fontRef idx="minor">
@@ -11776,10 +11730,12 @@
             </a:avLst>
           </a:prstGeom>
           <a:solidFill>
-            <a:srgbClr val="F1F3F4"/>
+            <a:srgbClr val="FFFFFF"/>
           </a:solidFill>
-          <a:ln>
-            <a:noFill/>
+          <a:ln w="9525">
+            <a:solidFill>
+              <a:srgbClr val="DADCE0"/>
+            </a:solidFill>
           </a:ln>
           <a:effectLst/>
         </p:spPr>
@@ -11790,7 +11746,7 @@
           <a:fillRef idx="3">
             <a:schemeClr val="accent1"/>
           </a:fillRef>
-          <a:effectRef idx="2">
+          <a:effectRef idx="0">
             <a:schemeClr val="accent1"/>
           </a:effectRef>
           <a:fontRef idx="minor">
@@ -12441,10 +12397,12 @@
             </a:avLst>
           </a:prstGeom>
           <a:solidFill>
-            <a:srgbClr val="F1F3F4"/>
+            <a:srgbClr val="FFFFFF"/>
           </a:solidFill>
-          <a:ln>
-            <a:noFill/>
+          <a:ln w="9525">
+            <a:solidFill>
+              <a:srgbClr val="DADCE0"/>
+            </a:solidFill>
           </a:ln>
           <a:effectLst/>
         </p:spPr>
@@ -12455,7 +12413,7 @@
           <a:fillRef idx="3">
             <a:schemeClr val="accent1"/>
           </a:fillRef>
-          <a:effectRef idx="2">
+          <a:effectRef idx="0">
             <a:schemeClr val="accent1"/>
           </a:effectRef>
           <a:fontRef idx="minor">
@@ -12616,10 +12574,12 @@
             </a:avLst>
           </a:prstGeom>
           <a:solidFill>
-            <a:srgbClr val="F1F3F4"/>
+            <a:srgbClr val="FFFFFF"/>
           </a:solidFill>
-          <a:ln>
-            <a:noFill/>
+          <a:ln w="9525">
+            <a:solidFill>
+              <a:srgbClr val="DADCE0"/>
+            </a:solidFill>
           </a:ln>
           <a:effectLst/>
         </p:spPr>
@@ -12630,7 +12590,7 @@
           <a:fillRef idx="3">
             <a:schemeClr val="accent1"/>
           </a:fillRef>
-          <a:effectRef idx="2">
+          <a:effectRef idx="0">
             <a:schemeClr val="accent1"/>
           </a:effectRef>
           <a:fontRef idx="minor">
@@ -12791,10 +12751,12 @@
             </a:avLst>
           </a:prstGeom>
           <a:solidFill>
-            <a:srgbClr val="F1F3F4"/>
+            <a:srgbClr val="FFFFFF"/>
           </a:solidFill>
-          <a:ln>
-            <a:noFill/>
+          <a:ln w="9525">
+            <a:solidFill>
+              <a:srgbClr val="DADCE0"/>
+            </a:solidFill>
           </a:ln>
           <a:effectLst/>
         </p:spPr>
@@ -12805,7 +12767,7 @@
           <a:fillRef idx="3">
             <a:schemeClr val="accent1"/>
           </a:fillRef>
-          <a:effectRef idx="2">
+          <a:effectRef idx="0">
             <a:schemeClr val="accent1"/>
           </a:effectRef>
           <a:fontRef idx="minor">
@@ -13188,10 +13150,12 @@
             </a:avLst>
           </a:prstGeom>
           <a:solidFill>
-            <a:srgbClr val="F1F3F4"/>
+            <a:srgbClr val="FFFFFF"/>
           </a:solidFill>
-          <a:ln>
-            <a:noFill/>
+          <a:ln w="9525">
+            <a:solidFill>
+              <a:srgbClr val="DADCE0"/>
+            </a:solidFill>
           </a:ln>
           <a:effectLst/>
         </p:spPr>
@@ -13202,7 +13166,7 @@
           <a:fillRef idx="3">
             <a:schemeClr val="accent1"/>
           </a:fillRef>
-          <a:effectRef idx="2">
+          <a:effectRef idx="0">
             <a:schemeClr val="accent1"/>
           </a:effectRef>
           <a:fontRef idx="minor">
@@ -13263,7 +13227,7 @@
                 </a:solidFill>
                 <a:latin typeface="Google Sans Flex"/>
               </a:rPr>
-              <a:t>?</a:t>
+              <a:t>1</a:t>
             </a:r>
           </a:p>
         </p:txBody>
@@ -13379,10 +13343,12 @@
             </a:avLst>
           </a:prstGeom>
           <a:solidFill>
-            <a:srgbClr val="F1F3F4"/>
+            <a:srgbClr val="FFFFFF"/>
           </a:solidFill>
-          <a:ln>
-            <a:noFill/>
+          <a:ln w="9525">
+            <a:solidFill>
+              <a:srgbClr val="DADCE0"/>
+            </a:solidFill>
           </a:ln>
           <a:effectLst/>
         </p:spPr>
@@ -13393,7 +13359,7 @@
           <a:fillRef idx="3">
             <a:schemeClr val="accent1"/>
           </a:fillRef>
-          <a:effectRef idx="2">
+          <a:effectRef idx="0">
             <a:schemeClr val="accent1"/>
           </a:effectRef>
           <a:fontRef idx="minor">
@@ -13454,7 +13420,7 @@
                 </a:solidFill>
                 <a:latin typeface="Google Sans Flex"/>
               </a:rPr>
-              <a:t>?</a:t>
+              <a:t>2</a:t>
             </a:r>
           </a:p>
         </p:txBody>
@@ -13570,10 +13536,12 @@
             </a:avLst>
           </a:prstGeom>
           <a:solidFill>
-            <a:srgbClr val="F1F3F4"/>
+            <a:srgbClr val="FFFFFF"/>
           </a:solidFill>
-          <a:ln>
-            <a:noFill/>
+          <a:ln w="9525">
+            <a:solidFill>
+              <a:srgbClr val="DADCE0"/>
+            </a:solidFill>
           </a:ln>
           <a:effectLst/>
         </p:spPr>
@@ -13584,7 +13552,7 @@
           <a:fillRef idx="3">
             <a:schemeClr val="accent1"/>
           </a:fillRef>
-          <a:effectRef idx="2">
+          <a:effectRef idx="0">
             <a:schemeClr val="accent1"/>
           </a:effectRef>
           <a:fontRef idx="minor">
@@ -13645,7 +13613,7 @@
                 </a:solidFill>
                 <a:latin typeface="Google Sans Flex"/>
               </a:rPr>
-              <a:t>★</a:t>
+              <a:t>3</a:t>
             </a:r>
           </a:p>
         </p:txBody>
@@ -13988,10 +13956,12 @@
             </a:avLst>
           </a:prstGeom>
           <a:solidFill>
-            <a:srgbClr val="F1F3F4"/>
+            <a:srgbClr val="FFFFFF"/>
           </a:solidFill>
-          <a:ln>
-            <a:noFill/>
+          <a:ln w="9525">
+            <a:solidFill>
+              <a:srgbClr val="DADCE0"/>
+            </a:solidFill>
           </a:ln>
           <a:effectLst/>
         </p:spPr>
@@ -14002,7 +13972,7 @@
           <a:fillRef idx="3">
             <a:schemeClr val="accent1"/>
           </a:fillRef>
-          <a:effectRef idx="2">
+          <a:effectRef idx="0">
             <a:schemeClr val="accent1"/>
           </a:effectRef>
           <a:fontRef idx="minor">
@@ -14163,10 +14133,12 @@
             </a:avLst>
           </a:prstGeom>
           <a:solidFill>
-            <a:srgbClr val="F1F3F4"/>
+            <a:srgbClr val="FFFFFF"/>
           </a:solidFill>
-          <a:ln>
-            <a:noFill/>
+          <a:ln w="9525">
+            <a:solidFill>
+              <a:srgbClr val="DADCE0"/>
+            </a:solidFill>
           </a:ln>
           <a:effectLst/>
         </p:spPr>
@@ -14177,7 +14149,7 @@
           <a:fillRef idx="3">
             <a:schemeClr val="accent1"/>
           </a:fillRef>
-          <a:effectRef idx="2">
+          <a:effectRef idx="0">
             <a:schemeClr val="accent1"/>
           </a:effectRef>
           <a:fontRef idx="minor">
@@ -14338,10 +14310,12 @@
             </a:avLst>
           </a:prstGeom>
           <a:solidFill>
-            <a:srgbClr val="F1F3F4"/>
+            <a:srgbClr val="FFFFFF"/>
           </a:solidFill>
-          <a:ln>
-            <a:noFill/>
+          <a:ln w="9525">
+            <a:solidFill>
+              <a:srgbClr val="DADCE0"/>
+            </a:solidFill>
           </a:ln>
           <a:effectLst/>
         </p:spPr>
@@ -14352,7 +14326,7 @@
           <a:fillRef idx="3">
             <a:schemeClr val="accent1"/>
           </a:fillRef>
-          <a:effectRef idx="2">
+          <a:effectRef idx="0">
             <a:schemeClr val="accent1"/>
           </a:effectRef>
           <a:fontRef idx="minor">
@@ -14513,10 +14487,12 @@
             </a:avLst>
           </a:prstGeom>
           <a:solidFill>
-            <a:srgbClr val="F1F3F4"/>
+            <a:srgbClr val="FFFFFF"/>
           </a:solidFill>
-          <a:ln>
-            <a:noFill/>
+          <a:ln w="9525">
+            <a:solidFill>
+              <a:srgbClr val="DADCE0"/>
+            </a:solidFill>
           </a:ln>
           <a:effectLst/>
         </p:spPr>
@@ -14527,7 +14503,7 @@
           <a:fillRef idx="3">
             <a:schemeClr val="accent1"/>
           </a:fillRef>
-          <a:effectRef idx="2">
+          <a:effectRef idx="0">
             <a:schemeClr val="accent1"/>
           </a:effectRef>
           <a:fontRef idx="minor">
@@ -14688,10 +14664,12 @@
             </a:avLst>
           </a:prstGeom>
           <a:solidFill>
-            <a:srgbClr val="F1F3F4"/>
+            <a:srgbClr val="FFFFFF"/>
           </a:solidFill>
-          <a:ln>
-            <a:noFill/>
+          <a:ln w="9525">
+            <a:solidFill>
+              <a:srgbClr val="DADCE0"/>
+            </a:solidFill>
           </a:ln>
           <a:effectLst/>
         </p:spPr>
@@ -14702,7 +14680,7 @@
           <a:fillRef idx="3">
             <a:schemeClr val="accent1"/>
           </a:fillRef>
-          <a:effectRef idx="2">
+          <a:effectRef idx="0">
             <a:schemeClr val="accent1"/>
           </a:effectRef>
           <a:fontRef idx="minor">
@@ -14863,10 +14841,12 @@
             </a:avLst>
           </a:prstGeom>
           <a:solidFill>
-            <a:srgbClr val="F1F3F4"/>
+            <a:srgbClr val="FFFFFF"/>
           </a:solidFill>
-          <a:ln>
-            <a:noFill/>
+          <a:ln w="9525">
+            <a:solidFill>
+              <a:srgbClr val="DADCE0"/>
+            </a:solidFill>
           </a:ln>
           <a:effectLst/>
         </p:spPr>
@@ -14877,7 +14857,7 @@
           <a:fillRef idx="3">
             <a:schemeClr val="accent1"/>
           </a:fillRef>
-          <a:effectRef idx="2">
+          <a:effectRef idx="0">
             <a:schemeClr val="accent1"/>
           </a:effectRef>
           <a:fontRef idx="minor">
@@ -15252,10 +15232,12 @@
             </a:avLst>
           </a:prstGeom>
           <a:solidFill>
-            <a:srgbClr val="F1F3F4"/>
+            <a:srgbClr val="FFFFFF"/>
           </a:solidFill>
-          <a:ln>
-            <a:noFill/>
+          <a:ln w="9525">
+            <a:solidFill>
+              <a:srgbClr val="DADCE0"/>
+            </a:solidFill>
           </a:ln>
           <a:effectLst/>
         </p:spPr>
@@ -15266,7 +15248,7 @@
           <a:fillRef idx="3">
             <a:schemeClr val="accent1"/>
           </a:fillRef>
-          <a:effectRef idx="2">
+          <a:effectRef idx="0">
             <a:schemeClr val="accent1"/>
           </a:effectRef>
           <a:fontRef idx="minor">
@@ -15465,10 +15447,12 @@
             </a:avLst>
           </a:prstGeom>
           <a:solidFill>
-            <a:srgbClr val="F1F3F4"/>
+            <a:srgbClr val="FFFFFF"/>
           </a:solidFill>
-          <a:ln>
-            <a:noFill/>
+          <a:ln w="9525">
+            <a:solidFill>
+              <a:srgbClr val="DADCE0"/>
+            </a:solidFill>
           </a:ln>
           <a:effectLst/>
         </p:spPr>
@@ -15479,7 +15463,7 @@
           <a:fillRef idx="3">
             <a:schemeClr val="accent1"/>
           </a:fillRef>
-          <a:effectRef idx="2">
+          <a:effectRef idx="0">
             <a:schemeClr val="accent1"/>
           </a:effectRef>
           <a:fontRef idx="minor">
@@ -15678,10 +15662,12 @@
             </a:avLst>
           </a:prstGeom>
           <a:solidFill>
-            <a:srgbClr val="F1F3F4"/>
+            <a:srgbClr val="FFFFFF"/>
           </a:solidFill>
-          <a:ln>
-            <a:noFill/>
+          <a:ln w="9525">
+            <a:solidFill>
+              <a:srgbClr val="DADCE0"/>
+            </a:solidFill>
           </a:ln>
           <a:effectLst/>
         </p:spPr>
@@ -15692,7 +15678,7 @@
           <a:fillRef idx="3">
             <a:schemeClr val="accent1"/>
           </a:fillRef>
-          <a:effectRef idx="2">
+          <a:effectRef idx="0">
             <a:schemeClr val="accent1"/>
           </a:effectRef>
           <a:fontRef idx="minor">
@@ -15908,7 +15894,7 @@
           <a:fillRef idx="3">
             <a:schemeClr val="accent1"/>
           </a:fillRef>
-          <a:effectRef idx="2">
+          <a:effectRef idx="0">
             <a:schemeClr val="accent1"/>
           </a:effectRef>
           <a:fontRef idx="minor">
@@ -16027,7 +16013,7 @@
           <a:fillRef idx="3">
             <a:schemeClr val="accent1"/>
           </a:fillRef>
-          <a:effectRef idx="2">
+          <a:effectRef idx="0">
             <a:schemeClr val="accent1"/>
           </a:effectRef>
           <a:fontRef idx="minor">
@@ -16162,7 +16148,7 @@
           <a:fillRef idx="3">
             <a:schemeClr val="accent1"/>
           </a:fillRef>
-          <a:effectRef idx="2">
+          <a:effectRef idx="0">
             <a:schemeClr val="accent1"/>
           </a:effectRef>
           <a:fontRef idx="minor">
@@ -16297,7 +16283,7 @@
           <a:fillRef idx="3">
             <a:schemeClr val="accent1"/>
           </a:fillRef>
-          <a:effectRef idx="2">
+          <a:effectRef idx="0">
             <a:schemeClr val="accent1"/>
           </a:effectRef>
           <a:fontRef idx="minor">
@@ -16432,7 +16418,7 @@
           <a:fillRef idx="3">
             <a:schemeClr val="accent1"/>
           </a:fillRef>
-          <a:effectRef idx="2">
+          <a:effectRef idx="0">
             <a:schemeClr val="accent1"/>
           </a:effectRef>
           <a:fontRef idx="minor">
@@ -16567,7 +16553,7 @@
           <a:fillRef idx="3">
             <a:schemeClr val="accent1"/>
           </a:fillRef>
-          <a:effectRef idx="2">
+          <a:effectRef idx="0">
             <a:schemeClr val="accent1"/>
           </a:effectRef>
           <a:fontRef idx="minor">
@@ -16702,7 +16688,7 @@
           <a:fillRef idx="3">
             <a:schemeClr val="accent1"/>
           </a:fillRef>
-          <a:effectRef idx="2">
+          <a:effectRef idx="0">
             <a:schemeClr val="accent1"/>
           </a:effectRef>
           <a:fontRef idx="minor">
@@ -17001,7 +16987,7 @@
           <a:fillRef idx="3">
             <a:schemeClr val="accent1"/>
           </a:fillRef>
-          <a:effectRef idx="2">
+          <a:effectRef idx="0">
             <a:schemeClr val="accent1"/>
           </a:effectRef>
           <a:fontRef idx="minor">
@@ -17045,7 +17031,7 @@
           <a:fillRef idx="3">
             <a:schemeClr val="accent1"/>
           </a:fillRef>
-          <a:effectRef idx="2">
+          <a:effectRef idx="0">
             <a:schemeClr val="accent1"/>
           </a:effectRef>
           <a:fontRef idx="minor">
@@ -17240,10 +17226,12 @@
             </a:avLst>
           </a:prstGeom>
           <a:solidFill>
-            <a:srgbClr val="F1F3F4"/>
+            <a:srgbClr val="FFFFFF"/>
           </a:solidFill>
-          <a:ln>
-            <a:noFill/>
+          <a:ln w="9525">
+            <a:solidFill>
+              <a:srgbClr val="DADCE0"/>
+            </a:solidFill>
           </a:ln>
           <a:effectLst/>
         </p:spPr>
@@ -17254,7 +17242,7 @@
           <a:fillRef idx="3">
             <a:schemeClr val="accent1"/>
           </a:fillRef>
-          <a:effectRef idx="2">
+          <a:effectRef idx="0">
             <a:schemeClr val="accent1"/>
           </a:effectRef>
           <a:fontRef idx="minor">
@@ -17340,7 +17328,7 @@
           <a:fillRef idx="3">
             <a:schemeClr val="accent1"/>
           </a:fillRef>
-          <a:effectRef idx="2">
+          <a:effectRef idx="0">
             <a:schemeClr val="accent1"/>
           </a:effectRef>
           <a:fontRef idx="minor">
@@ -17441,7 +17429,7 @@
           <a:fillRef idx="3">
             <a:schemeClr val="accent1"/>
           </a:fillRef>
-          <a:effectRef idx="2">
+          <a:effectRef idx="0">
             <a:schemeClr val="accent1"/>
           </a:effectRef>
           <a:fontRef idx="minor">
@@ -17565,7 +17553,7 @@
           <a:fillRef idx="3">
             <a:schemeClr val="accent1"/>
           </a:fillRef>
-          <a:effectRef idx="2">
+          <a:effectRef idx="0">
             <a:schemeClr val="accent1"/>
           </a:effectRef>
           <a:fontRef idx="minor">
@@ -17650,7 +17638,7 @@
           <a:fillRef idx="3">
             <a:schemeClr val="accent1"/>
           </a:fillRef>
-          <a:effectRef idx="2">
+          <a:effectRef idx="0">
             <a:schemeClr val="accent1"/>
           </a:effectRef>
           <a:fontRef idx="minor">
@@ -17735,7 +17723,7 @@
           <a:fillRef idx="3">
             <a:schemeClr val="accent1"/>
           </a:fillRef>
-          <a:effectRef idx="2">
+          <a:effectRef idx="0">
             <a:schemeClr val="accent1"/>
           </a:effectRef>
           <a:fontRef idx="minor">
@@ -17820,7 +17808,7 @@
           <a:fillRef idx="3">
             <a:schemeClr val="accent1"/>
           </a:fillRef>
-          <a:effectRef idx="2">
+          <a:effectRef idx="0">
             <a:schemeClr val="accent1"/>
           </a:effectRef>
           <a:fontRef idx="minor">
@@ -17942,7 +17930,7 @@
           <a:fillRef idx="3">
             <a:schemeClr val="accent1"/>
           </a:fillRef>
-          <a:effectRef idx="2">
+          <a:effectRef idx="0">
             <a:schemeClr val="accent1"/>
           </a:effectRef>
           <a:fontRef idx="minor">
@@ -18259,7 +18247,7 @@
           <a:fillRef idx="3">
             <a:schemeClr val="accent1"/>
           </a:fillRef>
-          <a:effectRef idx="2">
+          <a:effectRef idx="0">
             <a:schemeClr val="accent1"/>
           </a:effectRef>
           <a:fontRef idx="minor">
@@ -18303,7 +18291,7 @@
           <a:fillRef idx="3">
             <a:schemeClr val="accent1"/>
           </a:fillRef>
-          <a:effectRef idx="2">
+          <a:effectRef idx="0">
             <a:schemeClr val="accent1"/>
           </a:effectRef>
           <a:fontRef idx="minor">
@@ -18347,7 +18335,7 @@
           <a:fillRef idx="3">
             <a:schemeClr val="accent1"/>
           </a:fillRef>
-          <a:effectRef idx="2">
+          <a:effectRef idx="0">
             <a:schemeClr val="accent1"/>
           </a:effectRef>
           <a:fontRef idx="minor">
@@ -18391,7 +18379,7 @@
           <a:fillRef idx="3">
             <a:schemeClr val="accent1"/>
           </a:fillRef>
-          <a:effectRef idx="2">
+          <a:effectRef idx="0">
             <a:schemeClr val="accent1"/>
           </a:effectRef>
           <a:fontRef idx="minor">
@@ -18435,7 +18423,7 @@
           <a:fillRef idx="3">
             <a:schemeClr val="accent1"/>
           </a:fillRef>
-          <a:effectRef idx="2">
+          <a:effectRef idx="0">
             <a:schemeClr val="accent1"/>
           </a:effectRef>
           <a:fontRef idx="minor">
@@ -18518,7 +18506,7 @@
           <a:fillRef idx="3">
             <a:schemeClr val="accent1"/>
           </a:fillRef>
-          <a:effectRef idx="2">
+          <a:effectRef idx="0">
             <a:schemeClr val="accent1"/>
           </a:effectRef>
           <a:fontRef idx="minor">
@@ -18550,8 +18538,10 @@
           <a:solidFill>
             <a:srgbClr val="FFFFFF"/>
           </a:solidFill>
-          <a:ln>
-            <a:noFill/>
+          <a:ln w="9525">
+            <a:solidFill>
+              <a:srgbClr val="DADCE0"/>
+            </a:solidFill>
           </a:ln>
           <a:effectLst/>
         </p:spPr>
@@ -18562,7 +18552,7 @@
           <a:fillRef idx="3">
             <a:schemeClr val="accent1"/>
           </a:fillRef>
-          <a:effectRef idx="2">
+          <a:effectRef idx="0">
             <a:schemeClr val="accent1"/>
           </a:effectRef>
           <a:fontRef idx="minor">
@@ -18606,7 +18596,7 @@
           <a:fillRef idx="3">
             <a:schemeClr val="accent1"/>
           </a:fillRef>
-          <a:effectRef idx="2">
+          <a:effectRef idx="0">
             <a:schemeClr val="accent1"/>
           </a:effectRef>
           <a:fontRef idx="minor">
@@ -18650,7 +18640,7 @@
           <a:fillRef idx="3">
             <a:schemeClr val="accent1"/>
           </a:fillRef>
-          <a:effectRef idx="2">
+          <a:effectRef idx="0">
             <a:schemeClr val="accent1"/>
           </a:effectRef>
           <a:fontRef idx="minor">
@@ -18694,7 +18684,7 @@
           <a:fillRef idx="3">
             <a:schemeClr val="accent1"/>
           </a:fillRef>
-          <a:effectRef idx="2">
+          <a:effectRef idx="0">
             <a:schemeClr val="accent1"/>
           </a:effectRef>
           <a:fontRef idx="minor">
@@ -18738,7 +18728,7 @@
           <a:fillRef idx="3">
             <a:schemeClr val="accent1"/>
           </a:fillRef>
-          <a:effectRef idx="2">
+          <a:effectRef idx="0">
             <a:schemeClr val="accent1"/>
           </a:effectRef>
           <a:fontRef idx="minor">
@@ -18821,7 +18811,7 @@
           <a:fillRef idx="3">
             <a:schemeClr val="accent1"/>
           </a:fillRef>
-          <a:effectRef idx="2">
+          <a:effectRef idx="0">
             <a:schemeClr val="accent1"/>
           </a:effectRef>
           <a:fontRef idx="minor">
@@ -18865,7 +18855,7 @@
           <a:fillRef idx="3">
             <a:schemeClr val="accent1"/>
           </a:fillRef>
-          <a:effectRef idx="2">
+          <a:effectRef idx="0">
             <a:schemeClr val="accent1"/>
           </a:effectRef>
           <a:fontRef idx="minor">
@@ -18909,7 +18899,7 @@
           <a:fillRef idx="3">
             <a:schemeClr val="accent1"/>
           </a:fillRef>
-          <a:effectRef idx="2">
+          <a:effectRef idx="0">
             <a:schemeClr val="accent1"/>
           </a:effectRef>
           <a:fontRef idx="minor">
@@ -18953,7 +18943,7 @@
           <a:fillRef idx="3">
             <a:schemeClr val="accent1"/>
           </a:fillRef>
-          <a:effectRef idx="2">
+          <a:effectRef idx="0">
             <a:schemeClr val="accent1"/>
           </a:effectRef>
           <a:fontRef idx="minor">
@@ -18997,7 +18987,7 @@
           <a:fillRef idx="3">
             <a:schemeClr val="accent1"/>
           </a:fillRef>
-          <a:effectRef idx="2">
+          <a:effectRef idx="0">
             <a:schemeClr val="accent1"/>
           </a:effectRef>
           <a:fontRef idx="minor">
@@ -19041,7 +19031,7 @@
           <a:fillRef idx="3">
             <a:schemeClr val="accent1"/>
           </a:fillRef>
-          <a:effectRef idx="2">
+          <a:effectRef idx="0">
             <a:schemeClr val="accent1"/>
           </a:effectRef>
           <a:fontRef idx="minor">
@@ -19124,7 +19114,7 @@
           <a:fillRef idx="3">
             <a:schemeClr val="accent1"/>
           </a:fillRef>
-          <a:effectRef idx="2">
+          <a:effectRef idx="0">
             <a:schemeClr val="accent1"/>
           </a:effectRef>
           <a:fontRef idx="minor">
@@ -19156,8 +19146,10 @@
           <a:solidFill>
             <a:srgbClr val="FFFFFF"/>
           </a:solidFill>
-          <a:ln>
-            <a:noFill/>
+          <a:ln w="9525">
+            <a:solidFill>
+              <a:srgbClr val="DADCE0"/>
+            </a:solidFill>
           </a:ln>
           <a:effectLst/>
         </p:spPr>
@@ -19168,7 +19160,7 @@
           <a:fillRef idx="3">
             <a:schemeClr val="accent1"/>
           </a:fillRef>
-          <a:effectRef idx="2">
+          <a:effectRef idx="0">
             <a:schemeClr val="accent1"/>
           </a:effectRef>
           <a:fontRef idx="minor">
@@ -19212,7 +19204,7 @@
           <a:fillRef idx="3">
             <a:schemeClr val="accent1"/>
           </a:fillRef>
-          <a:effectRef idx="2">
+          <a:effectRef idx="0">
             <a:schemeClr val="accent1"/>
           </a:effectRef>
           <a:fontRef idx="minor">
@@ -19256,7 +19248,7 @@
           <a:fillRef idx="3">
             <a:schemeClr val="accent1"/>
           </a:fillRef>
-          <a:effectRef idx="2">
+          <a:effectRef idx="0">
             <a:schemeClr val="accent1"/>
           </a:effectRef>
           <a:fontRef idx="minor">
@@ -19300,7 +19292,7 @@
           <a:fillRef idx="3">
             <a:schemeClr val="accent1"/>
           </a:fillRef>
-          <a:effectRef idx="2">
+          <a:effectRef idx="0">
             <a:schemeClr val="accent1"/>
           </a:effectRef>
           <a:fontRef idx="minor">
@@ -19344,7 +19336,7 @@
           <a:fillRef idx="3">
             <a:schemeClr val="accent1"/>
           </a:fillRef>
-          <a:effectRef idx="2">
+          <a:effectRef idx="0">
             <a:schemeClr val="accent1"/>
           </a:effectRef>
           <a:fontRef idx="minor">
@@ -19427,7 +19419,7 @@
           <a:fillRef idx="3">
             <a:schemeClr val="accent1"/>
           </a:fillRef>
-          <a:effectRef idx="2">
+          <a:effectRef idx="0">
             <a:schemeClr val="accent1"/>
           </a:effectRef>
           <a:fontRef idx="minor">
@@ -19471,7 +19463,7 @@
           <a:fillRef idx="3">
             <a:schemeClr val="accent1"/>
           </a:fillRef>
-          <a:effectRef idx="2">
+          <a:effectRef idx="0">
             <a:schemeClr val="accent1"/>
           </a:effectRef>
           <a:fontRef idx="minor">
@@ -19515,7 +19507,7 @@
           <a:fillRef idx="3">
             <a:schemeClr val="accent1"/>
           </a:fillRef>
-          <a:effectRef idx="2">
+          <a:effectRef idx="0">
             <a:schemeClr val="accent1"/>
           </a:effectRef>
           <a:fontRef idx="minor">
@@ -19559,7 +19551,7 @@
           <a:fillRef idx="3">
             <a:schemeClr val="accent1"/>
           </a:fillRef>
-          <a:effectRef idx="2">
+          <a:effectRef idx="0">
             <a:schemeClr val="accent1"/>
           </a:effectRef>
           <a:fontRef idx="minor">
@@ -19603,7 +19595,7 @@
           <a:fillRef idx="3">
             <a:schemeClr val="accent1"/>
           </a:fillRef>
-          <a:effectRef idx="2">
+          <a:effectRef idx="0">
             <a:schemeClr val="accent1"/>
           </a:effectRef>
           <a:fontRef idx="minor">
@@ -19647,7 +19639,7 @@
           <a:fillRef idx="3">
             <a:schemeClr val="accent1"/>
           </a:fillRef>
-          <a:effectRef idx="2">
+          <a:effectRef idx="0">
             <a:schemeClr val="accent1"/>
           </a:effectRef>
           <a:fontRef idx="minor">
@@ -19730,7 +19722,7 @@
           <a:fillRef idx="3">
             <a:schemeClr val="accent1"/>
           </a:fillRef>
-          <a:effectRef idx="2">
+          <a:effectRef idx="0">
             <a:schemeClr val="accent1"/>
           </a:effectRef>
           <a:fontRef idx="minor">
@@ -19774,7 +19766,7 @@
           <a:fillRef idx="3">
             <a:schemeClr val="accent1"/>
           </a:fillRef>
-          <a:effectRef idx="2">
+          <a:effectRef idx="0">
             <a:schemeClr val="accent1"/>
           </a:effectRef>
           <a:fontRef idx="minor">
@@ -19857,7 +19849,7 @@
           <a:fillRef idx="3">
             <a:schemeClr val="accent1"/>
           </a:fillRef>
-          <a:effectRef idx="2">
+          <a:effectRef idx="0">
             <a:schemeClr val="accent1"/>
           </a:effectRef>
           <a:fontRef idx="minor">
@@ -19940,7 +19932,7 @@
           <a:fillRef idx="3">
             <a:schemeClr val="accent1"/>
           </a:fillRef>
-          <a:effectRef idx="2">
+          <a:effectRef idx="0">
             <a:schemeClr val="accent1"/>
           </a:effectRef>
           <a:fontRef idx="minor">
@@ -20025,7 +20017,7 @@
           <a:fillRef idx="3">
             <a:schemeClr val="accent1"/>
           </a:fillRef>
-          <a:effectRef idx="2">
+          <a:effectRef idx="0">
             <a:schemeClr val="accent1"/>
           </a:effectRef>
           <a:fontRef idx="minor">
@@ -20285,10 +20277,12 @@
             </a:avLst>
           </a:prstGeom>
           <a:solidFill>
-            <a:srgbClr val="F1F3F4"/>
+            <a:srgbClr val="FFFFFF"/>
           </a:solidFill>
-          <a:ln>
-            <a:noFill/>
+          <a:ln w="9525">
+            <a:solidFill>
+              <a:srgbClr val="DADCE0"/>
+            </a:solidFill>
           </a:ln>
           <a:effectLst/>
         </p:spPr>
@@ -20299,7 +20293,7 @@
           <a:fillRef idx="3">
             <a:schemeClr val="accent1"/>
           </a:fillRef>
-          <a:effectRef idx="2">
+          <a:effectRef idx="0">
             <a:schemeClr val="accent1"/>
           </a:effectRef>
           <a:fontRef idx="minor">
@@ -20382,7 +20376,7 @@
           <a:fillRef idx="3">
             <a:schemeClr val="accent1"/>
           </a:fillRef>
-          <a:effectRef idx="2">
+          <a:effectRef idx="0">
             <a:schemeClr val="accent1"/>
           </a:effectRef>
           <a:fontRef idx="minor">
@@ -20451,10 +20445,12 @@
             </a:avLst>
           </a:prstGeom>
           <a:solidFill>
-            <a:srgbClr val="F1F3F4"/>
+            <a:srgbClr val="FFFFFF"/>
           </a:solidFill>
-          <a:ln>
-            <a:noFill/>
+          <a:ln w="9525">
+            <a:solidFill>
+              <a:srgbClr val="DADCE0"/>
+            </a:solidFill>
           </a:ln>
           <a:effectLst/>
         </p:spPr>
@@ -20465,7 +20461,7 @@
           <a:fillRef idx="3">
             <a:schemeClr val="accent1"/>
           </a:fillRef>
-          <a:effectRef idx="2">
+          <a:effectRef idx="0">
             <a:schemeClr val="accent1"/>
           </a:effectRef>
           <a:fontRef idx="minor">
@@ -20536,8 +20532,10 @@
           <a:solidFill>
             <a:srgbClr val="FFFFFF"/>
           </a:solidFill>
-          <a:ln>
-            <a:noFill/>
+          <a:ln w="9525">
+            <a:solidFill>
+              <a:srgbClr val="DADCE0"/>
+            </a:solidFill>
           </a:ln>
           <a:effectLst/>
         </p:spPr>
@@ -20548,7 +20546,7 @@
           <a:fillRef idx="3">
             <a:schemeClr val="accent1"/>
           </a:fillRef>
-          <a:effectRef idx="2">
+          <a:effectRef idx="0">
             <a:schemeClr val="accent1"/>
           </a:effectRef>
           <a:fontRef idx="minor">
@@ -20619,8 +20617,10 @@
           <a:solidFill>
             <a:srgbClr val="FFFFFF"/>
           </a:solidFill>
-          <a:ln>
-            <a:noFill/>
+          <a:ln w="9525">
+            <a:solidFill>
+              <a:srgbClr val="DADCE0"/>
+            </a:solidFill>
           </a:ln>
           <a:effectLst/>
         </p:spPr>
@@ -20631,7 +20631,7 @@
           <a:fillRef idx="3">
             <a:schemeClr val="accent1"/>
           </a:fillRef>
-          <a:effectRef idx="2">
+          <a:effectRef idx="0">
             <a:schemeClr val="accent1"/>
           </a:effectRef>
           <a:fontRef idx="minor">
@@ -20702,8 +20702,10 @@
           <a:solidFill>
             <a:srgbClr val="FFFFFF"/>
           </a:solidFill>
-          <a:ln>
-            <a:noFill/>
+          <a:ln w="9525">
+            <a:solidFill>
+              <a:srgbClr val="DADCE0"/>
+            </a:solidFill>
           </a:ln>
           <a:effectLst/>
         </p:spPr>
@@ -20714,7 +20716,7 @@
           <a:fillRef idx="3">
             <a:schemeClr val="accent1"/>
           </a:fillRef>
-          <a:effectRef idx="2">
+          <a:effectRef idx="0">
             <a:schemeClr val="accent1"/>
           </a:effectRef>
           <a:fontRef idx="minor">
@@ -20785,8 +20787,10 @@
           <a:solidFill>
             <a:srgbClr val="FFFFFF"/>
           </a:solidFill>
-          <a:ln>
-            <a:noFill/>
+          <a:ln w="9525">
+            <a:solidFill>
+              <a:srgbClr val="DADCE0"/>
+            </a:solidFill>
           </a:ln>
           <a:effectLst/>
         </p:spPr>
@@ -20797,7 +20801,7 @@
           <a:fillRef idx="3">
             <a:schemeClr val="accent1"/>
           </a:fillRef>
-          <a:effectRef idx="2">
+          <a:effectRef idx="0">
             <a:schemeClr val="accent1"/>
           </a:effectRef>
           <a:fontRef idx="minor">
@@ -20868,8 +20872,10 @@
           <a:solidFill>
             <a:srgbClr val="FFFFFF"/>
           </a:solidFill>
-          <a:ln>
-            <a:noFill/>
+          <a:ln w="9525">
+            <a:solidFill>
+              <a:srgbClr val="DADCE0"/>
+            </a:solidFill>
           </a:ln>
           <a:effectLst/>
         </p:spPr>
@@ -20880,7 +20886,7 @@
           <a:fillRef idx="3">
             <a:schemeClr val="accent1"/>
           </a:fillRef>
-          <a:effectRef idx="2">
+          <a:effectRef idx="0">
             <a:schemeClr val="accent1"/>
           </a:effectRef>
           <a:fontRef idx="minor">
@@ -20951,8 +20957,10 @@
           <a:solidFill>
             <a:srgbClr val="FFFFFF"/>
           </a:solidFill>
-          <a:ln>
-            <a:noFill/>
+          <a:ln w="9525">
+            <a:solidFill>
+              <a:srgbClr val="DADCE0"/>
+            </a:solidFill>
           </a:ln>
           <a:effectLst/>
         </p:spPr>
@@ -20963,7 +20971,7 @@
           <a:fillRef idx="3">
             <a:schemeClr val="accent1"/>
           </a:fillRef>
-          <a:effectRef idx="2">
+          <a:effectRef idx="0">
             <a:schemeClr val="accent1"/>
           </a:effectRef>
           <a:fontRef idx="minor">
@@ -21034,8 +21042,10 @@
           <a:solidFill>
             <a:srgbClr val="FFFFFF"/>
           </a:solidFill>
-          <a:ln>
-            <a:noFill/>
+          <a:ln w="9525">
+            <a:solidFill>
+              <a:srgbClr val="DADCE0"/>
+            </a:solidFill>
           </a:ln>
           <a:effectLst/>
         </p:spPr>
@@ -21046,7 +21056,7 @@
           <a:fillRef idx="3">
             <a:schemeClr val="accent1"/>
           </a:fillRef>
-          <a:effectRef idx="2">
+          <a:effectRef idx="0">
             <a:schemeClr val="accent1"/>
           </a:effectRef>
           <a:fontRef idx="minor">
@@ -21169,8 +21179,10 @@
           <a:solidFill>
             <a:srgbClr val="FFFFFF"/>
           </a:solidFill>
-          <a:ln>
-            <a:noFill/>
+          <a:ln w="9525">
+            <a:solidFill>
+              <a:srgbClr val="DADCE0"/>
+            </a:solidFill>
           </a:ln>
           <a:effectLst/>
         </p:spPr>
@@ -21181,7 +21193,7 @@
           <a:fillRef idx="3">
             <a:schemeClr val="accent1"/>
           </a:fillRef>
-          <a:effectRef idx="2">
+          <a:effectRef idx="0">
             <a:schemeClr val="accent1"/>
           </a:effectRef>
           <a:fontRef idx="minor">
@@ -21268,8 +21280,10 @@
           <a:solidFill>
             <a:srgbClr val="FFFFFF"/>
           </a:solidFill>
-          <a:ln>
-            <a:noFill/>
+          <a:ln w="9525">
+            <a:solidFill>
+              <a:srgbClr val="DADCE0"/>
+            </a:solidFill>
           </a:ln>
           <a:effectLst/>
         </p:spPr>
@@ -21280,7 +21294,7 @@
           <a:fillRef idx="3">
             <a:schemeClr val="accent1"/>
           </a:fillRef>
-          <a:effectRef idx="2">
+          <a:effectRef idx="0">
             <a:schemeClr val="accent1"/>
           </a:effectRef>
           <a:fontRef idx="minor">
@@ -21383,8 +21397,10 @@
           <a:solidFill>
             <a:srgbClr val="FFFFFF"/>
           </a:solidFill>
-          <a:ln>
-            <a:noFill/>
+          <a:ln w="9525">
+            <a:solidFill>
+              <a:srgbClr val="DADCE0"/>
+            </a:solidFill>
           </a:ln>
           <a:effectLst/>
         </p:spPr>
@@ -21395,7 +21411,7 @@
           <a:fillRef idx="3">
             <a:schemeClr val="accent1"/>
           </a:fillRef>
-          <a:effectRef idx="2">
+          <a:effectRef idx="0">
             <a:schemeClr val="accent1"/>
           </a:effectRef>
           <a:fontRef idx="minor">
@@ -21482,8 +21498,10 @@
           <a:solidFill>
             <a:srgbClr val="FFFFFF"/>
           </a:solidFill>
-          <a:ln>
-            <a:noFill/>
+          <a:ln w="9525">
+            <a:solidFill>
+              <a:srgbClr val="DADCE0"/>
+            </a:solidFill>
           </a:ln>
           <a:effectLst/>
         </p:spPr>
@@ -21494,7 +21512,7 @@
           <a:fillRef idx="3">
             <a:schemeClr val="accent1"/>
           </a:fillRef>
-          <a:effectRef idx="2">
+          <a:effectRef idx="0">
             <a:schemeClr val="accent1"/>
           </a:effectRef>
           <a:fontRef idx="minor">
@@ -21695,8 +21713,10 @@
           <a:solidFill>
             <a:srgbClr val="FFFFFF"/>
           </a:solidFill>
-          <a:ln>
-            <a:noFill/>
+          <a:ln w="9525">
+            <a:solidFill>
+              <a:srgbClr val="DADCE0"/>
+            </a:solidFill>
           </a:ln>
           <a:effectLst/>
         </p:spPr>
@@ -21707,7 +21727,7 @@
           <a:fillRef idx="3">
             <a:schemeClr val="accent1"/>
           </a:fillRef>
-          <a:effectRef idx="2">
+          <a:effectRef idx="0">
             <a:schemeClr val="accent1"/>
           </a:effectRef>
           <a:fontRef idx="minor">
@@ -21794,8 +21814,10 @@
           <a:solidFill>
             <a:srgbClr val="FFFFFF"/>
           </a:solidFill>
-          <a:ln>
-            <a:noFill/>
+          <a:ln w="9525">
+            <a:solidFill>
+              <a:srgbClr val="DADCE0"/>
+            </a:solidFill>
           </a:ln>
           <a:effectLst/>
         </p:spPr>
@@ -21806,7 +21828,7 @@
           <a:fillRef idx="3">
             <a:schemeClr val="accent1"/>
           </a:fillRef>
-          <a:effectRef idx="2">
+          <a:effectRef idx="0">
             <a:schemeClr val="accent1"/>
           </a:effectRef>
           <a:fontRef idx="minor">
@@ -21893,8 +21915,10 @@
           <a:solidFill>
             <a:srgbClr val="FFFFFF"/>
           </a:solidFill>
-          <a:ln>
-            <a:noFill/>
+          <a:ln w="9525">
+            <a:solidFill>
+              <a:srgbClr val="DADCE0"/>
+            </a:solidFill>
           </a:ln>
           <a:effectLst/>
         </p:spPr>
@@ -21905,7 +21929,7 @@
           <a:fillRef idx="3">
             <a:schemeClr val="accent1"/>
           </a:fillRef>
-          <a:effectRef idx="2">
+          <a:effectRef idx="0">
             <a:schemeClr val="accent1"/>
           </a:effectRef>
           <a:fontRef idx="minor">
@@ -21992,8 +22016,10 @@
           <a:solidFill>
             <a:srgbClr val="FFFFFF"/>
           </a:solidFill>
-          <a:ln>
-            <a:noFill/>
+          <a:ln w="9525">
+            <a:solidFill>
+              <a:srgbClr val="DADCE0"/>
+            </a:solidFill>
           </a:ln>
           <a:effectLst/>
         </p:spPr>
@@ -22004,7 +22030,7 @@
           <a:fillRef idx="3">
             <a:schemeClr val="accent1"/>
           </a:fillRef>
-          <a:effectRef idx="2">
+          <a:effectRef idx="0">
             <a:schemeClr val="accent1"/>
           </a:effectRef>
           <a:fontRef idx="minor">
@@ -22091,8 +22117,10 @@
           <a:solidFill>
             <a:srgbClr val="FFFFFF"/>
           </a:solidFill>
-          <a:ln>
-            <a:noFill/>
+          <a:ln w="9525">
+            <a:solidFill>
+              <a:srgbClr val="DADCE0"/>
+            </a:solidFill>
           </a:ln>
           <a:effectLst/>
         </p:spPr>
@@ -22103,7 +22131,7 @@
           <a:fillRef idx="3">
             <a:schemeClr val="accent1"/>
           </a:fillRef>
-          <a:effectRef idx="2">
+          <a:effectRef idx="0">
             <a:schemeClr val="accent1"/>
           </a:effectRef>
           <a:fontRef idx="minor">
@@ -22562,10 +22590,12 @@
             </a:avLst>
           </a:prstGeom>
           <a:solidFill>
-            <a:srgbClr val="F1F3F4"/>
+            <a:srgbClr val="FFFFFF"/>
           </a:solidFill>
-          <a:ln>
-            <a:noFill/>
+          <a:ln w="9525">
+            <a:solidFill>
+              <a:srgbClr val="DADCE0"/>
+            </a:solidFill>
           </a:ln>
           <a:effectLst/>
         </p:spPr>
@@ -22576,7 +22606,7 @@
           <a:fillRef idx="3">
             <a:schemeClr val="accent1"/>
           </a:fillRef>
-          <a:effectRef idx="2">
+          <a:effectRef idx="0">
             <a:schemeClr val="accent1"/>
           </a:effectRef>
           <a:fontRef idx="minor">
@@ -22811,10 +22841,12 @@
             </a:avLst>
           </a:prstGeom>
           <a:solidFill>
-            <a:srgbClr val="F1F3F4"/>
+            <a:srgbClr val="FFFFFF"/>
           </a:solidFill>
-          <a:ln>
-            <a:noFill/>
+          <a:ln w="9525">
+            <a:solidFill>
+              <a:srgbClr val="DADCE0"/>
+            </a:solidFill>
           </a:ln>
           <a:effectLst/>
         </p:spPr>
@@ -22825,7 +22857,7 @@
           <a:fillRef idx="3">
             <a:schemeClr val="accent1"/>
           </a:fillRef>
-          <a:effectRef idx="2">
+          <a:effectRef idx="0">
             <a:schemeClr val="accent1"/>
           </a:effectRef>
           <a:fontRef idx="minor">
@@ -23096,10 +23128,12 @@
             </a:avLst>
           </a:prstGeom>
           <a:solidFill>
-            <a:srgbClr val="F1F3F4"/>
+            <a:srgbClr val="FFFFFF"/>
           </a:solidFill>
-          <a:ln>
-            <a:noFill/>
+          <a:ln w="9525">
+            <a:solidFill>
+              <a:srgbClr val="DADCE0"/>
+            </a:solidFill>
           </a:ln>
           <a:effectLst/>
         </p:spPr>
@@ -23110,7 +23144,7 @@
           <a:fillRef idx="3">
             <a:schemeClr val="accent1"/>
           </a:fillRef>
-          <a:effectRef idx="2">
+          <a:effectRef idx="0">
             <a:schemeClr val="accent1"/>
           </a:effectRef>
           <a:fontRef idx="minor">
@@ -23381,10 +23415,12 @@
             </a:avLst>
           </a:prstGeom>
           <a:solidFill>
-            <a:srgbClr val="F1F3F4"/>
+            <a:srgbClr val="FFFFFF"/>
           </a:solidFill>
-          <a:ln>
-            <a:noFill/>
+          <a:ln w="9525">
+            <a:solidFill>
+              <a:srgbClr val="DADCE0"/>
+            </a:solidFill>
           </a:ln>
           <a:effectLst/>
         </p:spPr>
@@ -23395,7 +23431,7 @@
           <a:fillRef idx="3">
             <a:schemeClr val="accent1"/>
           </a:fillRef>
-          <a:effectRef idx="2">
+          <a:effectRef idx="0">
             <a:schemeClr val="accent1"/>
           </a:effectRef>
           <a:fontRef idx="minor">

--- a/docs/대회/제출/AI-Builder-Cup-제출-초안.pptx
+++ b/docs/대회/제출/AI-Builder-Cup-제출-초안.pptx
@@ -7099,885 +7099,6 @@
   <p:cSld>
     <p:spTree>
       <p:nvGrpSpPr>
-        <p:cNvPr id="123" name="Shape 123"/>
-        <p:cNvGrpSpPr/>
-        <p:nvPr/>
-      </p:nvGrpSpPr>
-      <p:grpSpPr>
-        <a:xfrm>
-          <a:off x="0" y="0"/>
-          <a:ext cx="0" cy="0"/>
-          <a:chOff x="0" y="0"/>
-          <a:chExt cx="0" cy="0"/>
-        </a:xfrm>
-      </p:grpSpPr>
-      <p:pic>
-        <p:nvPicPr>
-          <p:cNvPr id="124" name="Google Shape;124;p22" title="Frame 144.png"/>
-          <p:cNvPicPr preferRelativeResize="0"/>
-          <p:nvPr/>
-        </p:nvPicPr>
-        <p:blipFill rotWithShape="1">
-          <a:blip r:embed="rId3">
-            <a:alphaModFix/>
-          </a:blip>
-          <a:srcRect b="98001" l="0" r="0" t="0"/>
-          <a:stretch/>
-        </p:blipFill>
-        <p:spPr>
-          <a:xfrm>
-            <a:off x="0" y="5093562"/>
-            <a:ext cx="9144000" cy="54275"/>
-          </a:xfrm>
-          <a:prstGeom prst="rect">
-            <a:avLst/>
-          </a:prstGeom>
-          <a:noFill/>
-          <a:ln>
-            <a:noFill/>
-          </a:ln>
-        </p:spPr>
-      </p:pic>
-      <p:pic>
-        <p:nvPicPr>
-          <p:cNvPr id="125" name="Google Shape;125;p22" title="Group 427319979.png"/>
-          <p:cNvPicPr preferRelativeResize="0"/>
-          <p:nvPr/>
-        </p:nvPicPr>
-        <p:blipFill>
-          <a:blip r:embed="rId4">
-            <a:alphaModFix/>
-          </a:blip>
-          <a:stretch>
-            <a:fillRect/>
-          </a:stretch>
-        </p:blipFill>
-        <p:spPr>
-          <a:xfrm>
-            <a:off x="0" y="1"/>
-            <a:ext cx="9144000" cy="507359"/>
-          </a:xfrm>
-          <a:prstGeom prst="rect">
-            <a:avLst/>
-          </a:prstGeom>
-          <a:noFill/>
-          <a:ln>
-            <a:noFill/>
-          </a:ln>
-        </p:spPr>
-      </p:pic>
-      <p:sp>
-        <p:nvSpPr>
-          <p:cNvPr id="126" name="Google Shape;126;p22"/>
-          <p:cNvSpPr/>
-          <p:nvPr/>
-        </p:nvSpPr>
-        <p:spPr>
-          <a:xfrm>
-            <a:off x="-29250" y="5071875"/>
-            <a:ext cx="9173400" cy="97800"/>
-          </a:xfrm>
-          <a:prstGeom prst="rect">
-            <a:avLst/>
-          </a:prstGeom>
-          <a:solidFill>
-            <a:schemeClr val="dk1"/>
-          </a:solidFill>
-          <a:ln>
-            <a:noFill/>
-          </a:ln>
-        </p:spPr>
-        <p:txBody>
-          <a:bodyPr anchorCtr="0" anchor="ctr" bIns="91425" lIns="91425" spcFirstLastPara="1" rIns="91425" wrap="square" tIns="91425">
-            <a:noAutofit/>
-          </a:bodyPr>
-          <a:lstStyle/>
-          <a:p>
-            <a:pPr indent="0" lvl="0" marL="0" rtl="0" algn="ctr">
-              <a:spcBef>
-                <a:spcPts val="0"/>
-              </a:spcBef>
-              <a:spcAft>
-                <a:spcPts val="0"/>
-              </a:spcAft>
-              <a:buNone/>
-            </a:pPr>
-            <a:r>
-              <a:t/>
-            </a:r>
-            <a:endParaRPr/>
-          </a:p>
-        </p:txBody>
-      </p:sp>
-      <p:sp>
-        <p:nvSpPr>
-          <p:cNvPr id="127" name="Google Shape;127;p22"/>
-          <p:cNvSpPr txBox="1"/>
-          <p:nvPr/>
-        </p:nvSpPr>
-        <p:spPr>
-          <a:xfrm>
-            <a:off x="265350" y="663825"/>
-            <a:ext cx="8943000" cy="561900"/>
-          </a:xfrm>
-          <a:prstGeom prst="rect">
-            <a:avLst/>
-          </a:prstGeom>
-          <a:noFill/>
-          <a:ln>
-            <a:noFill/>
-          </a:ln>
-        </p:spPr>
-        <p:txBody>
-          <a:bodyPr anchorCtr="0" anchor="t" bIns="91425" lIns="91425" spcFirstLastPara="1" rIns="91425" wrap="square" tIns="91425">
-            <a:noAutofit/>
-          </a:bodyPr>
-          <a:lstStyle/>
-          <a:p>
-            <a:pPr indent="0" lvl="0" marL="0" rtl="0" algn="l">
-              <a:spcBef>
-                <a:spcPts val="0"/>
-              </a:spcBef>
-              <a:spcAft>
-                <a:spcPts val="0"/>
-              </a:spcAft>
-              <a:buNone/>
-            </a:pPr>
-            <a:r>
-              <a:rPr lang="en-GB" sz="1600">
-                <a:latin typeface="Google Sans Flex Medium"/>
-                <a:ea typeface="Google Sans Flex Medium"/>
-                <a:cs typeface="Google Sans Flex Medium"/>
-                <a:sym typeface="Google Sans Flex Medium"/>
-              </a:rPr>
-              <a:t>Estimated implementation cost (optional)</a:t>
-            </a:r>
-            <a:endParaRPr sz="1600">
-              <a:latin typeface="Google Sans Flex Medium"/>
-              <a:ea typeface="Google Sans Flex Medium"/>
-              <a:cs typeface="Google Sans Flex Medium"/>
-              <a:sym typeface="Google Sans Flex Medium"/>
-            </a:endParaRPr>
-          </a:p>
-        </p:txBody>
-      </p:sp>
-      <p:sp>
-        <p:nvSpPr>
-          <p:cNvPr id="128" name="Rounded Rectangle 127"/>
-          <p:cNvSpPr/>
-          <p:nvPr/>
-        </p:nvSpPr>
-        <p:spPr>
-          <a:xfrm>
-            <a:off x="365760" y="1188720"/>
-            <a:ext cx="2697480" cy="1234440"/>
-          </a:xfrm>
-          <a:prstGeom prst="roundRect">
-            <a:avLst>
-              <a:gd name="adj" fmla="val 8000"/>
-            </a:avLst>
-          </a:prstGeom>
-          <a:solidFill>
-            <a:srgbClr val="FFFFFF"/>
-          </a:solidFill>
-          <a:ln w="9525">
-            <a:solidFill>
-              <a:srgbClr val="DADCE0"/>
-            </a:solidFill>
-          </a:ln>
-          <a:effectLst/>
-        </p:spPr>
-        <p:style>
-          <a:lnRef idx="1">
-            <a:schemeClr val="accent1"/>
-          </a:lnRef>
-          <a:fillRef idx="3">
-            <a:schemeClr val="accent1"/>
-          </a:fillRef>
-          <a:effectRef idx="0">
-            <a:schemeClr val="accent1"/>
-          </a:effectRef>
-          <a:fontRef idx="minor">
-            <a:schemeClr val="lt1"/>
-          </a:fontRef>
-        </p:style>
-        <p:txBody>
-          <a:bodyPr rtlCol="0" anchor="ctr"/>
-          <a:lstStyle/>
-          <a:p/>
-        </p:txBody>
-      </p:sp>
-      <p:sp>
-        <p:nvSpPr>
-          <p:cNvPr id="129" name="TextBox 128"/>
-          <p:cNvSpPr txBox="1"/>
-          <p:nvPr/>
-        </p:nvSpPr>
-        <p:spPr>
-          <a:xfrm>
-            <a:off x="548640" y="1261872"/>
-            <a:ext cx="2377440" cy="640080"/>
-          </a:xfrm>
-          <a:prstGeom prst="rect">
-            <a:avLst/>
-          </a:prstGeom>
-          <a:noFill/>
-        </p:spPr>
-        <p:txBody>
-          <a:bodyPr wrap="square" anchor="t" lIns="0" rIns="0" tIns="0" bIns="0">
-            <a:noAutofit/>
-          </a:bodyPr>
-          <a:lstStyle/>
-          <a:p>
-            <a:pPr algn="l">
-              <a:spcAft>
-                <a:spcPts val="400"/>
-              </a:spcAft>
-            </a:pPr>
-            <a:r>
-              <a:rPr sz="2800" b="1" i="0">
-                <a:solidFill>
-                  <a:srgbClr val="1A73E8"/>
-                </a:solidFill>
-                <a:latin typeface="Google Sans Flex"/>
-              </a:rPr>
-              <a:t>$0.0015</a:t>
-            </a:r>
-          </a:p>
-        </p:txBody>
-      </p:sp>
-      <p:sp>
-        <p:nvSpPr>
-          <p:cNvPr id="130" name="TextBox 129"/>
-          <p:cNvSpPr txBox="1"/>
-          <p:nvPr/>
-        </p:nvSpPr>
-        <p:spPr>
-          <a:xfrm>
-            <a:off x="548640" y="1901952"/>
-            <a:ext cx="2377440" cy="457200"/>
-          </a:xfrm>
-          <a:prstGeom prst="rect">
-            <a:avLst/>
-          </a:prstGeom>
-          <a:noFill/>
-        </p:spPr>
-        <p:txBody>
-          <a:bodyPr wrap="square" anchor="t" lIns="0" rIns="0" tIns="0" bIns="0">
-            <a:noAutofit/>
-          </a:bodyPr>
-          <a:lstStyle/>
-          <a:p>
-            <a:pPr algn="l">
-              <a:spcAft>
-                <a:spcPts val="400"/>
-              </a:spcAft>
-            </a:pPr>
-            <a:r>
-              <a:rPr sz="1000" b="0" i="0">
-                <a:solidFill>
-                  <a:srgbClr val="5F6368"/>
-                </a:solidFill>
-                <a:latin typeface="Google Sans Flex"/>
-              </a:rPr>
-              <a:t>per request-time Gemini call*</a:t>
-            </a:r>
-          </a:p>
-        </p:txBody>
-      </p:sp>
-      <p:sp>
-        <p:nvSpPr>
-          <p:cNvPr id="131" name="Rounded Rectangle 130"/>
-          <p:cNvSpPr/>
-          <p:nvPr/>
-        </p:nvSpPr>
-        <p:spPr>
-          <a:xfrm>
-            <a:off x="3200400" y="1188720"/>
-            <a:ext cx="2697480" cy="1234440"/>
-          </a:xfrm>
-          <a:prstGeom prst="roundRect">
-            <a:avLst>
-              <a:gd name="adj" fmla="val 8000"/>
-            </a:avLst>
-          </a:prstGeom>
-          <a:solidFill>
-            <a:srgbClr val="FFFFFF"/>
-          </a:solidFill>
-          <a:ln w="9525">
-            <a:solidFill>
-              <a:srgbClr val="DADCE0"/>
-            </a:solidFill>
-          </a:ln>
-          <a:effectLst/>
-        </p:spPr>
-        <p:style>
-          <a:lnRef idx="1">
-            <a:schemeClr val="accent1"/>
-          </a:lnRef>
-          <a:fillRef idx="3">
-            <a:schemeClr val="accent1"/>
-          </a:fillRef>
-          <a:effectRef idx="0">
-            <a:schemeClr val="accent1"/>
-          </a:effectRef>
-          <a:fontRef idx="minor">
-            <a:schemeClr val="lt1"/>
-          </a:fontRef>
-        </p:style>
-        <p:txBody>
-          <a:bodyPr rtlCol="0" anchor="ctr"/>
-          <a:lstStyle/>
-          <a:p/>
-        </p:txBody>
-      </p:sp>
-      <p:sp>
-        <p:nvSpPr>
-          <p:cNvPr id="132" name="TextBox 131"/>
-          <p:cNvSpPr txBox="1"/>
-          <p:nvPr/>
-        </p:nvSpPr>
-        <p:spPr>
-          <a:xfrm>
-            <a:off x="3383280" y="1261872"/>
-            <a:ext cx="2377440" cy="640080"/>
-          </a:xfrm>
-          <a:prstGeom prst="rect">
-            <a:avLst/>
-          </a:prstGeom>
-          <a:noFill/>
-        </p:spPr>
-        <p:txBody>
-          <a:bodyPr wrap="square" anchor="t" lIns="0" rIns="0" tIns="0" bIns="0">
-            <a:noAutofit/>
-          </a:bodyPr>
-          <a:lstStyle/>
-          <a:p>
-            <a:pPr algn="l">
-              <a:spcAft>
-                <a:spcPts val="400"/>
-              </a:spcAft>
-            </a:pPr>
-            <a:r>
-              <a:rPr sz="2800" b="1" i="0">
-                <a:solidFill>
-                  <a:srgbClr val="D93025"/>
-                </a:solidFill>
-                <a:latin typeface="Google Sans Flex"/>
-              </a:rPr>
-              <a:t>≈ $15</a:t>
-            </a:r>
-          </a:p>
-        </p:txBody>
-      </p:sp>
-      <p:sp>
-        <p:nvSpPr>
-          <p:cNvPr id="133" name="TextBox 132"/>
-          <p:cNvSpPr txBox="1"/>
-          <p:nvPr/>
-        </p:nvSpPr>
-        <p:spPr>
-          <a:xfrm>
-            <a:off x="3383280" y="1901952"/>
-            <a:ext cx="2377440" cy="457200"/>
-          </a:xfrm>
-          <a:prstGeom prst="rect">
-            <a:avLst/>
-          </a:prstGeom>
-          <a:noFill/>
-        </p:spPr>
-        <p:txBody>
-          <a:bodyPr wrap="square" anchor="t" lIns="0" rIns="0" tIns="0" bIns="0">
-            <a:noAutofit/>
-          </a:bodyPr>
-          <a:lstStyle/>
-          <a:p>
-            <a:pPr algn="l">
-              <a:spcAft>
-                <a:spcPts val="400"/>
-              </a:spcAft>
-            </a:pPr>
-            <a:r>
-              <a:rPr sz="1000" b="0" i="0">
-                <a:solidFill>
-                  <a:srgbClr val="5F6368"/>
-                </a:solidFill>
-                <a:latin typeface="Google Sans Flex"/>
-              </a:rPr>
-              <a:t>per 10,000 Gemini calls*</a:t>
-            </a:r>
-          </a:p>
-        </p:txBody>
-      </p:sp>
-      <p:sp>
-        <p:nvSpPr>
-          <p:cNvPr id="134" name="Rounded Rectangle 133"/>
-          <p:cNvSpPr/>
-          <p:nvPr/>
-        </p:nvSpPr>
-        <p:spPr>
-          <a:xfrm>
-            <a:off x="6035040" y="1188720"/>
-            <a:ext cx="2697480" cy="1234440"/>
-          </a:xfrm>
-          <a:prstGeom prst="roundRect">
-            <a:avLst>
-              <a:gd name="adj" fmla="val 8000"/>
-            </a:avLst>
-          </a:prstGeom>
-          <a:solidFill>
-            <a:srgbClr val="FFFFFF"/>
-          </a:solidFill>
-          <a:ln w="9525">
-            <a:solidFill>
-              <a:srgbClr val="DADCE0"/>
-            </a:solidFill>
-          </a:ln>
-          <a:effectLst/>
-        </p:spPr>
-        <p:style>
-          <a:lnRef idx="1">
-            <a:schemeClr val="accent1"/>
-          </a:lnRef>
-          <a:fillRef idx="3">
-            <a:schemeClr val="accent1"/>
-          </a:fillRef>
-          <a:effectRef idx="0">
-            <a:schemeClr val="accent1"/>
-          </a:effectRef>
-          <a:fontRef idx="minor">
-            <a:schemeClr val="lt1"/>
-          </a:fontRef>
-        </p:style>
-        <p:txBody>
-          <a:bodyPr rtlCol="0" anchor="ctr"/>
-          <a:lstStyle/>
-          <a:p/>
-        </p:txBody>
-      </p:sp>
-      <p:sp>
-        <p:nvSpPr>
-          <p:cNvPr id="135" name="TextBox 134"/>
-          <p:cNvSpPr txBox="1"/>
-          <p:nvPr/>
-        </p:nvSpPr>
-        <p:spPr>
-          <a:xfrm>
-            <a:off x="6217920" y="1261872"/>
-            <a:ext cx="2377440" cy="640080"/>
-          </a:xfrm>
-          <a:prstGeom prst="rect">
-            <a:avLst/>
-          </a:prstGeom>
-          <a:noFill/>
-        </p:spPr>
-        <p:txBody>
-          <a:bodyPr wrap="square" anchor="t" lIns="0" rIns="0" tIns="0" bIns="0">
-            <a:noAutofit/>
-          </a:bodyPr>
-          <a:lstStyle/>
-          <a:p>
-            <a:pPr algn="l">
-              <a:spcAft>
-                <a:spcPts val="400"/>
-              </a:spcAft>
-            </a:pPr>
-            <a:r>
-              <a:rPr sz="2800" b="1" i="0">
-                <a:solidFill>
-                  <a:srgbClr val="E37400"/>
-                </a:solidFill>
-                <a:latin typeface="Google Sans Flex"/>
-              </a:rPr>
-              <a:t>$0</a:t>
-            </a:r>
-          </a:p>
-        </p:txBody>
-      </p:sp>
-      <p:sp>
-        <p:nvSpPr>
-          <p:cNvPr id="136" name="TextBox 135"/>
-          <p:cNvSpPr txBox="1"/>
-          <p:nvPr/>
-        </p:nvSpPr>
-        <p:spPr>
-          <a:xfrm>
-            <a:off x="6217920" y="1901952"/>
-            <a:ext cx="2377440" cy="457200"/>
-          </a:xfrm>
-          <a:prstGeom prst="rect">
-            <a:avLst/>
-          </a:prstGeom>
-          <a:noFill/>
-        </p:spPr>
-        <p:txBody>
-          <a:bodyPr wrap="square" anchor="t" lIns="0" rIns="0" tIns="0" bIns="0">
-            <a:noAutofit/>
-          </a:bodyPr>
-          <a:lstStyle/>
-          <a:p>
-            <a:pPr algn="l">
-              <a:spcAft>
-                <a:spcPts val="400"/>
-              </a:spcAft>
-            </a:pPr>
-            <a:r>
-              <a:rPr sz="1000" b="0" i="0">
-                <a:solidFill>
-                  <a:srgbClr val="5F6368"/>
-                </a:solidFill>
-                <a:latin typeface="Google Sans Flex"/>
-              </a:rPr>
-              <a:t>GPU serving — Gemma runs in the batch, not per request</a:t>
-            </a:r>
-          </a:p>
-        </p:txBody>
-      </p:sp>
-      <p:sp>
-        <p:nvSpPr>
-          <p:cNvPr id="137" name="TextBox 136"/>
-          <p:cNvSpPr txBox="1"/>
-          <p:nvPr/>
-        </p:nvSpPr>
-        <p:spPr>
-          <a:xfrm>
-            <a:off x="365760" y="2606040"/>
-            <a:ext cx="4114800" cy="256032"/>
-          </a:xfrm>
-          <a:prstGeom prst="rect">
-            <a:avLst/>
-          </a:prstGeom>
-          <a:noFill/>
-        </p:spPr>
-        <p:txBody>
-          <a:bodyPr wrap="square" anchor="t" lIns="0" rIns="0" tIns="0" bIns="0">
-            <a:noAutofit/>
-          </a:bodyPr>
-          <a:lstStyle/>
-          <a:p>
-            <a:pPr algn="l">
-              <a:spcAft>
-                <a:spcPts val="400"/>
-              </a:spcAft>
-            </a:pPr>
-            <a:r>
-              <a:rPr sz="1150" b="1" i="0">
-                <a:solidFill>
-                  <a:srgbClr val="202124"/>
-                </a:solidFill>
-                <a:latin typeface="Google Sans Flex"/>
-              </a:rPr>
-              <a:t>Cost guards built in</a:t>
-            </a:r>
-          </a:p>
-        </p:txBody>
-      </p:sp>
-      <p:sp>
-        <p:nvSpPr>
-          <p:cNvPr id="138" name="TextBox 137"/>
-          <p:cNvSpPr txBox="1"/>
-          <p:nvPr/>
-        </p:nvSpPr>
-        <p:spPr>
-          <a:xfrm>
-            <a:off x="365760" y="2907792"/>
-            <a:ext cx="4114800" cy="1645920"/>
-          </a:xfrm>
-          <a:prstGeom prst="rect">
-            <a:avLst/>
-          </a:prstGeom>
-          <a:noFill/>
-        </p:spPr>
-        <p:txBody>
-          <a:bodyPr wrap="square" anchor="t" lIns="0" rIns="0" tIns="0" bIns="0">
-            <a:noAutofit/>
-          </a:bodyPr>
-          <a:lstStyle/>
-          <a:p>
-            <a:pPr algn="l" marL="146304" indent="-146304">
-              <a:spcAft>
-                <a:spcPts val="500"/>
-              </a:spcAft>
-              <a:buClr>
-                <a:srgbClr val="5F6368"/>
-              </a:buClr>
-              <a:buFont typeface="Arial"/>
-              <a:buChar char="•"/>
-            </a:pPr>
-            <a:r>
-              <a:rPr sz="1050" b="0" i="0">
-                <a:solidFill>
-                  <a:srgbClr val="202124"/>
-                </a:solidFill>
-                <a:latin typeface="Google Sans Flex"/>
-              </a:rPr>
-              <a:t>Gemini daily call cap recorded in the database</a:t>
-            </a:r>
-          </a:p>
-          <a:p>
-            <a:pPr algn="l" marL="146304" indent="-146304">
-              <a:spcAft>
-                <a:spcPts val="500"/>
-              </a:spcAft>
-              <a:buClr>
-                <a:srgbClr val="5F6368"/>
-              </a:buClr>
-              <a:buFont typeface="Arial"/>
-              <a:buChar char="•"/>
-            </a:pPr>
-            <a:r>
-              <a:rPr sz="1050" b="0" i="0">
-                <a:solidFill>
-                  <a:srgbClr val="202124"/>
-                </a:solidFill>
-                <a:latin typeface="Google Sans Flex"/>
-              </a:rPr>
-              <a:t>Per-instance request limit (20 / min) on recommend &amp; create</a:t>
-            </a:r>
-          </a:p>
-          <a:p>
-            <a:pPr algn="l" marL="146304" indent="-146304">
-              <a:spcAft>
-                <a:spcPts val="500"/>
-              </a:spcAft>
-              <a:buClr>
-                <a:srgbClr val="5F6368"/>
-              </a:buClr>
-              <a:buFont typeface="Arial"/>
-              <a:buChar char="•"/>
-            </a:pPr>
-            <a:r>
-              <a:rPr sz="1050" b="0" i="0">
-                <a:solidFill>
-                  <a:srgbClr val="202124"/>
-                </a:solidFill>
-                <a:latin typeface="Google Sans Flex"/>
-              </a:rPr>
-              <a:t>Cloud Run scales to zero; monthly Cloud Run spend limit</a:t>
-            </a:r>
-          </a:p>
-          <a:p>
-            <a:pPr algn="l" marL="146304" indent="-146304">
-              <a:spcAft>
-                <a:spcPts val="500"/>
-              </a:spcAft>
-              <a:buClr>
-                <a:srgbClr val="5F6368"/>
-              </a:buClr>
-              <a:buFont typeface="Arial"/>
-              <a:buChar char="•"/>
-            </a:pPr>
-            <a:r>
-              <a:rPr sz="1050" b="0" i="0">
-                <a:solidFill>
-                  <a:srgbClr val="202124"/>
-                </a:solidFill>
-                <a:latin typeface="Google Sans Flex"/>
-              </a:rPr>
-              <a:t>One Gemini call per request step; heavy work is batched</a:t>
-            </a:r>
-          </a:p>
-        </p:txBody>
-      </p:sp>
-      <p:sp>
-        <p:nvSpPr>
-          <p:cNvPr id="139" name="TextBox 138"/>
-          <p:cNvSpPr txBox="1"/>
-          <p:nvPr/>
-        </p:nvSpPr>
-        <p:spPr>
-          <a:xfrm>
-            <a:off x="4663440" y="2606040"/>
-            <a:ext cx="4114800" cy="256032"/>
-          </a:xfrm>
-          <a:prstGeom prst="rect">
-            <a:avLst/>
-          </a:prstGeom>
-          <a:noFill/>
-        </p:spPr>
-        <p:txBody>
-          <a:bodyPr wrap="square" anchor="t" lIns="0" rIns="0" tIns="0" bIns="0">
-            <a:noAutofit/>
-          </a:bodyPr>
-          <a:lstStyle/>
-          <a:p>
-            <a:pPr algn="l">
-              <a:spcAft>
-                <a:spcPts val="400"/>
-              </a:spcAft>
-            </a:pPr>
-            <a:r>
-              <a:rPr sz="1150" b="1" i="0">
-                <a:solidFill>
-                  <a:srgbClr val="202124"/>
-                </a:solidFill>
-                <a:latin typeface="Google Sans Flex"/>
-              </a:rPr>
-              <a:t>Design choice that avoided the biggest cost</a:t>
-            </a:r>
-          </a:p>
-        </p:txBody>
-      </p:sp>
-      <p:sp>
-        <p:nvSpPr>
-          <p:cNvPr id="140" name="Rounded Rectangle 139"/>
-          <p:cNvSpPr/>
-          <p:nvPr/>
-        </p:nvSpPr>
-        <p:spPr>
-          <a:xfrm>
-            <a:off x="4663440" y="2907792"/>
-            <a:ext cx="4114800" cy="1143000"/>
-          </a:xfrm>
-          <a:prstGeom prst="roundRect">
-            <a:avLst>
-              <a:gd name="adj" fmla="val 8000"/>
-            </a:avLst>
-          </a:prstGeom>
-          <a:solidFill>
-            <a:srgbClr val="E8F0FE"/>
-          </a:solidFill>
-          <a:ln>
-            <a:noFill/>
-          </a:ln>
-          <a:effectLst/>
-        </p:spPr>
-        <p:style>
-          <a:lnRef idx="1">
-            <a:schemeClr val="accent1"/>
-          </a:lnRef>
-          <a:fillRef idx="3">
-            <a:schemeClr val="accent1"/>
-          </a:fillRef>
-          <a:effectRef idx="0">
-            <a:schemeClr val="accent1"/>
-          </a:effectRef>
-          <a:fontRef idx="minor">
-            <a:schemeClr val="lt1"/>
-          </a:fontRef>
-        </p:style>
-        <p:txBody>
-          <a:bodyPr rtlCol="0" anchor="ctr"/>
-          <a:lstStyle/>
-          <a:p/>
-        </p:txBody>
-      </p:sp>
-      <p:sp>
-        <p:nvSpPr>
-          <p:cNvPr id="141" name="TextBox 140"/>
-          <p:cNvSpPr txBox="1"/>
-          <p:nvPr/>
-        </p:nvSpPr>
-        <p:spPr>
-          <a:xfrm>
-            <a:off x="4828032" y="2980944"/>
-            <a:ext cx="3794760" cy="1024128"/>
-          </a:xfrm>
-          <a:prstGeom prst="rect">
-            <a:avLst/>
-          </a:prstGeom>
-          <a:noFill/>
-        </p:spPr>
-        <p:txBody>
-          <a:bodyPr wrap="square" anchor="t" lIns="0" rIns="0" tIns="0" bIns="0">
-            <a:noAutofit/>
-          </a:bodyPr>
-          <a:lstStyle/>
-          <a:p>
-            <a:pPr algn="l">
-              <a:spcAft>
-                <a:spcPts val="600"/>
-              </a:spcAft>
-            </a:pPr>
-            <a:r>
-              <a:rPr sz="1000" b="1" i="0">
-                <a:solidFill>
-                  <a:srgbClr val="202124"/>
-                </a:solidFill>
-                <a:latin typeface="Google Sans Flex"/>
-              </a:rPr>
-              <a:t>Always-on Cloud Run L4 GPU for Gemma: </a:t>
-            </a:r>
-            <a:r>
-              <a:rPr sz="1000" b="0" i="0">
-                <a:solidFill>
-                  <a:srgbClr val="202124"/>
-                </a:solidFill>
-                <a:latin typeface="Google Sans Flex"/>
-              </a:rPr>
-              <a:t>≈ $753 / month (720 h, Tier-1 list price, excluding free tier).</a:t>
-            </a:r>
-          </a:p>
-          <a:p>
-            <a:pPr algn="l">
-              <a:spcAft>
-                <a:spcPts val="600"/>
-              </a:spcAft>
-            </a:pPr>
-            <a:r>
-              <a:rPr sz="1000" b="0" i="0">
-                <a:solidFill>
-                  <a:srgbClr val="202124"/>
-                </a:solidFill>
-                <a:latin typeface="Google Sans Flex"/>
-              </a:rPr>
-              <a:t>We run Gemma 4 in the batch pipeline instead and keep request-time AI on Gemini, so serving cost follows usage.</a:t>
-            </a:r>
-          </a:p>
-        </p:txBody>
-      </p:sp>
-      <p:sp>
-        <p:nvSpPr>
-          <p:cNvPr id="142" name="TextBox 141"/>
-          <p:cNvSpPr txBox="1"/>
-          <p:nvPr/>
-        </p:nvSpPr>
-        <p:spPr>
-          <a:xfrm>
-            <a:off x="365760" y="4434840"/>
-            <a:ext cx="8412480" cy="274320"/>
-          </a:xfrm>
-          <a:prstGeom prst="rect">
-            <a:avLst/>
-          </a:prstGeom>
-          <a:noFill/>
-        </p:spPr>
-        <p:txBody>
-          <a:bodyPr wrap="square" anchor="t" lIns="0" rIns="0" tIns="0" bIns="0">
-            <a:noAutofit/>
-          </a:bodyPr>
-          <a:lstStyle/>
-          <a:p>
-            <a:pPr algn="l">
-              <a:spcAft>
-                <a:spcPts val="400"/>
-              </a:spcAft>
-            </a:pPr>
-            <a:r>
-              <a:rPr sz="850" b="0" i="0">
-                <a:solidFill>
-                  <a:srgbClr val="5F6368"/>
-                </a:solidFill>
-                <a:latin typeface="Google Sans Flex"/>
-              </a:rPr>
-              <a:t>*List-price estimate for gemini-3.8-flash (Vertex AI global standard, through 2026-12-31), 1,000 input + 200 output tokens; excludes thinking tokens, grounding, caching and taxes. Cloud SQL (smallest shared-core tier): [confirm from Billing].</a:t>
-            </a:r>
-          </a:p>
-        </p:txBody>
-      </p:sp>
-    </p:spTree>
-  </p:cSld>
-  <p:clrMapOvr>
-    <a:masterClrMapping/>
-  </p:clrMapOvr>
-</p:sld>
-</file>
-
-<file path=ppt/slides/slide11.xml><?xml version="1.0" encoding="utf-8"?>
-<p:sld xmlns:a="http://schemas.openxmlformats.org/drawingml/2006/main" xmlns:r="http://schemas.openxmlformats.org/officeDocument/2006/relationships" xmlns:mc="http://schemas.openxmlformats.org/markup-compatibility/2006" xmlns:mv="urn:schemas-microsoft-com:mac:vml" xmlns:p="http://schemas.openxmlformats.org/presentationml/2006/main" xmlns:c="http://schemas.openxmlformats.org/drawingml/2006/chart" xmlns:dgm="http://schemas.openxmlformats.org/drawingml/2006/diagram" xmlns:o="urn:schemas-microsoft-com:office:office" xmlns:v="urn:schemas-microsoft-com:vml" xmlns:pvml="urn:schemas-microsoft-com:office:powerpoint" xmlns:com="http://schemas.openxmlformats.org/drawingml/2006/compatibility" xmlns:p14="http://schemas.microsoft.com/office/powerpoint/2010/main" xmlns:p15="http://schemas.microsoft.com/office/powerpoint/2012/main" xmlns:ahyp="http://schemas.microsoft.com/office/drawing/2018/hyperlinkcolor">
-  <p:cSld>
-    <p:spTree>
-      <p:nvGrpSpPr>
         <p:cNvPr id="131" name="Shape 131"/>
         <p:cNvGrpSpPr/>
         <p:nvPr/>
@@ -8648,7 +7769,7 @@
 </p:sld>
 </file>
 
-<file path=ppt/slides/slide12.xml><?xml version="1.0" encoding="utf-8"?>
+<file path=ppt/slides/slide11.xml><?xml version="1.0" encoding="utf-8"?>
 <p:sld xmlns:a="http://schemas.openxmlformats.org/drawingml/2006/main" xmlns:r="http://schemas.openxmlformats.org/officeDocument/2006/relationships" xmlns:mc="http://schemas.openxmlformats.org/markup-compatibility/2006" xmlns:mv="urn:schemas-microsoft-com:mac:vml" xmlns:p="http://schemas.openxmlformats.org/presentationml/2006/main" xmlns:c="http://schemas.openxmlformats.org/drawingml/2006/chart" xmlns:dgm="http://schemas.openxmlformats.org/drawingml/2006/diagram" xmlns:o="urn:schemas-microsoft-com:office:office" xmlns:v="urn:schemas-microsoft-com:vml" xmlns:pvml="urn:schemas-microsoft-com:office:powerpoint" xmlns:com="http://schemas.openxmlformats.org/drawingml/2006/compatibility" xmlns:p14="http://schemas.microsoft.com/office/powerpoint/2010/main" xmlns:p15="http://schemas.microsoft.com/office/powerpoint/2012/main" xmlns:ahyp="http://schemas.microsoft.com/office/drawing/2018/hyperlinkcolor">
   <p:cSld>
     <p:spTree>
@@ -8895,7 +8016,7 @@
                 </a:solidFill>
                 <a:latin typeface="Google Sans Flex"/>
               </a:rPr>
-              <a:t>45% → 2%</a:t>
+              <a:t>40% → 91%</a:t>
             </a:r>
           </a:p>
         </p:txBody>
@@ -8934,7 +8055,7 @@
                 </a:solidFill>
                 <a:latin typeface="Google Sans Flex"/>
               </a:rPr>
-              <a:t>Lifecycle “unknown”</a:t>
+              <a:t>Picks that fit the product</a:t>
             </a:r>
           </a:p>
           <a:p>
@@ -8950,7 +8071,7 @@
                 </a:solidFill>
                 <a:latin typeface="Google Sans Flex"/>
               </a:rPr>
-              <a:t>135 verified terms, after the evidence fix</a:t>
+              <a:t>same 12 cases, round 4 → 9</a:t>
             </a:r>
           </a:p>
         </p:txBody>
@@ -9035,7 +8156,7 @@
                 </a:solidFill>
                 <a:latin typeface="Google Sans Flex"/>
               </a:rPr>
-              <a:t>16 / 20</a:t>
+              <a:t>0</a:t>
             </a:r>
           </a:p>
         </p:txBody>
@@ -9074,7 +8195,7 @@
                 </a:solidFill>
                 <a:latin typeface="Google Sans Flex"/>
               </a:rPr>
-              <a:t>Risk levels matching review</a:t>
+              <a:t>Risky picks shown as “no issue”</a:t>
             </a:r>
           </a:p>
           <a:p>
@@ -9090,7 +8211,7 @@
                 </a:solidFill>
                 <a:latin typeface="Google Sans Flex"/>
               </a:rPr>
-              <a:t>80% · first developer review</a:t>
+              <a:t>round 9 · was 2 in round 8</a:t>
             </a:r>
           </a:p>
         </p:txBody>
@@ -9175,7 +8296,7 @@
                 </a:solidFill>
                 <a:latin typeface="Google Sans Flex"/>
               </a:rPr>
-              <a:t>1.8 s</a:t>
+              <a:t>6.6 s</a:t>
             </a:r>
           </a:p>
         </p:txBody>
@@ -9230,7 +8351,7 @@
                 </a:solidFill>
                 <a:latin typeface="Google Sans Flex"/>
               </a:rPr>
-              <a:t>max 3.1 s</a:t>
+              <a:t>max 14.1 s · Gemini on Vertex AI</a:t>
             </a:r>
           </a:p>
         </p:txBody>
@@ -9315,7 +8436,7 @@
                 </a:solidFill>
                 <a:latin typeface="Google Sans Flex"/>
               </a:rPr>
-              <a:t>12.0 s</a:t>
+              <a:t>16.3 s</a:t>
             </a:r>
           </a:p>
         </p:txBody>
@@ -9370,7 +8491,7 @@
                 </a:solidFill>
                 <a:latin typeface="Google Sans Flex"/>
               </a:rPr>
-              <a:t>max 31.6 s · before the 1-call redesign</a:t>
+              <a:t>max 27.9 s · one structured call</a:t>
             </a:r>
           </a:p>
         </p:txBody>
@@ -9409,7 +8530,7 @@
                 </a:solidFill>
                 <a:latin typeface="Google Sans Flex"/>
               </a:rPr>
-              <a:t>What the first run taught us (20 cases)</a:t>
+              <a:t>What nine rounds on the same 12 cases taught us</a:t>
             </a:r>
           </a:p>
         </p:txBody>
@@ -9453,7 +8574,7 @@
                 </a:solidFill>
                 <a:latin typeface="Google Sans Flex"/>
               </a:rPr>
-              <a:t>8 of 20 cases ran end to end; TH and ID had too few verified memes to recommend.</a:t>
+              <a:t>Copy introduced the meme by name (“like …”) → now forbidden and re-checked; usability 2.0 → 2.50 / 3.</a:t>
             </a:r>
           </a:p>
           <a:p>
@@ -9474,7 +8595,7 @@
                 </a:solidFill>
                 <a:latin typeface="Google Sans Flex"/>
               </a:rPr>
-              <a:t>1,882 of 9,738 evidence items did not contain the term → now filtered out.</a:t>
+              <a:t>Generic words and site names were picked as memes → removed by reviewers; usage words fixed by a person for 56 of 170 candidates.</a:t>
             </a:r>
           </a:p>
           <a:p>
@@ -9495,7 +8616,7 @@
                 </a:solidFill>
                 <a:latin typeface="Google Sans Flex"/>
               </a:rPr>
-              <a:t>Local model put the thumbnail inside the script in 7 of 18 generations → schema repair + retry.</a:t>
+              <a:t>A data refresh added unjudged candidates and fit fell to 67% → 36 candidates got a human risk decision.</a:t>
             </a:r>
           </a:p>
         </p:txBody>
@@ -9578,7 +8699,7 @@
                 </a:solidFill>
                 <a:latin typeface="Google Sans Flex"/>
               </a:rPr>
-              <a:t>20 cases = 5 markets × 4 product types (food, beauty, fashion, app).</a:t>
+              <a:t>12 cases = Korea, Japan, English-language × cosmetics, drink, running shoes, budgeting app.</a:t>
             </a:r>
           </a:p>
           <a:p>
@@ -9599,7 +8720,7 @@
                 </a:solidFill>
                 <a:latin typeface="Google Sans Flex"/>
               </a:rPr>
-              <a:t>Measured 2026-09-28–29 on real collected data with local Gemma 4; rule-measurable items only.</a:t>
+              <a:t>Measured 2026-10-09–10 with request-time Gemini on a read-only copy of production data.</a:t>
             </a:r>
           </a:p>
           <a:p>
@@ -9620,7 +8741,7 @@
                 </a:solidFill>
                 <a:latin typeface="Google Sans Flex"/>
               </a:rPr>
-              <a:t>Human judgement of fit and copy quality, and a re-run with request-time Gemini, are pending.</a:t>
+              <a:t>Judgments are AI drafts reviewed by one team member; 4 of 12 cases get no pick (mostly Japan).</a:t>
             </a:r>
           </a:p>
         </p:txBody>
@@ -9633,7 +8754,7 @@
 </p:sld>
 </file>
 
-<file path=ppt/slides/slide13.xml><?xml version="1.0" encoding="utf-8"?>
+<file path=ppt/slides/slide12.xml><?xml version="1.0" encoding="utf-8"?>
 <p:sld xmlns:a="http://schemas.openxmlformats.org/drawingml/2006/main" xmlns:r="http://schemas.openxmlformats.org/officeDocument/2006/relationships" xmlns:mc="http://schemas.openxmlformats.org/markup-compatibility/2006" xmlns:mv="urn:schemas-microsoft-com:mac:vml" xmlns:p="http://schemas.openxmlformats.org/presentationml/2006/main" xmlns:c="http://schemas.openxmlformats.org/drawingml/2006/chart" xmlns:dgm="http://schemas.openxmlformats.org/drawingml/2006/diagram" xmlns:o="urn:schemas-microsoft-com:office:office" xmlns:v="urn:schemas-microsoft-com:vml" xmlns:pvml="urn:schemas-microsoft-com:office:powerpoint" xmlns:com="http://schemas.openxmlformats.org/drawingml/2006/compatibility" xmlns:p14="http://schemas.microsoft.com/office/powerpoint/2010/main" xmlns:p15="http://schemas.microsoft.com/office/powerpoint/2012/main" xmlns:ahyp="http://schemas.microsoft.com/office/drawing/2018/hyperlinkcolor">
   <p:cSld>
     <p:spTree>
@@ -9977,7 +9098,7 @@
                 </a:solidFill>
                 <a:latin typeface="Google Sans Flex"/>
               </a:rPr>
-              <a:t>Deploy web and API on Cloud Run with Cloud SQL</a:t>
+              <a:t>Final dictionary refresh, then re-measure the 12 cases</a:t>
             </a:r>
           </a:p>
           <a:p>
@@ -9998,7 +9119,7 @@
                 </a:solidFill>
                 <a:latin typeface="Google Sans Flex"/>
               </a:rPr>
-              <a:t>Publish reviewed dictionary data safely</a:t>
+              <a:t>Show Gemma classifying live on the L4 VM in the demo</a:t>
             </a:r>
           </a:p>
           <a:p>
@@ -10019,7 +9140,7 @@
                 </a:solidFill>
                 <a:latin typeface="Google Sans Flex"/>
               </a:rPr>
-              <a:t>Human-judged evaluation; re-measure with Gemini</a:t>
+              <a:t>More Japanese candidates: 3 of 4 products get no pick</a:t>
             </a:r>
           </a:p>
           <a:p>
@@ -10040,7 +9161,7 @@
                 </a:solidFill>
                 <a:latin typeface="Google Sans Flex"/>
               </a:rPr>
-              <a:t>Grow verified memes beyond KR and JP</a:t>
+              <a:t>Human labels for list-filter precision and recall</a:t>
             </a:r>
           </a:p>
           <a:p>
@@ -10522,7 +9643,7 @@
 </p:sld>
 </file>
 
-<file path=ppt/slides/slide14.xml><?xml version="1.0" encoding="utf-8"?>
+<file path=ppt/slides/slide13.xml><?xml version="1.0" encoding="utf-8"?>
 <p:sld xmlns:a="http://schemas.openxmlformats.org/drawingml/2006/main" xmlns:r="http://schemas.openxmlformats.org/officeDocument/2006/relationships" xmlns:mc="http://schemas.openxmlformats.org/markup-compatibility/2006" xmlns:mv="urn:schemas-microsoft-com:mac:vml" xmlns:p="http://schemas.openxmlformats.org/presentationml/2006/main" xmlns:c="http://schemas.openxmlformats.org/drawingml/2006/chart" xmlns:dgm="http://schemas.openxmlformats.org/drawingml/2006/diagram" xmlns:o="urn:schemas-microsoft-com:office:office" xmlns:v="urn:schemas-microsoft-com:vml" xmlns:pvml="urn:schemas-microsoft-com:office:powerpoint" xmlns:com="http://schemas.openxmlformats.org/drawingml/2006/compatibility" xmlns:p14="http://schemas.microsoft.com/office/powerpoint/2010/main" xmlns:p15="http://schemas.microsoft.com/office/powerpoint/2012/main" xmlns:ahyp="http://schemas.microsoft.com/office/drawing/2018/hyperlinkcolor">
   <p:cSld>
     <p:spTree>
@@ -11056,7 +10177,7 @@
 </p:sld>
 </file>
 
-<file path=ppt/slides/slide15.xml><?xml version="1.0" encoding="utf-8"?>
+<file path=ppt/slides/slide14.xml><?xml version="1.0" encoding="utf-8"?>
 <p:sld xmlns:a="http://schemas.openxmlformats.org/drawingml/2006/main" xmlns:r="http://schemas.openxmlformats.org/officeDocument/2006/relationships" xmlns:mc="http://schemas.openxmlformats.org/markup-compatibility/2006" xmlns:mv="urn:schemas-microsoft-com:mac:vml" xmlns:p="http://schemas.openxmlformats.org/presentationml/2006/main" xmlns:c="http://schemas.openxmlformats.org/drawingml/2006/chart" xmlns:dgm="http://schemas.openxmlformats.org/drawingml/2006/diagram" xmlns:o="urn:schemas-microsoft-com:office:office" xmlns:v="urn:schemas-microsoft-com:vml" xmlns:pvml="urn:schemas-microsoft-com:office:powerpoint" xmlns:com="http://schemas.openxmlformats.org/drawingml/2006/compatibility" xmlns:p14="http://schemas.microsoft.com/office/powerpoint/2010/main" xmlns:p15="http://schemas.microsoft.com/office/powerpoint/2012/main" xmlns:ahyp="http://schemas.microsoft.com/office/drawing/2018/hyperlinkcolor">
   <p:cSld>
     <p:spTree>
@@ -11966,7 +11087,7 @@
 </p:sld>
 </file>
 
-<file path=ppt/slides/slide16.xml><?xml version="1.0" encoding="utf-8"?>
+<file path=ppt/slides/slide15.xml><?xml version="1.0" encoding="utf-8"?>
 <p:sld xmlns:a="http://schemas.openxmlformats.org/drawingml/2006/main" xmlns:r="http://schemas.openxmlformats.org/officeDocument/2006/relationships" xmlns:mc="http://schemas.openxmlformats.org/markup-compatibility/2006" xmlns:mv="urn:schemas-microsoft-com:mac:vml" xmlns:p="http://schemas.openxmlformats.org/presentationml/2006/main" xmlns:c="http://schemas.openxmlformats.org/drawingml/2006/chart" xmlns:dgm="http://schemas.openxmlformats.org/drawingml/2006/diagram" xmlns:o="urn:schemas-microsoft-com:office:office" xmlns:v="urn:schemas-microsoft-com:vml" xmlns:pvml="urn:schemas-microsoft-com:office:powerpoint" xmlns:com="http://schemas.openxmlformats.org/drawingml/2006/compatibility" xmlns:p14="http://schemas.microsoft.com/office/powerpoint/2010/main" xmlns:p15="http://schemas.microsoft.com/office/powerpoint/2012/main" xmlns:ahyp="http://schemas.microsoft.com/office/drawing/2018/hyperlinkcolor">
   <p:cSld>
     <p:spTree>
@@ -12046,7 +11167,7 @@
 </p:sld>
 </file>
 
-<file path=ppt/slides/slide3.xml><?xml version="1.0" encoding="utf-8"?>
+<file path=ppt/slides/slide2.xml><?xml version="1.0" encoding="utf-8"?>
 <p:sld xmlns:a="http://schemas.openxmlformats.org/drawingml/2006/main" xmlns:r="http://schemas.openxmlformats.org/officeDocument/2006/relationships" xmlns:mc="http://schemas.openxmlformats.org/markup-compatibility/2006" xmlns:mv="urn:schemas-microsoft-com:mac:vml" xmlns:p="http://schemas.openxmlformats.org/presentationml/2006/main" xmlns:c="http://schemas.openxmlformats.org/drawingml/2006/chart" xmlns:dgm="http://schemas.openxmlformats.org/drawingml/2006/diagram" xmlns:o="urn:schemas-microsoft-com:office:office" xmlns:v="urn:schemas-microsoft-com:vml" xmlns:pvml="urn:schemas-microsoft-com:office:powerpoint" xmlns:com="http://schemas.openxmlformats.org/drawingml/2006/compatibility" xmlns:p14="http://schemas.microsoft.com/office/powerpoint/2010/main" xmlns:p15="http://schemas.microsoft.com/office/powerpoint/2012/main" xmlns:ahyp="http://schemas.microsoft.com/office/drawing/2018/hyperlinkcolor">
   <p:cSld>
     <p:spTree>
@@ -12958,7 +12079,7 @@
 </p:sld>
 </file>
 
-<file path=ppt/slides/slide4.xml><?xml version="1.0" encoding="utf-8"?>
+<file path=ppt/slides/slide3.xml><?xml version="1.0" encoding="utf-8"?>
 <p:sld xmlns:a="http://schemas.openxmlformats.org/drawingml/2006/main" xmlns:r="http://schemas.openxmlformats.org/officeDocument/2006/relationships" xmlns:mc="http://schemas.openxmlformats.org/markup-compatibility/2006" xmlns:mv="urn:schemas-microsoft-com:mac:vml" xmlns:p="http://schemas.openxmlformats.org/presentationml/2006/main" xmlns:c="http://schemas.openxmlformats.org/drawingml/2006/chart" xmlns:dgm="http://schemas.openxmlformats.org/drawingml/2006/diagram" xmlns:o="urn:schemas-microsoft-com:office:office" xmlns:v="urn:schemas-microsoft-com:vml" xmlns:pvml="urn:schemas-microsoft-com:office:powerpoint" xmlns:com="http://schemas.openxmlformats.org/drawingml/2006/compatibility" xmlns:p14="http://schemas.microsoft.com/office/powerpoint/2010/main" xmlns:p15="http://schemas.microsoft.com/office/powerpoint/2012/main" xmlns:ahyp="http://schemas.microsoft.com/office/drawing/2018/hyperlinkcolor">
   <p:cSld>
     <p:spTree>
@@ -13772,7 +12893,7 @@
 </p:sld>
 </file>
 
-<file path=ppt/slides/slide5.xml><?xml version="1.0" encoding="utf-8"?>
+<file path=ppt/slides/slide4.xml><?xml version="1.0" encoding="utf-8"?>
 <p:sld xmlns:a="http://schemas.openxmlformats.org/drawingml/2006/main" xmlns:r="http://schemas.openxmlformats.org/officeDocument/2006/relationships" xmlns:mc="http://schemas.openxmlformats.org/markup-compatibility/2006" xmlns:mv="urn:schemas-microsoft-com:mac:vml" xmlns:p="http://schemas.openxmlformats.org/presentationml/2006/main" xmlns:c="http://schemas.openxmlformats.org/drawingml/2006/chart" xmlns:dgm="http://schemas.openxmlformats.org/drawingml/2006/diagram" xmlns:o="urn:schemas-microsoft-com:office:office" xmlns:v="urn:schemas-microsoft-com:vml" xmlns:pvml="urn:schemas-microsoft-com:office:powerpoint" xmlns:com="http://schemas.openxmlformats.org/drawingml/2006/compatibility" xmlns:p14="http://schemas.microsoft.com/office/powerpoint/2010/main" xmlns:p15="http://schemas.microsoft.com/office/powerpoint/2012/main" xmlns:ahyp="http://schemas.microsoft.com/office/drawing/2018/hyperlinkcolor">
   <p:cSld>
     <p:spTree>
@@ -15009,7 +14130,7 @@
 </p:sld>
 </file>
 
-<file path=ppt/slides/slide6.xml><?xml version="1.0" encoding="utf-8"?>
+<file path=ppt/slides/slide5.xml><?xml version="1.0" encoding="utf-8"?>
 <p:sld xmlns:a="http://schemas.openxmlformats.org/drawingml/2006/main" xmlns:r="http://schemas.openxmlformats.org/officeDocument/2006/relationships" xmlns:mc="http://schemas.openxmlformats.org/markup-compatibility/2006" xmlns:mv="urn:schemas-microsoft-com:mac:vml" xmlns:p="http://schemas.openxmlformats.org/presentationml/2006/main" xmlns:c="http://schemas.openxmlformats.org/drawingml/2006/chart" xmlns:dgm="http://schemas.openxmlformats.org/drawingml/2006/diagram" xmlns:o="urn:schemas-microsoft-com:office:office" xmlns:v="urn:schemas-microsoft-com:vml" xmlns:pvml="urn:schemas-microsoft-com:office:powerpoint" xmlns:com="http://schemas.openxmlformats.org/drawingml/2006/compatibility" xmlns:p14="http://schemas.microsoft.com/office/powerpoint/2010/main" xmlns:p15="http://schemas.microsoft.com/office/powerpoint/2012/main" xmlns:ahyp="http://schemas.microsoft.com/office/drawing/2018/hyperlinkcolor">
   <p:cSld>
     <p:spTree>
@@ -16787,7 +15908,7 @@
 </p:sld>
 </file>
 
-<file path=ppt/slides/slide7.xml><?xml version="1.0" encoding="utf-8"?>
+<file path=ppt/slides/slide6.xml><?xml version="1.0" encoding="utf-8"?>
 <p:sld xmlns:a="http://schemas.openxmlformats.org/drawingml/2006/main" xmlns:r="http://schemas.openxmlformats.org/officeDocument/2006/relationships" xmlns:mc="http://schemas.openxmlformats.org/markup-compatibility/2006" xmlns:mv="urn:schemas-microsoft-com:mac:vml" xmlns:p="http://schemas.openxmlformats.org/presentationml/2006/main" xmlns:c="http://schemas.openxmlformats.org/drawingml/2006/chart" xmlns:dgm="http://schemas.openxmlformats.org/drawingml/2006/diagram" xmlns:o="urn:schemas-microsoft-com:office:office" xmlns:v="urn:schemas-microsoft-com:vml" xmlns:pvml="urn:schemas-microsoft-com:office:powerpoint" xmlns:com="http://schemas.openxmlformats.org/drawingml/2006/compatibility" xmlns:p14="http://schemas.microsoft.com/office/powerpoint/2010/main" xmlns:p15="http://schemas.microsoft.com/office/powerpoint/2012/main" xmlns:ahyp="http://schemas.microsoft.com/office/drawing/2018/hyperlinkcolor">
   <p:cSld>
     <p:spTree>
@@ -20093,7 +19214,7 @@
 </p:sld>
 </file>
 
-<file path=ppt/slides/slide8.xml><?xml version="1.0" encoding="utf-8"?>
+<file path=ppt/slides/slide7.xml><?xml version="1.0" encoding="utf-8"?>
 <p:sld xmlns:a="http://schemas.openxmlformats.org/drawingml/2006/main" xmlns:r="http://schemas.openxmlformats.org/officeDocument/2006/relationships" xmlns:mc="http://schemas.openxmlformats.org/markup-compatibility/2006" xmlns:mv="urn:schemas-microsoft-com:mac:vml" xmlns:p="http://schemas.openxmlformats.org/presentationml/2006/main" xmlns:c="http://schemas.openxmlformats.org/drawingml/2006/chart" xmlns:dgm="http://schemas.openxmlformats.org/drawingml/2006/diagram" xmlns:o="urn:schemas-microsoft-com:office:office" xmlns:v="urn:schemas-microsoft-com:vml" xmlns:pvml="urn:schemas-microsoft-com:office:powerpoint" xmlns:com="http://schemas.openxmlformats.org/drawingml/2006/compatibility" xmlns:p14="http://schemas.microsoft.com/office/powerpoint/2010/main" xmlns:p15="http://schemas.microsoft.com/office/powerpoint/2012/main" xmlns:ahyp="http://schemas.microsoft.com/office/drawing/2018/hyperlinkcolor">
   <p:cSld>
     <p:spTree>
@@ -21357,7 +20478,7 @@
                 </a:solidFill>
                 <a:latin typeface="Google Sans Flex"/>
               </a:rPr>
-              <a:t>local · Ollama</a:t>
+              <a:t>local · Ollama · Kaggle</a:t>
             </a:r>
           </a:p>
           <a:p>
@@ -22406,7 +21527,7 @@
 </p:sld>
 </file>
 
-<file path=ppt/slides/slide9.xml><?xml version="1.0" encoding="utf-8"?>
+<file path=ppt/slides/slide8.xml><?xml version="1.0" encoding="utf-8"?>
 <p:sld xmlns:a="http://schemas.openxmlformats.org/drawingml/2006/main" xmlns:r="http://schemas.openxmlformats.org/officeDocument/2006/relationships" xmlns:mc="http://schemas.openxmlformats.org/markup-compatibility/2006" xmlns:mv="urn:schemas-microsoft-com:mac:vml" xmlns:p="http://schemas.openxmlformats.org/presentationml/2006/main" xmlns:c="http://schemas.openxmlformats.org/drawingml/2006/chart" xmlns:dgm="http://schemas.openxmlformats.org/drawingml/2006/diagram" xmlns:o="urn:schemas-microsoft-com:office:office" xmlns:v="urn:schemas-microsoft-com:vml" xmlns:pvml="urn:schemas-microsoft-com:office:powerpoint" xmlns:com="http://schemas.openxmlformats.org/drawingml/2006/compatibility" xmlns:p14="http://schemas.microsoft.com/office/powerpoint/2010/main" xmlns:p15="http://schemas.microsoft.com/office/powerpoint/2012/main" xmlns:ahyp="http://schemas.microsoft.com/office/drawing/2018/hyperlinkcolor">
   <p:cSld>
     <p:spTree>
@@ -22789,7 +21910,7 @@
                 </a:solidFill>
                 <a:latin typeface="Google Sans Flex"/>
               </a:rPr>
-              <a:t> (local) — classification, translation, evidence labeling, fit tags</a:t>
+              <a:t> (local, Kaggle, on-demand L4 VM) — classification, translation, evidence labeling, live re-checks for reviewers</a:t>
             </a:r>
           </a:p>
           <a:p>
@@ -23043,7 +22164,7 @@
                 </a:solidFill>
                 <a:latin typeface="Google Sans Flex"/>
               </a:rPr>
-              <a:t>Vertex AI</a:t>
+              <a:t>Vertex AI · Compute Engine L4 GPU</a:t>
             </a:r>
           </a:p>
           <a:p>
@@ -23720,6 +22841,885 @@
                 <a:latin typeface="Google Sans Flex"/>
               </a:rPr>
               <a:t>Firebase / Firestore are not used: the dictionary is relational and versioned (meanings, evidence, reviews), so it lives in Cloud SQL for PostgreSQL.</a:t>
+            </a:r>
+          </a:p>
+        </p:txBody>
+      </p:sp>
+    </p:spTree>
+  </p:cSld>
+  <p:clrMapOvr>
+    <a:masterClrMapping/>
+  </p:clrMapOvr>
+</p:sld>
+</file>
+
+<file path=ppt/slides/slide9.xml><?xml version="1.0" encoding="utf-8"?>
+<p:sld xmlns:a="http://schemas.openxmlformats.org/drawingml/2006/main" xmlns:r="http://schemas.openxmlformats.org/officeDocument/2006/relationships" xmlns:mc="http://schemas.openxmlformats.org/markup-compatibility/2006" xmlns:mv="urn:schemas-microsoft-com:mac:vml" xmlns:p="http://schemas.openxmlformats.org/presentationml/2006/main" xmlns:c="http://schemas.openxmlformats.org/drawingml/2006/chart" xmlns:dgm="http://schemas.openxmlformats.org/drawingml/2006/diagram" xmlns:o="urn:schemas-microsoft-com:office:office" xmlns:v="urn:schemas-microsoft-com:vml" xmlns:pvml="urn:schemas-microsoft-com:office:powerpoint" xmlns:com="http://schemas.openxmlformats.org/drawingml/2006/compatibility" xmlns:p14="http://schemas.microsoft.com/office/powerpoint/2010/main" xmlns:p15="http://schemas.microsoft.com/office/powerpoint/2012/main" xmlns:ahyp="http://schemas.microsoft.com/office/drawing/2018/hyperlinkcolor">
+  <p:cSld>
+    <p:spTree>
+      <p:nvGrpSpPr>
+        <p:cNvPr id="123" name="Shape 123"/>
+        <p:cNvGrpSpPr/>
+        <p:nvPr/>
+      </p:nvGrpSpPr>
+      <p:grpSpPr>
+        <a:xfrm>
+          <a:off x="0" y="0"/>
+          <a:ext cx="0" cy="0"/>
+          <a:chOff x="0" y="0"/>
+          <a:chExt cx="0" cy="0"/>
+        </a:xfrm>
+      </p:grpSpPr>
+      <p:pic>
+        <p:nvPicPr>
+          <p:cNvPr id="124" name="Google Shape;124;p22" title="Frame 144.png"/>
+          <p:cNvPicPr preferRelativeResize="0"/>
+          <p:nvPr/>
+        </p:nvPicPr>
+        <p:blipFill rotWithShape="1">
+          <a:blip r:embed="rId3">
+            <a:alphaModFix/>
+          </a:blip>
+          <a:srcRect b="98001" l="0" r="0" t="0"/>
+          <a:stretch/>
+        </p:blipFill>
+        <p:spPr>
+          <a:xfrm>
+            <a:off x="0" y="5093562"/>
+            <a:ext cx="9144000" cy="54275"/>
+          </a:xfrm>
+          <a:prstGeom prst="rect">
+            <a:avLst/>
+          </a:prstGeom>
+          <a:noFill/>
+          <a:ln>
+            <a:noFill/>
+          </a:ln>
+        </p:spPr>
+      </p:pic>
+      <p:pic>
+        <p:nvPicPr>
+          <p:cNvPr id="125" name="Google Shape;125;p22" title="Group 427319979.png"/>
+          <p:cNvPicPr preferRelativeResize="0"/>
+          <p:nvPr/>
+        </p:nvPicPr>
+        <p:blipFill>
+          <a:blip r:embed="rId4">
+            <a:alphaModFix/>
+          </a:blip>
+          <a:stretch>
+            <a:fillRect/>
+          </a:stretch>
+        </p:blipFill>
+        <p:spPr>
+          <a:xfrm>
+            <a:off x="0" y="1"/>
+            <a:ext cx="9144000" cy="507359"/>
+          </a:xfrm>
+          <a:prstGeom prst="rect">
+            <a:avLst/>
+          </a:prstGeom>
+          <a:noFill/>
+          <a:ln>
+            <a:noFill/>
+          </a:ln>
+        </p:spPr>
+      </p:pic>
+      <p:sp>
+        <p:nvSpPr>
+          <p:cNvPr id="126" name="Google Shape;126;p22"/>
+          <p:cNvSpPr/>
+          <p:nvPr/>
+        </p:nvSpPr>
+        <p:spPr>
+          <a:xfrm>
+            <a:off x="-29250" y="5071875"/>
+            <a:ext cx="9173400" cy="97800"/>
+          </a:xfrm>
+          <a:prstGeom prst="rect">
+            <a:avLst/>
+          </a:prstGeom>
+          <a:solidFill>
+            <a:schemeClr val="dk1"/>
+          </a:solidFill>
+          <a:ln>
+            <a:noFill/>
+          </a:ln>
+        </p:spPr>
+        <p:txBody>
+          <a:bodyPr anchorCtr="0" anchor="ctr" bIns="91425" lIns="91425" spcFirstLastPara="1" rIns="91425" wrap="square" tIns="91425">
+            <a:noAutofit/>
+          </a:bodyPr>
+          <a:lstStyle/>
+          <a:p>
+            <a:pPr indent="0" lvl="0" marL="0" rtl="0" algn="ctr">
+              <a:spcBef>
+                <a:spcPts val="0"/>
+              </a:spcBef>
+              <a:spcAft>
+                <a:spcPts val="0"/>
+              </a:spcAft>
+              <a:buNone/>
+            </a:pPr>
+            <a:r>
+              <a:t/>
+            </a:r>
+            <a:endParaRPr/>
+          </a:p>
+        </p:txBody>
+      </p:sp>
+      <p:sp>
+        <p:nvSpPr>
+          <p:cNvPr id="127" name="Google Shape;127;p22"/>
+          <p:cNvSpPr txBox="1"/>
+          <p:nvPr/>
+        </p:nvSpPr>
+        <p:spPr>
+          <a:xfrm>
+            <a:off x="265350" y="663825"/>
+            <a:ext cx="8943000" cy="561900"/>
+          </a:xfrm>
+          <a:prstGeom prst="rect">
+            <a:avLst/>
+          </a:prstGeom>
+          <a:noFill/>
+          <a:ln>
+            <a:noFill/>
+          </a:ln>
+        </p:spPr>
+        <p:txBody>
+          <a:bodyPr anchorCtr="0" anchor="t" bIns="91425" lIns="91425" spcFirstLastPara="1" rIns="91425" wrap="square" tIns="91425">
+            <a:noAutofit/>
+          </a:bodyPr>
+          <a:lstStyle/>
+          <a:p>
+            <a:pPr indent="0" lvl="0" marL="0" rtl="0" algn="l">
+              <a:spcBef>
+                <a:spcPts val="0"/>
+              </a:spcBef>
+              <a:spcAft>
+                <a:spcPts val="0"/>
+              </a:spcAft>
+              <a:buNone/>
+            </a:pPr>
+            <a:r>
+              <a:rPr lang="en-GB" sz="1600">
+                <a:latin typeface="Google Sans Flex Medium"/>
+                <a:ea typeface="Google Sans Flex Medium"/>
+                <a:cs typeface="Google Sans Flex Medium"/>
+                <a:sym typeface="Google Sans Flex Medium"/>
+              </a:rPr>
+              <a:t>Estimated implementation cost (optional)</a:t>
+            </a:r>
+            <a:endParaRPr sz="1600">
+              <a:latin typeface="Google Sans Flex Medium"/>
+              <a:ea typeface="Google Sans Flex Medium"/>
+              <a:cs typeface="Google Sans Flex Medium"/>
+              <a:sym typeface="Google Sans Flex Medium"/>
+            </a:endParaRPr>
+          </a:p>
+        </p:txBody>
+      </p:sp>
+      <p:sp>
+        <p:nvSpPr>
+          <p:cNvPr id="128" name="Rounded Rectangle 127"/>
+          <p:cNvSpPr/>
+          <p:nvPr/>
+        </p:nvSpPr>
+        <p:spPr>
+          <a:xfrm>
+            <a:off x="365760" y="1188720"/>
+            <a:ext cx="2697480" cy="1234440"/>
+          </a:xfrm>
+          <a:prstGeom prst="roundRect">
+            <a:avLst>
+              <a:gd name="adj" fmla="val 8000"/>
+            </a:avLst>
+          </a:prstGeom>
+          <a:solidFill>
+            <a:srgbClr val="FFFFFF"/>
+          </a:solidFill>
+          <a:ln w="9525">
+            <a:solidFill>
+              <a:srgbClr val="DADCE0"/>
+            </a:solidFill>
+          </a:ln>
+          <a:effectLst/>
+        </p:spPr>
+        <p:style>
+          <a:lnRef idx="1">
+            <a:schemeClr val="accent1"/>
+          </a:lnRef>
+          <a:fillRef idx="3">
+            <a:schemeClr val="accent1"/>
+          </a:fillRef>
+          <a:effectRef idx="0">
+            <a:schemeClr val="accent1"/>
+          </a:effectRef>
+          <a:fontRef idx="minor">
+            <a:schemeClr val="lt1"/>
+          </a:fontRef>
+        </p:style>
+        <p:txBody>
+          <a:bodyPr rtlCol="0" anchor="ctr"/>
+          <a:lstStyle/>
+          <a:p/>
+        </p:txBody>
+      </p:sp>
+      <p:sp>
+        <p:nvSpPr>
+          <p:cNvPr id="129" name="TextBox 128"/>
+          <p:cNvSpPr txBox="1"/>
+          <p:nvPr/>
+        </p:nvSpPr>
+        <p:spPr>
+          <a:xfrm>
+            <a:off x="548640" y="1261872"/>
+            <a:ext cx="2377440" cy="640080"/>
+          </a:xfrm>
+          <a:prstGeom prst="rect">
+            <a:avLst/>
+          </a:prstGeom>
+          <a:noFill/>
+        </p:spPr>
+        <p:txBody>
+          <a:bodyPr wrap="square" anchor="t" lIns="0" rIns="0" tIns="0" bIns="0">
+            <a:noAutofit/>
+          </a:bodyPr>
+          <a:lstStyle/>
+          <a:p>
+            <a:pPr algn="l">
+              <a:spcAft>
+                <a:spcPts val="400"/>
+              </a:spcAft>
+            </a:pPr>
+            <a:r>
+              <a:rPr sz="2800" b="1" i="0">
+                <a:solidFill>
+                  <a:srgbClr val="1A73E8"/>
+                </a:solidFill>
+                <a:latin typeface="Google Sans Flex"/>
+              </a:rPr>
+              <a:t>$0.0015</a:t>
+            </a:r>
+          </a:p>
+        </p:txBody>
+      </p:sp>
+      <p:sp>
+        <p:nvSpPr>
+          <p:cNvPr id="130" name="TextBox 129"/>
+          <p:cNvSpPr txBox="1"/>
+          <p:nvPr/>
+        </p:nvSpPr>
+        <p:spPr>
+          <a:xfrm>
+            <a:off x="548640" y="1901952"/>
+            <a:ext cx="2377440" cy="457200"/>
+          </a:xfrm>
+          <a:prstGeom prst="rect">
+            <a:avLst/>
+          </a:prstGeom>
+          <a:noFill/>
+        </p:spPr>
+        <p:txBody>
+          <a:bodyPr wrap="square" anchor="t" lIns="0" rIns="0" tIns="0" bIns="0">
+            <a:noAutofit/>
+          </a:bodyPr>
+          <a:lstStyle/>
+          <a:p>
+            <a:pPr algn="l">
+              <a:spcAft>
+                <a:spcPts val="400"/>
+              </a:spcAft>
+            </a:pPr>
+            <a:r>
+              <a:rPr sz="1000" b="0" i="0">
+                <a:solidFill>
+                  <a:srgbClr val="5F6368"/>
+                </a:solidFill>
+                <a:latin typeface="Google Sans Flex"/>
+              </a:rPr>
+              <a:t>per request-time Gemini call*</a:t>
+            </a:r>
+          </a:p>
+        </p:txBody>
+      </p:sp>
+      <p:sp>
+        <p:nvSpPr>
+          <p:cNvPr id="131" name="Rounded Rectangle 130"/>
+          <p:cNvSpPr/>
+          <p:nvPr/>
+        </p:nvSpPr>
+        <p:spPr>
+          <a:xfrm>
+            <a:off x="3200400" y="1188720"/>
+            <a:ext cx="2697480" cy="1234440"/>
+          </a:xfrm>
+          <a:prstGeom prst="roundRect">
+            <a:avLst>
+              <a:gd name="adj" fmla="val 8000"/>
+            </a:avLst>
+          </a:prstGeom>
+          <a:solidFill>
+            <a:srgbClr val="FFFFFF"/>
+          </a:solidFill>
+          <a:ln w="9525">
+            <a:solidFill>
+              <a:srgbClr val="DADCE0"/>
+            </a:solidFill>
+          </a:ln>
+          <a:effectLst/>
+        </p:spPr>
+        <p:style>
+          <a:lnRef idx="1">
+            <a:schemeClr val="accent1"/>
+          </a:lnRef>
+          <a:fillRef idx="3">
+            <a:schemeClr val="accent1"/>
+          </a:fillRef>
+          <a:effectRef idx="0">
+            <a:schemeClr val="accent1"/>
+          </a:effectRef>
+          <a:fontRef idx="minor">
+            <a:schemeClr val="lt1"/>
+          </a:fontRef>
+        </p:style>
+        <p:txBody>
+          <a:bodyPr rtlCol="0" anchor="ctr"/>
+          <a:lstStyle/>
+          <a:p/>
+        </p:txBody>
+      </p:sp>
+      <p:sp>
+        <p:nvSpPr>
+          <p:cNvPr id="132" name="TextBox 131"/>
+          <p:cNvSpPr txBox="1"/>
+          <p:nvPr/>
+        </p:nvSpPr>
+        <p:spPr>
+          <a:xfrm>
+            <a:off x="3383280" y="1261872"/>
+            <a:ext cx="2377440" cy="640080"/>
+          </a:xfrm>
+          <a:prstGeom prst="rect">
+            <a:avLst/>
+          </a:prstGeom>
+          <a:noFill/>
+        </p:spPr>
+        <p:txBody>
+          <a:bodyPr wrap="square" anchor="t" lIns="0" rIns="0" tIns="0" bIns="0">
+            <a:noAutofit/>
+          </a:bodyPr>
+          <a:lstStyle/>
+          <a:p>
+            <a:pPr algn="l">
+              <a:spcAft>
+                <a:spcPts val="400"/>
+              </a:spcAft>
+            </a:pPr>
+            <a:r>
+              <a:rPr sz="2800" b="1" i="0">
+                <a:solidFill>
+                  <a:srgbClr val="D93025"/>
+                </a:solidFill>
+                <a:latin typeface="Google Sans Flex"/>
+              </a:rPr>
+              <a:t>≈ $15</a:t>
+            </a:r>
+          </a:p>
+        </p:txBody>
+      </p:sp>
+      <p:sp>
+        <p:nvSpPr>
+          <p:cNvPr id="133" name="TextBox 132"/>
+          <p:cNvSpPr txBox="1"/>
+          <p:nvPr/>
+        </p:nvSpPr>
+        <p:spPr>
+          <a:xfrm>
+            <a:off x="3383280" y="1901952"/>
+            <a:ext cx="2377440" cy="457200"/>
+          </a:xfrm>
+          <a:prstGeom prst="rect">
+            <a:avLst/>
+          </a:prstGeom>
+          <a:noFill/>
+        </p:spPr>
+        <p:txBody>
+          <a:bodyPr wrap="square" anchor="t" lIns="0" rIns="0" tIns="0" bIns="0">
+            <a:noAutofit/>
+          </a:bodyPr>
+          <a:lstStyle/>
+          <a:p>
+            <a:pPr algn="l">
+              <a:spcAft>
+                <a:spcPts val="400"/>
+              </a:spcAft>
+            </a:pPr>
+            <a:r>
+              <a:rPr sz="1000" b="0" i="0">
+                <a:solidFill>
+                  <a:srgbClr val="5F6368"/>
+                </a:solidFill>
+                <a:latin typeface="Google Sans Flex"/>
+              </a:rPr>
+              <a:t>per 10,000 Gemini calls*</a:t>
+            </a:r>
+          </a:p>
+        </p:txBody>
+      </p:sp>
+      <p:sp>
+        <p:nvSpPr>
+          <p:cNvPr id="134" name="Rounded Rectangle 133"/>
+          <p:cNvSpPr/>
+          <p:nvPr/>
+        </p:nvSpPr>
+        <p:spPr>
+          <a:xfrm>
+            <a:off x="6035040" y="1188720"/>
+            <a:ext cx="2697480" cy="1234440"/>
+          </a:xfrm>
+          <a:prstGeom prst="roundRect">
+            <a:avLst>
+              <a:gd name="adj" fmla="val 8000"/>
+            </a:avLst>
+          </a:prstGeom>
+          <a:solidFill>
+            <a:srgbClr val="FFFFFF"/>
+          </a:solidFill>
+          <a:ln w="9525">
+            <a:solidFill>
+              <a:srgbClr val="DADCE0"/>
+            </a:solidFill>
+          </a:ln>
+          <a:effectLst/>
+        </p:spPr>
+        <p:style>
+          <a:lnRef idx="1">
+            <a:schemeClr val="accent1"/>
+          </a:lnRef>
+          <a:fillRef idx="3">
+            <a:schemeClr val="accent1"/>
+          </a:fillRef>
+          <a:effectRef idx="0">
+            <a:schemeClr val="accent1"/>
+          </a:effectRef>
+          <a:fontRef idx="minor">
+            <a:schemeClr val="lt1"/>
+          </a:fontRef>
+        </p:style>
+        <p:txBody>
+          <a:bodyPr rtlCol="0" anchor="ctr"/>
+          <a:lstStyle/>
+          <a:p/>
+        </p:txBody>
+      </p:sp>
+      <p:sp>
+        <p:nvSpPr>
+          <p:cNvPr id="135" name="TextBox 134"/>
+          <p:cNvSpPr txBox="1"/>
+          <p:nvPr/>
+        </p:nvSpPr>
+        <p:spPr>
+          <a:xfrm>
+            <a:off x="6217920" y="1261872"/>
+            <a:ext cx="2377440" cy="640080"/>
+          </a:xfrm>
+          <a:prstGeom prst="rect">
+            <a:avLst/>
+          </a:prstGeom>
+          <a:noFill/>
+        </p:spPr>
+        <p:txBody>
+          <a:bodyPr wrap="square" anchor="t" lIns="0" rIns="0" tIns="0" bIns="0">
+            <a:noAutofit/>
+          </a:bodyPr>
+          <a:lstStyle/>
+          <a:p>
+            <a:pPr algn="l">
+              <a:spcAft>
+                <a:spcPts val="400"/>
+              </a:spcAft>
+            </a:pPr>
+            <a:r>
+              <a:rPr sz="2800" b="1" i="0">
+                <a:solidFill>
+                  <a:srgbClr val="E37400"/>
+                </a:solidFill>
+                <a:latin typeface="Google Sans Flex"/>
+              </a:rPr>
+              <a:t>$0</a:t>
+            </a:r>
+          </a:p>
+        </p:txBody>
+      </p:sp>
+      <p:sp>
+        <p:nvSpPr>
+          <p:cNvPr id="136" name="TextBox 135"/>
+          <p:cNvSpPr txBox="1"/>
+          <p:nvPr/>
+        </p:nvSpPr>
+        <p:spPr>
+          <a:xfrm>
+            <a:off x="6217920" y="1901952"/>
+            <a:ext cx="2377440" cy="457200"/>
+          </a:xfrm>
+          <a:prstGeom prst="rect">
+            <a:avLst/>
+          </a:prstGeom>
+          <a:noFill/>
+        </p:spPr>
+        <p:txBody>
+          <a:bodyPr wrap="square" anchor="t" lIns="0" rIns="0" tIns="0" bIns="0">
+            <a:noAutofit/>
+          </a:bodyPr>
+          <a:lstStyle/>
+          <a:p>
+            <a:pPr algn="l">
+              <a:spcAft>
+                <a:spcPts val="400"/>
+              </a:spcAft>
+            </a:pPr>
+            <a:r>
+              <a:rPr sz="1000" b="0" i="0">
+                <a:solidFill>
+                  <a:srgbClr val="5F6368"/>
+                </a:solidFill>
+                <a:latin typeface="Google Sans Flex"/>
+              </a:rPr>
+              <a:t>always-on GPU — Gemma runs in the batch; an L4 VM starts only for reviewer demos</a:t>
+            </a:r>
+          </a:p>
+        </p:txBody>
+      </p:sp>
+      <p:sp>
+        <p:nvSpPr>
+          <p:cNvPr id="137" name="TextBox 136"/>
+          <p:cNvSpPr txBox="1"/>
+          <p:nvPr/>
+        </p:nvSpPr>
+        <p:spPr>
+          <a:xfrm>
+            <a:off x="365760" y="2606040"/>
+            <a:ext cx="4114800" cy="256032"/>
+          </a:xfrm>
+          <a:prstGeom prst="rect">
+            <a:avLst/>
+          </a:prstGeom>
+          <a:noFill/>
+        </p:spPr>
+        <p:txBody>
+          <a:bodyPr wrap="square" anchor="t" lIns="0" rIns="0" tIns="0" bIns="0">
+            <a:noAutofit/>
+          </a:bodyPr>
+          <a:lstStyle/>
+          <a:p>
+            <a:pPr algn="l">
+              <a:spcAft>
+                <a:spcPts val="400"/>
+              </a:spcAft>
+            </a:pPr>
+            <a:r>
+              <a:rPr sz="1150" b="1" i="0">
+                <a:solidFill>
+                  <a:srgbClr val="202124"/>
+                </a:solidFill>
+                <a:latin typeface="Google Sans Flex"/>
+              </a:rPr>
+              <a:t>Cost guards built in</a:t>
+            </a:r>
+          </a:p>
+        </p:txBody>
+      </p:sp>
+      <p:sp>
+        <p:nvSpPr>
+          <p:cNvPr id="138" name="TextBox 137"/>
+          <p:cNvSpPr txBox="1"/>
+          <p:nvPr/>
+        </p:nvSpPr>
+        <p:spPr>
+          <a:xfrm>
+            <a:off x="365760" y="2907792"/>
+            <a:ext cx="4114800" cy="1645920"/>
+          </a:xfrm>
+          <a:prstGeom prst="rect">
+            <a:avLst/>
+          </a:prstGeom>
+          <a:noFill/>
+        </p:spPr>
+        <p:txBody>
+          <a:bodyPr wrap="square" anchor="t" lIns="0" rIns="0" tIns="0" bIns="0">
+            <a:noAutofit/>
+          </a:bodyPr>
+          <a:lstStyle/>
+          <a:p>
+            <a:pPr algn="l" marL="146304" indent="-146304">
+              <a:spcAft>
+                <a:spcPts val="500"/>
+              </a:spcAft>
+              <a:buClr>
+                <a:srgbClr val="5F6368"/>
+              </a:buClr>
+              <a:buFont typeface="Arial"/>
+              <a:buChar char="•"/>
+            </a:pPr>
+            <a:r>
+              <a:rPr sz="1050" b="0" i="0">
+                <a:solidFill>
+                  <a:srgbClr val="202124"/>
+                </a:solidFill>
+                <a:latin typeface="Google Sans Flex"/>
+              </a:rPr>
+              <a:t>Gemini daily call cap recorded in the database</a:t>
+            </a:r>
+          </a:p>
+          <a:p>
+            <a:pPr algn="l" marL="146304" indent="-146304">
+              <a:spcAft>
+                <a:spcPts val="500"/>
+              </a:spcAft>
+              <a:buClr>
+                <a:srgbClr val="5F6368"/>
+              </a:buClr>
+              <a:buFont typeface="Arial"/>
+              <a:buChar char="•"/>
+            </a:pPr>
+            <a:r>
+              <a:rPr sz="1050" b="0" i="0">
+                <a:solidFill>
+                  <a:srgbClr val="202124"/>
+                </a:solidFill>
+                <a:latin typeface="Google Sans Flex"/>
+              </a:rPr>
+              <a:t>Per-instance request limit (20 / min) on recommend &amp; create</a:t>
+            </a:r>
+          </a:p>
+          <a:p>
+            <a:pPr algn="l" marL="146304" indent="-146304">
+              <a:spcAft>
+                <a:spcPts val="500"/>
+              </a:spcAft>
+              <a:buClr>
+                <a:srgbClr val="5F6368"/>
+              </a:buClr>
+              <a:buFont typeface="Arial"/>
+              <a:buChar char="•"/>
+            </a:pPr>
+            <a:r>
+              <a:rPr sz="1050" b="0" i="0">
+                <a:solidFill>
+                  <a:srgbClr val="202124"/>
+                </a:solidFill>
+                <a:latin typeface="Google Sans Flex"/>
+              </a:rPr>
+              <a:t>Cloud Run scales to zero; monthly Cloud Run spend limit</a:t>
+            </a:r>
+          </a:p>
+          <a:p>
+            <a:pPr algn="l" marL="146304" indent="-146304">
+              <a:spcAft>
+                <a:spcPts val="500"/>
+              </a:spcAft>
+              <a:buClr>
+                <a:srgbClr val="5F6368"/>
+              </a:buClr>
+              <a:buFont typeface="Arial"/>
+              <a:buChar char="•"/>
+            </a:pPr>
+            <a:r>
+              <a:rPr sz="1050" b="0" i="0">
+                <a:solidFill>
+                  <a:srgbClr val="202124"/>
+                </a:solidFill>
+                <a:latin typeface="Google Sans Flex"/>
+              </a:rPr>
+              <a:t>One Gemini call per request step; heavy work is batched</a:t>
+            </a:r>
+          </a:p>
+        </p:txBody>
+      </p:sp>
+      <p:sp>
+        <p:nvSpPr>
+          <p:cNvPr id="139" name="TextBox 138"/>
+          <p:cNvSpPr txBox="1"/>
+          <p:nvPr/>
+        </p:nvSpPr>
+        <p:spPr>
+          <a:xfrm>
+            <a:off x="4663440" y="2606040"/>
+            <a:ext cx="4114800" cy="256032"/>
+          </a:xfrm>
+          <a:prstGeom prst="rect">
+            <a:avLst/>
+          </a:prstGeom>
+          <a:noFill/>
+        </p:spPr>
+        <p:txBody>
+          <a:bodyPr wrap="square" anchor="t" lIns="0" rIns="0" tIns="0" bIns="0">
+            <a:noAutofit/>
+          </a:bodyPr>
+          <a:lstStyle/>
+          <a:p>
+            <a:pPr algn="l">
+              <a:spcAft>
+                <a:spcPts val="400"/>
+              </a:spcAft>
+            </a:pPr>
+            <a:r>
+              <a:rPr sz="1150" b="1" i="0">
+                <a:solidFill>
+                  <a:srgbClr val="202124"/>
+                </a:solidFill>
+                <a:latin typeface="Google Sans Flex"/>
+              </a:rPr>
+              <a:t>Design choice that avoided the biggest cost</a:t>
+            </a:r>
+          </a:p>
+        </p:txBody>
+      </p:sp>
+      <p:sp>
+        <p:nvSpPr>
+          <p:cNvPr id="140" name="Rounded Rectangle 139"/>
+          <p:cNvSpPr/>
+          <p:nvPr/>
+        </p:nvSpPr>
+        <p:spPr>
+          <a:xfrm>
+            <a:off x="4663440" y="2907792"/>
+            <a:ext cx="4114800" cy="1143000"/>
+          </a:xfrm>
+          <a:prstGeom prst="roundRect">
+            <a:avLst>
+              <a:gd name="adj" fmla="val 8000"/>
+            </a:avLst>
+          </a:prstGeom>
+          <a:solidFill>
+            <a:srgbClr val="E8F0FE"/>
+          </a:solidFill>
+          <a:ln>
+            <a:noFill/>
+          </a:ln>
+          <a:effectLst/>
+        </p:spPr>
+        <p:style>
+          <a:lnRef idx="1">
+            <a:schemeClr val="accent1"/>
+          </a:lnRef>
+          <a:fillRef idx="3">
+            <a:schemeClr val="accent1"/>
+          </a:fillRef>
+          <a:effectRef idx="0">
+            <a:schemeClr val="accent1"/>
+          </a:effectRef>
+          <a:fontRef idx="minor">
+            <a:schemeClr val="lt1"/>
+          </a:fontRef>
+        </p:style>
+        <p:txBody>
+          <a:bodyPr rtlCol="0" anchor="ctr"/>
+          <a:lstStyle/>
+          <a:p/>
+        </p:txBody>
+      </p:sp>
+      <p:sp>
+        <p:nvSpPr>
+          <p:cNvPr id="141" name="TextBox 140"/>
+          <p:cNvSpPr txBox="1"/>
+          <p:nvPr/>
+        </p:nvSpPr>
+        <p:spPr>
+          <a:xfrm>
+            <a:off x="4828032" y="2980944"/>
+            <a:ext cx="3794760" cy="1024128"/>
+          </a:xfrm>
+          <a:prstGeom prst="rect">
+            <a:avLst/>
+          </a:prstGeom>
+          <a:noFill/>
+        </p:spPr>
+        <p:txBody>
+          <a:bodyPr wrap="square" anchor="t" lIns="0" rIns="0" tIns="0" bIns="0">
+            <a:noAutofit/>
+          </a:bodyPr>
+          <a:lstStyle/>
+          <a:p>
+            <a:pPr algn="l">
+              <a:spcAft>
+                <a:spcPts val="600"/>
+              </a:spcAft>
+            </a:pPr>
+            <a:r>
+              <a:rPr sz="1000" b="1" i="0">
+                <a:solidFill>
+                  <a:srgbClr val="202124"/>
+                </a:solidFill>
+                <a:latin typeface="Google Sans Flex"/>
+              </a:rPr>
+              <a:t>Always-on Cloud Run L4 GPU for Gemma: </a:t>
+            </a:r>
+            <a:r>
+              <a:rPr sz="1000" b="0" i="0">
+                <a:solidFill>
+                  <a:srgbClr val="202124"/>
+                </a:solidFill>
+                <a:latin typeface="Google Sans Flex"/>
+              </a:rPr>
+              <a:t>≈ $753 / month (720 h, Tier-1 list price, excluding free tier).</a:t>
+            </a:r>
+          </a:p>
+          <a:p>
+            <a:pPr algn="l">
+              <a:spcAft>
+                <a:spcPts val="600"/>
+              </a:spcAft>
+            </a:pPr>
+            <a:r>
+              <a:rPr sz="1000" b="0" i="0">
+                <a:solidFill>
+                  <a:srgbClr val="202124"/>
+                </a:solidFill>
+                <a:latin typeface="Google Sans Flex"/>
+              </a:rPr>
+              <a:t>We run Gemma 4 in the batch pipeline and on an L4 VM that is started only when needed, and keep request-time AI on Gemini, so serving cost follows usage.</a:t>
+            </a:r>
+          </a:p>
+        </p:txBody>
+      </p:sp>
+      <p:sp>
+        <p:nvSpPr>
+          <p:cNvPr id="142" name="TextBox 141"/>
+          <p:cNvSpPr txBox="1"/>
+          <p:nvPr/>
+        </p:nvSpPr>
+        <p:spPr>
+          <a:xfrm>
+            <a:off x="365760" y="4434840"/>
+            <a:ext cx="8412480" cy="274320"/>
+          </a:xfrm>
+          <a:prstGeom prst="rect">
+            <a:avLst/>
+          </a:prstGeom>
+          <a:noFill/>
+        </p:spPr>
+        <p:txBody>
+          <a:bodyPr wrap="square" anchor="t" lIns="0" rIns="0" tIns="0" bIns="0">
+            <a:noAutofit/>
+          </a:bodyPr>
+          <a:lstStyle/>
+          <a:p>
+            <a:pPr algn="l">
+              <a:spcAft>
+                <a:spcPts val="400"/>
+              </a:spcAft>
+            </a:pPr>
+            <a:r>
+              <a:rPr sz="850" b="0" i="0">
+                <a:solidFill>
+                  <a:srgbClr val="5F6368"/>
+                </a:solidFill>
+                <a:latin typeface="Google Sans Flex"/>
+              </a:rPr>
+              <a:t>*List-price estimate for gemini-3.8-flash (Vertex AI global standard, through 2026-12-31), 1,000 input + 200 output tokens; excludes thinking tokens, grounding, caching and taxes. Cloud SQL (smallest shared-core tier): [confirm from Billing].</a:t>
             </a:r>
           </a:p>
         </p:txBody>

--- a/docs/대회/제출/AI-Builder-Cup-제출-초안.pptx
+++ b/docs/대회/제출/AI-Builder-Cup-제출-초안.pptx
@@ -793,7 +793,7 @@
           <a:lstStyle/>
           <a:p>
             <a:r>
-              <a:t>Fill in the team name and leader before export.</a:t>
+              <a:t>Team and leader confirmed (2026-10-11).</a:t>
             </a:r>
           </a:p>
         </p:txBody>
@@ -6963,7 +6963,7 @@
                 </a:solidFill>
                 <a:latin typeface="Google Sans Flex"/>
               </a:rPr>
-              <a:t> TBD</a:t>
+              <a:t> Choi Eunji</a:t>
             </a:r>
             <a:endParaRPr sz="1800">
               <a:latin typeface="Google Sans Flex"/>
@@ -7381,7 +7381,7 @@
                 </a:solidFill>
                 <a:latin typeface="Google Sans Flex"/>
               </a:rPr>
-              <a:t>Keyword dashboard — memes in use, fading, caution (/trends)</a:t>
+              <a:t>Create — one product, a meme picked per market (/)</a:t>
             </a:r>
           </a:p>
         </p:txBody>
@@ -7506,7 +7506,7 @@
                 </a:solidFill>
                 <a:latin typeface="Google Sans Flex"/>
               </a:rPr>
-              <a:t>Recommend — photo or copy → up to 5 memes (/recommend)</a:t>
+              <a:t>Drafts — rule check, AI opinion and approval</a:t>
             </a:r>
           </a:p>
         </p:txBody>
@@ -7631,7 +7631,7 @@
                 </a:solidFill>
                 <a:latin typeface="Google Sans Flex"/>
               </a:rPr>
-              <a:t>Create — SNS copy, short-form script, thumbnail plan</a:t>
+              <a:t>Dictionary entry — can I use it, meaning and sources</a:t>
             </a:r>
           </a:p>
         </p:txBody>
@@ -7756,7 +7756,7 @@
                 </a:solidFill>
                 <a:latin typeface="Google Sans Flex"/>
               </a:rPr>
-              <a:t>Dictionary entry — meaning, spread, risk and sources</a:t>
+              <a:t>Copy check — fine vs. fading (/check)</a:t>
             </a:r>
           </a:p>
         </p:txBody>
@@ -11350,7 +11350,7 @@
                 </a:solidFill>
                 <a:latin typeface="Google Sans Flex"/>
               </a:rPr>
-              <a:t>tells brand marketers and short-form creators which memes are in use in each JAPAC market, which to avoid, and turns a chosen meme into ready-to-shoot content — with a source behind every claim.</a:t>
+              <a:t>turns one product into local copy for each market — Korea, Japan and English-language — using memes that are in use there now and safe for a brand, with a source behind every claim and a person approving before anything goes out.</a:t>
             </a:r>
           </a:p>
         </p:txBody>
@@ -11496,7 +11496,7 @@
                 </a:solidFill>
                 <a:latin typeface="Google Sans Flex"/>
               </a:rPr>
-              <a:t>Creators still have to turn that insight into a script by hand.</a:t>
+              <a:t>Marketers still have to turn that insight into copy by hand, market by market.</a:t>
             </a:r>
           </a:p>
         </p:txBody>
@@ -11634,7 +11634,7 @@
                 </a:solidFill>
                 <a:latin typeface="Google Sans Flex"/>
               </a:rPr>
-              <a:t>Explore</a:t>
+              <a:t>Create</a:t>
             </a:r>
           </a:p>
         </p:txBody>
@@ -11673,7 +11673,7 @@
                 </a:solidFill>
                 <a:latin typeface="Google Sans Flex"/>
               </a:rPr>
-              <a:t>Pick target markets → keyword dashboard with lifecycle, spread and risk per meme</a:t>
+              <a:t>Photo + one line, pick markets → rules pick one meme per market, with why and what was left out</a:t>
             </a:r>
           </a:p>
         </p:txBody>
@@ -11811,7 +11811,7 @@
                 </a:solidFill>
                 <a:latin typeface="Google Sans Flex"/>
               </a:rPr>
-              <a:t>Recommend</a:t>
+              <a:t>Approve</a:t>
             </a:r>
           </a:p>
         </p:txBody>
@@ -11850,7 +11850,7 @@
                 </a:solidFill>
                 <a:latin typeface="Google Sans Flex"/>
               </a:rPr>
-              <a:t>Upload a product photo or promo copy → up to 5 fitting memes, each with its evidence</a:t>
+              <a:t>Gemini writes 4 lines, a video script and a thumbnail plan; rules re-check each line; a person approves</a:t>
             </a:r>
           </a:p>
         </p:txBody>
@@ -11988,7 +11988,7 @@
                 </a:solidFill>
                 <a:latin typeface="Google Sans Flex"/>
               </a:rPr>
-              <a:t>Create</a:t>
+              <a:t>Check</a:t>
             </a:r>
           </a:p>
         </p:txBody>
@@ -12027,7 +12027,7 @@
                 </a:solidFill>
                 <a:latin typeface="Google Sans Flex"/>
               </a:rPr>
-              <a:t>Pick one → SNS copy, a 15–30 s short-form script and a thumbnail plan</a:t>
+              <a:t>Every meme links to its dictionary entry and sources; paste your own copy to see what is risky or fading</a:t>
             </a:r>
           </a:p>
         </p:txBody>
@@ -12066,7 +12066,7 @@
                 </a:solidFill>
                 <a:latin typeface="Google Sans Flex"/>
               </a:rPr>
-              <a:t>Theme: Media, Content &amp; Digital Experiences  ·  Target markets: KR, JP, TW, HK, TH, VN, ID, PH, MY, SG  ·  Collected globally, served per market</a:t>
+              <a:t>Theme: Media, Content &amp; Digital Experiences  ·  Copy for KR, JP and English markets  ·  Trends for 10 APAC markets + global</a:t>
             </a:r>
           </a:p>
         </p:txBody>
@@ -13193,7 +13193,7 @@
                 </a:solidFill>
                 <a:latin typeface="Google Sans Flex"/>
               </a:rPr>
-              <a:t>Regional keyword dashboard</a:t>
+              <a:t>Campaign drafts per market</a:t>
             </a:r>
           </a:p>
         </p:txBody>
@@ -13232,7 +13232,7 @@
                 </a:solidFill>
                 <a:latin typeface="Google Sans Flex"/>
               </a:rPr>
-              <a:t>Memes in use, fading, or needing caution for the chosen markets — 12-week mentions, search signals, lifecycle and spread stage.</a:t>
+              <a:t>Product photo + one line → one meme per market picked by rules (fit, tone, lifecycle, risk), then 4 lines, a video script and a thumbnail plan in that market’s language.</a:t>
             </a:r>
           </a:p>
         </p:txBody>
@@ -13370,7 +13370,7 @@
                 </a:solidFill>
                 <a:latin typeface="Google Sans Flex"/>
               </a:rPr>
-              <a:t>Photo / copy → meme picks</a:t>
+              <a:t>Rule check + human approval</a:t>
             </a:r>
           </a:p>
         </p:txBody>
@@ -13409,7 +13409,7 @@
                 </a:solidFill>
                 <a:latin typeface="Google Sans Flex"/>
               </a:rPr>
-              <a:t>Gemini reads a product photo or promo copy; rules rank memes by fit, tone, lifecycle and risk; up to 5 with reasons and sources.</a:t>
+              <a:t>Every line is re-checked: meme used, no profanity, X length, one language, no “like …” intros. Failing lines are rewritten once or dropped; a person approves before copying.</a:t>
             </a:r>
           </a:p>
         </p:txBody>
@@ -13547,7 +13547,7 @@
                 </a:solidFill>
                 <a:latin typeface="Google Sans Flex"/>
               </a:rPr>
-              <a:t>Content generation</a:t>
+              <a:t>Copy check</a:t>
             </a:r>
           </a:p>
         </p:txBody>
@@ -13586,7 +13586,7 @@
                 </a:solidFill>
                 <a:latin typeface="Google Sans Flex"/>
               </a:rPr>
-              <a:t>Instagram and X copy (up to 2 variants each), a 15–30 s short-form script and a thumbnail plan in the market’s language, checked against the dictionary.</a:t>
+              <a:t>Paste your own copy: each meme is marked fine, use with care, fading, not used in this market or don’t use, with an AI opinion on whether it is used as meant.</a:t>
             </a:r>
           </a:p>
         </p:txBody>
@@ -13940,7 +13940,7 @@
                 </a:solidFill>
                 <a:latin typeface="Google Sans Flex"/>
               </a:rPr>
-              <a:t>None · Caution · Avoid · Not enough evidence — derived from classified evidence; reviewers can override in the admin console.</a:t>
+              <a:t>None · Caution · Avoid · Not enough evidence — rules over classified evidence; avoid-level memes stay off public lists; reviewers can override.</a:t>
             </a:r>
           </a:p>
         </p:txBody>
@@ -14078,7 +14078,7 @@
                 </a:solidFill>
                 <a:latin typeface="Google Sans Flex"/>
               </a:rPr>
-              <a:t>Cross-country &amp; generation view</a:t>
+              <a:t>Trends, briefing &amp; world map</a:t>
             </a:r>
           </a:p>
         </p:txBody>
@@ -14117,7 +14117,7 @@
                 </a:solidFill>
                 <a:latin typeface="Google Sans Flex"/>
               </a:rPr>
-              <a:t>A world map of how one meme differs by country, and a message interpreter that explains slang to another generation or culture.</a:t>
+              <a:t>Memes in use, fading or needing care per market with 12-week mentions; a one-page market briefing; a map of how one meme differs by country.</a:t>
             </a:r>
           </a:p>
         </p:txBody>
@@ -14331,7 +14331,7 @@
                 </a:solidFill>
                 <a:latin typeface="Google Sans Flex"/>
               </a:rPr>
-              <a:t>At request time — one flow, at most one Gemini call per step</a:t>
+              <a:t>At request time — rules pick, Gemini writes, rules check, a person approves</a:t>
             </a:r>
           </a:p>
         </p:txBody>
@@ -14416,7 +14416,7 @@
                 </a:solidFill>
                 <a:latin typeface="Google Sans Flex"/>
               </a:rPr>
-              <a:t>1  Explore</a:t>
+              <a:t>1  Pick</a:t>
             </a:r>
           </a:p>
         </p:txBody>
@@ -14455,7 +14455,7 @@
                 </a:solidFill>
                 <a:latin typeface="Google Sans Flex"/>
               </a:rPr>
-              <a:t>Choose markets</a:t>
+              <a:t>Product photo + one line, markets</a:t>
             </a:r>
           </a:p>
         </p:txBody>
@@ -14494,7 +14494,7 @@
                 </a:solidFill>
                 <a:latin typeface="Google Sans Flex"/>
               </a:rPr>
-              <a:t>Reads published keyword cards.</a:t>
+              <a:t>Gemini: photo/line → product brief.</a:t>
             </a:r>
           </a:p>
           <a:p>
@@ -14510,7 +14510,7 @@
                 </a:solidFill>
                 <a:latin typeface="Google Sans Flex"/>
               </a:rPr>
-              <a:t>No model call.</a:t>
+              <a:t>Rules score verified memes by fit, tone, lifecycle, risk → one per market, with left-outs.</a:t>
             </a:r>
           </a:p>
         </p:txBody>
@@ -14631,7 +14631,7 @@
                 </a:solidFill>
                 <a:latin typeface="Google Sans Flex"/>
               </a:rPr>
-              <a:t>2  Recommend</a:t>
+              <a:t>2  Write &amp; check</a:t>
             </a:r>
           </a:p>
         </p:txBody>
@@ -14670,7 +14670,7 @@
                 </a:solidFill>
                 <a:latin typeface="Google Sans Flex"/>
               </a:rPr>
-              <a:t>Photo or promo copy + tone</a:t>
+              <a:t>Per market, in its language</a:t>
             </a:r>
           </a:p>
         </p:txBody>
@@ -14709,7 +14709,7 @@
                 </a:solidFill>
                 <a:latin typeface="Google Sans Flex"/>
               </a:rPr>
-              <a:t>Gemini: photo/copy → product brief.</a:t>
+              <a:t>Gemini: one structured call → 4 lines, video script, thumbnail plan.</a:t>
             </a:r>
           </a:p>
           <a:p>
@@ -14725,7 +14725,7 @@
                 </a:solidFill>
                 <a:latin typeface="Google Sans Flex"/>
               </a:rPr>
-              <a:t>Rules score fit, tone, lifecycle, risk → up to 5 with stored reasons.</a:t>
+              <a:t>Rules re-check each line; one rewrite, failing line dropped; AI opinion on meaning.</a:t>
             </a:r>
           </a:p>
         </p:txBody>
@@ -14846,7 +14846,7 @@
                 </a:solidFill>
                 <a:latin typeface="Google Sans Flex"/>
               </a:rPr>
-              <a:t>3  Create</a:t>
+              <a:t>3  Approve</a:t>
             </a:r>
           </a:p>
         </p:txBody>
@@ -14885,7 +14885,7 @@
                 </a:solidFill>
                 <a:latin typeface="Google Sans Flex"/>
               </a:rPr>
-              <a:t>Pick one meme</a:t>
+              <a:t>A person decides</a:t>
             </a:r>
           </a:p>
         </p:txBody>
@@ -14924,7 +14924,7 @@
                 </a:solidFill>
                 <a:latin typeface="Google Sans Flex"/>
               </a:rPr>
-              <a:t>Gemini: one structured call → copy, script, thumbnail.</a:t>
+              <a:t>Nothing can be copied until a reviewer approves.</a:t>
             </a:r>
           </a:p>
           <a:p>
@@ -14940,7 +14940,7 @@
                 </a:solidFill>
                 <a:latin typeface="Google Sans Flex"/>
               </a:rPr>
-              <a:t>Rule check vs. meaning &amp; risk; one retry, failing variant dropped.</a:t>
+              <a:t>The approval is recorded with the reviewer’s name; every meme links to its evidence.</a:t>
             </a:r>
           </a:p>
         </p:txBody>

--- a/docs/대회/제출/AI-Builder-Cup-제출-초안.pptx
+++ b/docs/대회/제출/AI-Builder-Cup-제출-초안.pptx
@@ -7365,457 +7365,6 @@
   <p:cSld>
     <p:spTree>
       <p:nvGrpSpPr>
-        <p:cNvPr id="131" name="Shape 131"/>
-        <p:cNvGrpSpPr/>
-        <p:nvPr/>
-      </p:nvGrpSpPr>
-      <p:grpSpPr>
-        <a:xfrm>
-          <a:off x="0" y="0"/>
-          <a:ext cx="0" cy="0"/>
-          <a:chOff x="0" y="0"/>
-          <a:chExt cx="0" cy="0"/>
-        </a:xfrm>
-      </p:grpSpPr>
-      <p:pic>
-        <p:nvPicPr>
-          <p:cNvPr id="132" name="Google Shape;132;p23" title="Frame 144.png"/>
-          <p:cNvPicPr preferRelativeResize="0"/>
-          <p:nvPr/>
-        </p:nvPicPr>
-        <p:blipFill rotWithShape="1">
-          <a:blip r:embed="rId3">
-            <a:alphaModFix/>
-          </a:blip>
-          <a:srcRect b="98001" l="0" r="0" t="0"/>
-          <a:stretch/>
-        </p:blipFill>
-        <p:spPr>
-          <a:xfrm>
-            <a:off x="0" y="5093562"/>
-            <a:ext cx="9144000" cy="54275"/>
-          </a:xfrm>
-          <a:prstGeom prst="rect">
-            <a:avLst/>
-          </a:prstGeom>
-          <a:noFill/>
-          <a:ln>
-            <a:noFill/>
-          </a:ln>
-        </p:spPr>
-      </p:pic>
-      <p:pic>
-        <p:nvPicPr>
-          <p:cNvPr id="133" name="Google Shape;133;p23" title="Group 427319979.png"/>
-          <p:cNvPicPr preferRelativeResize="0"/>
-          <p:nvPr/>
-        </p:nvPicPr>
-        <p:blipFill>
-          <a:blip r:embed="rId4">
-            <a:alphaModFix/>
-          </a:blip>
-          <a:stretch>
-            <a:fillRect/>
-          </a:stretch>
-        </p:blipFill>
-        <p:spPr>
-          <a:xfrm>
-            <a:off x="0" y="1"/>
-            <a:ext cx="9144000" cy="507359"/>
-          </a:xfrm>
-          <a:prstGeom prst="rect">
-            <a:avLst/>
-          </a:prstGeom>
-          <a:noFill/>
-          <a:ln>
-            <a:noFill/>
-          </a:ln>
-        </p:spPr>
-      </p:pic>
-      <p:sp>
-        <p:nvSpPr>
-          <p:cNvPr id="134" name="Google Shape;134;p23"/>
-          <p:cNvSpPr/>
-          <p:nvPr/>
-        </p:nvSpPr>
-        <p:spPr>
-          <a:xfrm>
-            <a:off x="-29250" y="5071875"/>
-            <a:ext cx="9173400" cy="97800"/>
-          </a:xfrm>
-          <a:prstGeom prst="rect">
-            <a:avLst/>
-          </a:prstGeom>
-          <a:solidFill>
-            <a:schemeClr val="dk1"/>
-          </a:solidFill>
-          <a:ln>
-            <a:noFill/>
-          </a:ln>
-        </p:spPr>
-        <p:txBody>
-          <a:bodyPr anchorCtr="0" anchor="ctr" bIns="91425" lIns="91425" spcFirstLastPara="1" rIns="91425" wrap="square" tIns="91425">
-            <a:noAutofit/>
-          </a:bodyPr>
-          <a:lstStyle/>
-          <a:p>
-            <a:pPr indent="0" lvl="0" marL="0" rtl="0" algn="ctr">
-              <a:spcBef>
-                <a:spcPts val="0"/>
-              </a:spcBef>
-              <a:spcAft>
-                <a:spcPts val="0"/>
-              </a:spcAft>
-              <a:buNone/>
-            </a:pPr>
-            <a:r>
-              <a:rPr>
-                <a:solidFill/>
-              </a:rPr>
-              <a:t/>
-            </a:r>
-            <a:endParaRPr/>
-          </a:p>
-        </p:txBody>
-      </p:sp>
-      <p:sp>
-        <p:nvSpPr>
-          <p:cNvPr id="135" name="Google Shape;135;p23"/>
-          <p:cNvSpPr txBox="1"/>
-          <p:nvPr/>
-        </p:nvSpPr>
-        <p:spPr>
-          <a:xfrm>
-            <a:off x="265350" y="663825"/>
-            <a:ext cx="8943000" cy="561900"/>
-          </a:xfrm>
-          <a:prstGeom prst="rect">
-            <a:avLst/>
-          </a:prstGeom>
-          <a:noFill/>
-          <a:ln>
-            <a:noFill/>
-          </a:ln>
-        </p:spPr>
-        <p:txBody>
-          <a:bodyPr anchorCtr="0" anchor="t" bIns="91425" lIns="91425" spcFirstLastPara="1" rIns="91425" wrap="square" tIns="91425">
-            <a:noAutofit/>
-          </a:bodyPr>
-          <a:lstStyle/>
-          <a:p>
-            <a:pPr indent="0" lvl="0" marL="0" rtl="0" algn="l">
-              <a:spcBef>
-                <a:spcPts val="0"/>
-              </a:spcBef>
-              <a:spcAft>
-                <a:spcPts val="0"/>
-              </a:spcAft>
-              <a:buNone/>
-            </a:pPr>
-            <a:r>
-              <a:rPr lang="en-GB" sz="1600">
-                <a:solidFill/>
-                <a:latin typeface="Google Sans Flex Medium"/>
-                <a:ea typeface="Google Sans Flex Medium"/>
-                <a:cs typeface="Google Sans Flex Medium"/>
-                <a:sym typeface="Google Sans Flex Medium"/>
-              </a:rPr>
-              <a:t>Snapshots of the prototype</a:t>
-            </a:r>
-            <a:endParaRPr sz="1600">
-              <a:latin typeface="Google Sans Flex Medium"/>
-              <a:ea typeface="Google Sans Flex Medium"/>
-              <a:cs typeface="Google Sans Flex Medium"/>
-              <a:sym typeface="Google Sans Flex Medium"/>
-            </a:endParaRPr>
-          </a:p>
-        </p:txBody>
-      </p:sp>
-      <p:sp>
-        <p:nvSpPr>
-          <p:cNvPr id="138" name="TextBox 137"/>
-          <p:cNvSpPr txBox="1"/>
-          <p:nvPr/>
-        </p:nvSpPr>
-        <p:spPr>
-          <a:xfrm>
-            <a:off x="365760" y="2606040"/>
-            <a:ext cx="4114800" cy="274320"/>
-          </a:xfrm>
-          <a:prstGeom prst="rect">
-            <a:avLst/>
-          </a:prstGeom>
-          <a:noFill/>
-        </p:spPr>
-        <p:txBody>
-          <a:bodyPr wrap="square" anchor="t" lIns="0" rIns="0" tIns="0" bIns="0">
-            <a:noAutofit/>
-          </a:bodyPr>
-          <a:lstStyle/>
-          <a:p>
-            <a:pPr algn="l">
-              <a:spcAft>
-                <a:spcPts val="400"/>
-              </a:spcAft>
-            </a:pPr>
-            <a:r>
-              <a:rPr sz="950" b="0" i="0">
-                <a:solidFill>
-                  <a:srgbClr val="121826"/>
-                </a:solidFill>
-                <a:latin typeface="Google Sans Flex"/>
-              </a:rPr>
-              <a:t>Create – one product, a meme picked per market (/)</a:t>
-            </a:r>
-          </a:p>
-        </p:txBody>
-      </p:sp>
-      <p:sp>
-        <p:nvSpPr>
-          <p:cNvPr id="141" name="TextBox 140"/>
-          <p:cNvSpPr txBox="1"/>
-          <p:nvPr/>
-        </p:nvSpPr>
-        <p:spPr>
-          <a:xfrm>
-            <a:off x="4617720" y="2606040"/>
-            <a:ext cx="4114800" cy="274320"/>
-          </a:xfrm>
-          <a:prstGeom prst="rect">
-            <a:avLst/>
-          </a:prstGeom>
-          <a:noFill/>
-        </p:spPr>
-        <p:txBody>
-          <a:bodyPr wrap="square" anchor="t" lIns="0" rIns="0" tIns="0" bIns="0">
-            <a:noAutofit/>
-          </a:bodyPr>
-          <a:lstStyle/>
-          <a:p>
-            <a:pPr algn="l">
-              <a:spcAft>
-                <a:spcPts val="400"/>
-              </a:spcAft>
-            </a:pPr>
-            <a:r>
-              <a:rPr sz="950" b="0" i="0">
-                <a:solidFill>
-                  <a:srgbClr val="121826"/>
-                </a:solidFill>
-                <a:latin typeface="Google Sans Flex"/>
-              </a:rPr>
-              <a:t>Explore – memes in use, fading or needing care (/trends)</a:t>
-            </a:r>
-          </a:p>
-        </p:txBody>
-      </p:sp>
-      <p:sp>
-        <p:nvSpPr>
-          <p:cNvPr id="144" name="TextBox 143"/>
-          <p:cNvSpPr txBox="1"/>
-          <p:nvPr/>
-        </p:nvSpPr>
-        <p:spPr>
-          <a:xfrm>
-            <a:off x="365760" y="4416552"/>
-            <a:ext cx="4114800" cy="274320"/>
-          </a:xfrm>
-          <a:prstGeom prst="rect">
-            <a:avLst/>
-          </a:prstGeom>
-          <a:noFill/>
-        </p:spPr>
-        <p:txBody>
-          <a:bodyPr wrap="square" anchor="t" lIns="0" rIns="0" tIns="0" bIns="0">
-            <a:noAutofit/>
-          </a:bodyPr>
-          <a:lstStyle/>
-          <a:p>
-            <a:pPr algn="l">
-              <a:spcAft>
-                <a:spcPts val="400"/>
-              </a:spcAft>
-            </a:pPr>
-            <a:r>
-              <a:rPr sz="950" b="0" i="0">
-                <a:solidFill>
-                  <a:srgbClr val="121826"/>
-                </a:solidFill>
-                <a:latin typeface="Google Sans Flex"/>
-              </a:rPr>
-              <a:t>Dictionary entry – can I use it, meaning and sources</a:t>
-            </a:r>
-          </a:p>
-        </p:txBody>
-      </p:sp>
-      <p:sp>
-        <p:nvSpPr>
-          <p:cNvPr id="147" name="TextBox 146"/>
-          <p:cNvSpPr txBox="1"/>
-          <p:nvPr/>
-        </p:nvSpPr>
-        <p:spPr>
-          <a:xfrm>
-            <a:off x="4617720" y="4416552"/>
-            <a:ext cx="4114800" cy="274320"/>
-          </a:xfrm>
-          <a:prstGeom prst="rect">
-            <a:avLst/>
-          </a:prstGeom>
-          <a:noFill/>
-        </p:spPr>
-        <p:txBody>
-          <a:bodyPr wrap="square" anchor="t" lIns="0" rIns="0" tIns="0" bIns="0">
-            <a:noAutofit/>
-          </a:bodyPr>
-          <a:lstStyle/>
-          <a:p>
-            <a:pPr algn="l">
-              <a:spcAft>
-                <a:spcPts val="400"/>
-              </a:spcAft>
-            </a:pPr>
-            <a:r>
-              <a:rPr sz="950" b="0" i="0">
-                <a:solidFill>
-                  <a:srgbClr val="121826"/>
-                </a:solidFill>
-                <a:latin typeface="Google Sans Flex"/>
-              </a:rPr>
-              <a:t>World map – memes per market and across borders (/map)</a:t>
-            </a:r>
-          </a:p>
-        </p:txBody>
-      </p:sp>
-      <p:pic>
-        <p:nvPicPr>
-          <p:cNvPr id="148" name="Picture 147" descr="crop-create.png"/>
-          <p:cNvPicPr>
-            <a:picLocks noChangeAspect="1"/>
-          </p:cNvPicPr>
-          <p:nvPr/>
-        </p:nvPicPr>
-        <p:blipFill>
-          <a:blip r:embed="rId5"/>
-          <a:stretch>
-            <a:fillRect/>
-          </a:stretch>
-        </p:blipFill>
-        <p:spPr>
-          <a:xfrm>
-            <a:off x="365760" y="1143000"/>
-            <a:ext cx="4114800" cy="1417320"/>
-          </a:xfrm>
-          <a:prstGeom prst="rect">
-            <a:avLst/>
-          </a:prstGeom>
-          <a:ln w="9525">
-            <a:solidFill>
-              <a:srgbClr val="DCE1E8"/>
-            </a:solidFill>
-          </a:ln>
-        </p:spPr>
-      </p:pic>
-      <p:pic>
-        <p:nvPicPr>
-          <p:cNvPr id="149" name="Picture 148" descr="crop-explore.png"/>
-          <p:cNvPicPr>
-            <a:picLocks noChangeAspect="1"/>
-          </p:cNvPicPr>
-          <p:nvPr/>
-        </p:nvPicPr>
-        <p:blipFill>
-          <a:blip r:embed="rId6"/>
-          <a:stretch>
-            <a:fillRect/>
-          </a:stretch>
-        </p:blipFill>
-        <p:spPr>
-          <a:xfrm>
-            <a:off x="4617720" y="1143000"/>
-            <a:ext cx="4114800" cy="1417320"/>
-          </a:xfrm>
-          <a:prstGeom prst="rect">
-            <a:avLst/>
-          </a:prstGeom>
-          <a:ln w="9525">
-            <a:solidFill>
-              <a:srgbClr val="DCE1E8"/>
-            </a:solidFill>
-          </a:ln>
-        </p:spPr>
-      </p:pic>
-      <p:pic>
-        <p:nvPicPr>
-          <p:cNvPr id="150" name="Picture 149" descr="crop-entry.png"/>
-          <p:cNvPicPr>
-            <a:picLocks noChangeAspect="1"/>
-          </p:cNvPicPr>
-          <p:nvPr/>
-        </p:nvPicPr>
-        <p:blipFill>
-          <a:blip r:embed="rId7"/>
-          <a:stretch>
-            <a:fillRect/>
-          </a:stretch>
-        </p:blipFill>
-        <p:spPr>
-          <a:xfrm>
-            <a:off x="365760" y="2953512"/>
-            <a:ext cx="4114800" cy="1417320"/>
-          </a:xfrm>
-          <a:prstGeom prst="rect">
-            <a:avLst/>
-          </a:prstGeom>
-          <a:ln w="9525">
-            <a:solidFill>
-              <a:srgbClr val="DCE1E8"/>
-            </a:solidFill>
-          </a:ln>
-        </p:spPr>
-      </p:pic>
-      <p:pic>
-        <p:nvPicPr>
-          <p:cNvPr id="151" name="Picture 150" descr="crop-map.png"/>
-          <p:cNvPicPr>
-            <a:picLocks noChangeAspect="1"/>
-          </p:cNvPicPr>
-          <p:nvPr/>
-        </p:nvPicPr>
-        <p:blipFill>
-          <a:blip r:embed="rId8"/>
-          <a:stretch>
-            <a:fillRect/>
-          </a:stretch>
-        </p:blipFill>
-        <p:spPr>
-          <a:xfrm>
-            <a:off x="4617720" y="2953512"/>
-            <a:ext cx="4114800" cy="1417320"/>
-          </a:xfrm>
-          <a:prstGeom prst="rect">
-            <a:avLst/>
-          </a:prstGeom>
-          <a:ln w="9525">
-            <a:solidFill>
-              <a:srgbClr val="DCE1E8"/>
-            </a:solidFill>
-          </a:ln>
-        </p:spPr>
-      </p:pic>
-    </p:spTree>
-  </p:cSld>
-  <p:clrMapOvr>
-    <a:masterClrMapping/>
-  </p:clrMapOvr>
-</p:sld>
-</file>
-
-<file path=ppt/slides/slide11.xml><?xml version="1.0" encoding="utf-8"?>
-<p:sld xmlns:a="http://schemas.openxmlformats.org/drawingml/2006/main" xmlns:r="http://schemas.openxmlformats.org/officeDocument/2006/relationships" xmlns:mc="http://schemas.openxmlformats.org/markup-compatibility/2006" xmlns:mv="urn:schemas-microsoft-com:mac:vml" xmlns:p="http://schemas.openxmlformats.org/presentationml/2006/main" xmlns:c="http://schemas.openxmlformats.org/drawingml/2006/chart" xmlns:dgm="http://schemas.openxmlformats.org/drawingml/2006/diagram" xmlns:o="urn:schemas-microsoft-com:office:office" xmlns:v="urn:schemas-microsoft-com:vml" xmlns:pvml="urn:schemas-microsoft-com:office:powerpoint" xmlns:com="http://schemas.openxmlformats.org/drawingml/2006/compatibility" xmlns:p14="http://schemas.microsoft.com/office/powerpoint/2010/main" xmlns:p15="http://schemas.microsoft.com/office/powerpoint/2012/main" xmlns:ahyp="http://schemas.microsoft.com/office/drawing/2018/hyperlinkcolor">
-  <p:cSld>
-    <p:spTree>
-      <p:nvGrpSpPr>
         <p:cNvPr id="139" name="Shape 139"/>
         <p:cNvGrpSpPr/>
         <p:nvPr/>
@@ -8724,7 +8273,7 @@
 </p:sld>
 </file>
 
-<file path=ppt/slides/slide12.xml><?xml version="1.0" encoding="utf-8"?>
+<file path=ppt/slides/slide11.xml><?xml version="1.0" encoding="utf-8"?>
 <p:sld xmlns:a="http://schemas.openxmlformats.org/drawingml/2006/main" xmlns:r="http://schemas.openxmlformats.org/officeDocument/2006/relationships" xmlns:mc="http://schemas.openxmlformats.org/markup-compatibility/2006" xmlns:mv="urn:schemas-microsoft-com:mac:vml" xmlns:p="http://schemas.openxmlformats.org/presentationml/2006/main" xmlns:c="http://schemas.openxmlformats.org/drawingml/2006/chart" xmlns:dgm="http://schemas.openxmlformats.org/drawingml/2006/diagram" xmlns:o="urn:schemas-microsoft-com:office:office" xmlns:v="urn:schemas-microsoft-com:vml" xmlns:pvml="urn:schemas-microsoft-com:office:powerpoint" xmlns:com="http://schemas.openxmlformats.org/drawingml/2006/compatibility" xmlns:p14="http://schemas.microsoft.com/office/powerpoint/2010/main" xmlns:p15="http://schemas.microsoft.com/office/powerpoint/2012/main" xmlns:ahyp="http://schemas.microsoft.com/office/drawing/2018/hyperlinkcolor">
   <p:cSld>
     <p:spTree>
@@ -9038,7 +8587,7 @@
                 </a:solidFill>
                 <a:latin typeface="Google Sans Flex"/>
               </a:rPr>
-              <a:t>Show Gemma classifying live on the L4 VM in the demo</a:t>
+              <a:t>Gemma live re-checks on the L4 VM (code ready, GPU off)</a:t>
             </a:r>
           </a:p>
           <a:p>
@@ -9452,7 +9001,7 @@
 </p:sld>
 </file>
 
-<file path=ppt/slides/slide13.xml><?xml version="1.0" encoding="utf-8"?>
+<file path=ppt/slides/slide12.xml><?xml version="1.0" encoding="utf-8"?>
 <p:sld xmlns:a="http://schemas.openxmlformats.org/drawingml/2006/main" xmlns:r="http://schemas.openxmlformats.org/officeDocument/2006/relationships" xmlns:mc="http://schemas.openxmlformats.org/markup-compatibility/2006" xmlns:mv="urn:schemas-microsoft-com:mac:vml" xmlns:p="http://schemas.openxmlformats.org/presentationml/2006/main" xmlns:c="http://schemas.openxmlformats.org/drawingml/2006/chart" xmlns:dgm="http://schemas.openxmlformats.org/drawingml/2006/diagram" xmlns:o="urn:schemas-microsoft-com:office:office" xmlns:v="urn:schemas-microsoft-com:vml" xmlns:pvml="urn:schemas-microsoft-com:office:powerpoint" xmlns:com="http://schemas.openxmlformats.org/drawingml/2006/compatibility" xmlns:p14="http://schemas.microsoft.com/office/powerpoint/2010/main" xmlns:p15="http://schemas.microsoft.com/office/powerpoint/2012/main" xmlns:ahyp="http://schemas.microsoft.com/office/drawing/2018/hyperlinkcolor">
   <p:cSld>
     <p:spTree>
@@ -9909,7 +9458,7 @@
                 </a:solidFill>
                 <a:latin typeface="Google Sans Flex"/>
               </a:rPr>
-              <a:t>Trend Interpreter shows brand marketers and short-form creators which memes are in use in each JAPAC market, which to avoid, and writes ready-to-use copy, scripts and thumbnail plans from a chosen meme, with sources for every claim.</a:t>
+              <a:t>Trend Interpreter turns one product into local copy for Korea, Japan and English-language markets, using memes that are in use there now and safe for a brand. Rules pick the meme, Gemini writes, rules check every line and a person approves; every claim links to its source.</a:t>
             </a:r>
           </a:p>
           <a:p>
@@ -9934,7 +9483,7 @@
                 </a:solidFill>
                 <a:latin typeface="Google Sans Flex"/>
               </a:rPr>
-              <a:t>Reads Shorts videos and runs Search-grounded research in the batch pipeline; at request time it turns a product photo or copy into a structured brief and generates content in one structured call.</a:t>
+              <a:t>Turns a product photo or line into a brief, then writes 4 lines, a video script and a thumbnail plan per market in one structured call; also judges whether copy uses a meme as meant. In the batch pipeline it reads trending Shorts and runs Search-grounded research.</a:t>
             </a:r>
           </a:p>
           <a:p>
@@ -9959,7 +9508,7 @@
                 </a:solidFill>
                 <a:latin typeface="Google Sans Flex"/>
               </a:rPr>
-              <a:t>Hosts the Next.js web app, the private FastAPI API and the alert relay; data lives in Cloud SQL for PostgreSQL.</a:t>
+              <a:t>Hosts the Next.js web app, the private FastAPI API, the publication, backup and maintenance jobs and the alert relay; data lives in Cloud SQL for PostgreSQL.</a:t>
             </a:r>
           </a:p>
           <a:p>
@@ -9997,7 +9546,7 @@
 </p:sld>
 </file>
 
-<file path=ppt/slides/slide14.xml><?xml version="1.0" encoding="utf-8"?>
+<file path=ppt/slides/slide13.xml><?xml version="1.0" encoding="utf-8"?>
 <p:sld xmlns:a="http://schemas.openxmlformats.org/drawingml/2006/main" xmlns:r="http://schemas.openxmlformats.org/officeDocument/2006/relationships" xmlns:mc="http://schemas.openxmlformats.org/markup-compatibility/2006" xmlns:mv="urn:schemas-microsoft-com:mac:vml" xmlns:p="http://schemas.openxmlformats.org/presentationml/2006/main" xmlns:c="http://schemas.openxmlformats.org/drawingml/2006/chart" xmlns:dgm="http://schemas.openxmlformats.org/drawingml/2006/diagram" xmlns:o="urn:schemas-microsoft-com:office:office" xmlns:v="urn:schemas-microsoft-com:vml" xmlns:pvml="urn:schemas-microsoft-com:office:powerpoint" xmlns:com="http://schemas.openxmlformats.org/drawingml/2006/compatibility" xmlns:p14="http://schemas.microsoft.com/office/powerpoint/2010/main" xmlns:p15="http://schemas.microsoft.com/office/powerpoint/2012/main" xmlns:ahyp="http://schemas.microsoft.com/office/drawing/2018/hyperlinkcolor">
   <p:cSld>
     <p:spTree>
@@ -10746,7 +10295,7 @@
 </p:sld>
 </file>
 
-<file path=ppt/slides/slide15.xml><?xml version="1.0" encoding="utf-8"?>
+<file path=ppt/slides/slide14.xml><?xml version="1.0" encoding="utf-8"?>
 <p:sld xmlns:a="http://schemas.openxmlformats.org/drawingml/2006/main" xmlns:r="http://schemas.openxmlformats.org/officeDocument/2006/relationships" xmlns:mc="http://schemas.openxmlformats.org/markup-compatibility/2006" xmlns:mv="urn:schemas-microsoft-com:mac:vml" xmlns:p="http://schemas.openxmlformats.org/presentationml/2006/main" xmlns:c="http://schemas.openxmlformats.org/drawingml/2006/chart" xmlns:dgm="http://schemas.openxmlformats.org/drawingml/2006/diagram" xmlns:o="urn:schemas-microsoft-com:office:office" xmlns:v="urn:schemas-microsoft-com:vml" xmlns:pvml="urn:schemas-microsoft-com:office:powerpoint" xmlns:com="http://schemas.openxmlformats.org/drawingml/2006/compatibility" xmlns:p14="http://schemas.microsoft.com/office/powerpoint/2010/main" xmlns:p15="http://schemas.microsoft.com/office/powerpoint/2012/main" xmlns:ahyp="http://schemas.microsoft.com/office/drawing/2018/hyperlinkcolor">
   <p:cSld>
     <p:spTree>
@@ -11457,7 +11006,7 @@
                 </a:solidFill>
                 <a:latin typeface="Google Sans Flex"/>
               </a:rPr>
-              <a:t>Theme: Media, Content &amp; Digital Experiences  ·  Copy for KR, JP and English markets  ·  Trends for 10 APAC markets + global</a:t>
+              <a:t>Theme: Media, Content &amp; Digital Experiences  ·  Copy for KR, JP and English markets  ·  Trends for 10 JAPAC markets + global</a:t>
             </a:r>
           </a:p>
         </p:txBody>
@@ -11978,7 +11527,7 @@
                 </a:solidFill>
                 <a:latin typeface="Google Sans Flex"/>
               </a:rPr>
-              <a:t>From trend insight to a ready script in one flow</a:t>
+              <a:t>From one product to approved local copy in one flow</a:t>
             </a:r>
           </a:p>
         </p:txBody>
@@ -16178,7 +15727,7 @@
 </p:sld>
 </file>
 
-<file path=ppt/slides/slide7.xml><?xml version="1.0" encoding="utf-8"?>
+<file path=ppt/slides/slide6.xml><?xml version="1.0" encoding="utf-8"?>
 <p:sld xmlns:a="http://schemas.openxmlformats.org/drawingml/2006/main" xmlns:r="http://schemas.openxmlformats.org/officeDocument/2006/relationships" xmlns:mc="http://schemas.openxmlformats.org/markup-compatibility/2006" xmlns:mv="urn:schemas-microsoft-com:mac:vml" xmlns:p="http://schemas.openxmlformats.org/presentationml/2006/main" xmlns:c="http://schemas.openxmlformats.org/drawingml/2006/chart" xmlns:dgm="http://schemas.openxmlformats.org/drawingml/2006/diagram" xmlns:o="urn:schemas-microsoft-com:office:office" xmlns:v="urn:schemas-microsoft-com:vml" xmlns:pvml="urn:schemas-microsoft-com:office:powerpoint" xmlns:com="http://schemas.openxmlformats.org/drawingml/2006/compatibility" xmlns:p14="http://schemas.microsoft.com/office/powerpoint/2010/main" xmlns:p15="http://schemas.microsoft.com/office/powerpoint/2012/main" xmlns:ahyp="http://schemas.microsoft.com/office/drawing/2018/hyperlinkcolor">
   <p:cSld>
     <p:spTree>
@@ -18495,7 +18044,7 @@
 </p:sld>
 </file>
 
-<file path=ppt/slides/slide8.xml><?xml version="1.0" encoding="utf-8"?>
+<file path=ppt/slides/slide7.xml><?xml version="1.0" encoding="utf-8"?>
 <p:sld xmlns:a="http://schemas.openxmlformats.org/drawingml/2006/main" xmlns:r="http://schemas.openxmlformats.org/officeDocument/2006/relationships" xmlns:mc="http://schemas.openxmlformats.org/markup-compatibility/2006" xmlns:mv="urn:schemas-microsoft-com:mac:vml" xmlns:p="http://schemas.openxmlformats.org/presentationml/2006/main" xmlns:c="http://schemas.openxmlformats.org/drawingml/2006/chart" xmlns:dgm="http://schemas.openxmlformats.org/drawingml/2006/diagram" xmlns:o="urn:schemas-microsoft-com:office:office" xmlns:v="urn:schemas-microsoft-com:vml" xmlns:pvml="urn:schemas-microsoft-com:office:powerpoint" xmlns:com="http://schemas.openxmlformats.org/drawingml/2006/compatibility" xmlns:p14="http://schemas.microsoft.com/office/powerpoint/2010/main" xmlns:p15="http://schemas.microsoft.com/office/powerpoint/2012/main" xmlns:ahyp="http://schemas.microsoft.com/office/drawing/2018/hyperlinkcolor">
   <p:cSld>
     <p:spTree>
@@ -19605,7 +19154,7 @@
 </p:sld>
 </file>
 
-<file path=ppt/slides/slide9.xml><?xml version="1.0" encoding="utf-8"?>
+<file path=ppt/slides/slide8.xml><?xml version="1.0" encoding="utf-8"?>
 <p:sld xmlns:a="http://schemas.openxmlformats.org/drawingml/2006/main" xmlns:r="http://schemas.openxmlformats.org/officeDocument/2006/relationships" xmlns:mc="http://schemas.openxmlformats.org/markup-compatibility/2006" xmlns:mv="urn:schemas-microsoft-com:mac:vml" xmlns:p="http://schemas.openxmlformats.org/presentationml/2006/main" xmlns:c="http://schemas.openxmlformats.org/drawingml/2006/chart" xmlns:dgm="http://schemas.openxmlformats.org/drawingml/2006/diagram" xmlns:o="urn:schemas-microsoft-com:office:office" xmlns:v="urn:schemas-microsoft-com:vml" xmlns:pvml="urn:schemas-microsoft-com:office:powerpoint" xmlns:com="http://schemas.openxmlformats.org/drawingml/2006/compatibility" xmlns:p14="http://schemas.microsoft.com/office/powerpoint/2010/main" xmlns:p15="http://schemas.microsoft.com/office/powerpoint/2012/main" xmlns:ahyp="http://schemas.microsoft.com/office/drawing/2018/hyperlinkcolor">
   <p:cSld>
     <p:spTree>
@@ -20469,11 +20018,462 @@
                 </a:solidFill>
                 <a:latin typeface="Google Sans Flex"/>
               </a:rPr>
-              <a:t>*List-price estimate for gemini-3.8-flash (Vertex AI global standard, through 2026-12-31), 1,000 input + 200 output tokens; excludes thinking tokens, grounding, caching and taxes. Cloud SQL (smallest shared-core tier): [confirm from Billing].</a:t>
-            </a:r>
-          </a:p>
-        </p:txBody>
-      </p:sp>
+              <a:t>*List-price estimate for gemini-3.8-flash (Vertex AI global standard, through 2026-12-31), 1,000 input + 200 output tokens; excludes thinking tokens, grounding, caching and taxes. Cloud SQL runs on a free trial instance until about 2026-10-30; a paid tier is set up before then.</a:t>
+            </a:r>
+          </a:p>
+        </p:txBody>
+      </p:sp>
+    </p:spTree>
+  </p:cSld>
+  <p:clrMapOvr>
+    <a:masterClrMapping/>
+  </p:clrMapOvr>
+</p:sld>
+</file>
+
+<file path=ppt/slides/slide9.xml><?xml version="1.0" encoding="utf-8"?>
+<p:sld xmlns:a="http://schemas.openxmlformats.org/drawingml/2006/main" xmlns:r="http://schemas.openxmlformats.org/officeDocument/2006/relationships" xmlns:mc="http://schemas.openxmlformats.org/markup-compatibility/2006" xmlns:mv="urn:schemas-microsoft-com:mac:vml" xmlns:p="http://schemas.openxmlformats.org/presentationml/2006/main" xmlns:c="http://schemas.openxmlformats.org/drawingml/2006/chart" xmlns:dgm="http://schemas.openxmlformats.org/drawingml/2006/diagram" xmlns:o="urn:schemas-microsoft-com:office:office" xmlns:v="urn:schemas-microsoft-com:vml" xmlns:pvml="urn:schemas-microsoft-com:office:powerpoint" xmlns:com="http://schemas.openxmlformats.org/drawingml/2006/compatibility" xmlns:p14="http://schemas.microsoft.com/office/powerpoint/2010/main" xmlns:p15="http://schemas.microsoft.com/office/powerpoint/2012/main" xmlns:ahyp="http://schemas.microsoft.com/office/drawing/2018/hyperlinkcolor">
+  <p:cSld>
+    <p:spTree>
+      <p:nvGrpSpPr>
+        <p:cNvPr id="131" name="Shape 131"/>
+        <p:cNvGrpSpPr/>
+        <p:nvPr/>
+      </p:nvGrpSpPr>
+      <p:grpSpPr>
+        <a:xfrm>
+          <a:off x="0" y="0"/>
+          <a:ext cx="0" cy="0"/>
+          <a:chOff x="0" y="0"/>
+          <a:chExt cx="0" cy="0"/>
+        </a:xfrm>
+      </p:grpSpPr>
+      <p:pic>
+        <p:nvPicPr>
+          <p:cNvPr id="132" name="Google Shape;132;p23" title="Frame 144.png"/>
+          <p:cNvPicPr preferRelativeResize="0"/>
+          <p:nvPr/>
+        </p:nvPicPr>
+        <p:blipFill rotWithShape="1">
+          <a:blip r:embed="rId3">
+            <a:alphaModFix/>
+          </a:blip>
+          <a:srcRect b="98001" l="0" r="0" t="0"/>
+          <a:stretch/>
+        </p:blipFill>
+        <p:spPr>
+          <a:xfrm>
+            <a:off x="0" y="5093562"/>
+            <a:ext cx="9144000" cy="54275"/>
+          </a:xfrm>
+          <a:prstGeom prst="rect">
+            <a:avLst/>
+          </a:prstGeom>
+          <a:noFill/>
+          <a:ln>
+            <a:noFill/>
+          </a:ln>
+        </p:spPr>
+      </p:pic>
+      <p:pic>
+        <p:nvPicPr>
+          <p:cNvPr id="133" name="Google Shape;133;p23" title="Group 427319979.png"/>
+          <p:cNvPicPr preferRelativeResize="0"/>
+          <p:nvPr/>
+        </p:nvPicPr>
+        <p:blipFill>
+          <a:blip r:embed="rId4">
+            <a:alphaModFix/>
+          </a:blip>
+          <a:stretch>
+            <a:fillRect/>
+          </a:stretch>
+        </p:blipFill>
+        <p:spPr>
+          <a:xfrm>
+            <a:off x="0" y="1"/>
+            <a:ext cx="9144000" cy="507359"/>
+          </a:xfrm>
+          <a:prstGeom prst="rect">
+            <a:avLst/>
+          </a:prstGeom>
+          <a:noFill/>
+          <a:ln>
+            <a:noFill/>
+          </a:ln>
+        </p:spPr>
+      </p:pic>
+      <p:sp>
+        <p:nvSpPr>
+          <p:cNvPr id="134" name="Google Shape;134;p23"/>
+          <p:cNvSpPr/>
+          <p:nvPr/>
+        </p:nvSpPr>
+        <p:spPr>
+          <a:xfrm>
+            <a:off x="-29250" y="5071875"/>
+            <a:ext cx="9173400" cy="97800"/>
+          </a:xfrm>
+          <a:prstGeom prst="rect">
+            <a:avLst/>
+          </a:prstGeom>
+          <a:solidFill>
+            <a:schemeClr val="dk1"/>
+          </a:solidFill>
+          <a:ln>
+            <a:noFill/>
+          </a:ln>
+        </p:spPr>
+        <p:txBody>
+          <a:bodyPr anchorCtr="0" anchor="ctr" bIns="91425" lIns="91425" spcFirstLastPara="1" rIns="91425" wrap="square" tIns="91425">
+            <a:noAutofit/>
+          </a:bodyPr>
+          <a:lstStyle/>
+          <a:p>
+            <a:pPr indent="0" lvl="0" marL="0" rtl="0" algn="ctr">
+              <a:spcBef>
+                <a:spcPts val="0"/>
+              </a:spcBef>
+              <a:spcAft>
+                <a:spcPts val="0"/>
+              </a:spcAft>
+              <a:buNone/>
+            </a:pPr>
+            <a:r>
+              <a:rPr>
+                <a:solidFill/>
+              </a:rPr>
+              <a:t/>
+            </a:r>
+            <a:endParaRPr/>
+          </a:p>
+        </p:txBody>
+      </p:sp>
+      <p:sp>
+        <p:nvSpPr>
+          <p:cNvPr id="135" name="Google Shape;135;p23"/>
+          <p:cNvSpPr txBox="1"/>
+          <p:nvPr/>
+        </p:nvSpPr>
+        <p:spPr>
+          <a:xfrm>
+            <a:off x="265350" y="663825"/>
+            <a:ext cx="8943000" cy="561900"/>
+          </a:xfrm>
+          <a:prstGeom prst="rect">
+            <a:avLst/>
+          </a:prstGeom>
+          <a:noFill/>
+          <a:ln>
+            <a:noFill/>
+          </a:ln>
+        </p:spPr>
+        <p:txBody>
+          <a:bodyPr anchorCtr="0" anchor="t" bIns="91425" lIns="91425" spcFirstLastPara="1" rIns="91425" wrap="square" tIns="91425">
+            <a:noAutofit/>
+          </a:bodyPr>
+          <a:lstStyle/>
+          <a:p>
+            <a:pPr indent="0" lvl="0" marL="0" rtl="0" algn="l">
+              <a:spcBef>
+                <a:spcPts val="0"/>
+              </a:spcBef>
+              <a:spcAft>
+                <a:spcPts val="0"/>
+              </a:spcAft>
+              <a:buNone/>
+            </a:pPr>
+            <a:r>
+              <a:rPr lang="en-GB" sz="1600">
+                <a:solidFill/>
+                <a:latin typeface="Google Sans Flex Medium"/>
+                <a:ea typeface="Google Sans Flex Medium"/>
+                <a:cs typeface="Google Sans Flex Medium"/>
+                <a:sym typeface="Google Sans Flex Medium"/>
+              </a:rPr>
+              <a:t>Snapshots of the prototype</a:t>
+            </a:r>
+            <a:endParaRPr sz="1600">
+              <a:latin typeface="Google Sans Flex Medium"/>
+              <a:ea typeface="Google Sans Flex Medium"/>
+              <a:cs typeface="Google Sans Flex Medium"/>
+              <a:sym typeface="Google Sans Flex Medium"/>
+            </a:endParaRPr>
+          </a:p>
+        </p:txBody>
+      </p:sp>
+      <p:sp>
+        <p:nvSpPr>
+          <p:cNvPr id="138" name="TextBox 137"/>
+          <p:cNvSpPr txBox="1"/>
+          <p:nvPr/>
+        </p:nvSpPr>
+        <p:spPr>
+          <a:xfrm>
+            <a:off x="365760" y="2606040"/>
+            <a:ext cx="4114800" cy="274320"/>
+          </a:xfrm>
+          <a:prstGeom prst="rect">
+            <a:avLst/>
+          </a:prstGeom>
+          <a:noFill/>
+        </p:spPr>
+        <p:txBody>
+          <a:bodyPr wrap="square" anchor="t" lIns="0" rIns="0" tIns="0" bIns="0">
+            <a:noAutofit/>
+          </a:bodyPr>
+          <a:lstStyle/>
+          <a:p>
+            <a:pPr algn="l">
+              <a:spcAft>
+                <a:spcPts val="400"/>
+              </a:spcAft>
+            </a:pPr>
+            <a:r>
+              <a:rPr sz="950" b="0" i="0">
+                <a:solidFill>
+                  <a:srgbClr val="121826"/>
+                </a:solidFill>
+                <a:latin typeface="Google Sans Flex"/>
+              </a:rPr>
+              <a:t>Create – one product, a meme picked per market (/)</a:t>
+            </a:r>
+          </a:p>
+        </p:txBody>
+      </p:sp>
+      <p:sp>
+        <p:nvSpPr>
+          <p:cNvPr id="141" name="TextBox 140"/>
+          <p:cNvSpPr txBox="1"/>
+          <p:nvPr/>
+        </p:nvSpPr>
+        <p:spPr>
+          <a:xfrm>
+            <a:off x="4617720" y="2606040"/>
+            <a:ext cx="4114800" cy="274320"/>
+          </a:xfrm>
+          <a:prstGeom prst="rect">
+            <a:avLst/>
+          </a:prstGeom>
+          <a:noFill/>
+        </p:spPr>
+        <p:txBody>
+          <a:bodyPr wrap="square" anchor="t" lIns="0" rIns="0" tIns="0" bIns="0">
+            <a:noAutofit/>
+          </a:bodyPr>
+          <a:lstStyle/>
+          <a:p>
+            <a:pPr algn="l">
+              <a:spcAft>
+                <a:spcPts val="400"/>
+              </a:spcAft>
+            </a:pPr>
+            <a:r>
+              <a:rPr sz="950" b="0" i="0">
+                <a:solidFill>
+                  <a:srgbClr val="121826"/>
+                </a:solidFill>
+                <a:latin typeface="Google Sans Flex"/>
+              </a:rPr>
+              <a:t>Explore – memes in use, fading or needing care (/trends)</a:t>
+            </a:r>
+          </a:p>
+        </p:txBody>
+      </p:sp>
+      <p:sp>
+        <p:nvSpPr>
+          <p:cNvPr id="144" name="TextBox 143"/>
+          <p:cNvSpPr txBox="1"/>
+          <p:nvPr/>
+        </p:nvSpPr>
+        <p:spPr>
+          <a:xfrm>
+            <a:off x="365760" y="4416552"/>
+            <a:ext cx="4114800" cy="274320"/>
+          </a:xfrm>
+          <a:prstGeom prst="rect">
+            <a:avLst/>
+          </a:prstGeom>
+          <a:noFill/>
+        </p:spPr>
+        <p:txBody>
+          <a:bodyPr wrap="square" anchor="t" lIns="0" rIns="0" tIns="0" bIns="0">
+            <a:noAutofit/>
+          </a:bodyPr>
+          <a:lstStyle/>
+          <a:p>
+            <a:pPr algn="l">
+              <a:spcAft>
+                <a:spcPts val="400"/>
+              </a:spcAft>
+            </a:pPr>
+            <a:r>
+              <a:rPr sz="950" b="0" i="0">
+                <a:solidFill>
+                  <a:srgbClr val="121826"/>
+                </a:solidFill>
+                <a:latin typeface="Google Sans Flex"/>
+              </a:rPr>
+              <a:t>Dictionary entry – can I use it, meaning and sources</a:t>
+            </a:r>
+          </a:p>
+        </p:txBody>
+      </p:sp>
+      <p:sp>
+        <p:nvSpPr>
+          <p:cNvPr id="147" name="TextBox 146"/>
+          <p:cNvSpPr txBox="1"/>
+          <p:nvPr/>
+        </p:nvSpPr>
+        <p:spPr>
+          <a:xfrm>
+            <a:off x="4617720" y="4416552"/>
+            <a:ext cx="4114800" cy="274320"/>
+          </a:xfrm>
+          <a:prstGeom prst="rect">
+            <a:avLst/>
+          </a:prstGeom>
+          <a:noFill/>
+        </p:spPr>
+        <p:txBody>
+          <a:bodyPr wrap="square" anchor="t" lIns="0" rIns="0" tIns="0" bIns="0">
+            <a:noAutofit/>
+          </a:bodyPr>
+          <a:lstStyle/>
+          <a:p>
+            <a:pPr algn="l">
+              <a:spcAft>
+                <a:spcPts val="400"/>
+              </a:spcAft>
+            </a:pPr>
+            <a:r>
+              <a:rPr sz="950" b="0" i="0">
+                <a:solidFill>
+                  <a:srgbClr val="121826"/>
+                </a:solidFill>
+                <a:latin typeface="Google Sans Flex"/>
+              </a:rPr>
+              <a:t>World map – memes per market and across borders (/map)</a:t>
+            </a:r>
+          </a:p>
+        </p:txBody>
+      </p:sp>
+      <p:pic>
+        <p:nvPicPr>
+          <p:cNvPr id="148" name="Picture 147" descr="crop-create.png"/>
+          <p:cNvPicPr>
+            <a:picLocks noChangeAspect="1"/>
+          </p:cNvPicPr>
+          <p:nvPr/>
+        </p:nvPicPr>
+        <p:blipFill>
+          <a:blip r:embed="rId5"/>
+          <a:stretch>
+            <a:fillRect/>
+          </a:stretch>
+        </p:blipFill>
+        <p:spPr>
+          <a:xfrm>
+            <a:off x="365760" y="1143000"/>
+            <a:ext cx="4114800" cy="1417320"/>
+          </a:xfrm>
+          <a:prstGeom prst="rect">
+            <a:avLst/>
+          </a:prstGeom>
+          <a:ln w="9525">
+            <a:solidFill>
+              <a:srgbClr val="DCE1E8"/>
+            </a:solidFill>
+          </a:ln>
+        </p:spPr>
+      </p:pic>
+      <p:pic>
+        <p:nvPicPr>
+          <p:cNvPr id="149" name="Picture 148" descr="crop-explore.png"/>
+          <p:cNvPicPr>
+            <a:picLocks noChangeAspect="1"/>
+          </p:cNvPicPr>
+          <p:nvPr/>
+        </p:nvPicPr>
+        <p:blipFill>
+          <a:blip r:embed="rId6"/>
+          <a:stretch>
+            <a:fillRect/>
+          </a:stretch>
+        </p:blipFill>
+        <p:spPr>
+          <a:xfrm>
+            <a:off x="4617720" y="1143000"/>
+            <a:ext cx="4114800" cy="1417320"/>
+          </a:xfrm>
+          <a:prstGeom prst="rect">
+            <a:avLst/>
+          </a:prstGeom>
+          <a:ln w="9525">
+            <a:solidFill>
+              <a:srgbClr val="DCE1E8"/>
+            </a:solidFill>
+          </a:ln>
+        </p:spPr>
+      </p:pic>
+      <p:pic>
+        <p:nvPicPr>
+          <p:cNvPr id="150" name="Picture 149" descr="crop-entry.png"/>
+          <p:cNvPicPr>
+            <a:picLocks noChangeAspect="1"/>
+          </p:cNvPicPr>
+          <p:nvPr/>
+        </p:nvPicPr>
+        <p:blipFill>
+          <a:blip r:embed="rId7"/>
+          <a:stretch>
+            <a:fillRect/>
+          </a:stretch>
+        </p:blipFill>
+        <p:spPr>
+          <a:xfrm>
+            <a:off x="365760" y="2953512"/>
+            <a:ext cx="4114800" cy="1417320"/>
+          </a:xfrm>
+          <a:prstGeom prst="rect">
+            <a:avLst/>
+          </a:prstGeom>
+          <a:ln w="9525">
+            <a:solidFill>
+              <a:srgbClr val="DCE1E8"/>
+            </a:solidFill>
+          </a:ln>
+        </p:spPr>
+      </p:pic>
+      <p:pic>
+        <p:nvPicPr>
+          <p:cNvPr id="151" name="Picture 150" descr="crop-map.png"/>
+          <p:cNvPicPr>
+            <a:picLocks noChangeAspect="1"/>
+          </p:cNvPicPr>
+          <p:nvPr/>
+        </p:nvPicPr>
+        <p:blipFill>
+          <a:blip r:embed="rId8"/>
+          <a:stretch>
+            <a:fillRect/>
+          </a:stretch>
+        </p:blipFill>
+        <p:spPr>
+          <a:xfrm>
+            <a:off x="4617720" y="2953512"/>
+            <a:ext cx="4114800" cy="1417320"/>
+          </a:xfrm>
+          <a:prstGeom prst="rect">
+            <a:avLst/>
+          </a:prstGeom>
+          <a:ln w="9525">
+            <a:solidFill>
+              <a:srgbClr val="DCE1E8"/>
+            </a:solidFill>
+          </a:ln>
+        </p:spPr>
+      </p:pic>
     </p:spTree>
   </p:cSld>
   <p:clrMapOvr>

--- a/docs/대회/제출/AI-Builder-Cup-제출-초안.pptx
+++ b/docs/대회/제출/AI-Builder-Cup-제출-초안.pptx
@@ -18,9 +18,12 @@
     <p:sldId id="265" r:id="rId15"/>
     <p:sldId id="266" r:id="rId16"/>
     <p:sldId id="267" r:id="rId17"/>
+    <p:sldId id="272" r:id="rId28"/>
     <p:sldId id="268" r:id="rId18"/>
+    <p:sldId id="273" r:id="rId29"/>
+    <p:sldId id="270" r:id="rId20"/>
     <p:sldId id="269" r:id="rId19"/>
-    <p:sldId id="270" r:id="rId20"/>
+    <p:sldId id="274" r:id="rId30"/>
     <p:sldId id="271" r:id="rId21"/>
   </p:sldIdLst>
   <p:sldSz cy="5143500" cx="9144000"/>
@@ -1844,6 +1847,122 @@
 </p:notes>
 </file>
 
+<file path=ppt/notesSlides/notesSlide17.xml><?xml version="1.0" encoding="utf-8"?>
+<p:notes xmlns:a="http://schemas.openxmlformats.org/drawingml/2006/main" xmlns:p="http://schemas.openxmlformats.org/presentationml/2006/main" xmlns:r="http://schemas.openxmlformats.org/officeDocument/2006/relationships">
+  <p:cSld>
+    <p:spTree>
+      <p:nvGrpSpPr>
+        <p:cNvPr id="1" name=""/>
+        <p:cNvGrpSpPr/>
+        <p:nvPr/>
+      </p:nvGrpSpPr>
+      <p:grpSpPr>
+        <a:xfrm>
+          <a:off x="0" y="0"/>
+          <a:ext cx="0" cy="0"/>
+          <a:chOff x="0" y="0"/>
+          <a:chExt cx="0" cy="0"/>
+        </a:xfrm>
+      </p:grpSpPr>
+      <p:sp>
+        <p:nvSpPr>
+          <p:cNvPr id="2" name="Slide Image Placeholder 1"/>
+          <p:cNvSpPr>
+            <a:spLocks noGrp="1"/>
+          </p:cNvSpPr>
+          <p:nvPr>
+            <p:ph type="sldImg" idx="2"/>
+          </p:nvPr>
+        </p:nvSpPr>
+        <p:spPr/>
+      </p:sp>
+      <p:sp>
+        <p:nvSpPr>
+          <p:cNvPr id="3" name="Notes Placeholder 2"/>
+          <p:cNvSpPr>
+            <a:spLocks noGrp="1"/>
+          </p:cNvSpPr>
+          <p:nvPr>
+            <p:ph type="body" idx="1"/>
+          </p:nvPr>
+        </p:nvSpPr>
+        <p:spPr/>
+        <p:txBody>
+          <a:bodyPr/>
+          <a:lstStyle/>
+          <a:p>
+            <a:r>
+              <a:t>URLs: 1 https://www.koreaherald.com/article/10741050 · 2 https://www.koreajoongangdaily.com/business/starbucks-korea-weekly-sales-sink-8-billion-won-in-wake-of-tank-day-controversy/12612519 · 3 https://www.bakeryandsnacks.com/Article/2026/08/21/why-internet-slang-can-damage-food-and-drink-brands/ · 4 https://intel.morningconsult.com/mc-content/analysis/brands-social-media-trends · 5 https://www.brandwatch.com/blog/introducing-react-score/ · 6 https://knowyourmeme.com/about · 7 https://support.google.com/trends/answer/4365533 · 8 https://ads.tiktok.com/help/article/trend-discovery · 9 https://cloud.google.com/vertex-ai/generative-ai/pricing · 11 https://webtan.impress.co.jp/n/2024/11/14/48107 · 12 https://www.journalist.or.kr/news/article.html?no=60072 · 13 https://sproutsocial.com/pricing/ · 14 https://www.vendr.com/marketplace/brandwatch</a:t>
+            </a:r>
+          </a:p>
+        </p:txBody>
+      </p:sp>
+    </p:spTree>
+  </p:cSld>
+  <p:clrMapOvr>
+    <a:masterClrMapping/>
+  </p:clrMapOvr>
+</p:notes>
+</file>
+
+<file path=ppt/notesSlides/notesSlide2.xml><?xml version="1.0" encoding="utf-8"?>
+<p:notes xmlns:a="http://schemas.openxmlformats.org/drawingml/2006/main" xmlns:p="http://schemas.openxmlformats.org/presentationml/2006/main" xmlns:r="http://schemas.openxmlformats.org/officeDocument/2006/relationships">
+  <p:cSld>
+    <p:spTree>
+      <p:nvGrpSpPr>
+        <p:cNvPr id="1" name=""/>
+        <p:cNvGrpSpPr/>
+        <p:nvPr/>
+      </p:nvGrpSpPr>
+      <p:grpSpPr>
+        <a:xfrm>
+          <a:off x="0" y="0"/>
+          <a:ext cx="0" cy="0"/>
+          <a:chOff x="0" y="0"/>
+          <a:chExt cx="0" cy="0"/>
+        </a:xfrm>
+      </p:grpSpPr>
+      <p:sp>
+        <p:nvSpPr>
+          <p:cNvPr id="2" name="Slide Image Placeholder 1"/>
+          <p:cNvSpPr>
+            <a:spLocks noGrp="1"/>
+          </p:cNvSpPr>
+          <p:nvPr>
+            <p:ph type="sldImg" idx="2"/>
+          </p:nvPr>
+        </p:nvSpPr>
+        <p:spPr/>
+      </p:sp>
+      <p:sp>
+        <p:nvSpPr>
+          <p:cNvPr id="3" name="Notes Placeholder 2"/>
+          <p:cNvSpPr>
+            <a:spLocks noGrp="1"/>
+          </p:cNvSpPr>
+          <p:nvPr>
+            <p:ph type="body" idx="1"/>
+          </p:nvPr>
+        </p:nvSpPr>
+        <p:spPr/>
+        <p:txBody>
+          <a:bodyPr/>
+          <a:lstStyle/>
+          <a:p>
+            <a:r>
+              <a:t>Japan: CyberBuzz x Digital InFact via Web担当者Forum 2024-11-14 (¥1.2038T, +13%). Korea: KOBACO survey via journalist.or.kr 2026-01-08 (₩10.10T, 59%). Sprout Social pricing page 2026-10-11. Brandwatch median $50,000/yr: Vendr Feb 2026 (secondary procurement data). Draft cost: 1 brief + 3 x (copy + opinion) = 7 calls x $0.0015.</a:t>
+            </a:r>
+          </a:p>
+        </p:txBody>
+      </p:sp>
+    </p:spTree>
+  </p:cSld>
+  <p:clrMapOvr>
+    <a:masterClrMapping/>
+  </p:clrMapOvr>
+</p:notes>
+</file>
+
 <file path=ppt/notesSlides/notesSlide3.xml><?xml version="1.0" encoding="utf-8"?>
 <p:notes xmlns:a="http://schemas.openxmlformats.org/drawingml/2006/main" xmlns:r="http://schemas.openxmlformats.org/officeDocument/2006/relationships" xmlns:mc="http://schemas.openxmlformats.org/markup-compatibility/2006" xmlns:mv="urn:schemas-microsoft-com:mac:vml" xmlns:p="http://schemas.openxmlformats.org/presentationml/2006/main" xmlns:c="http://schemas.openxmlformats.org/drawingml/2006/chart" xmlns:dgm="http://schemas.openxmlformats.org/drawingml/2006/diagram" xmlns:o="urn:schemas-microsoft-com:office:office" xmlns:v="urn:schemas-microsoft-com:vml" xmlns:pvml="urn:schemas-microsoft-com:office:powerpoint" xmlns:com="http://schemas.openxmlformats.org/drawingml/2006/compatibility" xmlns:p14="http://schemas.microsoft.com/office/powerpoint/2010/main" xmlns:p15="http://schemas.microsoft.com/office/powerpoint/2012/main" xmlns:ahyp="http://schemas.microsoft.com/office/drawing/2018/hyperlinkcolor" showMasterPhAnim="0" showMasterSp="0">
   <p:cSld>
@@ -2008,19 +2127,9 @@
           </a:bodyPr>
           <a:lstStyle/>
           <a:p>
-            <a:pPr indent="0" lvl="0" marL="0" rtl="0" algn="l">
-              <a:spcBef>
-                <a:spcPts val="0"/>
-              </a:spcBef>
-              <a:spcAft>
-                <a:spcPts val="0"/>
-              </a:spcAft>
-              <a:buNone/>
-            </a:pPr>
-            <a:r>
-              <a:t/>
-            </a:r>
-            <a:endParaRPr/>
+            <a:r>
+              <a:t>Comparison from public pages, checked 2026-10-11. Brandwatch: Consumer Research one-pager (volume, peak detection, Iris), React Score (brand-mention risk), 44-language sentiment, Iris Writing Assistant (beta). Know Your Meme: entries with origin and numbered references, English only. Google Trends: relative 0-100 index, Rising/Breakout, 100+ countries, Gemini panel cites nothing. TikTok Creative Center: posts/views per hashtag, trendline, country picker incl. KR JP TW TH VN ID PH MY SG AU; Symphony writes scripts, no review step documented. See the Sources slide.</a:t>
+            </a:r>
           </a:p>
         </p:txBody>
       </p:sp>
@@ -2219,6 +2328,64 @@
               <a:t/>
             </a:r>
             <a:endParaRPr/>
+          </a:p>
+        </p:txBody>
+      </p:sp>
+    </p:spTree>
+  </p:cSld>
+  <p:clrMapOvr>
+    <a:masterClrMapping/>
+  </p:clrMapOvr>
+</p:notes>
+</file>
+
+<file path=ppt/notesSlides/notesSlide7.xml><?xml version="1.0" encoding="utf-8"?>
+<p:notes xmlns:a="http://schemas.openxmlformats.org/drawingml/2006/main" xmlns:p="http://schemas.openxmlformats.org/presentationml/2006/main" xmlns:r="http://schemas.openxmlformats.org/officeDocument/2006/relationships">
+  <p:cSld>
+    <p:spTree>
+      <p:nvGrpSpPr>
+        <p:cNvPr id="1" name=""/>
+        <p:cNvGrpSpPr/>
+        <p:nvPr/>
+      </p:nvGrpSpPr>
+      <p:grpSpPr>
+        <a:xfrm>
+          <a:off x="0" y="0"/>
+          <a:ext cx="0" cy="0"/>
+          <a:chOff x="0" y="0"/>
+          <a:chExt cx="0" cy="0"/>
+        </a:xfrm>
+      </p:grpSpPr>
+      <p:sp>
+        <p:nvSpPr>
+          <p:cNvPr id="2" name="Slide Image Placeholder 1"/>
+          <p:cNvSpPr>
+            <a:spLocks noGrp="1"/>
+          </p:cNvSpPr>
+          <p:nvPr>
+            <p:ph type="sldImg" idx="2"/>
+          </p:nvPr>
+        </p:nvSpPr>
+        <p:spPr/>
+      </p:sp>
+      <p:sp>
+        <p:nvSpPr>
+          <p:cNvPr id="3" name="Notes Placeholder 2"/>
+          <p:cNvSpPr>
+            <a:spLocks noGrp="1"/>
+          </p:cNvSpPr>
+          <p:nvPr>
+            <p:ph type="body" idx="1"/>
+          </p:nvPr>
+        </p:nvSpPr>
+        <p:spPr/>
+        <p:txBody>
+          <a:bodyPr/>
+          <a:lstStyle/>
+          <a:p>
+            <a:r>
+              <a:t>Cases from the round 4, 5, 8 and 9 judgments recorded in EVALUATION.md (Plan 09). No invented examples.</a:t>
+            </a:r>
           </a:p>
         </p:txBody>
       </p:sp>
@@ -7486,8 +7653,8 @@
         </p:nvSpPr>
         <p:spPr>
           <a:xfrm>
-            <a:off x="265350" y="663825"/>
-            <a:ext cx="8943000" cy="561900"/>
+            <a:off x="265350" y="548640"/>
+            <a:ext cx="8943000" cy="256032"/>
           </a:xfrm>
           <a:prstGeom prst="rect">
             <a:avLst/>
@@ -7513,8 +7680,10 @@
               <a:buNone/>
             </a:pPr>
             <a:r>
-              <a:rPr lang="en-GB" sz="1600">
-                <a:solidFill/>
+              <a:rPr lang="en-GB" sz="1050">
+                <a:solidFill>
+                  <a:srgbClr val="566074"/>
+                </a:solidFill>
                 <a:latin typeface="Google Sans Flex Medium"/>
                 <a:ea typeface="Google Sans Flex Medium"/>
                 <a:cs typeface="Google Sans Flex Medium"/>
@@ -8265,6 +8434,40 @@
           </a:graphicData>
         </a:graphic>
       </p:graphicFrame>
+      <p:sp>
+        <p:nvSpPr>
+          <p:cNvPr id="161" name="Headline"/>
+          <p:cNvSpPr txBox="1"/>
+          <p:nvPr/>
+        </p:nvSpPr>
+        <p:spPr>
+          <a:xfrm>
+            <a:off x="365760" y="786384"/>
+            <a:ext cx="8412480" cy="310896"/>
+          </a:xfrm>
+          <a:prstGeom prst="rect">
+            <a:avLst/>
+          </a:prstGeom>
+          <a:noFill/>
+        </p:spPr>
+        <p:txBody>
+          <a:bodyPr wrap="square" lIns="0" rIns="0" tIns="0" bIns="0">
+            <a:spAutoFit/>
+          </a:bodyPr>
+          <a:lstStyle/>
+          <a:p>
+            <a:r>
+              <a:rPr sz="1600" b="1">
+                <a:solidFill>
+                  <a:srgbClr val="121826"/>
+                </a:solidFill>
+                <a:latin typeface="Google Sans Flex"/>
+              </a:rPr>
+              <a:t>Picks that fit the product rose from 40% to 91% on the same 12 cases</a:t>
+            </a:r>
+          </a:p>
+        </p:txBody>
+      </p:sp>
     </p:spTree>
   </p:cSld>
   <p:clrMapOvr>
@@ -8274,6 +8477,897 @@
 </file>
 
 <file path=ppt/slides/slide11.xml><?xml version="1.0" encoding="utf-8"?>
+<p:sld xmlns:a="http://schemas.openxmlformats.org/drawingml/2006/main" xmlns:r="http://schemas.openxmlformats.org/officeDocument/2006/relationships" xmlns:mc="http://schemas.openxmlformats.org/markup-compatibility/2006" xmlns:mv="urn:schemas-microsoft-com:mac:vml" xmlns:p="http://schemas.openxmlformats.org/presentationml/2006/main" xmlns:c="http://schemas.openxmlformats.org/drawingml/2006/chart" xmlns:dgm="http://schemas.openxmlformats.org/drawingml/2006/diagram" xmlns:o="urn:schemas-microsoft-com:office:office" xmlns:v="urn:schemas-microsoft-com:vml" xmlns:pvml="urn:schemas-microsoft-com:office:powerpoint" xmlns:com="http://schemas.openxmlformats.org/drawingml/2006/compatibility" xmlns:p14="http://schemas.microsoft.com/office/powerpoint/2010/main" xmlns:p15="http://schemas.microsoft.com/office/powerpoint/2012/main" xmlns:ahyp="http://schemas.microsoft.com/office/drawing/2018/hyperlinkcolor">
+  <p:cSld>
+    <p:spTree>
+      <p:nvGrpSpPr>
+        <p:cNvPr id="163" name="Shape 163"/>
+        <p:cNvGrpSpPr/>
+        <p:nvPr/>
+      </p:nvGrpSpPr>
+      <p:grpSpPr>
+        <a:xfrm>
+          <a:off x="0" y="0"/>
+          <a:ext cx="0" cy="0"/>
+          <a:chOff x="0" y="0"/>
+          <a:chExt cx="0" cy="0"/>
+        </a:xfrm>
+      </p:grpSpPr>
+      <p:pic>
+        <p:nvPicPr>
+          <p:cNvPr id="164" name="Google Shape;164;p27" title="Frame 144.png"/>
+          <p:cNvPicPr preferRelativeResize="0"/>
+          <p:nvPr/>
+        </p:nvPicPr>
+        <p:blipFill rotWithShape="1">
+          <a:blip r:embed="rId3">
+            <a:alphaModFix/>
+          </a:blip>
+          <a:srcRect b="98001" l="0" r="0" t="0"/>
+          <a:stretch/>
+        </p:blipFill>
+        <p:spPr>
+          <a:xfrm>
+            <a:off x="0" y="5093562"/>
+            <a:ext cx="9144000" cy="54275"/>
+          </a:xfrm>
+          <a:prstGeom prst="rect">
+            <a:avLst/>
+          </a:prstGeom>
+          <a:noFill/>
+          <a:ln>
+            <a:noFill/>
+          </a:ln>
+        </p:spPr>
+      </p:pic>
+      <p:pic>
+        <p:nvPicPr>
+          <p:cNvPr id="165" name="Google Shape;165;p27" title="Group 427319979.png"/>
+          <p:cNvPicPr preferRelativeResize="0"/>
+          <p:nvPr/>
+        </p:nvPicPr>
+        <p:blipFill>
+          <a:blip r:embed="rId4">
+            <a:alphaModFix/>
+          </a:blip>
+          <a:stretch>
+            <a:fillRect/>
+          </a:stretch>
+        </p:blipFill>
+        <p:spPr>
+          <a:xfrm>
+            <a:off x="0" y="1"/>
+            <a:ext cx="9144000" cy="507359"/>
+          </a:xfrm>
+          <a:prstGeom prst="rect">
+            <a:avLst/>
+          </a:prstGeom>
+          <a:noFill/>
+          <a:ln>
+            <a:noFill/>
+          </a:ln>
+        </p:spPr>
+      </p:pic>
+      <p:sp>
+        <p:nvSpPr>
+          <p:cNvPr id="166" name="Google Shape;166;p27"/>
+          <p:cNvSpPr/>
+          <p:nvPr/>
+        </p:nvSpPr>
+        <p:spPr>
+          <a:xfrm>
+            <a:off x="-29250" y="5071875"/>
+            <a:ext cx="9173400" cy="97800"/>
+          </a:xfrm>
+          <a:prstGeom prst="rect">
+            <a:avLst/>
+          </a:prstGeom>
+          <a:solidFill>
+            <a:schemeClr val="dk1"/>
+          </a:solidFill>
+          <a:ln>
+            <a:noFill/>
+          </a:ln>
+        </p:spPr>
+        <p:txBody>
+          <a:bodyPr anchorCtr="0" anchor="ctr" bIns="91425" lIns="91425" spcFirstLastPara="1" rIns="91425" wrap="square" tIns="91425">
+            <a:noAutofit/>
+          </a:bodyPr>
+          <a:lstStyle/>
+          <a:p>
+            <a:pPr indent="0" lvl="0" marL="0" rtl="0" algn="ctr">
+              <a:spcBef>
+                <a:spcPts val="0"/>
+              </a:spcBef>
+              <a:spcAft>
+                <a:spcPts val="0"/>
+              </a:spcAft>
+              <a:buNone/>
+            </a:pPr>
+            <a:r>
+              <a:rPr>
+                <a:solidFill/>
+              </a:rPr>
+              <a:t/>
+            </a:r>
+            <a:endParaRPr/>
+          </a:p>
+        </p:txBody>
+      </p:sp>
+      <p:sp>
+        <p:nvSpPr>
+          <p:cNvPr id="71" name="Google Shape;71;p15"/>
+          <p:cNvSpPr txBox="1"/>
+          <p:nvPr/>
+        </p:nvSpPr>
+        <p:spPr>
+          <a:xfrm>
+            <a:off x="265350" y="548640"/>
+            <a:ext cx="8943000" cy="256032"/>
+          </a:xfrm>
+          <a:prstGeom prst="rect">
+            <a:avLst/>
+          </a:prstGeom>
+          <a:noFill/>
+          <a:ln>
+            <a:noFill/>
+          </a:ln>
+        </p:spPr>
+        <p:txBody>
+          <a:bodyPr anchorCtr="0" anchor="t" bIns="91425" lIns="91425" spcFirstLastPara="1" rIns="91425" wrap="square" tIns="91425">
+            <a:noAutofit/>
+          </a:bodyPr>
+          <a:lstStyle/>
+          <a:p>
+            <a:pPr indent="0" lvl="0" marL="0" rtl="0" algn="l">
+              <a:spcBef>
+                <a:spcPts val="0"/>
+              </a:spcBef>
+              <a:spcAft>
+                <a:spcPts val="0"/>
+              </a:spcAft>
+              <a:buNone/>
+            </a:pPr>
+            <a:r>
+              <a:rPr lang="en-GB" sz="1050">
+                <a:solidFill>
+                  <a:srgbClr val="566074"/>
+                </a:solidFill>
+                <a:latin typeface="Google Sans Flex Medium"/>
+                <a:ea typeface="Google Sans Flex Medium"/>
+                <a:cs typeface="Google Sans Flex Medium"/>
+                <a:sym typeface="Google Sans Flex Medium"/>
+              </a:rPr>
+              <a:t>Prototype Performance report</a:t>
+            </a:r>
+            <a:endParaRPr sz="1600">
+              <a:latin typeface="Google Sans Flex Medium"/>
+              <a:ea typeface="Google Sans Flex Medium"/>
+              <a:cs typeface="Google Sans Flex Medium"/>
+              <a:sym typeface="Google Sans Flex Medium"/>
+            </a:endParaRPr>
+          </a:p>
+        </p:txBody>
+      </p:sp>
+      <p:sp>
+        <p:nvSpPr>
+          <p:cNvPr id="167" name="Rounded Rectangle 166"/>
+          <p:cNvSpPr/>
+          <p:nvPr/>
+        </p:nvSpPr>
+        <p:spPr>
+          <a:xfrm>
+            <a:off x="365760" y="1234440"/>
+            <a:ext cx="2697480" cy="3429000"/>
+          </a:xfrm>
+          <a:prstGeom prst="roundRect">
+            <a:avLst>
+              <a:gd name="adj" fmla="val 8000"/>
+            </a:avLst>
+          </a:prstGeom>
+          <a:solidFill>
+            <a:srgbClr val="F2F4F7"/>
+          </a:solidFill>
+          <a:ln w="9525">
+            <a:noFill/>
+          </a:ln>
+          <a:effectLst/>
+        </p:spPr>
+        <p:style>
+          <a:lnRef idx="1">
+            <a:schemeClr val="accent1"/>
+          </a:lnRef>
+          <a:fillRef idx="3">
+            <a:schemeClr val="accent1"/>
+          </a:fillRef>
+          <a:effectRef idx="0">
+            <a:schemeClr val="accent1"/>
+          </a:effectRef>
+          <a:fontRef idx="minor">
+            <a:schemeClr val="lt1"/>
+          </a:fontRef>
+        </p:style>
+        <p:txBody>
+          <a:bodyPr rtlCol="0" anchor="ctr"/>
+          <a:lstStyle/>
+          <a:p/>
+        </p:txBody>
+      </p:sp>
+      <p:sp>
+        <p:nvSpPr>
+          <p:cNvPr id="169" name="TextBox 168"/>
+          <p:cNvSpPr txBox="1"/>
+          <p:nvPr/>
+        </p:nvSpPr>
+        <p:spPr>
+          <a:xfrm>
+            <a:off x="530352" y="1353312"/>
+            <a:ext cx="2414016" cy="347472"/>
+          </a:xfrm>
+          <a:prstGeom prst="rect">
+            <a:avLst/>
+          </a:prstGeom>
+          <a:noFill/>
+        </p:spPr>
+        <p:txBody>
+          <a:bodyPr wrap="square" anchor="ctr" lIns="0" rIns="0" tIns="0" bIns="0">
+            <a:noAutofit/>
+          </a:bodyPr>
+          <a:lstStyle/>
+          <a:p>
+            <a:pPr algn="l">
+              <a:spcAft>
+                <a:spcPts val="400"/>
+              </a:spcAft>
+            </a:pPr>
+            <a:r>
+              <a:rPr sz="1200" b="1" i="0">
+                <a:solidFill>
+                  <a:srgbClr val="121826"/>
+                </a:solidFill>
+                <a:latin typeface="Google Sans Flex"/>
+              </a:rPr>
+              <a:t>The copy named a website, not a meme</a:t>
+            </a:r>
+          </a:p>
+        </p:txBody>
+      </p:sp>
+      <p:sp>
+        <p:nvSpPr>
+          <p:cNvPr id="170" name="TextBox 169"/>
+          <p:cNvSpPr txBox="1"/>
+          <p:nvPr/>
+        </p:nvSpPr>
+        <p:spPr>
+          <a:xfrm>
+            <a:off x="530352" y="1847088"/>
+            <a:ext cx="2395728" cy="2743200"/>
+          </a:xfrm>
+          <a:prstGeom prst="rect">
+            <a:avLst/>
+          </a:prstGeom>
+          <a:noFill/>
+        </p:spPr>
+        <p:txBody>
+          <a:bodyPr wrap="square" anchor="t" lIns="0" rIns="0" tIns="0" bIns="0">
+            <a:noAutofit/>
+          </a:bodyPr>
+          <a:lstStyle/>
+          <a:p>
+            <a:pPr algn="l" marL="146304" indent="-146304">
+              <a:spcAft>
+                <a:spcPts val="900"/>
+              </a:spcAft>
+              <a:buClr>
+                <a:srgbClr val="5F6368"/>
+              </a:buClr>
+              <a:buFont typeface="Arial"/>
+              <a:buChar char="•"/>
+            </a:pPr>
+            <a:r>
+              <a:rPr sz="1100" b="0" i="0">
+                <a:solidFill>
+                  <a:srgbClr val="121826"/>
+                </a:solidFill>
+                <a:latin typeface="Google Sans Flex"/>
+              </a:rPr>
+              <a:t>Round 4, English running shoes: the copy put the site name “Know Your Meme” in its body.</a:t>
+            </a:r>
+          </a:p>
+          <a:p>
+            <a:pPr algn="l" marL="146304" indent="-146304">
+              <a:spcAft>
+                <a:spcPts val="900"/>
+              </a:spcAft>
+              <a:buClr>
+                <a:srgbClr val="5F6368"/>
+              </a:buClr>
+              <a:buFont typeface="Arial"/>
+              <a:buChar char="•"/>
+            </a:pPr>
+            <a:r>
+              <a:rPr sz="1100" b="0" i="0">
+                <a:solidFill>
+                  <a:srgbClr val="121826"/>
+                </a:solidFill>
+                <a:latin typeface="Google Sans Flex"/>
+              </a:rPr>
+              <a:t>Reviewers removed non-meme entries (site names, generic words) from the dictionary.</a:t>
+            </a:r>
+          </a:p>
+          <a:p>
+            <a:pPr algn="l" marL="146304" indent="-146304">
+              <a:spcAft>
+                <a:spcPts val="900"/>
+              </a:spcAft>
+              <a:buClr>
+                <a:srgbClr val="5F6368"/>
+              </a:buClr>
+              <a:buFont typeface="Arial"/>
+              <a:buChar char="•"/>
+            </a:pPr>
+            <a:r>
+              <a:rPr sz="1100" b="0" i="0">
+                <a:solidFill>
+                  <a:srgbClr val="121826"/>
+                </a:solidFill>
+                <a:latin typeface="Google Sans Flex"/>
+              </a:rPr>
+              <a:t>From round 5 no site name was picked.</a:t>
+            </a:r>
+          </a:p>
+        </p:txBody>
+      </p:sp>
+      <p:sp>
+        <p:nvSpPr>
+          <p:cNvPr id="171" name="Rounded Rectangle 170"/>
+          <p:cNvSpPr/>
+          <p:nvPr/>
+        </p:nvSpPr>
+        <p:spPr>
+          <a:xfrm>
+            <a:off x="3200400" y="1234440"/>
+            <a:ext cx="2697480" cy="3429000"/>
+          </a:xfrm>
+          <a:prstGeom prst="roundRect">
+            <a:avLst>
+              <a:gd name="adj" fmla="val 8000"/>
+            </a:avLst>
+          </a:prstGeom>
+          <a:solidFill>
+            <a:srgbClr val="F2F4F7"/>
+          </a:solidFill>
+          <a:ln w="9525">
+            <a:noFill/>
+          </a:ln>
+          <a:effectLst/>
+        </p:spPr>
+        <p:style>
+          <a:lnRef idx="1">
+            <a:schemeClr val="accent1"/>
+          </a:lnRef>
+          <a:fillRef idx="3">
+            <a:schemeClr val="accent1"/>
+          </a:fillRef>
+          <a:effectRef idx="0">
+            <a:schemeClr val="accent1"/>
+          </a:effectRef>
+          <a:fontRef idx="minor">
+            <a:schemeClr val="lt1"/>
+          </a:fontRef>
+        </p:style>
+        <p:txBody>
+          <a:bodyPr rtlCol="0" anchor="ctr"/>
+          <a:lstStyle/>
+          <a:p/>
+        </p:txBody>
+      </p:sp>
+      <p:sp>
+        <p:nvSpPr>
+          <p:cNvPr id="173" name="TextBox 172"/>
+          <p:cNvSpPr txBox="1"/>
+          <p:nvPr/>
+        </p:nvSpPr>
+        <p:spPr>
+          <a:xfrm>
+            <a:off x="3364992" y="1353312"/>
+            <a:ext cx="2414016" cy="347472"/>
+          </a:xfrm>
+          <a:prstGeom prst="rect">
+            <a:avLst/>
+          </a:prstGeom>
+          <a:noFill/>
+        </p:spPr>
+        <p:txBody>
+          <a:bodyPr wrap="square" anchor="ctr" lIns="0" rIns="0" tIns="0" bIns="0">
+            <a:noAutofit/>
+          </a:bodyPr>
+          <a:lstStyle/>
+          <a:p>
+            <a:pPr algn="l">
+              <a:spcAft>
+                <a:spcPts val="400"/>
+              </a:spcAft>
+            </a:pPr>
+            <a:r>
+              <a:rPr sz="1200" b="1" i="0">
+                <a:solidFill>
+                  <a:srgbClr val="121826"/>
+                </a:solidFill>
+                <a:latin typeface="Google Sans Flex"/>
+              </a:rPr>
+              <a:t>The copy explained the meme instead of using it</a:t>
+            </a:r>
+          </a:p>
+        </p:txBody>
+      </p:sp>
+      <p:sp>
+        <p:nvSpPr>
+          <p:cNvPr id="174" name="TextBox 173"/>
+          <p:cNvSpPr txBox="1"/>
+          <p:nvPr/>
+        </p:nvSpPr>
+        <p:spPr>
+          <a:xfrm>
+            <a:off x="3364992" y="1847088"/>
+            <a:ext cx="2395728" cy="2743200"/>
+          </a:xfrm>
+          <a:prstGeom prst="rect">
+            <a:avLst/>
+          </a:prstGeom>
+          <a:noFill/>
+        </p:spPr>
+        <p:txBody>
+          <a:bodyPr wrap="square" anchor="t" lIns="0" rIns="0" tIns="0" bIns="0">
+            <a:noAutofit/>
+          </a:bodyPr>
+          <a:lstStyle/>
+          <a:p>
+            <a:pPr algn="l" marL="146304" indent="-146304">
+              <a:spcAft>
+                <a:spcPts val="900"/>
+              </a:spcAft>
+              <a:buClr>
+                <a:srgbClr val="5F6368"/>
+              </a:buClr>
+              <a:buFont typeface="Arial"/>
+              <a:buChar char="•"/>
+            </a:pPr>
+            <a:r>
+              <a:rPr sz="1100" b="0" i="0">
+                <a:solidFill>
+                  <a:srgbClr val="121826"/>
+                </a:solidFill>
+                <a:latin typeface="Google Sans Flex"/>
+              </a:rPr>
+              <a:t>Round 4: lines introduced the meme by name (“like …”) and read as meta copy.</a:t>
+            </a:r>
+          </a:p>
+          <a:p>
+            <a:pPr algn="l" marL="146304" indent="-146304">
+              <a:spcAft>
+                <a:spcPts val="900"/>
+              </a:spcAft>
+              <a:buClr>
+                <a:srgbClr val="5F6368"/>
+              </a:buClr>
+              <a:buFont typeface="Arial"/>
+              <a:buChar char="•"/>
+            </a:pPr>
+            <a:r>
+              <a:rPr sz="1100" b="0" i="0">
+                <a:solidFill>
+                  <a:srgbClr val="121826"/>
+                </a:solidFill>
+                <a:latin typeface="Google Sans Flex"/>
+              </a:rPr>
+              <a:t>A rule now rejects such a line and asks for one rewrite.</a:t>
+            </a:r>
+          </a:p>
+          <a:p>
+            <a:pPr algn="l" marL="146304" indent="-146304">
+              <a:spcAft>
+                <a:spcPts val="900"/>
+              </a:spcAft>
+              <a:buClr>
+                <a:srgbClr val="5F6368"/>
+              </a:buClr>
+              <a:buFont typeface="Arial"/>
+              <a:buChar char="•"/>
+            </a:pPr>
+            <a:r>
+              <a:rPr sz="1100" b="0" i="0">
+                <a:solidFill>
+                  <a:srgbClr val="121826"/>
+                </a:solidFill>
+                <a:latin typeface="Google Sans Flex"/>
+              </a:rPr>
+              <a:t>Copy usability rose from 2.0 to 2.6 out of 3 in round 5.</a:t>
+            </a:r>
+          </a:p>
+        </p:txBody>
+      </p:sp>
+      <p:sp>
+        <p:nvSpPr>
+          <p:cNvPr id="175" name="Rounded Rectangle 174"/>
+          <p:cNvSpPr/>
+          <p:nvPr/>
+        </p:nvSpPr>
+        <p:spPr>
+          <a:xfrm>
+            <a:off x="6035040" y="1234440"/>
+            <a:ext cx="2697480" cy="3429000"/>
+          </a:xfrm>
+          <a:prstGeom prst="roundRect">
+            <a:avLst>
+              <a:gd name="adj" fmla="val 8000"/>
+            </a:avLst>
+          </a:prstGeom>
+          <a:solidFill>
+            <a:srgbClr val="F2F4F7"/>
+          </a:solidFill>
+          <a:ln w="9525">
+            <a:noFill/>
+          </a:ln>
+          <a:effectLst/>
+        </p:spPr>
+        <p:style>
+          <a:lnRef idx="1">
+            <a:schemeClr val="accent1"/>
+          </a:lnRef>
+          <a:fillRef idx="3">
+            <a:schemeClr val="accent1"/>
+          </a:fillRef>
+          <a:effectRef idx="0">
+            <a:schemeClr val="accent1"/>
+          </a:effectRef>
+          <a:fontRef idx="minor">
+            <a:schemeClr val="lt1"/>
+          </a:fontRef>
+        </p:style>
+        <p:txBody>
+          <a:bodyPr rtlCol="0" anchor="ctr"/>
+          <a:lstStyle/>
+          <a:p/>
+        </p:txBody>
+      </p:sp>
+      <p:sp>
+        <p:nvSpPr>
+          <p:cNvPr id="177" name="TextBox 176"/>
+          <p:cNvSpPr txBox="1"/>
+          <p:nvPr/>
+        </p:nvSpPr>
+        <p:spPr>
+          <a:xfrm>
+            <a:off x="6199632" y="1353312"/>
+            <a:ext cx="2414016" cy="347472"/>
+          </a:xfrm>
+          <a:prstGeom prst="rect">
+            <a:avLst/>
+          </a:prstGeom>
+          <a:noFill/>
+        </p:spPr>
+        <p:txBody>
+          <a:bodyPr wrap="square" anchor="ctr" lIns="0" rIns="0" tIns="0" bIns="0">
+            <a:noAutofit/>
+          </a:bodyPr>
+          <a:lstStyle/>
+          <a:p>
+            <a:pPr algn="l">
+              <a:spcAft>
+                <a:spcPts val="400"/>
+              </a:spcAft>
+            </a:pPr>
+            <a:r>
+              <a:rPr sz="1200" b="1" i="0">
+                <a:solidFill>
+                  <a:srgbClr val="121826"/>
+                </a:solidFill>
+                <a:latin typeface="Google Sans Flex"/>
+              </a:rPr>
+              <a:t>New data brought risky picks with no verdict</a:t>
+            </a:r>
+          </a:p>
+        </p:txBody>
+      </p:sp>
+      <p:sp>
+        <p:nvSpPr>
+          <p:cNvPr id="178" name="TextBox 177"/>
+          <p:cNvSpPr txBox="1"/>
+          <p:nvPr/>
+        </p:nvSpPr>
+        <p:spPr>
+          <a:xfrm>
+            <a:off x="6199632" y="1847088"/>
+            <a:ext cx="2395728" cy="2743200"/>
+          </a:xfrm>
+          <a:prstGeom prst="rect">
+            <a:avLst/>
+          </a:prstGeom>
+          <a:noFill/>
+        </p:spPr>
+        <p:txBody>
+          <a:bodyPr wrap="square" anchor="t" lIns="0" rIns="0" tIns="0" bIns="0">
+            <a:noAutofit/>
+          </a:bodyPr>
+          <a:lstStyle/>
+          <a:p>
+            <a:pPr algn="l" marL="146304" indent="-146304">
+              <a:spcAft>
+                <a:spcPts val="900"/>
+              </a:spcAft>
+              <a:buClr>
+                <a:srgbClr val="5F6368"/>
+              </a:buClr>
+              <a:buFont typeface="Arial"/>
+              <a:buChar char="•"/>
+            </a:pPr>
+            <a:r>
+              <a:rPr sz="1100" b="0" i="0">
+                <a:solidFill>
+                  <a:srgbClr val="121826"/>
+                </a:solidFill>
+                <a:latin typeface="Google Sans Flex"/>
+              </a:rPr>
+              <a:t>Round 8: “호갱” (a customer who gets ripped off) and “Meme coin” were offered for budgeting apps with no risk verdict.</a:t>
+            </a:r>
+          </a:p>
+          <a:p>
+            <a:pPr algn="l" marL="146304" indent="-146304">
+              <a:spcAft>
+                <a:spcPts val="900"/>
+              </a:spcAft>
+              <a:buClr>
+                <a:srgbClr val="5F6368"/>
+              </a:buClr>
+              <a:buFont typeface="Arial"/>
+              <a:buChar char="•"/>
+            </a:pPr>
+            <a:r>
+              <a:rPr sz="1100" b="0" i="0">
+                <a:solidFill>
+                  <a:srgbClr val="121826"/>
+                </a:solidFill>
+                <a:latin typeface="Google Sans Flex"/>
+              </a:rPr>
+              <a:t>36 candidates without a verdict got a human risk decision.</a:t>
+            </a:r>
+          </a:p>
+          <a:p>
+            <a:pPr algn="l" marL="146304" indent="-146304">
+              <a:spcAft>
+                <a:spcPts val="900"/>
+              </a:spcAft>
+              <a:buClr>
+                <a:srgbClr val="5F6368"/>
+              </a:buClr>
+              <a:buFont typeface="Arial"/>
+              <a:buChar char="•"/>
+            </a:pPr>
+            <a:r>
+              <a:rPr sz="1100" b="0" i="0">
+                <a:solidFill>
+                  <a:srgbClr val="121826"/>
+                </a:solidFill>
+                <a:latin typeface="Google Sans Flex"/>
+              </a:rPr>
+              <a:t>Round 9: no risky pick shown as safe.</a:t>
+            </a:r>
+          </a:p>
+        </p:txBody>
+      </p:sp>
+      <p:sp>
+        <p:nvSpPr>
+          <p:cNvPr id="179" name="Headline"/>
+          <p:cNvSpPr txBox="1"/>
+          <p:nvPr/>
+        </p:nvSpPr>
+        <p:spPr>
+          <a:xfrm>
+            <a:off x="365760" y="786384"/>
+            <a:ext cx="8412480" cy="310896"/>
+          </a:xfrm>
+          <a:prstGeom prst="rect">
+            <a:avLst/>
+          </a:prstGeom>
+          <a:noFill/>
+        </p:spPr>
+        <p:txBody>
+          <a:bodyPr wrap="square" lIns="0" rIns="0" tIns="0" bIns="0">
+            <a:spAutoFit/>
+          </a:bodyPr>
+          <a:lstStyle/>
+          <a:p>
+            <a:r>
+              <a:rPr sz="1600" b="1">
+                <a:solidFill>
+                  <a:srgbClr val="121826"/>
+                </a:solidFill>
+                <a:latin typeface="Google Sans Flex"/>
+              </a:rPr>
+              <a:t>The rules caught what a person would otherwise have had to fix</a:t>
+            </a:r>
+          </a:p>
+        </p:txBody>
+      </p:sp>
+      <p:sp>
+        <p:nvSpPr>
+          <p:cNvPr id="180" name="TextBox 179"/>
+          <p:cNvSpPr txBox="1"/>
+          <p:nvPr/>
+        </p:nvSpPr>
+        <p:spPr>
+          <a:xfrm>
+            <a:off x="365760" y="4773168"/>
+            <a:ext cx="8412480" cy="182880"/>
+          </a:xfrm>
+          <a:prstGeom prst="rect">
+            <a:avLst/>
+          </a:prstGeom>
+          <a:noFill/>
+        </p:spPr>
+        <p:txBody>
+          <a:bodyPr wrap="none" lIns="0" rIns="0" tIns="0" bIns="0">
+            <a:spAutoFit/>
+          </a:bodyPr>
+          <a:lstStyle/>
+          <a:p>
+            <a:r>
+              <a:rPr sz="800">
+                <a:solidFill>
+                  <a:srgbClr val="566074"/>
+                </a:solidFill>
+                <a:latin typeface="Google Sans Flex"/>
+              </a:rPr>
+              <a:t>Same 12 cases each round; judgments are AI drafts reviewed by one person. Details: EVALUATION.md and evals/recommend-rounds.csv in the repository.</a:t>
+            </a:r>
+          </a:p>
+        </p:txBody>
+      </p:sp>
+      <p:sp>
+        <p:nvSpPr>
+          <p:cNvPr id="181" name="TextBox 180"/>
+          <p:cNvSpPr txBox="1"/>
+          <p:nvPr/>
+        </p:nvSpPr>
+        <p:spPr>
+          <a:xfrm>
+            <a:off x="548640" y="3886200"/>
+            <a:ext cx="2331720" cy="640080"/>
+          </a:xfrm>
+          <a:prstGeom prst="rect">
+            <a:avLst/>
+          </a:prstGeom>
+          <a:noFill/>
+        </p:spPr>
+        <p:txBody>
+          <a:bodyPr wrap="square" lIns="0" rIns="0" tIns="0" bIns="0">
+            <a:spAutoFit/>
+          </a:bodyPr>
+          <a:lstStyle/>
+          <a:p>
+            <a:r>
+              <a:rPr sz="2400" b="1">
+                <a:solidFill>
+                  <a:srgbClr val="121826"/>
+                </a:solidFill>
+                <a:latin typeface="Google Sans Flex"/>
+              </a:rPr>
+              <a:t>3 entries</a:t>
+            </a:r>
+          </a:p>
+          <a:p>
+            <a:r>
+              <a:rPr sz="950">
+                <a:solidFill>
+                  <a:srgbClr val="566074"/>
+                </a:solidFill>
+                <a:latin typeface="Google Sans Flex"/>
+              </a:rPr>
+              <a:t>non-memes removed after round 4</a:t>
+            </a:r>
+          </a:p>
+        </p:txBody>
+      </p:sp>
+      <p:sp>
+        <p:nvSpPr>
+          <p:cNvPr id="182" name="TextBox 181"/>
+          <p:cNvSpPr txBox="1"/>
+          <p:nvPr/>
+        </p:nvSpPr>
+        <p:spPr>
+          <a:xfrm>
+            <a:off x="3383280" y="3886200"/>
+            <a:ext cx="2331720" cy="640080"/>
+          </a:xfrm>
+          <a:prstGeom prst="rect">
+            <a:avLst/>
+          </a:prstGeom>
+          <a:noFill/>
+        </p:spPr>
+        <p:txBody>
+          <a:bodyPr wrap="square" lIns="0" rIns="0" tIns="0" bIns="0">
+            <a:spAutoFit/>
+          </a:bodyPr>
+          <a:lstStyle/>
+          <a:p>
+            <a:r>
+              <a:rPr sz="2400" b="1">
+                <a:solidFill>
+                  <a:srgbClr val="121826"/>
+                </a:solidFill>
+                <a:latin typeface="Google Sans Flex"/>
+              </a:rPr>
+              <a:t>2.0 → 2.6</a:t>
+            </a:r>
+          </a:p>
+          <a:p>
+            <a:r>
+              <a:rPr sz="950">
+                <a:solidFill>
+                  <a:srgbClr val="566074"/>
+                </a:solidFill>
+                <a:latin typeface="Google Sans Flex"/>
+              </a:rPr>
+              <a:t>copy usability, round 4 → 5</a:t>
+            </a:r>
+          </a:p>
+        </p:txBody>
+      </p:sp>
+      <p:sp>
+        <p:nvSpPr>
+          <p:cNvPr id="183" name="TextBox 182"/>
+          <p:cNvSpPr txBox="1"/>
+          <p:nvPr/>
+        </p:nvSpPr>
+        <p:spPr>
+          <a:xfrm>
+            <a:off x="6217920" y="3886200"/>
+            <a:ext cx="2331720" cy="640080"/>
+          </a:xfrm>
+          <a:prstGeom prst="rect">
+            <a:avLst/>
+          </a:prstGeom>
+          <a:noFill/>
+        </p:spPr>
+        <p:txBody>
+          <a:bodyPr wrap="square" lIns="0" rIns="0" tIns="0" bIns="0">
+            <a:spAutoFit/>
+          </a:bodyPr>
+          <a:lstStyle/>
+          <a:p>
+            <a:r>
+              <a:rPr sz="2400" b="1">
+                <a:solidFill>
+                  <a:srgbClr val="121826"/>
+                </a:solidFill>
+                <a:latin typeface="Google Sans Flex"/>
+              </a:rPr>
+              <a:t>2 → 0</a:t>
+            </a:r>
+          </a:p>
+          <a:p>
+            <a:r>
+              <a:rPr sz="950">
+                <a:solidFill>
+                  <a:srgbClr val="566074"/>
+                </a:solidFill>
+                <a:latin typeface="Google Sans Flex"/>
+              </a:rPr>
+              <a:t>risky picks shown as safe, round 8 → 9</a:t>
+            </a:r>
+          </a:p>
+        </p:txBody>
+      </p:sp>
+    </p:spTree>
+  </p:cSld>
+  <p:clrMapOvr>
+    <a:masterClrMapping/>
+  </p:clrMapOvr>
+</p:sld>
+</file>
+
+<file path=ppt/slides/slide12.xml><?xml version="1.0" encoding="utf-8"?>
 <p:sld xmlns:a="http://schemas.openxmlformats.org/drawingml/2006/main" xmlns:r="http://schemas.openxmlformats.org/officeDocument/2006/relationships" xmlns:mc="http://schemas.openxmlformats.org/markup-compatibility/2006" xmlns:mv="urn:schemas-microsoft-com:mac:vml" xmlns:p="http://schemas.openxmlformats.org/presentationml/2006/main" xmlns:c="http://schemas.openxmlformats.org/drawingml/2006/chart" xmlns:dgm="http://schemas.openxmlformats.org/drawingml/2006/diagram" xmlns:o="urn:schemas-microsoft-com:office:office" xmlns:v="urn:schemas-microsoft-com:vml" xmlns:pvml="urn:schemas-microsoft-com:office:powerpoint" xmlns:com="http://schemas.openxmlformats.org/drawingml/2006/compatibility" xmlns:p14="http://schemas.microsoft.com/office/powerpoint/2010/main" xmlns:p15="http://schemas.microsoft.com/office/powerpoint/2012/main" xmlns:ahyp="http://schemas.microsoft.com/office/drawing/2018/hyperlinkcolor">
   <p:cSld>
     <p:spTree>
@@ -8399,8 +9493,8 @@
         </p:nvSpPr>
         <p:spPr>
           <a:xfrm>
-            <a:off x="265350" y="663825"/>
-            <a:ext cx="8943000" cy="561900"/>
+            <a:off x="265350" y="548640"/>
+            <a:ext cx="8943000" cy="256032"/>
           </a:xfrm>
           <a:prstGeom prst="rect">
             <a:avLst/>
@@ -8426,8 +9520,10 @@
               <a:buNone/>
             </a:pPr>
             <a:r>
-              <a:rPr lang="en-GB" sz="1600">
-                <a:solidFill/>
+              <a:rPr lang="en-GB" sz="1050">
+                <a:solidFill>
+                  <a:srgbClr val="566074"/>
+                </a:solidFill>
                 <a:latin typeface="Google Sans Flex Medium"/>
                 <a:ea typeface="Google Sans Flex Medium"/>
                 <a:cs typeface="Google Sans Flex Medium"/>
@@ -8993,547 +10089,36 @@
           </a:p>
         </p:txBody>
       </p:sp>
-    </p:spTree>
-  </p:cSld>
-  <p:clrMapOvr>
-    <a:masterClrMapping/>
-  </p:clrMapOvr>
-</p:sld>
-</file>
-
-<file path=ppt/slides/slide12.xml><?xml version="1.0" encoding="utf-8"?>
-<p:sld xmlns:a="http://schemas.openxmlformats.org/drawingml/2006/main" xmlns:r="http://schemas.openxmlformats.org/officeDocument/2006/relationships" xmlns:mc="http://schemas.openxmlformats.org/markup-compatibility/2006" xmlns:mv="urn:schemas-microsoft-com:mac:vml" xmlns:p="http://schemas.openxmlformats.org/presentationml/2006/main" xmlns:c="http://schemas.openxmlformats.org/drawingml/2006/chart" xmlns:dgm="http://schemas.openxmlformats.org/drawingml/2006/diagram" xmlns:o="urn:schemas-microsoft-com:office:office" xmlns:v="urn:schemas-microsoft-com:vml" xmlns:pvml="urn:schemas-microsoft-com:office:powerpoint" xmlns:com="http://schemas.openxmlformats.org/drawingml/2006/compatibility" xmlns:p14="http://schemas.microsoft.com/office/powerpoint/2010/main" xmlns:p15="http://schemas.microsoft.com/office/powerpoint/2012/main" xmlns:ahyp="http://schemas.microsoft.com/office/drawing/2018/hyperlinkcolor">
-  <p:cSld>
-    <p:spTree>
-      <p:nvGrpSpPr>
-        <p:cNvPr id="155" name="Shape 155"/>
-        <p:cNvGrpSpPr/>
-        <p:nvPr/>
-      </p:nvGrpSpPr>
-      <p:grpSpPr>
-        <a:xfrm>
-          <a:off x="0" y="0"/>
-          <a:ext cx="0" cy="0"/>
-          <a:chOff x="0" y="0"/>
-          <a:chExt cx="0" cy="0"/>
-        </a:xfrm>
-      </p:grpSpPr>
-      <p:pic>
-        <p:nvPicPr>
-          <p:cNvPr id="156" name="Google Shape;156;p26" title="Frame 144.png"/>
-          <p:cNvPicPr preferRelativeResize="0"/>
-          <p:nvPr/>
-        </p:nvPicPr>
-        <p:blipFill rotWithShape="1">
-          <a:blip r:embed="rId3">
-            <a:alphaModFix/>
-          </a:blip>
-          <a:srcRect b="98001" l="0" r="0" t="0"/>
-          <a:stretch/>
-        </p:blipFill>
-        <p:spPr>
-          <a:xfrm>
-            <a:off x="0" y="5093562"/>
-            <a:ext cx="9144000" cy="54275"/>
+      <p:sp>
+        <p:nvSpPr>
+          <p:cNvPr id="166" name="Headline"/>
+          <p:cNvSpPr txBox="1"/>
+          <p:nvPr/>
+        </p:nvSpPr>
+        <p:spPr>
+          <a:xfrm>
+            <a:off x="365760" y="786384"/>
+            <a:ext cx="8412480" cy="310896"/>
           </a:xfrm>
           <a:prstGeom prst="rect">
             <a:avLst/>
           </a:prstGeom>
           <a:noFill/>
-          <a:ln>
-            <a:noFill/>
-          </a:ln>
-        </p:spPr>
-      </p:pic>
-      <p:pic>
-        <p:nvPicPr>
-          <p:cNvPr id="157" name="Google Shape;157;p26" title="Group 427319979.png"/>
-          <p:cNvPicPr preferRelativeResize="0"/>
-          <p:nvPr/>
-        </p:nvPicPr>
-        <p:blipFill>
-          <a:blip r:embed="rId4">
-            <a:alphaModFix/>
-          </a:blip>
-          <a:stretch>
-            <a:fillRect/>
-          </a:stretch>
-        </p:blipFill>
-        <p:spPr>
-          <a:xfrm>
-            <a:off x="0" y="1"/>
-            <a:ext cx="9144000" cy="507359"/>
-          </a:xfrm>
-          <a:prstGeom prst="rect">
-            <a:avLst/>
-          </a:prstGeom>
-          <a:noFill/>
-          <a:ln>
-            <a:noFill/>
-          </a:ln>
-        </p:spPr>
-      </p:pic>
-      <p:sp>
-        <p:nvSpPr>
-          <p:cNvPr id="158" name="Google Shape;158;p26"/>
-          <p:cNvSpPr/>
-          <p:nvPr/>
-        </p:nvSpPr>
-        <p:spPr>
-          <a:xfrm>
-            <a:off x="-29250" y="5071875"/>
-            <a:ext cx="9173400" cy="97800"/>
-          </a:xfrm>
-          <a:prstGeom prst="rect">
-            <a:avLst/>
-          </a:prstGeom>
-          <a:solidFill>
-            <a:schemeClr val="dk1"/>
-          </a:solidFill>
-          <a:ln>
-            <a:noFill/>
-          </a:ln>
-        </p:spPr>
-        <p:txBody>
-          <a:bodyPr anchorCtr="0" anchor="ctr" bIns="91425" lIns="91425" spcFirstLastPara="1" rIns="91425" wrap="square" tIns="91425">
-            <a:noAutofit/>
+        </p:spPr>
+        <p:txBody>
+          <a:bodyPr wrap="square" lIns="0" rIns="0" tIns="0" bIns="0">
+            <a:spAutoFit/>
           </a:bodyPr>
           <a:lstStyle/>
           <a:p>
-            <a:pPr indent="0" lvl="0" marL="0" rtl="0" algn="ctr">
-              <a:spcBef>
-                <a:spcPts val="0"/>
-              </a:spcBef>
-              <a:spcAft>
-                <a:spcPts val="0"/>
-              </a:spcAft>
-              <a:buNone/>
-            </a:pPr>
-            <a:r>
-              <a:rPr>
-                <a:solidFill/>
-              </a:rPr>
-              <a:t/>
-            </a:r>
-            <a:endParaRPr/>
-          </a:p>
-        </p:txBody>
-      </p:sp>
-      <p:sp>
-        <p:nvSpPr>
-          <p:cNvPr id="159" name="Google Shape;159;p26"/>
-          <p:cNvSpPr txBox="1"/>
-          <p:nvPr/>
-        </p:nvSpPr>
-        <p:spPr>
-          <a:xfrm>
-            <a:off x="265350" y="663825"/>
-            <a:ext cx="8943000" cy="1463040"/>
-          </a:xfrm>
-          <a:prstGeom prst="rect">
-            <a:avLst/>
-          </a:prstGeom>
-          <a:noFill/>
-          <a:ln>
-            <a:noFill/>
-          </a:ln>
-        </p:spPr>
-        <p:txBody>
-          <a:bodyPr anchorCtr="0" anchor="t" bIns="91425" lIns="91425" spcFirstLastPara="1" rIns="91425" wrap="square" tIns="91425">
-            <a:noAutofit/>
-          </a:bodyPr>
-          <a:lstStyle/>
-          <a:p>
-            <a:pPr indent="0" lvl="0" marL="0" rtl="0" algn="l">
-              <a:spcBef>
-                <a:spcPts val="0"/>
-              </a:spcBef>
-              <a:spcAft>
-                <a:spcPts val="0"/>
-              </a:spcAft>
-              <a:buNone/>
-            </a:pPr>
-            <a:r>
-              <a:rPr lang="en-GB" sz="1600">
-                <a:solidFill/>
-                <a:latin typeface="Google Sans Flex Medium"/>
-                <a:ea typeface="Google Sans Flex Medium"/>
-                <a:cs typeface="Google Sans Flex Medium"/>
-                <a:sym typeface="Google Sans Flex Medium"/>
-              </a:rPr>
-              <a:t>Provide links to your:</a:t>
-            </a:r>
-            <a:endParaRPr sz="1600">
-              <a:latin typeface="Google Sans Flex Medium"/>
-              <a:ea typeface="Google Sans Flex Medium"/>
-              <a:cs typeface="Google Sans Flex Medium"/>
-              <a:sym typeface="Google Sans Flex Medium"/>
-            </a:endParaRPr>
-          </a:p>
-          <a:p>
-            <a:pPr indent="0" lvl="0" marL="0" rtl="0" algn="l">
-              <a:spcBef>
-                <a:spcPts val="0"/>
-              </a:spcBef>
-              <a:spcAft>
-                <a:spcPts val="0"/>
-              </a:spcAft>
-              <a:buNone/>
-            </a:pPr>
-            <a:r>
-              <a:rPr>
-                <a:solidFill/>
-              </a:rPr>
-              <a:t/>
-            </a:r>
-            <a:endParaRPr sz="1600">
-              <a:latin typeface="Google Sans Flex Medium"/>
-              <a:ea typeface="Google Sans Flex Medium"/>
-              <a:cs typeface="Google Sans Flex Medium"/>
-              <a:sym typeface="Google Sans Flex Medium"/>
-            </a:endParaRPr>
-          </a:p>
-          <a:p>
-            <a:pPr indent="-317500" lvl="0" marL="457200" rtl="0" algn="l">
-              <a:spcBef>
-                <a:spcPts val="0"/>
-              </a:spcBef>
-              <a:spcAft>
-                <a:spcPts val="0"/>
-              </a:spcAft>
-              <a:buSzPts val="1400"/>
-              <a:buFont typeface="Google Sans Flex Medium"/>
-              <a:buChar char="●"/>
-            </a:pPr>
-            <a:r>
-              <a:rPr lang="en-GB">
-                <a:solidFill/>
-                <a:latin typeface="Google Sans Flex Medium"/>
-                <a:ea typeface="Google Sans Flex Medium"/>
-                <a:cs typeface="Google Sans Flex Medium"/>
-                <a:sym typeface="Google Sans Flex Medium"/>
-              </a:rPr>
-              <a:t>GitHub Public Repository</a:t>
-            </a:r>
-            <a:r>
-              <a:rPr>
+            <a:r>
+              <a:rPr sz="1600" b="1">
                 <a:solidFill>
                   <a:srgbClr val="121826"/>
                 </a:solidFill>
                 <a:latin typeface="Google Sans Flex"/>
               </a:rPr>
-              <a:t>:  https://github.com/Sihyeon-Ji/2026-google-ai-builder-cup</a:t>
-            </a:r>
-            <a:endParaRPr>
-              <a:latin typeface="Google Sans Flex Medium"/>
-              <a:ea typeface="Google Sans Flex Medium"/>
-              <a:cs typeface="Google Sans Flex Medium"/>
-              <a:sym typeface="Google Sans Flex Medium"/>
-            </a:endParaRPr>
-          </a:p>
-          <a:p>
-            <a:pPr indent="-317500" lvl="0" marL="457200" rtl="0" algn="l">
-              <a:spcBef>
-                <a:spcPts val="0"/>
-              </a:spcBef>
-              <a:spcAft>
-                <a:spcPts val="0"/>
-              </a:spcAft>
-              <a:buSzPts val="1400"/>
-              <a:buFont typeface="Google Sans Flex Medium"/>
-              <a:buChar char="●"/>
-            </a:pPr>
-            <a:r>
-              <a:rPr lang="en-GB">
-                <a:solidFill/>
-                <a:latin typeface="Google Sans Flex Medium"/>
-                <a:ea typeface="Google Sans Flex Medium"/>
-                <a:cs typeface="Google Sans Flex Medium"/>
-                <a:sym typeface="Google Sans Flex Medium"/>
-              </a:rPr>
-              <a:t>Demo Video Link (3 Minutes)</a:t>
-            </a:r>
-            <a:r>
-              <a:rPr>
-                <a:solidFill>
-                  <a:srgbClr val="566074"/>
-                </a:solidFill>
-                <a:latin typeface="Google Sans Flex"/>
-              </a:rPr>
-              <a:t>:  [YouTube / Vimeo / Drive link – under 3 minutes]</a:t>
-            </a:r>
-            <a:endParaRPr>
-              <a:latin typeface="Google Sans Flex Medium"/>
-              <a:ea typeface="Google Sans Flex Medium"/>
-              <a:cs typeface="Google Sans Flex Medium"/>
-              <a:sym typeface="Google Sans Flex Medium"/>
-            </a:endParaRPr>
-          </a:p>
-          <a:p>
-            <a:pPr indent="-317500" lvl="0" marL="457200" rtl="0" algn="l">
-              <a:spcBef>
-                <a:spcPts val="0"/>
-              </a:spcBef>
-              <a:spcAft>
-                <a:spcPts val="0"/>
-              </a:spcAft>
-              <a:buSzPts val="1400"/>
-              <a:buFont typeface="Google Sans Flex Medium"/>
-              <a:buChar char="●"/>
-            </a:pPr>
-            <a:r>
-              <a:rPr lang="en-GB">
-                <a:solidFill/>
-                <a:latin typeface="Google Sans Flex Medium"/>
-                <a:ea typeface="Google Sans Flex Medium"/>
-                <a:cs typeface="Google Sans Flex Medium"/>
-                <a:sym typeface="Google Sans Flex Medium"/>
-              </a:rPr>
-              <a:t>Final Product Link</a:t>
-            </a:r>
-            <a:r>
-              <a:rPr>
-                <a:solidFill>
-                  <a:srgbClr val="566074"/>
-                </a:solidFill>
-                <a:latin typeface="Google Sans Flex"/>
-              </a:rPr>
-              <a:t>:  [Cloud Run URL]</a:t>
-            </a:r>
-            <a:endParaRPr>
-              <a:latin typeface="Google Sans Flex Medium"/>
-              <a:ea typeface="Google Sans Flex Medium"/>
-              <a:cs typeface="Google Sans Flex Medium"/>
-              <a:sym typeface="Google Sans Flex Medium"/>
-            </a:endParaRPr>
-          </a:p>
-          <a:p>
-            <a:pPr indent="0" lvl="0" marL="0" rtl="0" algn="l">
-              <a:spcBef>
-                <a:spcPts val="0"/>
-              </a:spcBef>
-              <a:spcAft>
-                <a:spcPts val="0"/>
-              </a:spcAft>
-              <a:buNone/>
-            </a:pPr>
-            <a:r>
-              <a:rPr>
-                <a:solidFill/>
-              </a:rPr>
-              <a:t/>
-            </a:r>
-            <a:endParaRPr sz="1600">
-              <a:latin typeface="Google Sans Flex Medium"/>
-              <a:ea typeface="Google Sans Flex Medium"/>
-              <a:cs typeface="Google Sans Flex Medium"/>
-              <a:sym typeface="Google Sans Flex Medium"/>
-            </a:endParaRPr>
-          </a:p>
-        </p:txBody>
-      </p:sp>
-      <p:sp>
-        <p:nvSpPr>
-          <p:cNvPr id="160" name="Rounded Rectangle 159"/>
-          <p:cNvSpPr/>
-          <p:nvPr/>
-        </p:nvSpPr>
-        <p:spPr>
-          <a:xfrm>
-            <a:off x="365760" y="2103120"/>
-            <a:ext cx="8412480" cy="2514600"/>
-          </a:xfrm>
-          <a:prstGeom prst="roundRect">
-            <a:avLst>
-              <a:gd name="adj" fmla="val 8000"/>
-            </a:avLst>
-          </a:prstGeom>
-          <a:solidFill>
-            <a:srgbClr val="F2F4F7"/>
-          </a:solidFill>
-          <a:ln w="9525">
-            <a:noFill/>
-          </a:ln>
-          <a:effectLst/>
-        </p:spPr>
-        <p:style>
-          <a:lnRef idx="1">
-            <a:schemeClr val="accent1"/>
-          </a:lnRef>
-          <a:fillRef idx="3">
-            <a:schemeClr val="accent1"/>
-          </a:fillRef>
-          <a:effectRef idx="0">
-            <a:schemeClr val="accent1"/>
-          </a:effectRef>
-          <a:fontRef idx="minor">
-            <a:schemeClr val="lt1"/>
-          </a:fontRef>
-        </p:style>
-        <p:txBody>
-          <a:bodyPr rtlCol="0" anchor="ctr"/>
-          <a:lstStyle/>
-          <a:p/>
-        </p:txBody>
-      </p:sp>
-      <p:sp>
-        <p:nvSpPr>
-          <p:cNvPr id="161" name="TextBox 160"/>
-          <p:cNvSpPr txBox="1"/>
-          <p:nvPr/>
-        </p:nvSpPr>
-        <p:spPr>
-          <a:xfrm>
-            <a:off x="548640" y="2212848"/>
-            <a:ext cx="8046720" cy="274320"/>
-          </a:xfrm>
-          <a:prstGeom prst="rect">
-            <a:avLst/>
-          </a:prstGeom>
-          <a:noFill/>
-        </p:spPr>
-        <p:txBody>
-          <a:bodyPr wrap="square" anchor="t" lIns="0" rIns="0" tIns="0" bIns="0">
-            <a:noAutofit/>
-          </a:bodyPr>
-          <a:lstStyle/>
-          <a:p>
-            <a:pPr algn="l">
-              <a:spcAft>
-                <a:spcPts val="400"/>
-              </a:spcAft>
-            </a:pPr>
-            <a:r>
-              <a:rPr sz="1200" b="1" i="0">
-                <a:solidFill>
-                  <a:srgbClr val="121826"/>
-                </a:solidFill>
-                <a:latin typeface="Google Sans Flex"/>
-              </a:rPr>
-              <a:t>Brief description – how we use Google Cloud and Gemini</a:t>
-            </a:r>
-          </a:p>
-        </p:txBody>
-      </p:sp>
-      <p:sp>
-        <p:nvSpPr>
-          <p:cNvPr id="162" name="TextBox 161"/>
-          <p:cNvSpPr txBox="1"/>
-          <p:nvPr/>
-        </p:nvSpPr>
-        <p:spPr>
-          <a:xfrm>
-            <a:off x="548640" y="2560320"/>
-            <a:ext cx="8046720" cy="2011680"/>
-          </a:xfrm>
-          <a:prstGeom prst="rect">
-            <a:avLst/>
-          </a:prstGeom>
-          <a:noFill/>
-        </p:spPr>
-        <p:txBody>
-          <a:bodyPr wrap="square" anchor="t" lIns="0" rIns="0" tIns="0" bIns="0">
-            <a:noAutofit/>
-          </a:bodyPr>
-          <a:lstStyle/>
-          <a:p>
-            <a:pPr algn="l">
-              <a:spcAft>
-                <a:spcPts val="600"/>
-              </a:spcAft>
-            </a:pPr>
-            <a:r>
-              <a:rPr sz="1050" b="1" i="0">
-                <a:solidFill>
-                  <a:srgbClr val="121826"/>
-                </a:solidFill>
-                <a:latin typeface="Google Sans Flex"/>
-              </a:rPr>
-              <a:t>Product. </a:t>
-            </a:r>
-            <a:r>
-              <a:rPr sz="1050" b="0" i="0">
-                <a:solidFill>
-                  <a:srgbClr val="121826"/>
-                </a:solidFill>
-                <a:latin typeface="Google Sans Flex"/>
-              </a:rPr>
-              <a:t>Trend Interpreter turns one product into local copy for Korea, Japan and English-language markets, using memes that are in use there now and safe for a brand. Rules pick the meme, Gemini writes, rules check every line and a person approves; every claim links to its source.</a:t>
-            </a:r>
-          </a:p>
-          <a:p>
-            <a:pPr algn="l">
-              <a:spcAft>
-                <a:spcPts val="600"/>
-              </a:spcAft>
-            </a:pPr>
-            <a:r>
-              <a:rPr sz="1050" b="1" i="0">
-                <a:solidFill>
-                  <a:srgbClr val="121826"/>
-                </a:solidFill>
-                <a:latin typeface="Google Sans Flex"/>
-              </a:rPr>
-              <a:t>Gemini (Vertex AI). </a:t>
-            </a:r>
-            <a:r>
-              <a:rPr sz="1050" b="0" i="0">
-                <a:solidFill>
-                  <a:srgbClr val="121826"/>
-                </a:solidFill>
-                <a:latin typeface="Google Sans Flex"/>
-              </a:rPr>
-              <a:t>Turns a product photo or line into a brief, then writes 4 lines, a video script and a thumbnail plan per market in one structured call; also judges whether copy uses a meme as meant. In the batch pipeline it reads trending Shorts and runs Search-grounded research.</a:t>
-            </a:r>
-          </a:p>
-          <a:p>
-            <a:pPr algn="l">
-              <a:spcAft>
-                <a:spcPts val="600"/>
-              </a:spcAft>
-            </a:pPr>
-            <a:r>
-              <a:rPr sz="1050" b="1" i="0">
-                <a:solidFill>
-                  <a:srgbClr val="121826"/>
-                </a:solidFill>
-                <a:latin typeface="Google Sans Flex"/>
-              </a:rPr>
-              <a:t>Cloud Run. </a:t>
-            </a:r>
-            <a:r>
-              <a:rPr sz="1050" b="0" i="0">
-                <a:solidFill>
-                  <a:srgbClr val="121826"/>
-                </a:solidFill>
-                <a:latin typeface="Google Sans Flex"/>
-              </a:rPr>
-              <a:t>Hosts the Next.js web app, the private FastAPI API, the publication, backup and maintenance jobs and the alert relay; data lives in Cloud SQL for PostgreSQL.</a:t>
-            </a:r>
-          </a:p>
-          <a:p>
-            <a:pPr algn="l">
-              <a:spcAft>
-                <a:spcPts val="600"/>
-              </a:spcAft>
-            </a:pPr>
-            <a:r>
-              <a:rPr sz="1050" b="1" i="0">
-                <a:solidFill>
-                  <a:srgbClr val="566074"/>
-                </a:solidFill>
-                <a:latin typeface="Google Sans Flex"/>
-              </a:rPr>
-              <a:t>Firebase / Firestore. </a:t>
-            </a:r>
-            <a:r>
-              <a:rPr sz="1050" b="0" i="0">
-                <a:solidFill>
-                  <a:srgbClr val="121826"/>
-                </a:solidFill>
-                <a:latin typeface="Google Sans Flex"/>
-              </a:rPr>
-              <a:t>Not used – the versioned dictionary is relational.</a:t>
+              <a:t>Next: the final data refresh, more Japanese memes and tests with marketers</a:t>
             </a:r>
           </a:p>
         </p:txBody>
@@ -9672,8 +10257,8 @@
         </p:nvSpPr>
         <p:spPr>
           <a:xfrm>
-            <a:off x="265350" y="663825"/>
-            <a:ext cx="8943000" cy="561900"/>
+            <a:off x="265350" y="548640"/>
+            <a:ext cx="8943000" cy="256032"/>
           </a:xfrm>
           <a:prstGeom prst="rect">
             <a:avLst/>
@@ -9699,14 +10284,16 @@
               <a:buNone/>
             </a:pPr>
             <a:r>
-              <a:rPr lang="en-GB" sz="1600">
-                <a:solidFill/>
+              <a:rPr lang="en-GB" sz="1050">
+                <a:solidFill>
+                  <a:srgbClr val="566074"/>
+                </a:solidFill>
                 <a:latin typeface="Google Sans Flex Medium"/>
                 <a:ea typeface="Google Sans Flex Medium"/>
                 <a:cs typeface="Google Sans Flex Medium"/>
                 <a:sym typeface="Google Sans Flex Medium"/>
               </a:rPr>
-              <a:t>Impact, feasibility and scalability</a:t>
+              <a:t>Additional Details/Future Development</a:t>
             </a:r>
             <a:endParaRPr sz="1600">
               <a:latin typeface="Google Sans Flex Medium"/>
@@ -9795,7 +10382,7 @@
                 </a:solidFill>
                 <a:latin typeface="Google Sans Flex"/>
               </a:rPr>
-              <a:t>Impact</a:t>
+              <a:t>Who pays</a:t>
             </a:r>
           </a:p>
         </p:txBody>
@@ -9839,7 +10426,7 @@
                 </a:solidFill>
                 <a:latin typeface="Google Sans Flex"/>
               </a:rPr>
-              <a:t>Marketers check lifespan and risk before a meme goes into a public campaign.</a:t>
+              <a:t>Brand marketing teams and their agencies running social campaigns in Korea, Japan and English-language JAPAC markets.</a:t>
             </a:r>
           </a:p>
           <a:p>
@@ -9860,7 +10447,7 @@
                 </a:solidFill>
                 <a:latin typeface="Google Sans Flex"/>
               </a:rPr>
-              <a:t>Marketers go from a product photo to approved local copy in one flow.</a:t>
+              <a:t>Japan’s social media marketing spend grew 13% in 2024.</a:t>
             </a:r>
           </a:p>
           <a:p>
@@ -9881,28 +10468,7 @@
                 </a:solidFill>
                 <a:latin typeface="Google Sans Flex"/>
               </a:rPr>
-              <a:t>Audiences across JAPAC see memes used with the meaning they know.</a:t>
-            </a:r>
-          </a:p>
-          <a:p>
-            <a:pPr algn="l" marL="146304" indent="-146304">
-              <a:spcAft>
-                <a:spcPts val="900"/>
-              </a:spcAft>
-              <a:buClr>
-                <a:srgbClr val="5F6368"/>
-              </a:buClr>
-              <a:buFont typeface="Arial"/>
-              <a:buChar char="•"/>
-            </a:pPr>
-            <a:r>
-              <a:rPr sz="1100" b="0" i="0">
-                <a:solidFill>
-                  <a:srgbClr val="566074"/>
-                </a:solidFill>
-                <a:latin typeface="Google Sans Flex"/>
-              </a:rPr>
-              <a:t>Expected benefits – not yet measured with users.</a:t>
+              <a:t>Korea’s online advertising reached ₩10.1 trillion in 2024, 59% of all ad spend.</a:t>
             </a:r>
           </a:p>
         </p:txBody>
@@ -9985,7 +10551,7 @@
                 </a:solidFill>
                 <a:latin typeface="Google Sans Flex"/>
               </a:rPr>
-              <a:t>Feasibility</a:t>
+              <a:t>What they use today</a:t>
             </a:r>
           </a:p>
         </p:txBody>
@@ -10029,7 +10595,7 @@
                 </a:solidFill>
                 <a:latin typeface="Google Sans Flex"/>
               </a:rPr>
-              <a:t>Deployed on Cloud Run with Cloud SQL; 8 of 12 evaluation cases run end to end with Gemini.</a:t>
+              <a:t>Listening tools: Sprout Social costs $199–$399 per seat a month, with listening as a paid add-on.</a:t>
             </a:r>
           </a:p>
           <a:p>
@@ -10050,7 +10616,7 @@
                 </a:solidFill>
                 <a:latin typeface="Google Sans Flex"/>
               </a:rPr>
-              <a:t>Verdicts and reasons are rule code; models draft meanings and write copy.</a:t>
+              <a:t>They count mentions and sentiment; none says whether a meme is safe to use or writes local copy a person approves.</a:t>
             </a:r>
           </a:p>
           <a:p>
@@ -10071,28 +10637,7 @@
                 </a:solidFill>
                 <a:latin typeface="Google Sans Flex"/>
               </a:rPr>
-              <a:t>510 API tests, 46 browser e2e tests and Terraform validation pass.</a:t>
-            </a:r>
-          </a:p>
-          <a:p>
-            <a:pPr algn="l" marL="146304" indent="-146304">
-              <a:spcAft>
-                <a:spcPts val="900"/>
-              </a:spcAft>
-              <a:buClr>
-                <a:srgbClr val="5F6368"/>
-              </a:buClr>
-              <a:buFont typeface="Arial"/>
-              <a:buChar char="•"/>
-            </a:pPr>
-            <a:r>
-              <a:rPr sz="1100" b="0" i="0">
-                <a:solidFill>
-                  <a:srgbClr val="121826"/>
-                </a:solidFill>
-                <a:latin typeface="Google Sans Flex"/>
-              </a:rPr>
-              <a:t>Built-in cost caps keep the service open through judging.</a:t>
+              <a:t>Teams fill the gap with community searches and agency checks.</a:t>
             </a:r>
           </a:p>
         </p:txBody>
@@ -10175,7 +10720,7 @@
                 </a:solidFill>
                 <a:latin typeface="Google Sans Flex"/>
               </a:rPr>
-              <a:t>Scalability</a:t>
+              <a:t>What it costs us</a:t>
             </a:r>
           </a:p>
         </p:txBody>
@@ -10219,7 +10764,7 @@
                 </a:solidFill>
                 <a:latin typeface="Google Sans Flex"/>
               </a:rPr>
-              <a:t>Collect globally, serve per market: a new region is a filter change plus data.</a:t>
+              <a:t>One 3-market draft takes about 7 Gemini calls: a product brief, then copy and an AI opinion per market.</a:t>
             </a:r>
           </a:p>
           <a:p>
@@ -10240,7 +10785,7 @@
                 </a:solidFill>
                 <a:latin typeface="Google Sans Flex"/>
               </a:rPr>
-              <a:t>Heavy AI work is batched once and reused by every user.</a:t>
+              <a:t>Proposed: a per-seat subscription for brand teams and a workspace per client for agencies.</a:t>
             </a:r>
           </a:p>
           <a:p>
@@ -10261,28 +10806,210 @@
                 </a:solidFill>
                 <a:latin typeface="Google Sans Flex"/>
               </a:rPr>
-              <a:t>Stateless Cloud Run services scale to zero and back out.</a:t>
-            </a:r>
-          </a:p>
-          <a:p>
-            <a:pPr algn="l" marL="146304" indent="-146304">
-              <a:spcAft>
-                <a:spcPts val="900"/>
-              </a:spcAft>
-              <a:buClr>
-                <a:srgbClr val="5F6368"/>
-              </a:buClr>
-              <a:buFont typeface="Arial"/>
-              <a:buChar char="•"/>
-            </a:pPr>
-            <a:r>
-              <a:rPr sz="1100" b="0" i="0">
+              <a:t>Not yet tested with paying users.</a:t>
+            </a:r>
+          </a:p>
+        </p:txBody>
+      </p:sp>
+      <p:sp>
+        <p:nvSpPr>
+          <p:cNvPr id="179" name="Headline"/>
+          <p:cNvSpPr txBox="1"/>
+          <p:nvPr/>
+        </p:nvSpPr>
+        <p:spPr>
+          <a:xfrm>
+            <a:off x="365760" y="786384"/>
+            <a:ext cx="8412480" cy="310896"/>
+          </a:xfrm>
+          <a:prstGeom prst="rect">
+            <a:avLst/>
+          </a:prstGeom>
+          <a:noFill/>
+        </p:spPr>
+        <p:txBody>
+          <a:bodyPr wrap="square" lIns="0" rIns="0" tIns="0" bIns="0">
+            <a:spAutoFit/>
+          </a:bodyPr>
+          <a:lstStyle/>
+          <a:p>
+            <a:r>
+              <a:rPr sz="1600" b="1">
                 <a:solidFill>
                   <a:srgbClr val="121826"/>
                 </a:solidFill>
                 <a:latin typeface="Google Sans Flex"/>
               </a:rPr>
-              <a:t>The same evidence dictionary can feed other content tools via the API.</a:t>
+              <a:t>Brand teams already pay for social tools; none answers this question</a:t>
+            </a:r>
+          </a:p>
+        </p:txBody>
+      </p:sp>
+      <p:sp>
+        <p:nvSpPr>
+          <p:cNvPr id="180" name="TextBox 179"/>
+          <p:cNvSpPr txBox="1"/>
+          <p:nvPr/>
+        </p:nvSpPr>
+        <p:spPr>
+          <a:xfrm>
+            <a:off x="548640" y="3886200"/>
+            <a:ext cx="2331720" cy="640080"/>
+          </a:xfrm>
+          <a:prstGeom prst="rect">
+            <a:avLst/>
+          </a:prstGeom>
+          <a:noFill/>
+        </p:spPr>
+        <p:txBody>
+          <a:bodyPr wrap="square" lIns="0" rIns="0" tIns="0" bIns="0">
+            <a:spAutoFit/>
+          </a:bodyPr>
+          <a:lstStyle/>
+          <a:p>
+            <a:r>
+              <a:rPr sz="2200" b="1">
+                <a:solidFill>
+                  <a:srgbClr val="121826"/>
+                </a:solidFill>
+                <a:latin typeface="Google Sans Flex"/>
+              </a:rPr>
+              <a:t>¥1.2 trillion</a:t>
+            </a:r>
+          </a:p>
+          <a:p>
+            <a:r>
+              <a:rPr sz="950">
+                <a:solidFill>
+                  <a:srgbClr val="566074"/>
+                </a:solidFill>
+                <a:latin typeface="Google Sans Flex"/>
+              </a:rPr>
+              <a:t>Japan social media marketing, 2024</a:t>
+            </a:r>
+          </a:p>
+        </p:txBody>
+      </p:sp>
+      <p:sp>
+        <p:nvSpPr>
+          <p:cNvPr id="181" name="TextBox 180"/>
+          <p:cNvSpPr txBox="1"/>
+          <p:nvPr/>
+        </p:nvSpPr>
+        <p:spPr>
+          <a:xfrm>
+            <a:off x="3383280" y="3886200"/>
+            <a:ext cx="2331720" cy="640080"/>
+          </a:xfrm>
+          <a:prstGeom prst="rect">
+            <a:avLst/>
+          </a:prstGeom>
+          <a:noFill/>
+        </p:spPr>
+        <p:txBody>
+          <a:bodyPr wrap="square" lIns="0" rIns="0" tIns="0" bIns="0">
+            <a:spAutoFit/>
+          </a:bodyPr>
+          <a:lstStyle/>
+          <a:p>
+            <a:r>
+              <a:rPr sz="2200" b="1">
+                <a:solidFill>
+                  <a:srgbClr val="121826"/>
+                </a:solidFill>
+                <a:latin typeface="Google Sans Flex"/>
+              </a:rPr>
+              <a:t>$50,000 / year</a:t>
+            </a:r>
+          </a:p>
+          <a:p>
+            <a:r>
+              <a:rPr sz="950">
+                <a:solidFill>
+                  <a:srgbClr val="566074"/>
+                </a:solidFill>
+                <a:latin typeface="Google Sans Flex"/>
+              </a:rPr>
+              <a:t>median Brandwatch contract</a:t>
+            </a:r>
+          </a:p>
+        </p:txBody>
+      </p:sp>
+      <p:sp>
+        <p:nvSpPr>
+          <p:cNvPr id="182" name="TextBox 181"/>
+          <p:cNvSpPr txBox="1"/>
+          <p:nvPr/>
+        </p:nvSpPr>
+        <p:spPr>
+          <a:xfrm>
+            <a:off x="6217920" y="3886200"/>
+            <a:ext cx="2331720" cy="640080"/>
+          </a:xfrm>
+          <a:prstGeom prst="rect">
+            <a:avLst/>
+          </a:prstGeom>
+          <a:noFill/>
+        </p:spPr>
+        <p:txBody>
+          <a:bodyPr wrap="square" lIns="0" rIns="0" tIns="0" bIns="0">
+            <a:spAutoFit/>
+          </a:bodyPr>
+          <a:lstStyle/>
+          <a:p>
+            <a:r>
+              <a:rPr sz="2200" b="1">
+                <a:solidFill>
+                  <a:srgbClr val="121826"/>
+                </a:solidFill>
+                <a:latin typeface="Google Sans Flex"/>
+              </a:rPr>
+              <a:t>≈ $0.01</a:t>
+            </a:r>
+          </a:p>
+          <a:p>
+            <a:r>
+              <a:rPr sz="950">
+                <a:solidFill>
+                  <a:srgbClr val="566074"/>
+                </a:solidFill>
+                <a:latin typeface="Google Sans Flex"/>
+              </a:rPr>
+              <a:t>Gemini cost of one 3-market draft, list price</a:t>
+            </a:r>
+          </a:p>
+        </p:txBody>
+      </p:sp>
+      <p:sp>
+        <p:nvSpPr>
+          <p:cNvPr id="183" name="TextBox 182"/>
+          <p:cNvSpPr txBox="1"/>
+          <p:nvPr/>
+        </p:nvSpPr>
+        <p:spPr>
+          <a:xfrm>
+            <a:off x="365760" y="4773168"/>
+            <a:ext cx="8412480" cy="182880"/>
+          </a:xfrm>
+          <a:prstGeom prst="rect">
+            <a:avLst/>
+          </a:prstGeom>
+          <a:noFill/>
+        </p:spPr>
+        <p:txBody>
+          <a:bodyPr wrap="none" lIns="0" rIns="0" tIns="0" bIns="0">
+            <a:spAutoFit/>
+          </a:bodyPr>
+          <a:lstStyle/>
+          <a:p>
+            <a:r>
+              <a:rPr sz="800">
+                <a:solidFill>
+                  <a:srgbClr val="566074"/>
+                </a:solidFill>
+                <a:latin typeface="Google Sans Flex"/>
+              </a:rPr>
+              <a:t>Sources 11–15 on the Sources slide. Cost per draft is our estimate from list prices; the pricing model is a proposal.</a:t>
             </a:r>
           </a:p>
         </p:txBody>
@@ -10296,6 +11023,2036 @@
 </file>
 
 <file path=ppt/slides/slide14.xml><?xml version="1.0" encoding="utf-8"?>
+<p:sld xmlns:a="http://schemas.openxmlformats.org/drawingml/2006/main" xmlns:r="http://schemas.openxmlformats.org/officeDocument/2006/relationships" xmlns:mc="http://schemas.openxmlformats.org/markup-compatibility/2006" xmlns:mv="urn:schemas-microsoft-com:mac:vml" xmlns:p="http://schemas.openxmlformats.org/presentationml/2006/main" xmlns:c="http://schemas.openxmlformats.org/drawingml/2006/chart" xmlns:dgm="http://schemas.openxmlformats.org/drawingml/2006/diagram" xmlns:o="urn:schemas-microsoft-com:office:office" xmlns:v="urn:schemas-microsoft-com:vml" xmlns:pvml="urn:schemas-microsoft-com:office:powerpoint" xmlns:com="http://schemas.openxmlformats.org/drawingml/2006/compatibility" xmlns:p14="http://schemas.microsoft.com/office/powerpoint/2010/main" xmlns:p15="http://schemas.microsoft.com/office/powerpoint/2012/main" xmlns:ahyp="http://schemas.microsoft.com/office/drawing/2018/hyperlinkcolor">
+  <p:cSld>
+    <p:spTree>
+      <p:nvGrpSpPr>
+        <p:cNvPr id="163" name="Shape 163"/>
+        <p:cNvGrpSpPr/>
+        <p:nvPr/>
+      </p:nvGrpSpPr>
+      <p:grpSpPr>
+        <a:xfrm>
+          <a:off x="0" y="0"/>
+          <a:ext cx="0" cy="0"/>
+          <a:chOff x="0" y="0"/>
+          <a:chExt cx="0" cy="0"/>
+        </a:xfrm>
+      </p:grpSpPr>
+      <p:pic>
+        <p:nvPicPr>
+          <p:cNvPr id="164" name="Google Shape;164;p27" title="Frame 144.png"/>
+          <p:cNvPicPr preferRelativeResize="0"/>
+          <p:nvPr/>
+        </p:nvPicPr>
+        <p:blipFill rotWithShape="1">
+          <a:blip r:embed="rId3">
+            <a:alphaModFix/>
+          </a:blip>
+          <a:srcRect b="98001" l="0" r="0" t="0"/>
+          <a:stretch/>
+        </p:blipFill>
+        <p:spPr>
+          <a:xfrm>
+            <a:off x="0" y="5093562"/>
+            <a:ext cx="9144000" cy="54275"/>
+          </a:xfrm>
+          <a:prstGeom prst="rect">
+            <a:avLst/>
+          </a:prstGeom>
+          <a:noFill/>
+          <a:ln>
+            <a:noFill/>
+          </a:ln>
+        </p:spPr>
+      </p:pic>
+      <p:pic>
+        <p:nvPicPr>
+          <p:cNvPr id="165" name="Google Shape;165;p27" title="Group 427319979.png"/>
+          <p:cNvPicPr preferRelativeResize="0"/>
+          <p:nvPr/>
+        </p:nvPicPr>
+        <p:blipFill>
+          <a:blip r:embed="rId4">
+            <a:alphaModFix/>
+          </a:blip>
+          <a:stretch>
+            <a:fillRect/>
+          </a:stretch>
+        </p:blipFill>
+        <p:spPr>
+          <a:xfrm>
+            <a:off x="0" y="1"/>
+            <a:ext cx="9144000" cy="507359"/>
+          </a:xfrm>
+          <a:prstGeom prst="rect">
+            <a:avLst/>
+          </a:prstGeom>
+          <a:noFill/>
+          <a:ln>
+            <a:noFill/>
+          </a:ln>
+        </p:spPr>
+      </p:pic>
+      <p:sp>
+        <p:nvSpPr>
+          <p:cNvPr id="166" name="Google Shape;166;p27"/>
+          <p:cNvSpPr/>
+          <p:nvPr/>
+        </p:nvSpPr>
+        <p:spPr>
+          <a:xfrm>
+            <a:off x="-29250" y="5071875"/>
+            <a:ext cx="9173400" cy="97800"/>
+          </a:xfrm>
+          <a:prstGeom prst="rect">
+            <a:avLst/>
+          </a:prstGeom>
+          <a:solidFill>
+            <a:schemeClr val="dk1"/>
+          </a:solidFill>
+          <a:ln>
+            <a:noFill/>
+          </a:ln>
+        </p:spPr>
+        <p:txBody>
+          <a:bodyPr anchorCtr="0" anchor="ctr" bIns="91425" lIns="91425" spcFirstLastPara="1" rIns="91425" wrap="square" tIns="91425">
+            <a:noAutofit/>
+          </a:bodyPr>
+          <a:lstStyle/>
+          <a:p>
+            <a:pPr indent="0" lvl="0" marL="0" rtl="0" algn="ctr">
+              <a:spcBef>
+                <a:spcPts val="0"/>
+              </a:spcBef>
+              <a:spcAft>
+                <a:spcPts val="0"/>
+              </a:spcAft>
+              <a:buNone/>
+            </a:pPr>
+            <a:r>
+              <a:rPr>
+                <a:solidFill/>
+              </a:rPr>
+              <a:t/>
+            </a:r>
+            <a:endParaRPr/>
+          </a:p>
+        </p:txBody>
+      </p:sp>
+      <p:sp>
+        <p:nvSpPr>
+          <p:cNvPr id="71" name="Google Shape;71;p15"/>
+          <p:cNvSpPr txBox="1"/>
+          <p:nvPr/>
+        </p:nvSpPr>
+        <p:spPr>
+          <a:xfrm>
+            <a:off x="265350" y="548640"/>
+            <a:ext cx="8943000" cy="256032"/>
+          </a:xfrm>
+          <a:prstGeom prst="rect">
+            <a:avLst/>
+          </a:prstGeom>
+          <a:noFill/>
+          <a:ln>
+            <a:noFill/>
+          </a:ln>
+        </p:spPr>
+        <p:txBody>
+          <a:bodyPr anchorCtr="0" anchor="t" bIns="91425" lIns="91425" spcFirstLastPara="1" rIns="91425" wrap="square" tIns="91425">
+            <a:noAutofit/>
+          </a:bodyPr>
+          <a:lstStyle/>
+          <a:p>
+            <a:pPr indent="0" lvl="0" marL="0" rtl="0" algn="l">
+              <a:spcBef>
+                <a:spcPts val="0"/>
+              </a:spcBef>
+              <a:spcAft>
+                <a:spcPts val="0"/>
+              </a:spcAft>
+              <a:buNone/>
+            </a:pPr>
+            <a:r>
+              <a:rPr lang="en-GB" sz="1050">
+                <a:solidFill>
+                  <a:srgbClr val="566074"/>
+                </a:solidFill>
+                <a:latin typeface="Google Sans Flex Medium"/>
+                <a:ea typeface="Google Sans Flex Medium"/>
+                <a:cs typeface="Google Sans Flex Medium"/>
+                <a:sym typeface="Google Sans Flex Medium"/>
+              </a:rPr>
+              <a:t>Impact, feasibility and scalability</a:t>
+            </a:r>
+            <a:endParaRPr sz="1600">
+              <a:latin typeface="Google Sans Flex Medium"/>
+              <a:ea typeface="Google Sans Flex Medium"/>
+              <a:cs typeface="Google Sans Flex Medium"/>
+              <a:sym typeface="Google Sans Flex Medium"/>
+            </a:endParaRPr>
+          </a:p>
+        </p:txBody>
+      </p:sp>
+      <p:sp>
+        <p:nvSpPr>
+          <p:cNvPr id="167" name="Rounded Rectangle 166"/>
+          <p:cNvSpPr/>
+          <p:nvPr/>
+        </p:nvSpPr>
+        <p:spPr>
+          <a:xfrm>
+            <a:off x="365760" y="1234440"/>
+            <a:ext cx="2697480" cy="3429000"/>
+          </a:xfrm>
+          <a:prstGeom prst="roundRect">
+            <a:avLst>
+              <a:gd name="adj" fmla="val 8000"/>
+            </a:avLst>
+          </a:prstGeom>
+          <a:solidFill>
+            <a:srgbClr val="F2F4F7"/>
+          </a:solidFill>
+          <a:ln w="9525">
+            <a:noFill/>
+          </a:ln>
+          <a:effectLst/>
+        </p:spPr>
+        <p:style>
+          <a:lnRef idx="1">
+            <a:schemeClr val="accent1"/>
+          </a:lnRef>
+          <a:fillRef idx="3">
+            <a:schemeClr val="accent1"/>
+          </a:fillRef>
+          <a:effectRef idx="0">
+            <a:schemeClr val="accent1"/>
+          </a:effectRef>
+          <a:fontRef idx="minor">
+            <a:schemeClr val="lt1"/>
+          </a:fontRef>
+        </p:style>
+        <p:txBody>
+          <a:bodyPr rtlCol="0" anchor="ctr"/>
+          <a:lstStyle/>
+          <a:p/>
+        </p:txBody>
+      </p:sp>
+      <p:sp>
+        <p:nvSpPr>
+          <p:cNvPr id="169" name="TextBox 168"/>
+          <p:cNvSpPr txBox="1"/>
+          <p:nvPr/>
+        </p:nvSpPr>
+        <p:spPr>
+          <a:xfrm>
+            <a:off x="530352" y="1353312"/>
+            <a:ext cx="2414016" cy="347472"/>
+          </a:xfrm>
+          <a:prstGeom prst="rect">
+            <a:avLst/>
+          </a:prstGeom>
+          <a:noFill/>
+        </p:spPr>
+        <p:txBody>
+          <a:bodyPr wrap="square" anchor="ctr" lIns="0" rIns="0" tIns="0" bIns="0">
+            <a:noAutofit/>
+          </a:bodyPr>
+          <a:lstStyle/>
+          <a:p>
+            <a:pPr algn="l">
+              <a:spcAft>
+                <a:spcPts val="400"/>
+              </a:spcAft>
+            </a:pPr>
+            <a:r>
+              <a:rPr sz="1200" b="1" i="0">
+                <a:solidFill>
+                  <a:srgbClr val="121826"/>
+                </a:solidFill>
+                <a:latin typeface="Google Sans Flex"/>
+              </a:rPr>
+              <a:t>Impact</a:t>
+            </a:r>
+          </a:p>
+        </p:txBody>
+      </p:sp>
+      <p:sp>
+        <p:nvSpPr>
+          <p:cNvPr id="170" name="TextBox 169"/>
+          <p:cNvSpPr txBox="1"/>
+          <p:nvPr/>
+        </p:nvSpPr>
+        <p:spPr>
+          <a:xfrm>
+            <a:off x="530352" y="1847088"/>
+            <a:ext cx="2395728" cy="2743200"/>
+          </a:xfrm>
+          <a:prstGeom prst="rect">
+            <a:avLst/>
+          </a:prstGeom>
+          <a:noFill/>
+        </p:spPr>
+        <p:txBody>
+          <a:bodyPr wrap="square" anchor="t" lIns="0" rIns="0" tIns="0" bIns="0">
+            <a:noAutofit/>
+          </a:bodyPr>
+          <a:lstStyle/>
+          <a:p>
+            <a:pPr algn="l" marL="146304" indent="-146304">
+              <a:spcAft>
+                <a:spcPts val="900"/>
+              </a:spcAft>
+              <a:buClr>
+                <a:srgbClr val="5F6368"/>
+              </a:buClr>
+              <a:buFont typeface="Arial"/>
+              <a:buChar char="•"/>
+            </a:pPr>
+            <a:r>
+              <a:rPr sz="1100" b="0" i="0">
+                <a:solidFill>
+                  <a:srgbClr val="121826"/>
+                </a:solidFill>
+                <a:latin typeface="Google Sans Flex"/>
+              </a:rPr>
+              <a:t>Marketers check lifespan and risk before a meme goes into a public campaign.</a:t>
+            </a:r>
+          </a:p>
+          <a:p>
+            <a:pPr algn="l" marL="146304" indent="-146304">
+              <a:spcAft>
+                <a:spcPts val="900"/>
+              </a:spcAft>
+              <a:buClr>
+                <a:srgbClr val="5F6368"/>
+              </a:buClr>
+              <a:buFont typeface="Arial"/>
+              <a:buChar char="•"/>
+            </a:pPr>
+            <a:r>
+              <a:rPr sz="1100" b="0" i="0">
+                <a:solidFill>
+                  <a:srgbClr val="121826"/>
+                </a:solidFill>
+                <a:latin typeface="Google Sans Flex"/>
+              </a:rPr>
+              <a:t>Marketers go from a product photo to approved local copy in one flow.</a:t>
+            </a:r>
+          </a:p>
+          <a:p>
+            <a:pPr algn="l" marL="146304" indent="-146304">
+              <a:spcAft>
+                <a:spcPts val="900"/>
+              </a:spcAft>
+              <a:buClr>
+                <a:srgbClr val="5F6368"/>
+              </a:buClr>
+              <a:buFont typeface="Arial"/>
+              <a:buChar char="•"/>
+            </a:pPr>
+            <a:r>
+              <a:rPr sz="1100" b="0" i="0">
+                <a:solidFill>
+                  <a:srgbClr val="121826"/>
+                </a:solidFill>
+                <a:latin typeface="Google Sans Flex"/>
+              </a:rPr>
+              <a:t>Audiences across JAPAC see memes used with the meaning they know.</a:t>
+            </a:r>
+          </a:p>
+          <a:p>
+            <a:pPr algn="l" marL="146304" indent="-146304">
+              <a:spcAft>
+                <a:spcPts val="900"/>
+              </a:spcAft>
+              <a:buClr>
+                <a:srgbClr val="5F6368"/>
+              </a:buClr>
+              <a:buFont typeface="Arial"/>
+              <a:buChar char="•"/>
+            </a:pPr>
+            <a:r>
+              <a:rPr sz="1100" b="0" i="0">
+                <a:solidFill>
+                  <a:srgbClr val="566074"/>
+                </a:solidFill>
+                <a:latin typeface="Google Sans Flex"/>
+              </a:rPr>
+              <a:t>Expected benefits – not yet measured with users.</a:t>
+            </a:r>
+          </a:p>
+        </p:txBody>
+      </p:sp>
+      <p:sp>
+        <p:nvSpPr>
+          <p:cNvPr id="171" name="Rounded Rectangle 170"/>
+          <p:cNvSpPr/>
+          <p:nvPr/>
+        </p:nvSpPr>
+        <p:spPr>
+          <a:xfrm>
+            <a:off x="3200400" y="1234440"/>
+            <a:ext cx="2697480" cy="3429000"/>
+          </a:xfrm>
+          <a:prstGeom prst="roundRect">
+            <a:avLst>
+              <a:gd name="adj" fmla="val 8000"/>
+            </a:avLst>
+          </a:prstGeom>
+          <a:solidFill>
+            <a:srgbClr val="F2F4F7"/>
+          </a:solidFill>
+          <a:ln w="9525">
+            <a:noFill/>
+          </a:ln>
+          <a:effectLst/>
+        </p:spPr>
+        <p:style>
+          <a:lnRef idx="1">
+            <a:schemeClr val="accent1"/>
+          </a:lnRef>
+          <a:fillRef idx="3">
+            <a:schemeClr val="accent1"/>
+          </a:fillRef>
+          <a:effectRef idx="0">
+            <a:schemeClr val="accent1"/>
+          </a:effectRef>
+          <a:fontRef idx="minor">
+            <a:schemeClr val="lt1"/>
+          </a:fontRef>
+        </p:style>
+        <p:txBody>
+          <a:bodyPr rtlCol="0" anchor="ctr"/>
+          <a:lstStyle/>
+          <a:p/>
+        </p:txBody>
+      </p:sp>
+      <p:sp>
+        <p:nvSpPr>
+          <p:cNvPr id="173" name="TextBox 172"/>
+          <p:cNvSpPr txBox="1"/>
+          <p:nvPr/>
+        </p:nvSpPr>
+        <p:spPr>
+          <a:xfrm>
+            <a:off x="3364992" y="1353312"/>
+            <a:ext cx="2414016" cy="347472"/>
+          </a:xfrm>
+          <a:prstGeom prst="rect">
+            <a:avLst/>
+          </a:prstGeom>
+          <a:noFill/>
+        </p:spPr>
+        <p:txBody>
+          <a:bodyPr wrap="square" anchor="ctr" lIns="0" rIns="0" tIns="0" bIns="0">
+            <a:noAutofit/>
+          </a:bodyPr>
+          <a:lstStyle/>
+          <a:p>
+            <a:pPr algn="l">
+              <a:spcAft>
+                <a:spcPts val="400"/>
+              </a:spcAft>
+            </a:pPr>
+            <a:r>
+              <a:rPr sz="1200" b="1" i="0">
+                <a:solidFill>
+                  <a:srgbClr val="121826"/>
+                </a:solidFill>
+                <a:latin typeface="Google Sans Flex"/>
+              </a:rPr>
+              <a:t>Feasibility</a:t>
+            </a:r>
+          </a:p>
+        </p:txBody>
+      </p:sp>
+      <p:sp>
+        <p:nvSpPr>
+          <p:cNvPr id="174" name="TextBox 173"/>
+          <p:cNvSpPr txBox="1"/>
+          <p:nvPr/>
+        </p:nvSpPr>
+        <p:spPr>
+          <a:xfrm>
+            <a:off x="3364992" y="1847088"/>
+            <a:ext cx="2395728" cy="2743200"/>
+          </a:xfrm>
+          <a:prstGeom prst="rect">
+            <a:avLst/>
+          </a:prstGeom>
+          <a:noFill/>
+        </p:spPr>
+        <p:txBody>
+          <a:bodyPr wrap="square" anchor="t" lIns="0" rIns="0" tIns="0" bIns="0">
+            <a:noAutofit/>
+          </a:bodyPr>
+          <a:lstStyle/>
+          <a:p>
+            <a:pPr algn="l" marL="146304" indent="-146304">
+              <a:spcAft>
+                <a:spcPts val="900"/>
+              </a:spcAft>
+              <a:buClr>
+                <a:srgbClr val="5F6368"/>
+              </a:buClr>
+              <a:buFont typeface="Arial"/>
+              <a:buChar char="•"/>
+            </a:pPr>
+            <a:r>
+              <a:rPr sz="1100" b="0" i="0">
+                <a:solidFill>
+                  <a:srgbClr val="121826"/>
+                </a:solidFill>
+                <a:latin typeface="Google Sans Flex"/>
+              </a:rPr>
+              <a:t>Deployed on Cloud Run with Cloud SQL; 8 of 12 evaluation cases run end to end with Gemini.</a:t>
+            </a:r>
+          </a:p>
+          <a:p>
+            <a:pPr algn="l" marL="146304" indent="-146304">
+              <a:spcAft>
+                <a:spcPts val="900"/>
+              </a:spcAft>
+              <a:buClr>
+                <a:srgbClr val="5F6368"/>
+              </a:buClr>
+              <a:buFont typeface="Arial"/>
+              <a:buChar char="•"/>
+            </a:pPr>
+            <a:r>
+              <a:rPr sz="1100" b="0" i="0">
+                <a:solidFill>
+                  <a:srgbClr val="121826"/>
+                </a:solidFill>
+                <a:latin typeface="Google Sans Flex"/>
+              </a:rPr>
+              <a:t>Verdicts and reasons are rule code; models draft meanings and write copy.</a:t>
+            </a:r>
+          </a:p>
+          <a:p>
+            <a:pPr algn="l" marL="146304" indent="-146304">
+              <a:spcAft>
+                <a:spcPts val="900"/>
+              </a:spcAft>
+              <a:buClr>
+                <a:srgbClr val="5F6368"/>
+              </a:buClr>
+              <a:buFont typeface="Arial"/>
+              <a:buChar char="•"/>
+            </a:pPr>
+            <a:r>
+              <a:rPr sz="1100" b="0" i="0">
+                <a:solidFill>
+                  <a:srgbClr val="121826"/>
+                </a:solidFill>
+                <a:latin typeface="Google Sans Flex"/>
+              </a:rPr>
+              <a:t>510 API tests, 46 browser e2e tests and Terraform validation pass.</a:t>
+            </a:r>
+          </a:p>
+          <a:p>
+            <a:pPr algn="l" marL="146304" indent="-146304">
+              <a:spcAft>
+                <a:spcPts val="900"/>
+              </a:spcAft>
+              <a:buClr>
+                <a:srgbClr val="5F6368"/>
+              </a:buClr>
+              <a:buFont typeface="Arial"/>
+              <a:buChar char="•"/>
+            </a:pPr>
+            <a:r>
+              <a:rPr sz="1100" b="0" i="0">
+                <a:solidFill>
+                  <a:srgbClr val="121826"/>
+                </a:solidFill>
+                <a:latin typeface="Google Sans Flex"/>
+              </a:rPr>
+              <a:t>Built-in cost caps keep the service open through judging.</a:t>
+            </a:r>
+          </a:p>
+        </p:txBody>
+      </p:sp>
+      <p:sp>
+        <p:nvSpPr>
+          <p:cNvPr id="175" name="Rounded Rectangle 174"/>
+          <p:cNvSpPr/>
+          <p:nvPr/>
+        </p:nvSpPr>
+        <p:spPr>
+          <a:xfrm>
+            <a:off x="6035040" y="1234440"/>
+            <a:ext cx="2697480" cy="3429000"/>
+          </a:xfrm>
+          <a:prstGeom prst="roundRect">
+            <a:avLst>
+              <a:gd name="adj" fmla="val 8000"/>
+            </a:avLst>
+          </a:prstGeom>
+          <a:solidFill>
+            <a:srgbClr val="F2F4F7"/>
+          </a:solidFill>
+          <a:ln w="9525">
+            <a:noFill/>
+          </a:ln>
+          <a:effectLst/>
+        </p:spPr>
+        <p:style>
+          <a:lnRef idx="1">
+            <a:schemeClr val="accent1"/>
+          </a:lnRef>
+          <a:fillRef idx="3">
+            <a:schemeClr val="accent1"/>
+          </a:fillRef>
+          <a:effectRef idx="0">
+            <a:schemeClr val="accent1"/>
+          </a:effectRef>
+          <a:fontRef idx="minor">
+            <a:schemeClr val="lt1"/>
+          </a:fontRef>
+        </p:style>
+        <p:txBody>
+          <a:bodyPr rtlCol="0" anchor="ctr"/>
+          <a:lstStyle/>
+          <a:p/>
+        </p:txBody>
+      </p:sp>
+      <p:sp>
+        <p:nvSpPr>
+          <p:cNvPr id="177" name="TextBox 176"/>
+          <p:cNvSpPr txBox="1"/>
+          <p:nvPr/>
+        </p:nvSpPr>
+        <p:spPr>
+          <a:xfrm>
+            <a:off x="6199632" y="1353312"/>
+            <a:ext cx="2414016" cy="347472"/>
+          </a:xfrm>
+          <a:prstGeom prst="rect">
+            <a:avLst/>
+          </a:prstGeom>
+          <a:noFill/>
+        </p:spPr>
+        <p:txBody>
+          <a:bodyPr wrap="square" anchor="ctr" lIns="0" rIns="0" tIns="0" bIns="0">
+            <a:noAutofit/>
+          </a:bodyPr>
+          <a:lstStyle/>
+          <a:p>
+            <a:pPr algn="l">
+              <a:spcAft>
+                <a:spcPts val="400"/>
+              </a:spcAft>
+            </a:pPr>
+            <a:r>
+              <a:rPr sz="1200" b="1" i="0">
+                <a:solidFill>
+                  <a:srgbClr val="121826"/>
+                </a:solidFill>
+                <a:latin typeface="Google Sans Flex"/>
+              </a:rPr>
+              <a:t>Scalability</a:t>
+            </a:r>
+          </a:p>
+        </p:txBody>
+      </p:sp>
+      <p:sp>
+        <p:nvSpPr>
+          <p:cNvPr id="178" name="TextBox 177"/>
+          <p:cNvSpPr txBox="1"/>
+          <p:nvPr/>
+        </p:nvSpPr>
+        <p:spPr>
+          <a:xfrm>
+            <a:off x="6199632" y="1847088"/>
+            <a:ext cx="2395728" cy="2743200"/>
+          </a:xfrm>
+          <a:prstGeom prst="rect">
+            <a:avLst/>
+          </a:prstGeom>
+          <a:noFill/>
+        </p:spPr>
+        <p:txBody>
+          <a:bodyPr wrap="square" anchor="t" lIns="0" rIns="0" tIns="0" bIns="0">
+            <a:noAutofit/>
+          </a:bodyPr>
+          <a:lstStyle/>
+          <a:p>
+            <a:pPr algn="l" marL="146304" indent="-146304">
+              <a:spcAft>
+                <a:spcPts val="900"/>
+              </a:spcAft>
+              <a:buClr>
+                <a:srgbClr val="5F6368"/>
+              </a:buClr>
+              <a:buFont typeface="Arial"/>
+              <a:buChar char="•"/>
+            </a:pPr>
+            <a:r>
+              <a:rPr sz="1100" b="0" i="0">
+                <a:solidFill>
+                  <a:srgbClr val="121826"/>
+                </a:solidFill>
+                <a:latin typeface="Google Sans Flex"/>
+              </a:rPr>
+              <a:t>Collect globally, serve per market: a new region is a filter change plus data.</a:t>
+            </a:r>
+          </a:p>
+          <a:p>
+            <a:pPr algn="l" marL="146304" indent="-146304">
+              <a:spcAft>
+                <a:spcPts val="900"/>
+              </a:spcAft>
+              <a:buClr>
+                <a:srgbClr val="5F6368"/>
+              </a:buClr>
+              <a:buFont typeface="Arial"/>
+              <a:buChar char="•"/>
+            </a:pPr>
+            <a:r>
+              <a:rPr sz="1100" b="0" i="0">
+                <a:solidFill>
+                  <a:srgbClr val="121826"/>
+                </a:solidFill>
+                <a:latin typeface="Google Sans Flex"/>
+              </a:rPr>
+              <a:t>Heavy AI work is batched once and reused by every user.</a:t>
+            </a:r>
+          </a:p>
+          <a:p>
+            <a:pPr algn="l" marL="146304" indent="-146304">
+              <a:spcAft>
+                <a:spcPts val="900"/>
+              </a:spcAft>
+              <a:buClr>
+                <a:srgbClr val="5F6368"/>
+              </a:buClr>
+              <a:buFont typeface="Arial"/>
+              <a:buChar char="•"/>
+            </a:pPr>
+            <a:r>
+              <a:rPr sz="1100" b="0" i="0">
+                <a:solidFill>
+                  <a:srgbClr val="121826"/>
+                </a:solidFill>
+                <a:latin typeface="Google Sans Flex"/>
+              </a:rPr>
+              <a:t>Stateless Cloud Run services scale to zero and back out.</a:t>
+            </a:r>
+          </a:p>
+          <a:p>
+            <a:pPr algn="l" marL="146304" indent="-146304">
+              <a:spcAft>
+                <a:spcPts val="900"/>
+              </a:spcAft>
+              <a:buClr>
+                <a:srgbClr val="5F6368"/>
+              </a:buClr>
+              <a:buFont typeface="Arial"/>
+              <a:buChar char="•"/>
+            </a:pPr>
+            <a:r>
+              <a:rPr sz="1100" b="0" i="0">
+                <a:solidFill>
+                  <a:srgbClr val="121826"/>
+                </a:solidFill>
+                <a:latin typeface="Google Sans Flex"/>
+              </a:rPr>
+              <a:t>The same evidence dictionary can feed other content tools via the API.</a:t>
+            </a:r>
+          </a:p>
+        </p:txBody>
+      </p:sp>
+      <p:sp>
+        <p:nvSpPr>
+          <p:cNvPr id="179" name="Headline"/>
+          <p:cNvSpPr txBox="1"/>
+          <p:nvPr/>
+        </p:nvSpPr>
+        <p:spPr>
+          <a:xfrm>
+            <a:off x="365760" y="786384"/>
+            <a:ext cx="8412480" cy="310896"/>
+          </a:xfrm>
+          <a:prstGeom prst="rect">
+            <a:avLst/>
+          </a:prstGeom>
+          <a:noFill/>
+        </p:spPr>
+        <p:txBody>
+          <a:bodyPr wrap="square" lIns="0" rIns="0" tIns="0" bIns="0">
+            <a:spAutoFit/>
+          </a:bodyPr>
+          <a:lstStyle/>
+          <a:p>
+            <a:r>
+              <a:rPr sz="1600" b="1">
+                <a:solidFill>
+                  <a:srgbClr val="121826"/>
+                </a:solidFill>
+                <a:latin typeface="Google Sans Flex"/>
+              </a:rPr>
+              <a:t>Deployed today; a new market needs data, not new code</a:t>
+            </a:r>
+          </a:p>
+        </p:txBody>
+      </p:sp>
+    </p:spTree>
+  </p:cSld>
+  <p:clrMapOvr>
+    <a:masterClrMapping/>
+  </p:clrMapOvr>
+</p:sld>
+</file>
+
+<file path=ppt/slides/slide15.xml><?xml version="1.0" encoding="utf-8"?>
+<p:sld xmlns:a="http://schemas.openxmlformats.org/drawingml/2006/main" xmlns:r="http://schemas.openxmlformats.org/officeDocument/2006/relationships" xmlns:mc="http://schemas.openxmlformats.org/markup-compatibility/2006" xmlns:mv="urn:schemas-microsoft-com:mac:vml" xmlns:p="http://schemas.openxmlformats.org/presentationml/2006/main" xmlns:c="http://schemas.openxmlformats.org/drawingml/2006/chart" xmlns:dgm="http://schemas.openxmlformats.org/drawingml/2006/diagram" xmlns:o="urn:schemas-microsoft-com:office:office" xmlns:v="urn:schemas-microsoft-com:vml" xmlns:pvml="urn:schemas-microsoft-com:office:powerpoint" xmlns:com="http://schemas.openxmlformats.org/drawingml/2006/compatibility" xmlns:p14="http://schemas.microsoft.com/office/powerpoint/2010/main" xmlns:p15="http://schemas.microsoft.com/office/powerpoint/2012/main" xmlns:ahyp="http://schemas.microsoft.com/office/drawing/2018/hyperlinkcolor">
+  <p:cSld>
+    <p:spTree>
+      <p:nvGrpSpPr>
+        <p:cNvPr id="155" name="Shape 155"/>
+        <p:cNvGrpSpPr/>
+        <p:nvPr/>
+      </p:nvGrpSpPr>
+      <p:grpSpPr>
+        <a:xfrm>
+          <a:off x="0" y="0"/>
+          <a:ext cx="0" cy="0"/>
+          <a:chOff x="0" y="0"/>
+          <a:chExt cx="0" cy="0"/>
+        </a:xfrm>
+      </p:grpSpPr>
+      <p:pic>
+        <p:nvPicPr>
+          <p:cNvPr id="156" name="Google Shape;156;p26" title="Frame 144.png"/>
+          <p:cNvPicPr preferRelativeResize="0"/>
+          <p:nvPr/>
+        </p:nvPicPr>
+        <p:blipFill rotWithShape="1">
+          <a:blip r:embed="rId3">
+            <a:alphaModFix/>
+          </a:blip>
+          <a:srcRect b="98001" l="0" r="0" t="0"/>
+          <a:stretch/>
+        </p:blipFill>
+        <p:spPr>
+          <a:xfrm>
+            <a:off x="0" y="5093562"/>
+            <a:ext cx="9144000" cy="54275"/>
+          </a:xfrm>
+          <a:prstGeom prst="rect">
+            <a:avLst/>
+          </a:prstGeom>
+          <a:noFill/>
+          <a:ln>
+            <a:noFill/>
+          </a:ln>
+        </p:spPr>
+      </p:pic>
+      <p:pic>
+        <p:nvPicPr>
+          <p:cNvPr id="157" name="Google Shape;157;p26" title="Group 427319979.png"/>
+          <p:cNvPicPr preferRelativeResize="0"/>
+          <p:nvPr/>
+        </p:nvPicPr>
+        <p:blipFill>
+          <a:blip r:embed="rId4">
+            <a:alphaModFix/>
+          </a:blip>
+          <a:stretch>
+            <a:fillRect/>
+          </a:stretch>
+        </p:blipFill>
+        <p:spPr>
+          <a:xfrm>
+            <a:off x="0" y="1"/>
+            <a:ext cx="9144000" cy="507359"/>
+          </a:xfrm>
+          <a:prstGeom prst="rect">
+            <a:avLst/>
+          </a:prstGeom>
+          <a:noFill/>
+          <a:ln>
+            <a:noFill/>
+          </a:ln>
+        </p:spPr>
+      </p:pic>
+      <p:sp>
+        <p:nvSpPr>
+          <p:cNvPr id="158" name="Google Shape;158;p26"/>
+          <p:cNvSpPr/>
+          <p:nvPr/>
+        </p:nvSpPr>
+        <p:spPr>
+          <a:xfrm>
+            <a:off x="-29250" y="5071875"/>
+            <a:ext cx="9173400" cy="97800"/>
+          </a:xfrm>
+          <a:prstGeom prst="rect">
+            <a:avLst/>
+          </a:prstGeom>
+          <a:solidFill>
+            <a:schemeClr val="dk1"/>
+          </a:solidFill>
+          <a:ln>
+            <a:noFill/>
+          </a:ln>
+        </p:spPr>
+        <p:txBody>
+          <a:bodyPr anchorCtr="0" anchor="ctr" bIns="91425" lIns="91425" spcFirstLastPara="1" rIns="91425" wrap="square" tIns="91425">
+            <a:noAutofit/>
+          </a:bodyPr>
+          <a:lstStyle/>
+          <a:p>
+            <a:pPr indent="0" lvl="0" marL="0" rtl="0" algn="ctr">
+              <a:spcBef>
+                <a:spcPts val="0"/>
+              </a:spcBef>
+              <a:spcAft>
+                <a:spcPts val="0"/>
+              </a:spcAft>
+              <a:buNone/>
+            </a:pPr>
+            <a:r>
+              <a:rPr>
+                <a:solidFill/>
+              </a:rPr>
+              <a:t/>
+            </a:r>
+            <a:endParaRPr/>
+          </a:p>
+        </p:txBody>
+      </p:sp>
+      <p:sp>
+        <p:nvSpPr>
+          <p:cNvPr id="159" name="Google Shape;159;p26"/>
+          <p:cNvSpPr txBox="1"/>
+          <p:nvPr/>
+        </p:nvSpPr>
+        <p:spPr>
+          <a:xfrm>
+            <a:off x="265350" y="663825"/>
+            <a:ext cx="8943000" cy="1463040"/>
+          </a:xfrm>
+          <a:prstGeom prst="rect">
+            <a:avLst/>
+          </a:prstGeom>
+          <a:noFill/>
+          <a:ln>
+            <a:noFill/>
+          </a:ln>
+        </p:spPr>
+        <p:txBody>
+          <a:bodyPr anchorCtr="0" anchor="t" bIns="91425" lIns="91425" spcFirstLastPara="1" rIns="91425" wrap="square" tIns="91425">
+            <a:noAutofit/>
+          </a:bodyPr>
+          <a:lstStyle/>
+          <a:p>
+            <a:pPr indent="0" lvl="0" marL="0" rtl="0" algn="l">
+              <a:spcBef>
+                <a:spcPts val="0"/>
+              </a:spcBef>
+              <a:spcAft>
+                <a:spcPts val="0"/>
+              </a:spcAft>
+              <a:buNone/>
+            </a:pPr>
+            <a:r>
+              <a:rPr lang="en-GB" sz="1600">
+                <a:solidFill/>
+                <a:latin typeface="Google Sans Flex Medium"/>
+                <a:ea typeface="Google Sans Flex Medium"/>
+                <a:cs typeface="Google Sans Flex Medium"/>
+                <a:sym typeface="Google Sans Flex Medium"/>
+              </a:rPr>
+              <a:t>Provide links to your:</a:t>
+            </a:r>
+            <a:endParaRPr sz="1600">
+              <a:latin typeface="Google Sans Flex Medium"/>
+              <a:ea typeface="Google Sans Flex Medium"/>
+              <a:cs typeface="Google Sans Flex Medium"/>
+              <a:sym typeface="Google Sans Flex Medium"/>
+            </a:endParaRPr>
+          </a:p>
+          <a:p>
+            <a:pPr indent="0" lvl="0" marL="0" rtl="0" algn="l">
+              <a:spcBef>
+                <a:spcPts val="0"/>
+              </a:spcBef>
+              <a:spcAft>
+                <a:spcPts val="0"/>
+              </a:spcAft>
+              <a:buNone/>
+            </a:pPr>
+            <a:r>
+              <a:rPr>
+                <a:solidFill/>
+              </a:rPr>
+              <a:t/>
+            </a:r>
+            <a:endParaRPr sz="1600">
+              <a:latin typeface="Google Sans Flex Medium"/>
+              <a:ea typeface="Google Sans Flex Medium"/>
+              <a:cs typeface="Google Sans Flex Medium"/>
+              <a:sym typeface="Google Sans Flex Medium"/>
+            </a:endParaRPr>
+          </a:p>
+          <a:p>
+            <a:pPr indent="-317500" lvl="0" marL="457200" rtl="0" algn="l">
+              <a:spcBef>
+                <a:spcPts val="0"/>
+              </a:spcBef>
+              <a:spcAft>
+                <a:spcPts val="0"/>
+              </a:spcAft>
+              <a:buSzPts val="1400"/>
+              <a:buFont typeface="Google Sans Flex Medium"/>
+              <a:buChar char="●"/>
+            </a:pPr>
+            <a:r>
+              <a:rPr lang="en-GB">
+                <a:solidFill/>
+                <a:latin typeface="Google Sans Flex Medium"/>
+                <a:ea typeface="Google Sans Flex Medium"/>
+                <a:cs typeface="Google Sans Flex Medium"/>
+                <a:sym typeface="Google Sans Flex Medium"/>
+              </a:rPr>
+              <a:t>GitHub Public Repository</a:t>
+            </a:r>
+            <a:r>
+              <a:rPr>
+                <a:solidFill>
+                  <a:srgbClr val="121826"/>
+                </a:solidFill>
+                <a:latin typeface="Google Sans Flex"/>
+              </a:rPr>
+              <a:t>:  https://github.com/Sihyeon-Ji/2026-google-ai-builder-cup</a:t>
+            </a:r>
+            <a:endParaRPr>
+              <a:latin typeface="Google Sans Flex Medium"/>
+              <a:ea typeface="Google Sans Flex Medium"/>
+              <a:cs typeface="Google Sans Flex Medium"/>
+              <a:sym typeface="Google Sans Flex Medium"/>
+            </a:endParaRPr>
+          </a:p>
+          <a:p>
+            <a:pPr indent="-317500" lvl="0" marL="457200" rtl="0" algn="l">
+              <a:spcBef>
+                <a:spcPts val="0"/>
+              </a:spcBef>
+              <a:spcAft>
+                <a:spcPts val="0"/>
+              </a:spcAft>
+              <a:buSzPts val="1400"/>
+              <a:buFont typeface="Google Sans Flex Medium"/>
+              <a:buChar char="●"/>
+            </a:pPr>
+            <a:r>
+              <a:rPr lang="en-GB">
+                <a:solidFill/>
+                <a:latin typeface="Google Sans Flex Medium"/>
+                <a:ea typeface="Google Sans Flex Medium"/>
+                <a:cs typeface="Google Sans Flex Medium"/>
+                <a:sym typeface="Google Sans Flex Medium"/>
+              </a:rPr>
+              <a:t>Demo Video Link (3 Minutes)</a:t>
+            </a:r>
+            <a:r>
+              <a:rPr>
+                <a:solidFill>
+                  <a:srgbClr val="566074"/>
+                </a:solidFill>
+                <a:latin typeface="Google Sans Flex"/>
+              </a:rPr>
+              <a:t>:  [YouTube / Vimeo / Drive link – under 3 minutes]</a:t>
+            </a:r>
+            <a:endParaRPr>
+              <a:latin typeface="Google Sans Flex Medium"/>
+              <a:ea typeface="Google Sans Flex Medium"/>
+              <a:cs typeface="Google Sans Flex Medium"/>
+              <a:sym typeface="Google Sans Flex Medium"/>
+            </a:endParaRPr>
+          </a:p>
+          <a:p>
+            <a:pPr indent="-317500" lvl="0" marL="457200" rtl="0" algn="l">
+              <a:spcBef>
+                <a:spcPts val="0"/>
+              </a:spcBef>
+              <a:spcAft>
+                <a:spcPts val="0"/>
+              </a:spcAft>
+              <a:buSzPts val="1400"/>
+              <a:buFont typeface="Google Sans Flex Medium"/>
+              <a:buChar char="●"/>
+            </a:pPr>
+            <a:r>
+              <a:rPr lang="en-GB">
+                <a:solidFill/>
+                <a:latin typeface="Google Sans Flex Medium"/>
+                <a:ea typeface="Google Sans Flex Medium"/>
+                <a:cs typeface="Google Sans Flex Medium"/>
+                <a:sym typeface="Google Sans Flex Medium"/>
+              </a:rPr>
+              <a:t>Final Product Link</a:t>
+            </a:r>
+            <a:r>
+              <a:rPr>
+                <a:solidFill>
+                  <a:srgbClr val="566074"/>
+                </a:solidFill>
+                <a:latin typeface="Google Sans Flex"/>
+              </a:rPr>
+              <a:t>:  [Cloud Run URL]</a:t>
+            </a:r>
+            <a:endParaRPr>
+              <a:latin typeface="Google Sans Flex Medium"/>
+              <a:ea typeface="Google Sans Flex Medium"/>
+              <a:cs typeface="Google Sans Flex Medium"/>
+              <a:sym typeface="Google Sans Flex Medium"/>
+            </a:endParaRPr>
+          </a:p>
+          <a:p>
+            <a:pPr indent="0" lvl="0" marL="0" rtl="0" algn="l">
+              <a:spcBef>
+                <a:spcPts val="0"/>
+              </a:spcBef>
+              <a:spcAft>
+                <a:spcPts val="0"/>
+              </a:spcAft>
+              <a:buNone/>
+            </a:pPr>
+            <a:r>
+              <a:rPr>
+                <a:solidFill/>
+              </a:rPr>
+              <a:t/>
+            </a:r>
+            <a:endParaRPr sz="1600">
+              <a:latin typeface="Google Sans Flex Medium"/>
+              <a:ea typeface="Google Sans Flex Medium"/>
+              <a:cs typeface="Google Sans Flex Medium"/>
+              <a:sym typeface="Google Sans Flex Medium"/>
+            </a:endParaRPr>
+          </a:p>
+        </p:txBody>
+      </p:sp>
+      <p:sp>
+        <p:nvSpPr>
+          <p:cNvPr id="160" name="Rounded Rectangle 159"/>
+          <p:cNvSpPr/>
+          <p:nvPr/>
+        </p:nvSpPr>
+        <p:spPr>
+          <a:xfrm>
+            <a:off x="365760" y="2103120"/>
+            <a:ext cx="8412480" cy="2514600"/>
+          </a:xfrm>
+          <a:prstGeom prst="roundRect">
+            <a:avLst>
+              <a:gd name="adj" fmla="val 8000"/>
+            </a:avLst>
+          </a:prstGeom>
+          <a:solidFill>
+            <a:srgbClr val="F2F4F7"/>
+          </a:solidFill>
+          <a:ln w="9525">
+            <a:noFill/>
+          </a:ln>
+          <a:effectLst/>
+        </p:spPr>
+        <p:style>
+          <a:lnRef idx="1">
+            <a:schemeClr val="accent1"/>
+          </a:lnRef>
+          <a:fillRef idx="3">
+            <a:schemeClr val="accent1"/>
+          </a:fillRef>
+          <a:effectRef idx="0">
+            <a:schemeClr val="accent1"/>
+          </a:effectRef>
+          <a:fontRef idx="minor">
+            <a:schemeClr val="lt1"/>
+          </a:fontRef>
+        </p:style>
+        <p:txBody>
+          <a:bodyPr rtlCol="0" anchor="ctr"/>
+          <a:lstStyle/>
+          <a:p/>
+        </p:txBody>
+      </p:sp>
+      <p:sp>
+        <p:nvSpPr>
+          <p:cNvPr id="161" name="TextBox 160"/>
+          <p:cNvSpPr txBox="1"/>
+          <p:nvPr/>
+        </p:nvSpPr>
+        <p:spPr>
+          <a:xfrm>
+            <a:off x="548640" y="2212848"/>
+            <a:ext cx="8046720" cy="274320"/>
+          </a:xfrm>
+          <a:prstGeom prst="rect">
+            <a:avLst/>
+          </a:prstGeom>
+          <a:noFill/>
+        </p:spPr>
+        <p:txBody>
+          <a:bodyPr wrap="square" anchor="t" lIns="0" rIns="0" tIns="0" bIns="0">
+            <a:noAutofit/>
+          </a:bodyPr>
+          <a:lstStyle/>
+          <a:p>
+            <a:pPr algn="l">
+              <a:spcAft>
+                <a:spcPts val="400"/>
+              </a:spcAft>
+            </a:pPr>
+            <a:r>
+              <a:rPr sz="1200" b="1" i="0">
+                <a:solidFill>
+                  <a:srgbClr val="121826"/>
+                </a:solidFill>
+                <a:latin typeface="Google Sans Flex"/>
+              </a:rPr>
+              <a:t>Brief description – how we use Google Cloud and Gemini</a:t>
+            </a:r>
+          </a:p>
+        </p:txBody>
+      </p:sp>
+      <p:sp>
+        <p:nvSpPr>
+          <p:cNvPr id="162" name="TextBox 161"/>
+          <p:cNvSpPr txBox="1"/>
+          <p:nvPr/>
+        </p:nvSpPr>
+        <p:spPr>
+          <a:xfrm>
+            <a:off x="548640" y="2560320"/>
+            <a:ext cx="8046720" cy="2011680"/>
+          </a:xfrm>
+          <a:prstGeom prst="rect">
+            <a:avLst/>
+          </a:prstGeom>
+          <a:noFill/>
+        </p:spPr>
+        <p:txBody>
+          <a:bodyPr wrap="square" anchor="t" lIns="0" rIns="0" tIns="0" bIns="0">
+            <a:noAutofit/>
+          </a:bodyPr>
+          <a:lstStyle/>
+          <a:p>
+            <a:pPr algn="l">
+              <a:spcAft>
+                <a:spcPts val="600"/>
+              </a:spcAft>
+            </a:pPr>
+            <a:r>
+              <a:rPr sz="1050" b="1" i="0">
+                <a:solidFill>
+                  <a:srgbClr val="121826"/>
+                </a:solidFill>
+                <a:latin typeface="Google Sans Flex"/>
+              </a:rPr>
+              <a:t>Product. </a:t>
+            </a:r>
+            <a:r>
+              <a:rPr sz="1050" b="0" i="0">
+                <a:solidFill>
+                  <a:srgbClr val="121826"/>
+                </a:solidFill>
+                <a:latin typeface="Google Sans Flex"/>
+              </a:rPr>
+              <a:t>Trend Interpreter turns one product into local copy for Korea, Japan and English-language markets, using memes that are in use there now and safe for a brand. Rules pick the meme, Gemini writes, rules check every line and a person approves; every claim links to its source.</a:t>
+            </a:r>
+          </a:p>
+          <a:p>
+            <a:pPr algn="l">
+              <a:spcAft>
+                <a:spcPts val="600"/>
+              </a:spcAft>
+            </a:pPr>
+            <a:r>
+              <a:rPr sz="1050" b="1" i="0">
+                <a:solidFill>
+                  <a:srgbClr val="121826"/>
+                </a:solidFill>
+                <a:latin typeface="Google Sans Flex"/>
+              </a:rPr>
+              <a:t>Gemini (Vertex AI). </a:t>
+            </a:r>
+            <a:r>
+              <a:rPr sz="1050" b="0" i="0">
+                <a:solidFill>
+                  <a:srgbClr val="121826"/>
+                </a:solidFill>
+                <a:latin typeface="Google Sans Flex"/>
+              </a:rPr>
+              <a:t>Turns a product photo or line into a brief, then writes 4 lines, a video script and a thumbnail plan per market in one structured call; also judges whether copy uses a meme as meant. In the batch pipeline it reads trending Shorts and runs Search-grounded research.</a:t>
+            </a:r>
+          </a:p>
+          <a:p>
+            <a:pPr algn="l">
+              <a:spcAft>
+                <a:spcPts val="600"/>
+              </a:spcAft>
+            </a:pPr>
+            <a:r>
+              <a:rPr sz="1050" b="1" i="0">
+                <a:solidFill>
+                  <a:srgbClr val="121826"/>
+                </a:solidFill>
+                <a:latin typeface="Google Sans Flex"/>
+              </a:rPr>
+              <a:t>Cloud Run. </a:t>
+            </a:r>
+            <a:r>
+              <a:rPr sz="1050" b="0" i="0">
+                <a:solidFill>
+                  <a:srgbClr val="121826"/>
+                </a:solidFill>
+                <a:latin typeface="Google Sans Flex"/>
+              </a:rPr>
+              <a:t>Hosts the Next.js web app, the private FastAPI API, the publication, backup and maintenance jobs and the alert relay; data lives in Cloud SQL for PostgreSQL.</a:t>
+            </a:r>
+          </a:p>
+          <a:p>
+            <a:pPr algn="l">
+              <a:spcAft>
+                <a:spcPts val="600"/>
+              </a:spcAft>
+            </a:pPr>
+            <a:r>
+              <a:rPr sz="1050" b="1" i="0">
+                <a:solidFill>
+                  <a:srgbClr val="566074"/>
+                </a:solidFill>
+                <a:latin typeface="Google Sans Flex"/>
+              </a:rPr>
+              <a:t>Firebase / Firestore. </a:t>
+            </a:r>
+            <a:r>
+              <a:rPr sz="1050" b="0" i="0">
+                <a:solidFill>
+                  <a:srgbClr val="121826"/>
+                </a:solidFill>
+                <a:latin typeface="Google Sans Flex"/>
+              </a:rPr>
+              <a:t>Not used – the versioned dictionary is relational.</a:t>
+            </a:r>
+          </a:p>
+        </p:txBody>
+      </p:sp>
+    </p:spTree>
+  </p:cSld>
+  <p:clrMapOvr>
+    <a:masterClrMapping/>
+  </p:clrMapOvr>
+</p:sld>
+</file>
+
+<file path=ppt/slides/slide16.xml><?xml version="1.0" encoding="utf-8"?>
+<p:sld xmlns:a="http://schemas.openxmlformats.org/drawingml/2006/main" xmlns:r="http://schemas.openxmlformats.org/officeDocument/2006/relationships" xmlns:mc="http://schemas.openxmlformats.org/markup-compatibility/2006" xmlns:mv="urn:schemas-microsoft-com:mac:vml" xmlns:p="http://schemas.openxmlformats.org/presentationml/2006/main" xmlns:c="http://schemas.openxmlformats.org/drawingml/2006/chart" xmlns:dgm="http://schemas.openxmlformats.org/drawingml/2006/diagram" xmlns:o="urn:schemas-microsoft-com:office:office" xmlns:v="urn:schemas-microsoft-com:vml" xmlns:pvml="urn:schemas-microsoft-com:office:powerpoint" xmlns:com="http://schemas.openxmlformats.org/drawingml/2006/compatibility" xmlns:p14="http://schemas.microsoft.com/office/powerpoint/2010/main" xmlns:p15="http://schemas.microsoft.com/office/powerpoint/2012/main" xmlns:ahyp="http://schemas.microsoft.com/office/drawing/2018/hyperlinkcolor">
+  <p:cSld>
+    <p:spTree>
+      <p:nvGrpSpPr>
+        <p:cNvPr id="163" name="Shape 163"/>
+        <p:cNvGrpSpPr/>
+        <p:nvPr/>
+      </p:nvGrpSpPr>
+      <p:grpSpPr>
+        <a:xfrm>
+          <a:off x="0" y="0"/>
+          <a:ext cx="0" cy="0"/>
+          <a:chOff x="0" y="0"/>
+          <a:chExt cx="0" cy="0"/>
+        </a:xfrm>
+      </p:grpSpPr>
+      <p:pic>
+        <p:nvPicPr>
+          <p:cNvPr id="164" name="Google Shape;164;p27" title="Frame 144.png"/>
+          <p:cNvPicPr preferRelativeResize="0"/>
+          <p:nvPr/>
+        </p:nvPicPr>
+        <p:blipFill rotWithShape="1">
+          <a:blip r:embed="rId3">
+            <a:alphaModFix/>
+          </a:blip>
+          <a:srcRect b="98001" l="0" r="0" t="0"/>
+          <a:stretch/>
+        </p:blipFill>
+        <p:spPr>
+          <a:xfrm>
+            <a:off x="0" y="5093562"/>
+            <a:ext cx="9144000" cy="54275"/>
+          </a:xfrm>
+          <a:prstGeom prst="rect">
+            <a:avLst/>
+          </a:prstGeom>
+          <a:noFill/>
+          <a:ln>
+            <a:noFill/>
+          </a:ln>
+        </p:spPr>
+      </p:pic>
+      <p:pic>
+        <p:nvPicPr>
+          <p:cNvPr id="165" name="Google Shape;165;p27" title="Group 427319979.png"/>
+          <p:cNvPicPr preferRelativeResize="0"/>
+          <p:nvPr/>
+        </p:nvPicPr>
+        <p:blipFill>
+          <a:blip r:embed="rId4">
+            <a:alphaModFix/>
+          </a:blip>
+          <a:stretch>
+            <a:fillRect/>
+          </a:stretch>
+        </p:blipFill>
+        <p:spPr>
+          <a:xfrm>
+            <a:off x="0" y="1"/>
+            <a:ext cx="9144000" cy="507359"/>
+          </a:xfrm>
+          <a:prstGeom prst="rect">
+            <a:avLst/>
+          </a:prstGeom>
+          <a:noFill/>
+          <a:ln>
+            <a:noFill/>
+          </a:ln>
+        </p:spPr>
+      </p:pic>
+      <p:sp>
+        <p:nvSpPr>
+          <p:cNvPr id="166" name="Google Shape;166;p27"/>
+          <p:cNvSpPr/>
+          <p:nvPr/>
+        </p:nvSpPr>
+        <p:spPr>
+          <a:xfrm>
+            <a:off x="-29250" y="5071875"/>
+            <a:ext cx="9173400" cy="97800"/>
+          </a:xfrm>
+          <a:prstGeom prst="rect">
+            <a:avLst/>
+          </a:prstGeom>
+          <a:solidFill>
+            <a:schemeClr val="dk1"/>
+          </a:solidFill>
+          <a:ln>
+            <a:noFill/>
+          </a:ln>
+        </p:spPr>
+        <p:txBody>
+          <a:bodyPr anchorCtr="0" anchor="ctr" bIns="91425" lIns="91425" spcFirstLastPara="1" rIns="91425" wrap="square" tIns="91425">
+            <a:noAutofit/>
+          </a:bodyPr>
+          <a:lstStyle/>
+          <a:p>
+            <a:pPr indent="0" lvl="0" marL="0" rtl="0" algn="ctr">
+              <a:spcBef>
+                <a:spcPts val="0"/>
+              </a:spcBef>
+              <a:spcAft>
+                <a:spcPts val="0"/>
+              </a:spcAft>
+              <a:buNone/>
+            </a:pPr>
+            <a:r>
+              <a:rPr>
+                <a:solidFill/>
+              </a:rPr>
+              <a:t/>
+            </a:r>
+            <a:endParaRPr/>
+          </a:p>
+        </p:txBody>
+      </p:sp>
+      <p:sp>
+        <p:nvSpPr>
+          <p:cNvPr id="71" name="Google Shape;71;p15"/>
+          <p:cNvSpPr txBox="1"/>
+          <p:nvPr/>
+        </p:nvSpPr>
+        <p:spPr>
+          <a:xfrm>
+            <a:off x="265350" y="548640"/>
+            <a:ext cx="8943000" cy="256032"/>
+          </a:xfrm>
+          <a:prstGeom prst="rect">
+            <a:avLst/>
+          </a:prstGeom>
+          <a:noFill/>
+          <a:ln>
+            <a:noFill/>
+          </a:ln>
+        </p:spPr>
+        <p:txBody>
+          <a:bodyPr anchorCtr="0" anchor="t" bIns="91425" lIns="91425" spcFirstLastPara="1" rIns="91425" wrap="square" tIns="91425">
+            <a:noAutofit/>
+          </a:bodyPr>
+          <a:lstStyle/>
+          <a:p>
+            <a:pPr indent="0" lvl="0" marL="0" rtl="0" algn="l">
+              <a:spcBef>
+                <a:spcPts val="0"/>
+              </a:spcBef>
+              <a:spcAft>
+                <a:spcPts val="0"/>
+              </a:spcAft>
+              <a:buNone/>
+            </a:pPr>
+            <a:r>
+              <a:rPr lang="en-GB" sz="1050">
+                <a:solidFill>
+                  <a:srgbClr val="566074"/>
+                </a:solidFill>
+                <a:latin typeface="Google Sans Flex Medium"/>
+                <a:ea typeface="Google Sans Flex Medium"/>
+                <a:cs typeface="Google Sans Flex Medium"/>
+                <a:sym typeface="Google Sans Flex Medium"/>
+              </a:rPr>
+              <a:t>Sources and notes</a:t>
+            </a:r>
+            <a:endParaRPr sz="1600">
+              <a:latin typeface="Google Sans Flex Medium"/>
+              <a:ea typeface="Google Sans Flex Medium"/>
+              <a:cs typeface="Google Sans Flex Medium"/>
+              <a:sym typeface="Google Sans Flex Medium"/>
+            </a:endParaRPr>
+          </a:p>
+        </p:txBody>
+      </p:sp>
+      <p:sp>
+        <p:nvSpPr>
+          <p:cNvPr id="179" name="Headline"/>
+          <p:cNvSpPr txBox="1"/>
+          <p:nvPr/>
+        </p:nvSpPr>
+        <p:spPr>
+          <a:xfrm>
+            <a:off x="365760" y="786384"/>
+            <a:ext cx="8412480" cy="310896"/>
+          </a:xfrm>
+          <a:prstGeom prst="rect">
+            <a:avLst/>
+          </a:prstGeom>
+          <a:noFill/>
+        </p:spPr>
+        <p:txBody>
+          <a:bodyPr wrap="square" lIns="0" rIns="0" tIns="0" bIns="0">
+            <a:spAutoFit/>
+          </a:bodyPr>
+          <a:lstStyle/>
+          <a:p>
+            <a:r>
+              <a:rPr sz="1600" b="1">
+                <a:solidFill>
+                  <a:srgbClr val="121826"/>
+                </a:solidFill>
+                <a:latin typeface="Google Sans Flex"/>
+              </a:rPr>
+              <a:t>Every number in this deck has a source</a:t>
+            </a:r>
+          </a:p>
+        </p:txBody>
+      </p:sp>
+      <p:sp>
+        <p:nvSpPr>
+          <p:cNvPr id="180" name="TextBox 179"/>
+          <p:cNvSpPr txBox="1"/>
+          <p:nvPr/>
+        </p:nvSpPr>
+        <p:spPr>
+          <a:xfrm>
+            <a:off x="365760" y="1234440"/>
+            <a:ext cx="4069080" cy="3611880"/>
+          </a:xfrm>
+          <a:prstGeom prst="rect">
+            <a:avLst/>
+          </a:prstGeom>
+          <a:noFill/>
+        </p:spPr>
+        <p:txBody>
+          <a:bodyPr wrap="square" lIns="0" rIns="0" tIns="0" bIns="0">
+            <a:spAutoFit/>
+          </a:bodyPr>
+          <a:lstStyle/>
+          <a:p>
+            <a:pPr>
+              <a:spcBef>
+                <a:spcPts val="600"/>
+              </a:spcBef>
+            </a:pPr>
+            <a:r>
+              <a:rPr sz="950" b="1">
+                <a:solidFill>
+                  <a:srgbClr val="121826"/>
+                </a:solidFill>
+                <a:latin typeface="Google Sans Flex"/>
+              </a:rPr>
+              <a:t>Brief about the idea</a:t>
+            </a:r>
+          </a:p>
+          <a:p>
+            <a:pPr>
+              <a:spcBef>
+                <a:spcPts val="200"/>
+              </a:spcBef>
+            </a:pPr>
+            <a:r>
+              <a:rPr sz="850" b="1">
+                <a:solidFill>
+                  <a:srgbClr val="566074"/>
+                </a:solidFill>
+                <a:latin typeface="Google Sans Flex"/>
+              </a:rPr>
+              <a:t>1  </a:t>
+            </a:r>
+            <a:r>
+              <a:rPr sz="850">
+                <a:solidFill>
+                  <a:srgbClr val="121826"/>
+                </a:solidFill>
+                <a:latin typeface="Google Sans Flex"/>
+              </a:rPr>
+              <a:t>Starbucks Korea “Tank Day”: pulled within hours, CEO fired, Seattle apology. The Korea Herald, 2026-05-19.</a:t>
+            </a:r>
+          </a:p>
+          <a:p>
+            <a:pPr>
+              <a:spcBef>
+                <a:spcPts val="200"/>
+              </a:spcBef>
+            </a:pPr>
+            <a:r>
+              <a:rPr sz="850" b="1">
+                <a:solidFill>
+                  <a:srgbClr val="566074"/>
+                </a:solidFill>
+                <a:latin typeface="Google Sans Flex"/>
+              </a:rPr>
+              <a:t>2  </a:t>
+            </a:r>
+            <a:r>
+              <a:rPr sz="850">
+                <a:solidFill>
+                  <a:srgbClr val="121826"/>
+                </a:solidFill>
+                <a:latin typeface="Google Sans Flex"/>
+              </a:rPr>
+              <a:t>Card payments −26.3% (₩32.16bn → ₩23.69bn), 18–24 May vs the week before. IGAWorks Mobile Index via Korea JoongAng Daily, 2026-05-27.</a:t>
+            </a:r>
+          </a:p>
+          <a:p>
+            <a:pPr>
+              <a:spcBef>
+                <a:spcPts val="200"/>
+              </a:spcBef>
+            </a:pPr>
+            <a:r>
+              <a:rPr sz="850" b="1">
+                <a:solidFill>
+                  <a:srgbClr val="566074"/>
+                </a:solidFill>
+                <a:latin typeface="Google Sans Flex"/>
+              </a:rPr>
+              <a:t>3  </a:t>
+            </a:r>
+            <a:r>
+              <a:rPr sz="850">
+                <a:solidFill>
+                  <a:srgbClr val="121826"/>
+                </a:solidFill>
+                <a:latin typeface="Google Sans Flex"/>
+              </a:rPr>
+              <a:t>Pyrah, Wang, Li, Xie, “The Slang Paradox”, Journal of Marketing Research 62(5), 2025; via BakeryandSnacks, 2026-08-21.</a:t>
+            </a:r>
+          </a:p>
+          <a:p>
+            <a:pPr>
+              <a:spcBef>
+                <a:spcPts val="200"/>
+              </a:spcBef>
+            </a:pPr>
+            <a:r>
+              <a:rPr sz="850" b="1">
+                <a:solidFill>
+                  <a:srgbClr val="566074"/>
+                </a:solidFill>
+                <a:latin typeface="Google Sans Flex"/>
+              </a:rPr>
+              <a:t>4  </a:t>
+            </a:r>
+            <a:r>
+              <a:rPr sz="850">
+                <a:solidFill>
+                  <a:srgbClr val="121826"/>
+                </a:solidFill>
+                <a:latin typeface="Google Sans Flex"/>
+              </a:rPr>
+              <a:t>Gen Z social media users, past month: 71% saw brands use slang or trends, 42% liked it, 32% did not. Morning Consult, 2024-12-09 (n = 1,002).</a:t>
+            </a:r>
+          </a:p>
+          <a:p>
+            <a:pPr>
+              <a:spcBef>
+                <a:spcPts val="600"/>
+              </a:spcBef>
+            </a:pPr>
+            <a:r>
+              <a:rPr sz="950" b="1">
+                <a:solidFill>
+                  <a:srgbClr val="121826"/>
+                </a:solidFill>
+                <a:latin typeface="Google Sans Flex"/>
+              </a:rPr>
+              <a:t>Opportunities</a:t>
+            </a:r>
+          </a:p>
+          <a:p>
+            <a:pPr>
+              <a:spcBef>
+                <a:spcPts val="200"/>
+              </a:spcBef>
+            </a:pPr>
+            <a:r>
+              <a:rPr sz="850" b="1">
+                <a:solidFill>
+                  <a:srgbClr val="566074"/>
+                </a:solidFill>
+                <a:latin typeface="Google Sans Flex"/>
+              </a:rPr>
+              <a:t>5  </a:t>
+            </a:r>
+            <a:r>
+              <a:rPr sz="850">
+                <a:solidFill>
+                  <a:srgbClr val="121826"/>
+                </a:solidFill>
+                <a:latin typeface="Google Sans Flex"/>
+              </a:rPr>
+              <a:t>Brandwatch Consumer Research one-pager; React Score (2024-12-03); sentiment in 44 languages; Iris Writing Assistant (beta).</a:t>
+            </a:r>
+          </a:p>
+          <a:p>
+            <a:pPr>
+              <a:spcBef>
+                <a:spcPts val="200"/>
+              </a:spcBef>
+            </a:pPr>
+            <a:r>
+              <a:rPr sz="850" b="1">
+                <a:solidFill>
+                  <a:srgbClr val="566074"/>
+                </a:solidFill>
+                <a:latin typeface="Google Sans Flex"/>
+              </a:rPr>
+              <a:t>6  </a:t>
+            </a:r>
+            <a:r>
+              <a:rPr sz="850">
+                <a:solidFill>
+                  <a:srgbClr val="121826"/>
+                </a:solidFill>
+                <a:latin typeface="Google Sans Flex"/>
+              </a:rPr>
+              <a:t>Know Your Meme: entries with origin and numbered references, English only.</a:t>
+            </a:r>
+          </a:p>
+          <a:p>
+            <a:pPr>
+              <a:spcBef>
+                <a:spcPts val="200"/>
+              </a:spcBef>
+            </a:pPr>
+            <a:r>
+              <a:rPr sz="850" b="1">
+                <a:solidFill>
+                  <a:srgbClr val="566074"/>
+                </a:solidFill>
+                <a:latin typeface="Google Sans Flex"/>
+              </a:rPr>
+              <a:t>7  </a:t>
+            </a:r>
+            <a:r>
+              <a:rPr sz="850">
+                <a:solidFill>
+                  <a:srgbClr val="121826"/>
+                </a:solidFill>
+                <a:latin typeface="Google Sans Flex"/>
+              </a:rPr>
+              <a:t>Google Trends help: relative 0–100 index, Rising and Breakout, 100+ countries.</a:t>
+            </a:r>
+          </a:p>
+          <a:p>
+            <a:pPr>
+              <a:spcBef>
+                <a:spcPts val="200"/>
+              </a:spcBef>
+            </a:pPr>
+            <a:r>
+              <a:rPr sz="850" b="1">
+                <a:solidFill>
+                  <a:srgbClr val="566074"/>
+                </a:solidFill>
+                <a:latin typeface="Google Sans Flex"/>
+              </a:rPr>
+              <a:t>8  </a:t>
+            </a:r>
+            <a:r>
+              <a:rPr sz="850">
+                <a:solidFill>
+                  <a:srgbClr val="121826"/>
+                </a:solidFill>
+                <a:latin typeface="Google Sans Flex"/>
+              </a:rPr>
+              <a:t>TikTok Creative Center trends by country; Symphony writes scripts (help pages, June–July 2026). All checked 2026-10-11.</a:t>
+            </a:r>
+          </a:p>
+        </p:txBody>
+      </p:sp>
+      <p:sp>
+        <p:nvSpPr>
+          <p:cNvPr id="181" name="TextBox 180"/>
+          <p:cNvSpPr txBox="1"/>
+          <p:nvPr/>
+        </p:nvSpPr>
+        <p:spPr>
+          <a:xfrm>
+            <a:off x="4709160" y="1234440"/>
+            <a:ext cx="4069080" cy="3611880"/>
+          </a:xfrm>
+          <a:prstGeom prst="rect">
+            <a:avLst/>
+          </a:prstGeom>
+          <a:noFill/>
+        </p:spPr>
+        <p:txBody>
+          <a:bodyPr wrap="square" lIns="0" rIns="0" tIns="0" bIns="0">
+            <a:spAutoFit/>
+          </a:bodyPr>
+          <a:lstStyle/>
+          <a:p>
+            <a:pPr>
+              <a:spcBef>
+                <a:spcPts val="600"/>
+              </a:spcBef>
+            </a:pPr>
+            <a:r>
+              <a:rPr sz="950" b="1">
+                <a:solidFill>
+                  <a:srgbClr val="121826"/>
+                </a:solidFill>
+                <a:latin typeface="Google Sans Flex"/>
+              </a:rPr>
+              <a:t>Cost and performance</a:t>
+            </a:r>
+          </a:p>
+          <a:p>
+            <a:pPr>
+              <a:spcBef>
+                <a:spcPts val="200"/>
+              </a:spcBef>
+            </a:pPr>
+            <a:r>
+              <a:rPr sz="850" b="1">
+                <a:solidFill>
+                  <a:srgbClr val="566074"/>
+                </a:solidFill>
+                <a:latin typeface="Google Sans Flex"/>
+              </a:rPr>
+              <a:t>9  </a:t>
+            </a:r>
+            <a:r>
+              <a:rPr sz="850">
+                <a:solidFill>
+                  <a:srgbClr val="121826"/>
+                </a:solidFill>
+                <a:latin typeface="Google Sans Flex"/>
+              </a:rPr>
+              <a:t>Gemini list price: Vertex AI generative AI pricing, gemini-3.8-flash, global standard.</a:t>
+            </a:r>
+          </a:p>
+          <a:p>
+            <a:pPr>
+              <a:spcBef>
+                <a:spcPts val="200"/>
+              </a:spcBef>
+            </a:pPr>
+            <a:r>
+              <a:rPr sz="850" b="1">
+                <a:solidFill>
+                  <a:srgbClr val="566074"/>
+                </a:solidFill>
+                <a:latin typeface="Google Sans Flex"/>
+              </a:rPr>
+              <a:t>10  </a:t>
+            </a:r>
+            <a:r>
+              <a:rPr sz="850">
+                <a:solidFill>
+                  <a:srgbClr val="121826"/>
+                </a:solidFill>
+                <a:latin typeface="Google Sans Flex"/>
+              </a:rPr>
+              <a:t>Evaluation: EVALUATION.md and evals/recommend-rounds.csv in the repository; judgments are AI drafts reviewed by one person.</a:t>
+            </a:r>
+          </a:p>
+          <a:p>
+            <a:pPr>
+              <a:spcBef>
+                <a:spcPts val="600"/>
+              </a:spcBef>
+            </a:pPr>
+            <a:r>
+              <a:rPr sz="950" b="1">
+                <a:solidFill>
+                  <a:srgbClr val="121826"/>
+                </a:solidFill>
+                <a:latin typeface="Google Sans Flex"/>
+              </a:rPr>
+              <a:t>Who pays</a:t>
+            </a:r>
+          </a:p>
+          <a:p>
+            <a:pPr>
+              <a:spcBef>
+                <a:spcPts val="200"/>
+              </a:spcBef>
+            </a:pPr>
+            <a:r>
+              <a:rPr sz="850" b="1">
+                <a:solidFill>
+                  <a:srgbClr val="566074"/>
+                </a:solidFill>
+                <a:latin typeface="Google Sans Flex"/>
+              </a:rPr>
+              <a:t>11  </a:t>
+            </a:r>
+            <a:r>
+              <a:rPr sz="850">
+                <a:solidFill>
+                  <a:srgbClr val="121826"/>
+                </a:solidFill>
+                <a:latin typeface="Google Sans Flex"/>
+              </a:rPr>
+              <a:t>Japan social media marketing ¥1.2038 trillion in 2024 (+13%). CyberBuzz × Digital InFact via Web担当者Forum, 2024-11-14.</a:t>
+            </a:r>
+          </a:p>
+          <a:p>
+            <a:pPr>
+              <a:spcBef>
+                <a:spcPts val="200"/>
+              </a:spcBef>
+            </a:pPr>
+            <a:r>
+              <a:rPr sz="850" b="1">
+                <a:solidFill>
+                  <a:srgbClr val="566074"/>
+                </a:solidFill>
+                <a:latin typeface="Google Sans Flex"/>
+              </a:rPr>
+              <a:t>12  </a:t>
+            </a:r>
+            <a:r>
+              <a:rPr sz="850">
+                <a:solidFill>
+                  <a:srgbClr val="121826"/>
+                </a:solidFill>
+                <a:latin typeface="Google Sans Flex"/>
+              </a:rPr>
+              <a:t>Korea online advertising ₩10.10 trillion in 2024, 59% of ad spend. KOBACO survey via journalist.or.kr, 2026-01-08.</a:t>
+            </a:r>
+          </a:p>
+          <a:p>
+            <a:pPr>
+              <a:spcBef>
+                <a:spcPts val="200"/>
+              </a:spcBef>
+            </a:pPr>
+            <a:r>
+              <a:rPr sz="850" b="1">
+                <a:solidFill>
+                  <a:srgbClr val="566074"/>
+                </a:solidFill>
+                <a:latin typeface="Google Sans Flex"/>
+              </a:rPr>
+              <a:t>13  </a:t>
+            </a:r>
+            <a:r>
+              <a:rPr sz="850">
+                <a:solidFill>
+                  <a:srgbClr val="121826"/>
+                </a:solidFill>
+                <a:latin typeface="Google Sans Flex"/>
+              </a:rPr>
+              <a:t>Sprout Social pricing page, seen 2026-10-11.</a:t>
+            </a:r>
+          </a:p>
+          <a:p>
+            <a:pPr>
+              <a:spcBef>
+                <a:spcPts val="200"/>
+              </a:spcBef>
+            </a:pPr>
+            <a:r>
+              <a:rPr sz="850" b="1">
+                <a:solidFill>
+                  <a:srgbClr val="566074"/>
+                </a:solidFill>
+                <a:latin typeface="Google Sans Flex"/>
+              </a:rPr>
+              <a:t>14  </a:t>
+            </a:r>
+            <a:r>
+              <a:rPr sz="850">
+                <a:solidFill>
+                  <a:srgbClr val="121826"/>
+                </a:solidFill>
+                <a:latin typeface="Google Sans Flex"/>
+              </a:rPr>
+              <a:t>Brandwatch median contract $50,000 a year (40 purchases). Vendr, February 2026 – procurement data, not a list price.</a:t>
+            </a:r>
+          </a:p>
+          <a:p>
+            <a:pPr>
+              <a:spcBef>
+                <a:spcPts val="200"/>
+              </a:spcBef>
+            </a:pPr>
+            <a:r>
+              <a:rPr sz="850" b="1">
+                <a:solidFill>
+                  <a:srgbClr val="566074"/>
+                </a:solidFill>
+                <a:latin typeface="Google Sans Flex"/>
+              </a:rPr>
+              <a:t>15  </a:t>
+            </a:r>
+            <a:r>
+              <a:rPr sz="850">
+                <a:solidFill>
+                  <a:srgbClr val="121826"/>
+                </a:solidFill>
+                <a:latin typeface="Google Sans Flex"/>
+              </a:rPr>
+              <a:t>Draft cost: 1 product brief + 3 markets × (copy + opinion) = 7 calls × $0.0015, our estimate.</a:t>
+            </a:r>
+          </a:p>
+        </p:txBody>
+      </p:sp>
+    </p:spTree>
+  </p:cSld>
+  <p:clrMapOvr>
+    <a:masterClrMapping/>
+  </p:clrMapOvr>
+</p:sld>
+</file>
+
+<file path=ppt/slides/slide17.xml><?xml version="1.0" encoding="utf-8"?>
 <p:sld xmlns:a="http://schemas.openxmlformats.org/drawingml/2006/main" xmlns:r="http://schemas.openxmlformats.org/officeDocument/2006/relationships" xmlns:mc="http://schemas.openxmlformats.org/markup-compatibility/2006" xmlns:mv="urn:schemas-microsoft-com:mac:vml" xmlns:p="http://schemas.openxmlformats.org/presentationml/2006/main" xmlns:c="http://schemas.openxmlformats.org/drawingml/2006/chart" xmlns:dgm="http://schemas.openxmlformats.org/drawingml/2006/diagram" xmlns:o="urn:schemas-microsoft-com:office:office" xmlns:v="urn:schemas-microsoft-com:vml" xmlns:pvml="urn:schemas-microsoft-com:office:powerpoint" xmlns:com="http://schemas.openxmlformats.org/drawingml/2006/compatibility" xmlns:p14="http://schemas.microsoft.com/office/powerpoint/2010/main" xmlns:p15="http://schemas.microsoft.com/office/powerpoint/2012/main" xmlns:ahyp="http://schemas.microsoft.com/office/drawing/2018/hyperlinkcolor">
   <p:cSld>
     <p:spTree>
@@ -10474,8 +13231,8 @@
         </p:nvSpPr>
         <p:spPr>
           <a:xfrm>
-            <a:off x="265350" y="663825"/>
-            <a:ext cx="8943000" cy="561900"/>
+            <a:off x="265350" y="548640"/>
+            <a:ext cx="8943000" cy="256032"/>
           </a:xfrm>
           <a:prstGeom prst="rect">
             <a:avLst/>
@@ -10501,8 +13258,10 @@
               <a:buNone/>
             </a:pPr>
             <a:r>
-              <a:rPr lang="en-GB" sz="1600">
-                <a:solidFill/>
+              <a:rPr lang="en-GB" sz="1050">
+                <a:solidFill>
+                  <a:srgbClr val="566074"/>
+                </a:solidFill>
                 <a:latin typeface="Google Sans Flex Medium"/>
                 <a:ea typeface="Google Sans Flex Medium"/>
                 <a:cs typeface="Google Sans Flex Medium"/>
@@ -11061,7 +13820,7 @@
                 </a:solidFill>
                 <a:latin typeface="Google Sans Flex"/>
               </a:rPr>
-              <a:t>A “Tank Day” pun on the 5·18 democracy anniversary: pulled within hours, CEO fired, parent’s shares −6% next day.</a:t>
+              <a:t>A “Tank Day” pun on the 5·18 democracy anniversary: pulled within hours, CEO fired, card sales −26% that week.</a:t>
             </a:r>
           </a:p>
           <a:p>
@@ -11151,6 +13910,40 @@
                 <a:latin typeface="Google Sans Flex"/>
               </a:rPr>
               <a:t>Gen Z social media users, past month · Morning Consult, Dec 2024 (n = 1,002)</a:t>
+            </a:r>
+          </a:p>
+        </p:txBody>
+      </p:sp>
+      <p:sp>
+        <p:nvSpPr>
+          <p:cNvPr id="91" name="Headline"/>
+          <p:cNvSpPr txBox="1"/>
+          <p:nvPr/>
+        </p:nvSpPr>
+        <p:spPr>
+          <a:xfrm>
+            <a:off x="365760" y="786384"/>
+            <a:ext cx="8412480" cy="310896"/>
+          </a:xfrm>
+          <a:prstGeom prst="rect">
+            <a:avLst/>
+          </a:prstGeom>
+          <a:noFill/>
+        </p:spPr>
+        <p:txBody>
+          <a:bodyPr wrap="square" lIns="0" rIns="0" tIns="0" bIns="0">
+            <a:spAutoFit/>
+          </a:bodyPr>
+          <a:lstStyle/>
+          <a:p>
+            <a:r>
+              <a:rPr sz="1600" b="1">
+                <a:solidFill>
+                  <a:srgbClr val="121826"/>
+                </a:solidFill>
+                <a:latin typeface="Google Sans Flex"/>
+              </a:rPr>
+              <a:t>One product, local copy for every market – with memes that are safe to use now</a:t>
             </a:r>
           </a:p>
         </p:txBody>
@@ -11289,8 +14082,8 @@
         </p:nvSpPr>
         <p:spPr>
           <a:xfrm>
-            <a:off x="265350" y="663825"/>
-            <a:ext cx="8943000" cy="557784"/>
+            <a:off x="265350" y="548640"/>
+            <a:ext cx="8943000" cy="256032"/>
           </a:xfrm>
           <a:prstGeom prst="rect">
             <a:avLst/>
@@ -11316,8 +14109,10 @@
               <a:buNone/>
             </a:pPr>
             <a:r>
-              <a:rPr lang="en-GB" sz="1600">
-                <a:solidFill/>
+              <a:rPr lang="en-GB" sz="1050">
+                <a:solidFill>
+                  <a:srgbClr val="566074"/>
+                </a:solidFill>
                 <a:latin typeface="Google Sans Flex SemiBold"/>
                 <a:ea typeface="Google Sans Flex SemiBold"/>
                 <a:cs typeface="Google Sans Flex SemiBold"/>
@@ -11532,9 +14327,82 @@
           </a:p>
         </p:txBody>
       </p:sp>
+      <p:sp>
+        <p:nvSpPr>
+          <p:cNvPr id="93" name="TextBox 92"/>
+          <p:cNvSpPr txBox="1"/>
+          <p:nvPr/>
+        </p:nvSpPr>
+        <p:spPr>
+          <a:xfrm>
+            <a:off x="365760" y="4754880"/>
+            <a:ext cx="5486400" cy="182880"/>
+          </a:xfrm>
+          <a:prstGeom prst="rect">
+            <a:avLst/>
+          </a:prstGeom>
+          <a:noFill/>
+        </p:spPr>
+        <p:txBody>
+          <a:bodyPr wrap="square" lIns="0" rIns="0" tIns="0" bIns="0" anchor="t">
+            <a:spAutoFit/>
+          </a:bodyPr>
+          <a:lstStyle/>
+          <a:p>
+            <a:pPr>
+              <a:spcBef>
+                <a:spcPts val="0"/>
+              </a:spcBef>
+            </a:pPr>
+            <a:r>
+              <a:rPr sz="800" b="0">
+                <a:solidFill>
+                  <a:srgbClr val="566074"/>
+                </a:solidFill>
+                <a:latin typeface="Google Sans Flex"/>
+              </a:rPr>
+              <a:t>●  yes   ○  partly   –  not offered or not published · each product’s public pages, 11 Oct 2026</a:t>
+            </a:r>
+          </a:p>
+        </p:txBody>
+      </p:sp>
+      <p:sp>
+        <p:nvSpPr>
+          <p:cNvPr id="94" name="Headline"/>
+          <p:cNvSpPr txBox="1"/>
+          <p:nvPr/>
+        </p:nvSpPr>
+        <p:spPr>
+          <a:xfrm>
+            <a:off x="365760" y="786384"/>
+            <a:ext cx="8412480" cy="310896"/>
+          </a:xfrm>
+          <a:prstGeom prst="rect">
+            <a:avLst/>
+          </a:prstGeom>
+          <a:noFill/>
+        </p:spPr>
+        <p:txBody>
+          <a:bodyPr wrap="square" lIns="0" rIns="0" tIns="0" bIns="0">
+            <a:spAutoFit/>
+          </a:bodyPr>
+          <a:lstStyle/>
+          <a:p>
+            <a:r>
+              <a:rPr sz="1600" b="1">
+                <a:solidFill>
+                  <a:srgbClr val="121826"/>
+                </a:solidFill>
+                <a:latin typeface="Google Sans Flex"/>
+              </a:rPr>
+              <a:t>Each tool answers one question; we answer “can my brand use this here, now?”</a:t>
+            </a:r>
+          </a:p>
+        </p:txBody>
+      </p:sp>
       <p:graphicFrame>
         <p:nvGraphicFramePr>
-          <p:cNvPr id="92" name="Table 91"/>
+          <p:cNvPr id="95" name="Table 94"/>
           <p:cNvGraphicFramePr>
             <a:graphicFrameLocks noGrp="1"/>
           </p:cNvGraphicFramePr>
@@ -11542,7 +14410,7 @@
         </p:nvGraphicFramePr>
         <p:xfrm>
           <a:off x="365760" y="1280160"/>
-          <a:ext cx="5486400" cy="3072384"/>
+          <a:ext cx="5486400" cy="3081528"/>
         </p:xfrm>
         <a:graphic>
           <a:graphicData uri="http://schemas.openxmlformats.org/drawingml/2006/table">
@@ -11551,13 +14419,14 @@
                 <a:tableStyleId>{2D5ABB26-0587-4C30-8999-92F81FD0307C}</a:tableStyleId>
               </a:tblPr>
               <a:tblGrid>
-                <a:gridCol w="1828800"/>
-                <a:gridCol w="914400"/>
-                <a:gridCol w="914400"/>
-                <a:gridCol w="914400"/>
-                <a:gridCol w="914400"/>
+                <a:gridCol w="1600200"/>
+                <a:gridCol w="777240"/>
+                <a:gridCol w="777240"/>
+                <a:gridCol w="777240"/>
+                <a:gridCol w="777240"/>
+                <a:gridCol w="777240"/>
               </a:tblGrid>
-              <a:tr h="384048">
+              <a:tr h="457200">
                 <a:tc>
                   <a:txBody>
                     <a:bodyPr wrap="square"/>
@@ -11565,7 +14434,7 @@
                     <a:p>
                       <a:pPr algn="l"/>
                       <a:r>
-                        <a:rPr sz="950" b="1">
+                        <a:rPr sz="850" b="1">
                           <a:solidFill>
                             <a:srgbClr val="566074"/>
                           </a:solidFill>
@@ -11575,7 +14444,7 @@
                       </a:r>
                     </a:p>
                   </a:txBody>
-                  <a:tcPr marL="73152" marR="36576" anchor="ctr">
+                  <a:tcPr marL="54864" marR="36576" anchor="ctr">
                     <a:lnL w="0">
                       <a:noFill/>
                     </a:lnL>
@@ -11600,17 +14469,17 @@
                     <a:p>
                       <a:pPr algn="ctr"/>
                       <a:r>
-                        <a:rPr sz="950" b="1">
+                        <a:rPr sz="850" b="1">
                           <a:solidFill>
                             <a:srgbClr val="566074"/>
                           </a:solidFill>
                           <a:latin typeface="Google Sans Flex"/>
                         </a:rPr>
-                        <a:t>Social listening</a:t>
+                        <a:t>Brandwatch</a:t>
                       </a:r>
                     </a:p>
                   </a:txBody>
-                  <a:tcPr marL="73152" marR="36576" anchor="ctr">
+                  <a:tcPr marL="54864" marR="36576" anchor="ctr">
                     <a:lnL w="0">
                       <a:noFill/>
                     </a:lnL>
@@ -11635,17 +14504,17 @@
                     <a:p>
                       <a:pPr algn="ctr"/>
                       <a:r>
-                        <a:rPr sz="950" b="1">
+                        <a:rPr sz="850" b="1">
                           <a:solidFill>
                             <a:srgbClr val="566074"/>
                           </a:solidFill>
                           <a:latin typeface="Google Sans Flex"/>
                         </a:rPr>
-                        <a:t>Meme wikis</a:t>
+                        <a:t>Know Your Meme</a:t>
                       </a:r>
                     </a:p>
                   </a:txBody>
-                  <a:tcPr marL="73152" marR="36576" anchor="ctr">
+                  <a:tcPr marL="54864" marR="36576" anchor="ctr">
                     <a:lnL w="0">
                       <a:noFill/>
                     </a:lnL>
@@ -11670,17 +14539,17 @@
                     <a:p>
                       <a:pPr algn="ctr"/>
                       <a:r>
-                        <a:rPr sz="950" b="1">
+                        <a:rPr sz="850" b="1">
                           <a:solidFill>
                             <a:srgbClr val="566074"/>
                           </a:solidFill>
                           <a:latin typeface="Google Sans Flex"/>
                         </a:rPr>
-                        <a:t>Trend tools</a:t>
+                        <a:t>Google Trends</a:t>
                       </a:r>
                     </a:p>
                   </a:txBody>
-                  <a:tcPr marL="73152" marR="36576" anchor="ctr">
+                  <a:tcPr marL="54864" marR="36576" anchor="ctr">
                     <a:lnL w="0">
                       <a:noFill/>
                     </a:lnL>
@@ -11705,7 +14574,42 @@
                     <a:p>
                       <a:pPr algn="ctr"/>
                       <a:r>
-                        <a:rPr sz="950" b="1">
+                        <a:rPr sz="850" b="1">
+                          <a:solidFill>
+                            <a:srgbClr val="566074"/>
+                          </a:solidFill>
+                          <a:latin typeface="Google Sans Flex"/>
+                        </a:rPr>
+                        <a:t>TikTok Creative Center</a:t>
+                      </a:r>
+                    </a:p>
+                  </a:txBody>
+                  <a:tcPr marL="54864" marR="36576" anchor="ctr">
+                    <a:lnL w="0">
+                      <a:noFill/>
+                    </a:lnL>
+                    <a:lnR w="0">
+                      <a:noFill/>
+                    </a:lnR>
+                    <a:lnT w="0">
+                      <a:noFill/>
+                    </a:lnT>
+                    <a:lnB w="9525">
+                      <a:solidFill>
+                        <a:srgbClr val="DCE1E8"/>
+                      </a:solidFill>
+                    </a:lnB>
+                    <a:noFill/>
+                  </a:tcPr>
+                </a:tc>
+                <a:tc>
+                  <a:txBody>
+                    <a:bodyPr wrap="square"/>
+                    <a:lstStyle/>
+                    <a:p>
+                      <a:pPr algn="ctr"/>
+                      <a:r>
+                        <a:rPr sz="850" b="1">
                           <a:solidFill>
                             <a:srgbClr val="121826"/>
                           </a:solidFill>
@@ -11715,7 +14619,7 @@
                       </a:r>
                     </a:p>
                   </a:txBody>
-                  <a:tcPr marL="73152" marR="36576" anchor="ctr">
+                  <a:tcPr marL="54864" marR="36576" anchor="ctr">
                     <a:lnL w="0">
                       <a:noFill/>
                     </a:lnL>
@@ -11736,7 +14640,7 @@
                   </a:tcPr>
                 </a:tc>
               </a:tr>
-              <a:tr h="384048">
+              <a:tr h="374904">
                 <a:tc>
                   <a:txBody>
                     <a:bodyPr wrap="square"/>
@@ -11754,7 +14658,7 @@
                       </a:r>
                     </a:p>
                   </a:txBody>
-                  <a:tcPr marL="73152" marR="36576" anchor="ctr">
+                  <a:tcPr marL="54864" marR="36576" anchor="ctr">
                     <a:lnL w="0">
                       <a:noFill/>
                     </a:lnL>
@@ -11789,7 +14693,256 @@
                       </a:r>
                     </a:p>
                   </a:txBody>
-                  <a:tcPr marL="73152" marR="36576" anchor="ctr">
+                  <a:tcPr marL="54864" marR="36576" anchor="ctr">
+                    <a:lnL w="0">
+                      <a:noFill/>
+                    </a:lnL>
+                    <a:lnR w="0">
+                      <a:noFill/>
+                    </a:lnR>
+                    <a:lnT w="0">
+                      <a:noFill/>
+                    </a:lnT>
+                    <a:lnB w="9525">
+                      <a:solidFill>
+                        <a:srgbClr val="DCE1E8"/>
+                      </a:solidFill>
+                    </a:lnB>
+                    <a:noFill/>
+                  </a:tcPr>
+                </a:tc>
+                <a:tc>
+                  <a:txBody>
+                    <a:bodyPr wrap="square"/>
+                    <a:lstStyle/>
+                    <a:p>
+                      <a:pPr algn="ctr"/>
+                      <a:r>
+                        <a:rPr sz="1200">
+                          <a:solidFill>
+                            <a:srgbClr val="566074"/>
+                          </a:solidFill>
+                          <a:latin typeface="Google Sans Flex"/>
+                        </a:rPr>
+                        <a:t>○</a:t>
+                      </a:r>
+                    </a:p>
+                  </a:txBody>
+                  <a:tcPr marL="54864" marR="36576" anchor="ctr">
+                    <a:lnL w="0">
+                      <a:noFill/>
+                    </a:lnL>
+                    <a:lnR w="0">
+                      <a:noFill/>
+                    </a:lnR>
+                    <a:lnT w="0">
+                      <a:noFill/>
+                    </a:lnT>
+                    <a:lnB w="9525">
+                      <a:solidFill>
+                        <a:srgbClr val="DCE1E8"/>
+                      </a:solidFill>
+                    </a:lnB>
+                    <a:noFill/>
+                  </a:tcPr>
+                </a:tc>
+                <a:tc>
+                  <a:txBody>
+                    <a:bodyPr wrap="square"/>
+                    <a:lstStyle/>
+                    <a:p>
+                      <a:pPr algn="ctr"/>
+                      <a:r>
+                        <a:rPr sz="1200">
+                          <a:solidFill>
+                            <a:srgbClr val="566074"/>
+                          </a:solidFill>
+                          <a:latin typeface="Google Sans Flex"/>
+                        </a:rPr>
+                        <a:t>○</a:t>
+                      </a:r>
+                    </a:p>
+                  </a:txBody>
+                  <a:tcPr marL="54864" marR="36576" anchor="ctr">
+                    <a:lnL w="0">
+                      <a:noFill/>
+                    </a:lnL>
+                    <a:lnR w="0">
+                      <a:noFill/>
+                    </a:lnR>
+                    <a:lnT w="0">
+                      <a:noFill/>
+                    </a:lnT>
+                    <a:lnB w="9525">
+                      <a:solidFill>
+                        <a:srgbClr val="DCE1E8"/>
+                      </a:solidFill>
+                    </a:lnB>
+                    <a:noFill/>
+                  </a:tcPr>
+                </a:tc>
+                <a:tc>
+                  <a:txBody>
+                    <a:bodyPr wrap="square"/>
+                    <a:lstStyle/>
+                    <a:p>
+                      <a:pPr algn="ctr"/>
+                      <a:r>
+                        <a:rPr sz="1200">
+                          <a:solidFill>
+                            <a:srgbClr val="121826"/>
+                          </a:solidFill>
+                          <a:latin typeface="Google Sans Flex"/>
+                        </a:rPr>
+                        <a:t>●</a:t>
+                      </a:r>
+                    </a:p>
+                  </a:txBody>
+                  <a:tcPr marL="54864" marR="36576" anchor="ctr">
+                    <a:lnL w="0">
+                      <a:noFill/>
+                    </a:lnL>
+                    <a:lnR w="0">
+                      <a:noFill/>
+                    </a:lnR>
+                    <a:lnT w="0">
+                      <a:noFill/>
+                    </a:lnT>
+                    <a:lnB w="9525">
+                      <a:solidFill>
+                        <a:srgbClr val="DCE1E8"/>
+                      </a:solidFill>
+                    </a:lnB>
+                    <a:noFill/>
+                  </a:tcPr>
+                </a:tc>
+                <a:tc>
+                  <a:txBody>
+                    <a:bodyPr wrap="square"/>
+                    <a:lstStyle/>
+                    <a:p>
+                      <a:pPr algn="ctr"/>
+                      <a:r>
+                        <a:rPr sz="1200">
+                          <a:solidFill>
+                            <a:srgbClr val="121826"/>
+                          </a:solidFill>
+                          <a:latin typeface="Google Sans Flex"/>
+                        </a:rPr>
+                        <a:t>●</a:t>
+                      </a:r>
+                    </a:p>
+                  </a:txBody>
+                  <a:tcPr marL="54864" marR="36576" anchor="ctr">
+                    <a:lnL w="0">
+                      <a:noFill/>
+                    </a:lnL>
+                    <a:lnR w="0">
+                      <a:noFill/>
+                    </a:lnR>
+                    <a:lnT w="0">
+                      <a:noFill/>
+                    </a:lnT>
+                    <a:lnB w="9525">
+                      <a:solidFill>
+                        <a:srgbClr val="DCE1E8"/>
+                      </a:solidFill>
+                    </a:lnB>
+                    <a:solidFill>
+                      <a:srgbClr val="F2F4F7"/>
+                    </a:solidFill>
+                  </a:tcPr>
+                </a:tc>
+              </a:tr>
+              <a:tr h="374904">
+                <a:tc>
+                  <a:txBody>
+                    <a:bodyPr wrap="square"/>
+                    <a:lstStyle/>
+                    <a:p>
+                      <a:pPr algn="l"/>
+                      <a:r>
+                        <a:rPr sz="1050">
+                          <a:solidFill>
+                            <a:srgbClr val="121826"/>
+                          </a:solidFill>
+                          <a:latin typeface="Google Sans Flex"/>
+                        </a:rPr>
+                        <a:t>What it means, where from</a:t>
+                      </a:r>
+                    </a:p>
+                  </a:txBody>
+                  <a:tcPr marL="54864" marR="36576" anchor="ctr">
+                    <a:lnL w="0">
+                      <a:noFill/>
+                    </a:lnL>
+                    <a:lnR w="0">
+                      <a:noFill/>
+                    </a:lnR>
+                    <a:lnT w="0">
+                      <a:noFill/>
+                    </a:lnT>
+                    <a:lnB w="9525">
+                      <a:solidFill>
+                        <a:srgbClr val="DCE1E8"/>
+                      </a:solidFill>
+                    </a:lnB>
+                    <a:noFill/>
+                  </a:tcPr>
+                </a:tc>
+                <a:tc>
+                  <a:txBody>
+                    <a:bodyPr wrap="square"/>
+                    <a:lstStyle/>
+                    <a:p>
+                      <a:pPr algn="ctr"/>
+                      <a:r>
+                        <a:rPr sz="1200">
+                          <a:solidFill>
+                            <a:srgbClr val="566074"/>
+                          </a:solidFill>
+                          <a:latin typeface="Google Sans Flex"/>
+                        </a:rPr>
+                        <a:t>○</a:t>
+                      </a:r>
+                    </a:p>
+                  </a:txBody>
+                  <a:tcPr marL="54864" marR="36576" anchor="ctr">
+                    <a:lnL w="0">
+                      <a:noFill/>
+                    </a:lnL>
+                    <a:lnR w="0">
+                      <a:noFill/>
+                    </a:lnR>
+                    <a:lnT w="0">
+                      <a:noFill/>
+                    </a:lnT>
+                    <a:lnB w="9525">
+                      <a:solidFill>
+                        <a:srgbClr val="DCE1E8"/>
+                      </a:solidFill>
+                    </a:lnB>
+                    <a:noFill/>
+                  </a:tcPr>
+                </a:tc>
+                <a:tc>
+                  <a:txBody>
+                    <a:bodyPr wrap="square"/>
+                    <a:lstStyle/>
+                    <a:p>
+                      <a:pPr algn="ctr"/>
+                      <a:r>
+                        <a:rPr sz="1200">
+                          <a:solidFill>
+                            <a:srgbClr val="121826"/>
+                          </a:solidFill>
+                          <a:latin typeface="Google Sans Flex"/>
+                        </a:rPr>
+                        <a:t>●</a:t>
+                      </a:r>
+                    </a:p>
+                  </a:txBody>
+                  <a:tcPr marL="54864" marR="36576" anchor="ctr">
                     <a:lnL w="0">
                       <a:noFill/>
                     </a:lnL>
@@ -11824,7 +14977,42 @@
                       </a:r>
                     </a:p>
                   </a:txBody>
-                  <a:tcPr marL="73152" marR="36576" anchor="ctr">
+                  <a:tcPr marL="54864" marR="36576" anchor="ctr">
+                    <a:lnL w="0">
+                      <a:noFill/>
+                    </a:lnL>
+                    <a:lnR w="0">
+                      <a:noFill/>
+                    </a:lnR>
+                    <a:lnT w="0">
+                      <a:noFill/>
+                    </a:lnT>
+                    <a:lnB w="9525">
+                      <a:solidFill>
+                        <a:srgbClr val="DCE1E8"/>
+                      </a:solidFill>
+                    </a:lnB>
+                    <a:noFill/>
+                  </a:tcPr>
+                </a:tc>
+                <a:tc>
+                  <a:txBody>
+                    <a:bodyPr wrap="square"/>
+                    <a:lstStyle/>
+                    <a:p>
+                      <a:pPr algn="ctr"/>
+                      <a:r>
+                        <a:rPr sz="1200">
+                          <a:solidFill>
+                            <a:srgbClr val="B8C0CC"/>
+                          </a:solidFill>
+                          <a:latin typeface="Google Sans Flex"/>
+                        </a:rPr>
+                        <a:t>–</a:t>
+                      </a:r>
+                    </a:p>
+                  </a:txBody>
+                  <a:tcPr marL="54864" marR="36576" anchor="ctr">
                     <a:lnL w="0">
                       <a:noFill/>
                     </a:lnL>
@@ -11859,7 +15047,46 @@
                       </a:r>
                     </a:p>
                   </a:txBody>
-                  <a:tcPr marL="73152" marR="36576" anchor="ctr">
+                  <a:tcPr marL="54864" marR="36576" anchor="ctr">
+                    <a:lnL w="0">
+                      <a:noFill/>
+                    </a:lnL>
+                    <a:lnR w="0">
+                      <a:noFill/>
+                    </a:lnR>
+                    <a:lnT w="0">
+                      <a:noFill/>
+                    </a:lnT>
+                    <a:lnB w="9525">
+                      <a:solidFill>
+                        <a:srgbClr val="DCE1E8"/>
+                      </a:solidFill>
+                    </a:lnB>
+                    <a:solidFill>
+                      <a:srgbClr val="F2F4F7"/>
+                    </a:solidFill>
+                  </a:tcPr>
+                </a:tc>
+              </a:tr>
+              <a:tr h="374904">
+                <a:tc>
+                  <a:txBody>
+                    <a:bodyPr wrap="square"/>
+                    <a:lstStyle/>
+                    <a:p>
+                      <a:pPr algn="l"/>
+                      <a:r>
+                        <a:rPr sz="1050">
+                          <a:solidFill>
+                            <a:srgbClr val="121826"/>
+                          </a:solidFill>
+                          <a:latin typeface="Google Sans Flex"/>
+                        </a:rPr>
+                        <a:t>Rising or fading</a:t>
+                      </a:r>
+                    </a:p>
+                  </a:txBody>
+                  <a:tcPr marL="54864" marR="36576" anchor="ctr">
                     <a:lnL w="0">
                       <a:noFill/>
                     </a:lnL>
@@ -11894,7 +15121,147 @@
                       </a:r>
                     </a:p>
                   </a:txBody>
-                  <a:tcPr marL="73152" marR="36576" anchor="ctr">
+                  <a:tcPr marL="54864" marR="36576" anchor="ctr">
+                    <a:lnL w="0">
+                      <a:noFill/>
+                    </a:lnL>
+                    <a:lnR w="0">
+                      <a:noFill/>
+                    </a:lnR>
+                    <a:lnT w="0">
+                      <a:noFill/>
+                    </a:lnT>
+                    <a:lnB w="9525">
+                      <a:solidFill>
+                        <a:srgbClr val="DCE1E8"/>
+                      </a:solidFill>
+                    </a:lnB>
+                    <a:noFill/>
+                  </a:tcPr>
+                </a:tc>
+                <a:tc>
+                  <a:txBody>
+                    <a:bodyPr wrap="square"/>
+                    <a:lstStyle/>
+                    <a:p>
+                      <a:pPr algn="ctr"/>
+                      <a:r>
+                        <a:rPr sz="1200">
+                          <a:solidFill>
+                            <a:srgbClr val="566074"/>
+                          </a:solidFill>
+                          <a:latin typeface="Google Sans Flex"/>
+                        </a:rPr>
+                        <a:t>○</a:t>
+                      </a:r>
+                    </a:p>
+                  </a:txBody>
+                  <a:tcPr marL="54864" marR="36576" anchor="ctr">
+                    <a:lnL w="0">
+                      <a:noFill/>
+                    </a:lnL>
+                    <a:lnR w="0">
+                      <a:noFill/>
+                    </a:lnR>
+                    <a:lnT w="0">
+                      <a:noFill/>
+                    </a:lnT>
+                    <a:lnB w="9525">
+                      <a:solidFill>
+                        <a:srgbClr val="DCE1E8"/>
+                      </a:solidFill>
+                    </a:lnB>
+                    <a:noFill/>
+                  </a:tcPr>
+                </a:tc>
+                <a:tc>
+                  <a:txBody>
+                    <a:bodyPr wrap="square"/>
+                    <a:lstStyle/>
+                    <a:p>
+                      <a:pPr algn="ctr"/>
+                      <a:r>
+                        <a:rPr sz="1200">
+                          <a:solidFill>
+                            <a:srgbClr val="121826"/>
+                          </a:solidFill>
+                          <a:latin typeface="Google Sans Flex"/>
+                        </a:rPr>
+                        <a:t>●</a:t>
+                      </a:r>
+                    </a:p>
+                  </a:txBody>
+                  <a:tcPr marL="54864" marR="36576" anchor="ctr">
+                    <a:lnL w="0">
+                      <a:noFill/>
+                    </a:lnL>
+                    <a:lnR w="0">
+                      <a:noFill/>
+                    </a:lnR>
+                    <a:lnT w="0">
+                      <a:noFill/>
+                    </a:lnT>
+                    <a:lnB w="9525">
+                      <a:solidFill>
+                        <a:srgbClr val="DCE1E8"/>
+                      </a:solidFill>
+                    </a:lnB>
+                    <a:noFill/>
+                  </a:tcPr>
+                </a:tc>
+                <a:tc>
+                  <a:txBody>
+                    <a:bodyPr wrap="square"/>
+                    <a:lstStyle/>
+                    <a:p>
+                      <a:pPr algn="ctr"/>
+                      <a:r>
+                        <a:rPr sz="1200">
+                          <a:solidFill>
+                            <a:srgbClr val="121826"/>
+                          </a:solidFill>
+                          <a:latin typeface="Google Sans Flex"/>
+                        </a:rPr>
+                        <a:t>●</a:t>
+                      </a:r>
+                    </a:p>
+                  </a:txBody>
+                  <a:tcPr marL="54864" marR="36576" anchor="ctr">
+                    <a:lnL w="0">
+                      <a:noFill/>
+                    </a:lnL>
+                    <a:lnR w="0">
+                      <a:noFill/>
+                    </a:lnR>
+                    <a:lnT w="0">
+                      <a:noFill/>
+                    </a:lnT>
+                    <a:lnB w="9525">
+                      <a:solidFill>
+                        <a:srgbClr val="DCE1E8"/>
+                      </a:solidFill>
+                    </a:lnB>
+                    <a:noFill/>
+                  </a:tcPr>
+                </a:tc>
+                <a:tc>
+                  <a:txBody>
+                    <a:bodyPr wrap="square"/>
+                    <a:lstStyle/>
+                    <a:p>
+                      <a:pPr algn="ctr"/>
+                      <a:r>
+                        <a:rPr sz="1200">
+                          <a:solidFill>
+                            <a:srgbClr val="121826"/>
+                          </a:solidFill>
+                          <a:latin typeface="Google Sans Flex"/>
+                        </a:rPr>
+                        <a:t>●</a:t>
+                      </a:r>
+                    </a:p>
+                  </a:txBody>
+                  <a:tcPr marL="54864" marR="36576" anchor="ctr">
                     <a:lnL w="0">
                       <a:noFill/>
                     </a:lnL>
@@ -11915,7 +15282,7 @@
                   </a:tcPr>
                 </a:tc>
               </a:tr>
-              <a:tr h="384048">
+              <a:tr h="374904">
                 <a:tc>
                   <a:txBody>
                     <a:bodyPr wrap="square"/>
@@ -11929,11 +15296,46 @@
                           </a:solidFill>
                           <a:latin typeface="Google Sans Flex"/>
                         </a:rPr>
-                        <a:t>What it means, where from</a:t>
+                        <a:t>Safe for a brand, and why</a:t>
                       </a:r>
                     </a:p>
                   </a:txBody>
-                  <a:tcPr marL="73152" marR="36576" anchor="ctr">
+                  <a:tcPr marL="54864" marR="36576" anchor="ctr">
+                    <a:lnL w="0">
+                      <a:noFill/>
+                    </a:lnL>
+                    <a:lnR w="0">
+                      <a:noFill/>
+                    </a:lnR>
+                    <a:lnT w="0">
+                      <a:noFill/>
+                    </a:lnT>
+                    <a:lnB w="9525">
+                      <a:solidFill>
+                        <a:srgbClr val="DCE1E8"/>
+                      </a:solidFill>
+                    </a:lnB>
+                    <a:noFill/>
+                  </a:tcPr>
+                </a:tc>
+                <a:tc>
+                  <a:txBody>
+                    <a:bodyPr wrap="square"/>
+                    <a:lstStyle/>
+                    <a:p>
+                      <a:pPr algn="ctr"/>
+                      <a:r>
+                        <a:rPr sz="1200">
+                          <a:solidFill>
+                            <a:srgbClr val="566074"/>
+                          </a:solidFill>
+                          <a:latin typeface="Google Sans Flex"/>
+                        </a:rPr>
+                        <a:t>○</a:t>
+                      </a:r>
+                    </a:p>
+                  </a:txBody>
+                  <a:tcPr marL="54864" marR="36576" anchor="ctr">
                     <a:lnL w="0">
                       <a:noFill/>
                     </a:lnL>
@@ -11968,7 +15370,77 @@
                       </a:r>
                     </a:p>
                   </a:txBody>
-                  <a:tcPr marL="73152" marR="36576" anchor="ctr">
+                  <a:tcPr marL="54864" marR="36576" anchor="ctr">
+                    <a:lnL w="0">
+                      <a:noFill/>
+                    </a:lnL>
+                    <a:lnR w="0">
+                      <a:noFill/>
+                    </a:lnR>
+                    <a:lnT w="0">
+                      <a:noFill/>
+                    </a:lnT>
+                    <a:lnB w="9525">
+                      <a:solidFill>
+                        <a:srgbClr val="DCE1E8"/>
+                      </a:solidFill>
+                    </a:lnB>
+                    <a:noFill/>
+                  </a:tcPr>
+                </a:tc>
+                <a:tc>
+                  <a:txBody>
+                    <a:bodyPr wrap="square"/>
+                    <a:lstStyle/>
+                    <a:p>
+                      <a:pPr algn="ctr"/>
+                      <a:r>
+                        <a:rPr sz="1200">
+                          <a:solidFill>
+                            <a:srgbClr val="B8C0CC"/>
+                          </a:solidFill>
+                          <a:latin typeface="Google Sans Flex"/>
+                        </a:rPr>
+                        <a:t>–</a:t>
+                      </a:r>
+                    </a:p>
+                  </a:txBody>
+                  <a:tcPr marL="54864" marR="36576" anchor="ctr">
+                    <a:lnL w="0">
+                      <a:noFill/>
+                    </a:lnL>
+                    <a:lnR w="0">
+                      <a:noFill/>
+                    </a:lnR>
+                    <a:lnT w="0">
+                      <a:noFill/>
+                    </a:lnT>
+                    <a:lnB w="9525">
+                      <a:solidFill>
+                        <a:srgbClr val="DCE1E8"/>
+                      </a:solidFill>
+                    </a:lnB>
+                    <a:noFill/>
+                  </a:tcPr>
+                </a:tc>
+                <a:tc>
+                  <a:txBody>
+                    <a:bodyPr wrap="square"/>
+                    <a:lstStyle/>
+                    <a:p>
+                      <a:pPr algn="ctr"/>
+                      <a:r>
+                        <a:rPr sz="1200">
+                          <a:solidFill>
+                            <a:srgbClr val="B8C0CC"/>
+                          </a:solidFill>
+                          <a:latin typeface="Google Sans Flex"/>
+                        </a:rPr>
+                        <a:t>–</a:t>
+                      </a:r>
+                    </a:p>
+                  </a:txBody>
+                  <a:tcPr marL="54864" marR="36576" anchor="ctr">
                     <a:lnL w="0">
                       <a:noFill/>
                     </a:lnL>
@@ -12003,7 +15475,81 @@
                       </a:r>
                     </a:p>
                   </a:txBody>
-                  <a:tcPr marL="73152" marR="36576" anchor="ctr">
+                  <a:tcPr marL="54864" marR="36576" anchor="ctr">
+                    <a:lnL w="0">
+                      <a:noFill/>
+                    </a:lnL>
+                    <a:lnR w="0">
+                      <a:noFill/>
+                    </a:lnR>
+                    <a:lnT w="0">
+                      <a:noFill/>
+                    </a:lnT>
+                    <a:lnB w="9525">
+                      <a:solidFill>
+                        <a:srgbClr val="DCE1E8"/>
+                      </a:solidFill>
+                    </a:lnB>
+                    <a:solidFill>
+                      <a:srgbClr val="F2F4F7"/>
+                    </a:solidFill>
+                  </a:tcPr>
+                </a:tc>
+              </a:tr>
+              <a:tr h="374904">
+                <a:tc>
+                  <a:txBody>
+                    <a:bodyPr wrap="square"/>
+                    <a:lstStyle/>
+                    <a:p>
+                      <a:pPr algn="l"/>
+                      <a:r>
+                        <a:rPr sz="1050">
+                          <a:solidFill>
+                            <a:srgbClr val="121826"/>
+                          </a:solidFill>
+                          <a:latin typeface="Google Sans Flex"/>
+                        </a:rPr>
+                        <a:t>Per JAPAC market</a:t>
+                      </a:r>
+                    </a:p>
+                  </a:txBody>
+                  <a:tcPr marL="54864" marR="36576" anchor="ctr">
+                    <a:lnL w="0">
+                      <a:noFill/>
+                    </a:lnL>
+                    <a:lnR w="0">
+                      <a:noFill/>
+                    </a:lnR>
+                    <a:lnT w="0">
+                      <a:noFill/>
+                    </a:lnT>
+                    <a:lnB w="9525">
+                      <a:solidFill>
+                        <a:srgbClr val="DCE1E8"/>
+                      </a:solidFill>
+                    </a:lnB>
+                    <a:noFill/>
+                  </a:tcPr>
+                </a:tc>
+                <a:tc>
+                  <a:txBody>
+                    <a:bodyPr wrap="square"/>
+                    <a:lstStyle/>
+                    <a:p>
+                      <a:pPr algn="ctr"/>
+                      <a:r>
+                        <a:rPr sz="1200">
+                          <a:solidFill>
+                            <a:srgbClr val="566074"/>
+                          </a:solidFill>
+                          <a:latin typeface="Google Sans Flex"/>
+                        </a:rPr>
+                        <a:t>○</a:t>
+                      </a:r>
+                    </a:p>
+                  </a:txBody>
+                  <a:tcPr marL="54864" marR="36576" anchor="ctr">
                     <a:lnL w="0">
                       <a:noFill/>
                     </a:lnL>
@@ -12038,7 +15584,7 @@
                       </a:r>
                     </a:p>
                   </a:txBody>
-                  <a:tcPr marL="73152" marR="36576" anchor="ctr">
+                  <a:tcPr marL="54864" marR="36576" anchor="ctr">
                     <a:lnL w="0">
                       <a:noFill/>
                     </a:lnL>
@@ -12073,7 +15619,77 @@
                       </a:r>
                     </a:p>
                   </a:txBody>
-                  <a:tcPr marL="73152" marR="36576" anchor="ctr">
+                  <a:tcPr marL="54864" marR="36576" anchor="ctr">
+                    <a:lnL w="0">
+                      <a:noFill/>
+                    </a:lnL>
+                    <a:lnR w="0">
+                      <a:noFill/>
+                    </a:lnR>
+                    <a:lnT w="0">
+                      <a:noFill/>
+                    </a:lnT>
+                    <a:lnB w="9525">
+                      <a:solidFill>
+                        <a:srgbClr val="DCE1E8"/>
+                      </a:solidFill>
+                    </a:lnB>
+                    <a:noFill/>
+                  </a:tcPr>
+                </a:tc>
+                <a:tc>
+                  <a:txBody>
+                    <a:bodyPr wrap="square"/>
+                    <a:lstStyle/>
+                    <a:p>
+                      <a:pPr algn="ctr"/>
+                      <a:r>
+                        <a:rPr sz="1200">
+                          <a:solidFill>
+                            <a:srgbClr val="121826"/>
+                          </a:solidFill>
+                          <a:latin typeface="Google Sans Flex"/>
+                        </a:rPr>
+                        <a:t>●</a:t>
+                      </a:r>
+                    </a:p>
+                  </a:txBody>
+                  <a:tcPr marL="54864" marR="36576" anchor="ctr">
+                    <a:lnL w="0">
+                      <a:noFill/>
+                    </a:lnL>
+                    <a:lnR w="0">
+                      <a:noFill/>
+                    </a:lnR>
+                    <a:lnT w="0">
+                      <a:noFill/>
+                    </a:lnT>
+                    <a:lnB w="9525">
+                      <a:solidFill>
+                        <a:srgbClr val="DCE1E8"/>
+                      </a:solidFill>
+                    </a:lnB>
+                    <a:noFill/>
+                  </a:tcPr>
+                </a:tc>
+                <a:tc>
+                  <a:txBody>
+                    <a:bodyPr wrap="square"/>
+                    <a:lstStyle/>
+                    <a:p>
+                      <a:pPr algn="ctr"/>
+                      <a:r>
+                        <a:rPr sz="1200">
+                          <a:solidFill>
+                            <a:srgbClr val="121826"/>
+                          </a:solidFill>
+                          <a:latin typeface="Google Sans Flex"/>
+                        </a:rPr>
+                        <a:t>●</a:t>
+                      </a:r>
+                    </a:p>
+                  </a:txBody>
+                  <a:tcPr marL="54864" marR="36576" anchor="ctr">
                     <a:lnL w="0">
                       <a:noFill/>
                     </a:lnL>
@@ -12094,7 +15710,7 @@
                   </a:tcPr>
                 </a:tc>
               </a:tr>
-              <a:tr h="384048">
+              <a:tr h="374904">
                 <a:tc>
                   <a:txBody>
                     <a:bodyPr wrap="square"/>
@@ -12108,11 +15724,11 @@
                           </a:solidFill>
                           <a:latin typeface="Google Sans Flex"/>
                         </a:rPr>
-                        <a:t>Rising or fading</a:t>
+                        <a:t>Writes copy a person approves</a:t>
                       </a:r>
                     </a:p>
                   </a:txBody>
-                  <a:tcPr marL="73152" marR="36576" anchor="ctr">
+                  <a:tcPr marL="54864" marR="36576" anchor="ctr">
                     <a:lnL w="0">
                       <a:noFill/>
                     </a:lnL>
@@ -12147,7 +15763,7 @@
                       </a:r>
                     </a:p>
                   </a:txBody>
-                  <a:tcPr marL="73152" marR="36576" anchor="ctr">
+                  <a:tcPr marL="54864" marR="36576" anchor="ctr">
                     <a:lnL w="0">
                       <a:noFill/>
                     </a:lnL>
@@ -12182,7 +15798,77 @@
                       </a:r>
                     </a:p>
                   </a:txBody>
-                  <a:tcPr marL="73152" marR="36576" anchor="ctr">
+                  <a:tcPr marL="54864" marR="36576" anchor="ctr">
+                    <a:lnL w="0">
+                      <a:noFill/>
+                    </a:lnL>
+                    <a:lnR w="0">
+                      <a:noFill/>
+                    </a:lnR>
+                    <a:lnT w="0">
+                      <a:noFill/>
+                    </a:lnT>
+                    <a:lnB w="9525">
+                      <a:solidFill>
+                        <a:srgbClr val="DCE1E8"/>
+                      </a:solidFill>
+                    </a:lnB>
+                    <a:noFill/>
+                  </a:tcPr>
+                </a:tc>
+                <a:tc>
+                  <a:txBody>
+                    <a:bodyPr wrap="square"/>
+                    <a:lstStyle/>
+                    <a:p>
+                      <a:pPr algn="ctr"/>
+                      <a:r>
+                        <a:rPr sz="1200">
+                          <a:solidFill>
+                            <a:srgbClr val="B8C0CC"/>
+                          </a:solidFill>
+                          <a:latin typeface="Google Sans Flex"/>
+                        </a:rPr>
+                        <a:t>–</a:t>
+                      </a:r>
+                    </a:p>
+                  </a:txBody>
+                  <a:tcPr marL="54864" marR="36576" anchor="ctr">
+                    <a:lnL w="0">
+                      <a:noFill/>
+                    </a:lnL>
+                    <a:lnR w="0">
+                      <a:noFill/>
+                    </a:lnR>
+                    <a:lnT w="0">
+                      <a:noFill/>
+                    </a:lnT>
+                    <a:lnB w="9525">
+                      <a:solidFill>
+                        <a:srgbClr val="DCE1E8"/>
+                      </a:solidFill>
+                    </a:lnB>
+                    <a:noFill/>
+                  </a:tcPr>
+                </a:tc>
+                <a:tc>
+                  <a:txBody>
+                    <a:bodyPr wrap="square"/>
+                    <a:lstStyle/>
+                    <a:p>
+                      <a:pPr algn="ctr"/>
+                      <a:r>
+                        <a:rPr sz="1200">
+                          <a:solidFill>
+                            <a:srgbClr val="566074"/>
+                          </a:solidFill>
+                          <a:latin typeface="Google Sans Flex"/>
+                        </a:rPr>
+                        <a:t>○</a:t>
+                      </a:r>
+                    </a:p>
+                  </a:txBody>
+                  <a:tcPr marL="54864" marR="36576" anchor="ctr">
                     <a:lnL w="0">
                       <a:noFill/>
                     </a:lnL>
@@ -12217,7 +15903,81 @@
                       </a:r>
                     </a:p>
                   </a:txBody>
-                  <a:tcPr marL="73152" marR="36576" anchor="ctr">
+                  <a:tcPr marL="54864" marR="36576" anchor="ctr">
+                    <a:lnL w="0">
+                      <a:noFill/>
+                    </a:lnL>
+                    <a:lnR w="0">
+                      <a:noFill/>
+                    </a:lnR>
+                    <a:lnT w="0">
+                      <a:noFill/>
+                    </a:lnT>
+                    <a:lnB w="9525">
+                      <a:solidFill>
+                        <a:srgbClr val="DCE1E8"/>
+                      </a:solidFill>
+                    </a:lnB>
+                    <a:solidFill>
+                      <a:srgbClr val="F2F4F7"/>
+                    </a:solidFill>
+                  </a:tcPr>
+                </a:tc>
+              </a:tr>
+              <a:tr h="374904">
+                <a:tc>
+                  <a:txBody>
+                    <a:bodyPr wrap="square"/>
+                    <a:lstStyle/>
+                    <a:p>
+                      <a:pPr algn="l"/>
+                      <a:r>
+                        <a:rPr sz="1050">
+                          <a:solidFill>
+                            <a:srgbClr val="121826"/>
+                          </a:solidFill>
+                          <a:latin typeface="Google Sans Flex"/>
+                        </a:rPr>
+                        <a:t>A source behind every claim</a:t>
+                      </a:r>
+                    </a:p>
+                  </a:txBody>
+                  <a:tcPr marL="54864" marR="36576" anchor="ctr">
+                    <a:lnL w="0">
+                      <a:noFill/>
+                    </a:lnL>
+                    <a:lnR w="0">
+                      <a:noFill/>
+                    </a:lnR>
+                    <a:lnT w="0">
+                      <a:noFill/>
+                    </a:lnT>
+                    <a:lnB w="9525">
+                      <a:solidFill>
+                        <a:srgbClr val="DCE1E8"/>
+                      </a:solidFill>
+                    </a:lnB>
+                    <a:noFill/>
+                  </a:tcPr>
+                </a:tc>
+                <a:tc>
+                  <a:txBody>
+                    <a:bodyPr wrap="square"/>
+                    <a:lstStyle/>
+                    <a:p>
+                      <a:pPr algn="ctr"/>
+                      <a:r>
+                        <a:rPr sz="1200">
+                          <a:solidFill>
+                            <a:srgbClr val="566074"/>
+                          </a:solidFill>
+                          <a:latin typeface="Google Sans Flex"/>
+                        </a:rPr>
+                        <a:t>○</a:t>
+                      </a:r>
+                    </a:p>
+                  </a:txBody>
+                  <a:tcPr marL="54864" marR="36576" anchor="ctr">
                     <a:lnL w="0">
                       <a:noFill/>
                     </a:lnL>
@@ -12252,46 +16012,7 @@
                       </a:r>
                     </a:p>
                   </a:txBody>
-                  <a:tcPr marL="73152" marR="36576" anchor="ctr">
-                    <a:lnL w="0">
-                      <a:noFill/>
-                    </a:lnL>
-                    <a:lnR w="0">
-                      <a:noFill/>
-                    </a:lnR>
-                    <a:lnT w="0">
-                      <a:noFill/>
-                    </a:lnT>
-                    <a:lnB w="9525">
-                      <a:solidFill>
-                        <a:srgbClr val="DCE1E8"/>
-                      </a:solidFill>
-                    </a:lnB>
-                    <a:solidFill>
-                      <a:srgbClr val="F2F4F7"/>
-                    </a:solidFill>
-                  </a:tcPr>
-                </a:tc>
-              </a:tr>
-              <a:tr h="384048">
-                <a:tc>
-                  <a:txBody>
-                    <a:bodyPr wrap="square"/>
-                    <a:lstStyle/>
-                    <a:p>
-                      <a:pPr algn="l"/>
-                      <a:r>
-                        <a:rPr sz="1050">
-                          <a:solidFill>
-                            <a:srgbClr val="121826"/>
-                          </a:solidFill>
-                          <a:latin typeface="Google Sans Flex"/>
-                        </a:rPr>
-                        <a:t>Safe for a brand, and why</a:t>
-                      </a:r>
-                    </a:p>
-                  </a:txBody>
-                  <a:tcPr marL="73152" marR="36576" anchor="ctr">
+                  <a:tcPr marL="54864" marR="36576" anchor="ctr">
                     <a:lnL w="0">
                       <a:noFill/>
                     </a:lnL>
@@ -12326,7 +16047,7 @@
                       </a:r>
                     </a:p>
                   </a:txBody>
-                  <a:tcPr marL="73152" marR="36576" anchor="ctr">
+                  <a:tcPr marL="54864" marR="36576" anchor="ctr">
                     <a:lnL w="0">
                       <a:noFill/>
                     </a:lnL>
@@ -12361,42 +16082,7 @@
                       </a:r>
                     </a:p>
                   </a:txBody>
-                  <a:tcPr marL="73152" marR="36576" anchor="ctr">
-                    <a:lnL w="0">
-                      <a:noFill/>
-                    </a:lnL>
-                    <a:lnR w="0">
-                      <a:noFill/>
-                    </a:lnR>
-                    <a:lnT w="0">
-                      <a:noFill/>
-                    </a:lnT>
-                    <a:lnB w="9525">
-                      <a:solidFill>
-                        <a:srgbClr val="DCE1E8"/>
-                      </a:solidFill>
-                    </a:lnB>
-                    <a:noFill/>
-                  </a:tcPr>
-                </a:tc>
-                <a:tc>
-                  <a:txBody>
-                    <a:bodyPr wrap="square"/>
-                    <a:lstStyle/>
-                    <a:p>
-                      <a:pPr algn="ctr"/>
-                      <a:r>
-                        <a:rPr sz="1200">
-                          <a:solidFill>
-                            <a:srgbClr val="B8C0CC"/>
-                          </a:solidFill>
-                          <a:latin typeface="Google Sans Flex"/>
-                        </a:rPr>
-                        <a:t>–</a:t>
-                      </a:r>
-                    </a:p>
-                  </a:txBody>
-                  <a:tcPr marL="73152" marR="36576" anchor="ctr">
+                  <a:tcPr marL="54864" marR="36576" anchor="ctr">
                     <a:lnL w="0">
                       <a:noFill/>
                     </a:lnL>
@@ -12431,544 +16117,7 @@
                       </a:r>
                     </a:p>
                   </a:txBody>
-                  <a:tcPr marL="73152" marR="36576" anchor="ctr">
-                    <a:lnL w="0">
-                      <a:noFill/>
-                    </a:lnL>
-                    <a:lnR w="0">
-                      <a:noFill/>
-                    </a:lnR>
-                    <a:lnT w="0">
-                      <a:noFill/>
-                    </a:lnT>
-                    <a:lnB w="9525">
-                      <a:solidFill>
-                        <a:srgbClr val="DCE1E8"/>
-                      </a:solidFill>
-                    </a:lnB>
-                    <a:solidFill>
-                      <a:srgbClr val="F2F4F7"/>
-                    </a:solidFill>
-                  </a:tcPr>
-                </a:tc>
-              </a:tr>
-              <a:tr h="384048">
-                <a:tc>
-                  <a:txBody>
-                    <a:bodyPr wrap="square"/>
-                    <a:lstStyle/>
-                    <a:p>
-                      <a:pPr algn="l"/>
-                      <a:r>
-                        <a:rPr sz="1050">
-                          <a:solidFill>
-                            <a:srgbClr val="121826"/>
-                          </a:solidFill>
-                          <a:latin typeface="Google Sans Flex"/>
-                        </a:rPr>
-                        <a:t>Per market, in its language</a:t>
-                      </a:r>
-                    </a:p>
-                  </a:txBody>
-                  <a:tcPr marL="73152" marR="36576" anchor="ctr">
-                    <a:lnL w="0">
-                      <a:noFill/>
-                    </a:lnL>
-                    <a:lnR w="0">
-                      <a:noFill/>
-                    </a:lnR>
-                    <a:lnT w="0">
-                      <a:noFill/>
-                    </a:lnT>
-                    <a:lnB w="9525">
-                      <a:solidFill>
-                        <a:srgbClr val="DCE1E8"/>
-                      </a:solidFill>
-                    </a:lnB>
-                    <a:noFill/>
-                  </a:tcPr>
-                </a:tc>
-                <a:tc>
-                  <a:txBody>
-                    <a:bodyPr wrap="square"/>
-                    <a:lstStyle/>
-                    <a:p>
-                      <a:pPr algn="ctr"/>
-                      <a:r>
-                        <a:rPr sz="1200">
-                          <a:solidFill>
-                            <a:srgbClr val="566074"/>
-                          </a:solidFill>
-                          <a:latin typeface="Google Sans Flex"/>
-                        </a:rPr>
-                        <a:t>○</a:t>
-                      </a:r>
-                    </a:p>
-                  </a:txBody>
-                  <a:tcPr marL="73152" marR="36576" anchor="ctr">
-                    <a:lnL w="0">
-                      <a:noFill/>
-                    </a:lnL>
-                    <a:lnR w="0">
-                      <a:noFill/>
-                    </a:lnR>
-                    <a:lnT w="0">
-                      <a:noFill/>
-                    </a:lnT>
-                    <a:lnB w="9525">
-                      <a:solidFill>
-                        <a:srgbClr val="DCE1E8"/>
-                      </a:solidFill>
-                    </a:lnB>
-                    <a:noFill/>
-                  </a:tcPr>
-                </a:tc>
-                <a:tc>
-                  <a:txBody>
-                    <a:bodyPr wrap="square"/>
-                    <a:lstStyle/>
-                    <a:p>
-                      <a:pPr algn="ctr"/>
-                      <a:r>
-                        <a:rPr sz="1200">
-                          <a:solidFill>
-                            <a:srgbClr val="566074"/>
-                          </a:solidFill>
-                          <a:latin typeface="Google Sans Flex"/>
-                        </a:rPr>
-                        <a:t>○</a:t>
-                      </a:r>
-                    </a:p>
-                  </a:txBody>
-                  <a:tcPr marL="73152" marR="36576" anchor="ctr">
-                    <a:lnL w="0">
-                      <a:noFill/>
-                    </a:lnL>
-                    <a:lnR w="0">
-                      <a:noFill/>
-                    </a:lnR>
-                    <a:lnT w="0">
-                      <a:noFill/>
-                    </a:lnT>
-                    <a:lnB w="9525">
-                      <a:solidFill>
-                        <a:srgbClr val="DCE1E8"/>
-                      </a:solidFill>
-                    </a:lnB>
-                    <a:noFill/>
-                  </a:tcPr>
-                </a:tc>
-                <a:tc>
-                  <a:txBody>
-                    <a:bodyPr wrap="square"/>
-                    <a:lstStyle/>
-                    <a:p>
-                      <a:pPr algn="ctr"/>
-                      <a:r>
-                        <a:rPr sz="1200">
-                          <a:solidFill>
-                            <a:srgbClr val="566074"/>
-                          </a:solidFill>
-                          <a:latin typeface="Google Sans Flex"/>
-                        </a:rPr>
-                        <a:t>○</a:t>
-                      </a:r>
-                    </a:p>
-                  </a:txBody>
-                  <a:tcPr marL="73152" marR="36576" anchor="ctr">
-                    <a:lnL w="0">
-                      <a:noFill/>
-                    </a:lnL>
-                    <a:lnR w="0">
-                      <a:noFill/>
-                    </a:lnR>
-                    <a:lnT w="0">
-                      <a:noFill/>
-                    </a:lnT>
-                    <a:lnB w="9525">
-                      <a:solidFill>
-                        <a:srgbClr val="DCE1E8"/>
-                      </a:solidFill>
-                    </a:lnB>
-                    <a:noFill/>
-                  </a:tcPr>
-                </a:tc>
-                <a:tc>
-                  <a:txBody>
-                    <a:bodyPr wrap="square"/>
-                    <a:lstStyle/>
-                    <a:p>
-                      <a:pPr algn="ctr"/>
-                      <a:r>
-                        <a:rPr sz="1200">
-                          <a:solidFill>
-                            <a:srgbClr val="121826"/>
-                          </a:solidFill>
-                          <a:latin typeface="Google Sans Flex"/>
-                        </a:rPr>
-                        <a:t>●</a:t>
-                      </a:r>
-                    </a:p>
-                  </a:txBody>
-                  <a:tcPr marL="73152" marR="36576" anchor="ctr">
-                    <a:lnL w="0">
-                      <a:noFill/>
-                    </a:lnL>
-                    <a:lnR w="0">
-                      <a:noFill/>
-                    </a:lnR>
-                    <a:lnT w="0">
-                      <a:noFill/>
-                    </a:lnT>
-                    <a:lnB w="9525">
-                      <a:solidFill>
-                        <a:srgbClr val="DCE1E8"/>
-                      </a:solidFill>
-                    </a:lnB>
-                    <a:solidFill>
-                      <a:srgbClr val="F2F4F7"/>
-                    </a:solidFill>
-                  </a:tcPr>
-                </a:tc>
-              </a:tr>
-              <a:tr h="384048">
-                <a:tc>
-                  <a:txBody>
-                    <a:bodyPr wrap="square"/>
-                    <a:lstStyle/>
-                    <a:p>
-                      <a:pPr algn="l"/>
-                      <a:r>
-                        <a:rPr sz="1050">
-                          <a:solidFill>
-                            <a:srgbClr val="121826"/>
-                          </a:solidFill>
-                          <a:latin typeface="Google Sans Flex"/>
-                        </a:rPr>
-                        <a:t>Writes copy a person approves</a:t>
-                      </a:r>
-                    </a:p>
-                  </a:txBody>
-                  <a:tcPr marL="73152" marR="36576" anchor="ctr">
-                    <a:lnL w="0">
-                      <a:noFill/>
-                    </a:lnL>
-                    <a:lnR w="0">
-                      <a:noFill/>
-                    </a:lnR>
-                    <a:lnT w="0">
-                      <a:noFill/>
-                    </a:lnT>
-                    <a:lnB w="9525">
-                      <a:solidFill>
-                        <a:srgbClr val="DCE1E8"/>
-                      </a:solidFill>
-                    </a:lnB>
-                    <a:noFill/>
-                  </a:tcPr>
-                </a:tc>
-                <a:tc>
-                  <a:txBody>
-                    <a:bodyPr wrap="square"/>
-                    <a:lstStyle/>
-                    <a:p>
-                      <a:pPr algn="ctr"/>
-                      <a:r>
-                        <a:rPr sz="1200">
-                          <a:solidFill>
-                            <a:srgbClr val="B8C0CC"/>
-                          </a:solidFill>
-                          <a:latin typeface="Google Sans Flex"/>
-                        </a:rPr>
-                        <a:t>–</a:t>
-                      </a:r>
-                    </a:p>
-                  </a:txBody>
-                  <a:tcPr marL="73152" marR="36576" anchor="ctr">
-                    <a:lnL w="0">
-                      <a:noFill/>
-                    </a:lnL>
-                    <a:lnR w="0">
-                      <a:noFill/>
-                    </a:lnR>
-                    <a:lnT w="0">
-                      <a:noFill/>
-                    </a:lnT>
-                    <a:lnB w="9525">
-                      <a:solidFill>
-                        <a:srgbClr val="DCE1E8"/>
-                      </a:solidFill>
-                    </a:lnB>
-                    <a:noFill/>
-                  </a:tcPr>
-                </a:tc>
-                <a:tc>
-                  <a:txBody>
-                    <a:bodyPr wrap="square"/>
-                    <a:lstStyle/>
-                    <a:p>
-                      <a:pPr algn="ctr"/>
-                      <a:r>
-                        <a:rPr sz="1200">
-                          <a:solidFill>
-                            <a:srgbClr val="B8C0CC"/>
-                          </a:solidFill>
-                          <a:latin typeface="Google Sans Flex"/>
-                        </a:rPr>
-                        <a:t>–</a:t>
-                      </a:r>
-                    </a:p>
-                  </a:txBody>
-                  <a:tcPr marL="73152" marR="36576" anchor="ctr">
-                    <a:lnL w="0">
-                      <a:noFill/>
-                    </a:lnL>
-                    <a:lnR w="0">
-                      <a:noFill/>
-                    </a:lnR>
-                    <a:lnT w="0">
-                      <a:noFill/>
-                    </a:lnT>
-                    <a:lnB w="9525">
-                      <a:solidFill>
-                        <a:srgbClr val="DCE1E8"/>
-                      </a:solidFill>
-                    </a:lnB>
-                    <a:noFill/>
-                  </a:tcPr>
-                </a:tc>
-                <a:tc>
-                  <a:txBody>
-                    <a:bodyPr wrap="square"/>
-                    <a:lstStyle/>
-                    <a:p>
-                      <a:pPr algn="ctr"/>
-                      <a:r>
-                        <a:rPr sz="1200">
-                          <a:solidFill>
-                            <a:srgbClr val="B8C0CC"/>
-                          </a:solidFill>
-                          <a:latin typeface="Google Sans Flex"/>
-                        </a:rPr>
-                        <a:t>–</a:t>
-                      </a:r>
-                    </a:p>
-                  </a:txBody>
-                  <a:tcPr marL="73152" marR="36576" anchor="ctr">
-                    <a:lnL w="0">
-                      <a:noFill/>
-                    </a:lnL>
-                    <a:lnR w="0">
-                      <a:noFill/>
-                    </a:lnR>
-                    <a:lnT w="0">
-                      <a:noFill/>
-                    </a:lnT>
-                    <a:lnB w="9525">
-                      <a:solidFill>
-                        <a:srgbClr val="DCE1E8"/>
-                      </a:solidFill>
-                    </a:lnB>
-                    <a:noFill/>
-                  </a:tcPr>
-                </a:tc>
-                <a:tc>
-                  <a:txBody>
-                    <a:bodyPr wrap="square"/>
-                    <a:lstStyle/>
-                    <a:p>
-                      <a:pPr algn="ctr"/>
-                      <a:r>
-                        <a:rPr sz="1200">
-                          <a:solidFill>
-                            <a:srgbClr val="121826"/>
-                          </a:solidFill>
-                          <a:latin typeface="Google Sans Flex"/>
-                        </a:rPr>
-                        <a:t>●</a:t>
-                      </a:r>
-                    </a:p>
-                  </a:txBody>
-                  <a:tcPr marL="73152" marR="36576" anchor="ctr">
-                    <a:lnL w="0">
-                      <a:noFill/>
-                    </a:lnL>
-                    <a:lnR w="0">
-                      <a:noFill/>
-                    </a:lnR>
-                    <a:lnT w="0">
-                      <a:noFill/>
-                    </a:lnT>
-                    <a:lnB w="9525">
-                      <a:solidFill>
-                        <a:srgbClr val="DCE1E8"/>
-                      </a:solidFill>
-                    </a:lnB>
-                    <a:solidFill>
-                      <a:srgbClr val="F2F4F7"/>
-                    </a:solidFill>
-                  </a:tcPr>
-                </a:tc>
-              </a:tr>
-              <a:tr h="384048">
-                <a:tc>
-                  <a:txBody>
-                    <a:bodyPr wrap="square"/>
-                    <a:lstStyle/>
-                    <a:p>
-                      <a:pPr algn="l"/>
-                      <a:r>
-                        <a:rPr sz="1050">
-                          <a:solidFill>
-                            <a:srgbClr val="121826"/>
-                          </a:solidFill>
-                          <a:latin typeface="Google Sans Flex"/>
-                        </a:rPr>
-                        <a:t>A source behind every claim</a:t>
-                      </a:r>
-                    </a:p>
-                  </a:txBody>
-                  <a:tcPr marL="73152" marR="36576" anchor="ctr">
-                    <a:lnL w="0">
-                      <a:noFill/>
-                    </a:lnL>
-                    <a:lnR w="0">
-                      <a:noFill/>
-                    </a:lnR>
-                    <a:lnT w="0">
-                      <a:noFill/>
-                    </a:lnT>
-                    <a:lnB w="9525">
-                      <a:solidFill>
-                        <a:srgbClr val="DCE1E8"/>
-                      </a:solidFill>
-                    </a:lnB>
-                    <a:noFill/>
-                  </a:tcPr>
-                </a:tc>
-                <a:tc>
-                  <a:txBody>
-                    <a:bodyPr wrap="square"/>
-                    <a:lstStyle/>
-                    <a:p>
-                      <a:pPr algn="ctr"/>
-                      <a:r>
-                        <a:rPr sz="1200">
-                          <a:solidFill>
-                            <a:srgbClr val="B8C0CC"/>
-                          </a:solidFill>
-                          <a:latin typeface="Google Sans Flex"/>
-                        </a:rPr>
-                        <a:t>–</a:t>
-                      </a:r>
-                    </a:p>
-                  </a:txBody>
-                  <a:tcPr marL="73152" marR="36576" anchor="ctr">
-                    <a:lnL w="0">
-                      <a:noFill/>
-                    </a:lnL>
-                    <a:lnR w="0">
-                      <a:noFill/>
-                    </a:lnR>
-                    <a:lnT w="0">
-                      <a:noFill/>
-                    </a:lnT>
-                    <a:lnB w="9525">
-                      <a:solidFill>
-                        <a:srgbClr val="DCE1E8"/>
-                      </a:solidFill>
-                    </a:lnB>
-                    <a:noFill/>
-                  </a:tcPr>
-                </a:tc>
-                <a:tc>
-                  <a:txBody>
-                    <a:bodyPr wrap="square"/>
-                    <a:lstStyle/>
-                    <a:p>
-                      <a:pPr algn="ctr"/>
-                      <a:r>
-                        <a:rPr sz="1200">
-                          <a:solidFill>
-                            <a:srgbClr val="121826"/>
-                          </a:solidFill>
-                          <a:latin typeface="Google Sans Flex"/>
-                        </a:rPr>
-                        <a:t>●</a:t>
-                      </a:r>
-                    </a:p>
-                  </a:txBody>
-                  <a:tcPr marL="73152" marR="36576" anchor="ctr">
-                    <a:lnL w="0">
-                      <a:noFill/>
-                    </a:lnL>
-                    <a:lnR w="0">
-                      <a:noFill/>
-                    </a:lnR>
-                    <a:lnT w="0">
-                      <a:noFill/>
-                    </a:lnT>
-                    <a:lnB w="9525">
-                      <a:solidFill>
-                        <a:srgbClr val="DCE1E8"/>
-                      </a:solidFill>
-                    </a:lnB>
-                    <a:noFill/>
-                  </a:tcPr>
-                </a:tc>
-                <a:tc>
-                  <a:txBody>
-                    <a:bodyPr wrap="square"/>
-                    <a:lstStyle/>
-                    <a:p>
-                      <a:pPr algn="ctr"/>
-                      <a:r>
-                        <a:rPr sz="1200">
-                          <a:solidFill>
-                            <a:srgbClr val="B8C0CC"/>
-                          </a:solidFill>
-                          <a:latin typeface="Google Sans Flex"/>
-                        </a:rPr>
-                        <a:t>–</a:t>
-                      </a:r>
-                    </a:p>
-                  </a:txBody>
-                  <a:tcPr marL="73152" marR="36576" anchor="ctr">
-                    <a:lnL w="0">
-                      <a:noFill/>
-                    </a:lnL>
-                    <a:lnR w="0">
-                      <a:noFill/>
-                    </a:lnR>
-                    <a:lnT w="0">
-                      <a:noFill/>
-                    </a:lnT>
-                    <a:lnB w="9525">
-                      <a:solidFill>
-                        <a:srgbClr val="DCE1E8"/>
-                      </a:solidFill>
-                    </a:lnB>
-                    <a:noFill/>
-                  </a:tcPr>
-                </a:tc>
-                <a:tc>
-                  <a:txBody>
-                    <a:bodyPr wrap="square"/>
-                    <a:lstStyle/>
-                    <a:p>
-                      <a:pPr algn="ctr"/>
-                      <a:r>
-                        <a:rPr sz="1200">
-                          <a:solidFill>
-                            <a:srgbClr val="121826"/>
-                          </a:solidFill>
-                          <a:latin typeface="Google Sans Flex"/>
-                        </a:rPr>
-                        <a:t>●</a:t>
-                      </a:r>
-                    </a:p>
-                  </a:txBody>
-                  <a:tcPr marL="73152" marR="36576" anchor="ctr">
+                  <a:tcPr marL="54864" marR="36576" anchor="ctr">
                     <a:lnL w="0">
                       <a:noFill/>
                     </a:lnL>
@@ -12993,45 +16142,6 @@
           </a:graphicData>
         </a:graphic>
       </p:graphicFrame>
-      <p:sp>
-        <p:nvSpPr>
-          <p:cNvPr id="93" name="TextBox 92"/>
-          <p:cNvSpPr txBox="1"/>
-          <p:nvPr/>
-        </p:nvSpPr>
-        <p:spPr>
-          <a:xfrm>
-            <a:off x="365760" y="4498848"/>
-            <a:ext cx="5486400" cy="182880"/>
-          </a:xfrm>
-          <a:prstGeom prst="rect">
-            <a:avLst/>
-          </a:prstGeom>
-          <a:noFill/>
-        </p:spPr>
-        <p:txBody>
-          <a:bodyPr wrap="square" lIns="0" rIns="0" tIns="0" bIns="0" anchor="t">
-            <a:spAutoFit/>
-          </a:bodyPr>
-          <a:lstStyle/>
-          <a:p>
-            <a:pPr>
-              <a:spcBef>
-                <a:spcPts val="0"/>
-              </a:spcBef>
-            </a:pPr>
-            <a:r>
-              <a:rPr sz="800" b="0">
-                <a:solidFill>
-                  <a:srgbClr val="566074"/>
-                </a:solidFill>
-                <a:latin typeface="Google Sans Flex"/>
-              </a:rPr>
-              <a:t>●  covers it   ○  partly   –  not its job</a:t>
-            </a:r>
-          </a:p>
-        </p:txBody>
-      </p:sp>
     </p:spTree>
   </p:cSld>
   <p:clrMapOvr>
@@ -13166,8 +16276,8 @@
         </p:nvSpPr>
         <p:spPr>
           <a:xfrm>
-            <a:off x="265350" y="663825"/>
-            <a:ext cx="8943000" cy="561900"/>
+            <a:off x="265350" y="548640"/>
+            <a:ext cx="8943000" cy="256032"/>
           </a:xfrm>
           <a:prstGeom prst="rect">
             <a:avLst/>
@@ -13193,8 +16303,10 @@
               <a:buNone/>
             </a:pPr>
             <a:r>
-              <a:rPr lang="en-GB" sz="1600">
-                <a:solidFill/>
+              <a:rPr lang="en-GB" sz="1050">
+                <a:solidFill>
+                  <a:srgbClr val="566074"/>
+                </a:solidFill>
                 <a:latin typeface="Google Sans Flex Medium"/>
                 <a:ea typeface="Google Sans Flex Medium"/>
                 <a:cs typeface="Google Sans Flex Medium"/>
@@ -13939,6 +17051,40 @@
                 <a:latin typeface="Google Sans Flex"/>
               </a:rPr>
               <a:t>Memes in use, fading or needing care per market with 12-week mentions; a one-page market briefing; a map of how one meme differs by country.</a:t>
+            </a:r>
+          </a:p>
+        </p:txBody>
+      </p:sp>
+      <p:sp>
+        <p:nvSpPr>
+          <p:cNvPr id="112" name="Headline"/>
+          <p:cNvSpPr txBox="1"/>
+          <p:nvPr/>
+        </p:nvSpPr>
+        <p:spPr>
+          <a:xfrm>
+            <a:off x="365760" y="786384"/>
+            <a:ext cx="8412480" cy="310896"/>
+          </a:xfrm>
+          <a:prstGeom prst="rect">
+            <a:avLst/>
+          </a:prstGeom>
+          <a:noFill/>
+        </p:spPr>
+        <p:txBody>
+          <a:bodyPr wrap="square" lIns="0" rIns="0" tIns="0" bIns="0">
+            <a:spAutoFit/>
+          </a:bodyPr>
+          <a:lstStyle/>
+          <a:p>
+            <a:r>
+              <a:rPr sz="1600" b="1">
+                <a:solidFill>
+                  <a:srgbClr val="121826"/>
+                </a:solidFill>
+                <a:latin typeface="Google Sans Flex"/>
+              </a:rPr>
+              <a:t>Pick, write, check, approve – with a dictionary entry behind every word</a:t>
             </a:r>
           </a:p>
         </p:txBody>
@@ -14077,8 +17223,8 @@
         </p:nvSpPr>
         <p:spPr>
           <a:xfrm>
-            <a:off x="265350" y="663825"/>
-            <a:ext cx="8943000" cy="561900"/>
+            <a:off x="265350" y="548640"/>
+            <a:ext cx="8943000" cy="256032"/>
           </a:xfrm>
           <a:prstGeom prst="rect">
             <a:avLst/>
@@ -14104,8 +17250,10 @@
               <a:buNone/>
             </a:pPr>
             <a:r>
-              <a:rPr lang="en-GB" sz="1600">
-                <a:solidFill/>
+              <a:rPr lang="en-GB" sz="1050">
+                <a:solidFill>
+                  <a:srgbClr val="566074"/>
+                </a:solidFill>
                 <a:latin typeface="Google Sans Flex Medium"/>
                 <a:ea typeface="Google Sans Flex Medium"/>
                 <a:cs typeface="Google Sans Flex Medium"/>
@@ -14156,7 +17304,7 @@
                 </a:solidFill>
                 <a:latin typeface="Google Sans Flex"/>
               </a:rPr>
-              <a:t>At request time – rules pick, Gemini writes, rules check, a person approves</a:t>
+              <a:t>At request time</a:t>
             </a:r>
           </a:p>
         </p:txBody>
@@ -15715,6 +18863,40 @@
                 <a:latin typeface="Google Sans Flex"/>
               </a:rPr>
               <a:t>Every recommendation and generated item carries its sources and observation time. Human reviewers can override meanings and risk levels; automated runs never overwrite a human decision.</a:t>
+            </a:r>
+          </a:p>
+        </p:txBody>
+      </p:sp>
+      <p:sp>
+        <p:nvSpPr>
+          <p:cNvPr id="133" name="Headline"/>
+          <p:cNvSpPr txBox="1"/>
+          <p:nvPr/>
+        </p:nvSpPr>
+        <p:spPr>
+          <a:xfrm>
+            <a:off x="365760" y="786384"/>
+            <a:ext cx="8412480" cy="310896"/>
+          </a:xfrm>
+          <a:prstGeom prst="rect">
+            <a:avLst/>
+          </a:prstGeom>
+          <a:noFill/>
+        </p:spPr>
+        <p:txBody>
+          <a:bodyPr wrap="square" lIns="0" rIns="0" tIns="0" bIns="0">
+            <a:spAutoFit/>
+          </a:bodyPr>
+          <a:lstStyle/>
+          <a:p>
+            <a:r>
+              <a:rPr sz="1600" b="1">
+                <a:solidFill>
+                  <a:srgbClr val="121826"/>
+                </a:solidFill>
+                <a:latin typeface="Google Sans Flex"/>
+              </a:rPr>
+              <a:t>Rules pick and check, Gemini writes, a person approves</a:t>
             </a:r>
           </a:p>
         </p:txBody>
@@ -15853,8 +19035,8 @@
         </p:nvSpPr>
         <p:spPr>
           <a:xfrm>
-            <a:off x="265350" y="663825"/>
-            <a:ext cx="8943000" cy="561900"/>
+            <a:off x="265350" y="548640"/>
+            <a:ext cx="8943000" cy="256032"/>
           </a:xfrm>
           <a:prstGeom prst="rect">
             <a:avLst/>
@@ -15880,8 +19062,10 @@
               <a:buNone/>
             </a:pPr>
             <a:r>
-              <a:rPr lang="en-GB" sz="1600">
-                <a:solidFill/>
+              <a:rPr lang="en-GB" sz="1050">
+                <a:solidFill>
+                  <a:srgbClr val="566074"/>
+                </a:solidFill>
                 <a:latin typeface="Google Sans Flex Medium"/>
                 <a:ea typeface="Google Sans Flex Medium"/>
                 <a:cs typeface="Google Sans Flex Medium"/>
@@ -18032,6 +21216,40 @@
                 <a:latin typeface="Google Sans Flex"/>
               </a:rPr>
               <a:t>Secret Manager · Artifact Registry · Cloud Monitoring → Pub/Sub → alert relay (Cloud Run) · Terraform · GitHub Actions via Workload Identity</a:t>
+            </a:r>
+          </a:p>
+        </p:txBody>
+      </p:sp>
+      <p:sp>
+        <p:nvSpPr>
+          <p:cNvPr id="159" name="Headline"/>
+          <p:cNvSpPr txBox="1"/>
+          <p:nvPr/>
+        </p:nvSpPr>
+        <p:spPr>
+          <a:xfrm>
+            <a:off x="365760" y="786384"/>
+            <a:ext cx="8412480" cy="310896"/>
+          </a:xfrm>
+          <a:prstGeom prst="rect">
+            <a:avLst/>
+          </a:prstGeom>
+          <a:noFill/>
+        </p:spPr>
+        <p:txBody>
+          <a:bodyPr wrap="square" lIns="0" rIns="0" tIns="0" bIns="0">
+            <a:spAutoFit/>
+          </a:bodyPr>
+          <a:lstStyle/>
+          <a:p>
+            <a:r>
+              <a:rPr sz="1600" b="1">
+                <a:solidFill>
+                  <a:srgbClr val="121826"/>
+                </a:solidFill>
+                <a:latin typeface="Google Sans Flex"/>
+              </a:rPr>
+              <a:t>Heavy work runs in the batch; Cloud Run serves only verified data</a:t>
             </a:r>
           </a:p>
         </p:txBody>
@@ -18170,8 +21388,8 @@
         </p:nvSpPr>
         <p:spPr>
           <a:xfrm>
-            <a:off x="265350" y="663825"/>
-            <a:ext cx="8943000" cy="561900"/>
+            <a:off x="265350" y="548640"/>
+            <a:ext cx="8943000" cy="256032"/>
           </a:xfrm>
           <a:prstGeom prst="rect">
             <a:avLst/>
@@ -18197,8 +21415,10 @@
               <a:buNone/>
             </a:pPr>
             <a:r>
-              <a:rPr lang="en-GB" sz="1600">
-                <a:solidFill/>
+              <a:rPr lang="en-GB" sz="1050">
+                <a:solidFill>
+                  <a:srgbClr val="566074"/>
+                </a:solidFill>
                 <a:latin typeface="Google Sans Flex Medium"/>
                 <a:ea typeface="Google Sans Flex Medium"/>
                 <a:cs typeface="Google Sans Flex Medium"/>
@@ -19142,6 +22362,40 @@
                 <a:latin typeface="Google Sans Flex"/>
               </a:rPr>
               <a:t>Firebase / Firestore are not used: the dictionary is relational and versioned (meanings, evidence, reviews), so it lives in Cloud SQL for PostgreSQL.</a:t>
+            </a:r>
+          </a:p>
+        </p:txBody>
+      </p:sp>
+      <p:sp>
+        <p:nvSpPr>
+          <p:cNvPr id="137" name="Headline"/>
+          <p:cNvSpPr txBox="1"/>
+          <p:nvPr/>
+        </p:nvSpPr>
+        <p:spPr>
+          <a:xfrm>
+            <a:off x="365760" y="786384"/>
+            <a:ext cx="8412480" cy="310896"/>
+          </a:xfrm>
+          <a:prstGeom prst="rect">
+            <a:avLst/>
+          </a:prstGeom>
+          <a:noFill/>
+        </p:spPr>
+        <p:txBody>
+          <a:bodyPr wrap="square" lIns="0" rIns="0" tIns="0" bIns="0">
+            <a:spAutoFit/>
+          </a:bodyPr>
+          <a:lstStyle/>
+          <a:p>
+            <a:r>
+              <a:rPr sz="1600" b="1">
+                <a:solidFill>
+                  <a:srgbClr val="121826"/>
+                </a:solidFill>
+                <a:latin typeface="Google Sans Flex"/>
+              </a:rPr>
+              <a:t>Gemini on Vertex AI writes, Gemma does batch work, plain code decides</a:t>
             </a:r>
           </a:p>
         </p:txBody>
@@ -19280,8 +22534,8 @@
         </p:nvSpPr>
         <p:spPr>
           <a:xfrm>
-            <a:off x="265350" y="663825"/>
-            <a:ext cx="8943000" cy="561900"/>
+            <a:off x="265350" y="548640"/>
+            <a:ext cx="8943000" cy="256032"/>
           </a:xfrm>
           <a:prstGeom prst="rect">
             <a:avLst/>
@@ -19307,8 +22561,10 @@
               <a:buNone/>
             </a:pPr>
             <a:r>
-              <a:rPr lang="en-GB" sz="1600">
-                <a:solidFill/>
+              <a:rPr lang="en-GB" sz="1050">
+                <a:solidFill>
+                  <a:srgbClr val="566074"/>
+                </a:solidFill>
                 <a:latin typeface="Google Sans Flex Medium"/>
                 <a:ea typeface="Google Sans Flex Medium"/>
                 <a:cs typeface="Google Sans Flex Medium"/>
@@ -20019,6 +23275,40 @@
                 <a:latin typeface="Google Sans Flex"/>
               </a:rPr>
               <a:t>*List-price estimate for gemini-3.8-flash (Vertex AI global standard, through 2026-12-31), 1,000 input + 200 output tokens; excludes thinking tokens, grounding, caching and taxes. Cloud SQL runs on a free trial instance until about 2026-10-30; a paid tier is set up before then.</a:t>
+            </a:r>
+          </a:p>
+        </p:txBody>
+      </p:sp>
+      <p:sp>
+        <p:nvSpPr>
+          <p:cNvPr id="143" name="Headline"/>
+          <p:cNvSpPr txBox="1"/>
+          <p:nvPr/>
+        </p:nvSpPr>
+        <p:spPr>
+          <a:xfrm>
+            <a:off x="365760" y="786384"/>
+            <a:ext cx="8412480" cy="310896"/>
+          </a:xfrm>
+          <a:prstGeom prst="rect">
+            <a:avLst/>
+          </a:prstGeom>
+          <a:noFill/>
+        </p:spPr>
+        <p:txBody>
+          <a:bodyPr wrap="square" lIns="0" rIns="0" tIns="0" bIns="0">
+            <a:spAutoFit/>
+          </a:bodyPr>
+          <a:lstStyle/>
+          <a:p>
+            <a:r>
+              <a:rPr sz="1600" b="1">
+                <a:solidFill>
+                  <a:srgbClr val="121826"/>
+                </a:solidFill>
+                <a:latin typeface="Google Sans Flex"/>
+              </a:rPr>
+              <a:t>About $0.0015 per Gemini call, and no GPU running when nobody needs it</a:t>
             </a:r>
           </a:p>
         </p:txBody>
@@ -20157,8 +23447,8 @@
         </p:nvSpPr>
         <p:spPr>
           <a:xfrm>
-            <a:off x="265350" y="663825"/>
-            <a:ext cx="8943000" cy="561900"/>
+            <a:off x="265350" y="548640"/>
+            <a:ext cx="8943000" cy="256032"/>
           </a:xfrm>
           <a:prstGeom prst="rect">
             <a:avLst/>
@@ -20184,8 +23474,10 @@
               <a:buNone/>
             </a:pPr>
             <a:r>
-              <a:rPr lang="en-GB" sz="1600">
-                <a:solidFill/>
+              <a:rPr lang="en-GB" sz="1050">
+                <a:solidFill>
+                  <a:srgbClr val="566074"/>
+                </a:solidFill>
                 <a:latin typeface="Google Sans Flex Medium"/>
                 <a:ea typeface="Google Sans Flex Medium"/>
                 <a:cs typeface="Google Sans Flex Medium"/>
@@ -20474,6 +23766,40 @@
           </a:ln>
         </p:spPr>
       </p:pic>
+      <p:sp>
+        <p:nvSpPr>
+          <p:cNvPr id="152" name="Headline"/>
+          <p:cNvSpPr txBox="1"/>
+          <p:nvPr/>
+        </p:nvSpPr>
+        <p:spPr>
+          <a:xfrm>
+            <a:off x="365760" y="786384"/>
+            <a:ext cx="8412480" cy="310896"/>
+          </a:xfrm>
+          <a:prstGeom prst="rect">
+            <a:avLst/>
+          </a:prstGeom>
+          <a:noFill/>
+        </p:spPr>
+        <p:txBody>
+          <a:bodyPr wrap="square" lIns="0" rIns="0" tIns="0" bIns="0">
+            <a:spAutoFit/>
+          </a:bodyPr>
+          <a:lstStyle/>
+          <a:p>
+            <a:r>
+              <a:rPr sz="1600" b="1">
+                <a:solidFill>
+                  <a:srgbClr val="121826"/>
+                </a:solidFill>
+                <a:latin typeface="Google Sans Flex"/>
+              </a:rPr>
+              <a:t>The deployed app, on data collected on 9 October</a:t>
+            </a:r>
+          </a:p>
+        </p:txBody>
+      </p:sp>
     </p:spTree>
   </p:cSld>
   <p:clrMapOvr>

--- a/docs/대회/제출/AI-Builder-Cup-제출-초안.pptx
+++ b/docs/대회/제출/AI-Builder-Cup-제출-초안.pptx
@@ -1821,7 +1821,7 @@
           <a:lstStyle/>
           <a:p>
             <a:r>
-              <a:t>Before submission: confirm the Trend web and API are deployed on Cloud Run with Cloud SQL (Plan 05), then fill in the product URL and the demo video link.</a:t>
+              <a:t>Links checked on 2026-10-17: the repository is public and the demo video (2:53, unlisted) opens without signing in.</a:t>
             </a:r>
           </a:p>
         </p:txBody>
@@ -10282,7 +10282,7 @@
                 </a:solidFill>
                 <a:latin typeface="Google Sans Flex"/>
               </a:rPr>
-              <a:t>Before submission</a:t>
+              <a:t>Now</a:t>
             </a:r>
           </a:p>
         </p:txBody>
@@ -10326,28 +10326,7 @@
                 </a:solidFill>
                 <a:latin typeface="Google Sans Flex"/>
               </a:rPr>
-              <a:t>Final dictionary refresh, then re-measure the 12 cases</a:t>
-            </a:r>
-          </a:p>
-          <a:p>
-            <a:pPr marL="146304" indent="-146304" algn="l">
-              <a:spcAft>
-                <a:spcPts val="800"/>
-              </a:spcAft>
-              <a:buClr>
-                <a:srgbClr val="5F6368"/>
-              </a:buClr>
-              <a:buFont typeface="Arial"/>
-              <a:buChar char="•"/>
-            </a:pPr>
-            <a:r>
-              <a:rPr sz="1100" b="0" i="0">
-                <a:solidFill>
-                  <a:srgbClr val="121826"/>
-                </a:solidFill>
-                <a:latin typeface="Google Sans Flex"/>
-              </a:rPr>
-              <a:t>Gemma live re-checks on the L4 VM (code ready, GPU off)</a:t>
+              <a:t>Turn on the GPU VM for Gemma live re-checks (code ready)</a:t>
             </a:r>
           </a:p>
           <a:p>
@@ -10786,7 +10765,7 @@
                 </a:solidFill>
                 <a:latin typeface="Google Sans Flex"/>
               </a:rPr>
-              <a:t>Next: the final data refresh, more Japanese memes and tests with marketers</a:t>
+              <a:t>Next: more Japanese memes, human-labelled tests and trials with marketers</a:t>
             </a:r>
           </a:p>
         </p:txBody>
@@ -13332,7 +13311,17 @@
                 </a:solidFill>
                 <a:latin typeface="Google Sans Flex"/>
               </a:rPr>
-              <a:t>:  https://github.com/Sihyeon-Ji/2026-google-ai-builder-cup</a:t>
+              <a:t>:  </a:t>
+            </a:r>
+            <a:r>
+              <a:rPr>
+                <a:solidFill>
+                  <a:srgbClr val="121826"/>
+                </a:solidFill>
+                <a:latin typeface="Google Sans Flex"/>
+                <a:hlinkClick r:id="rId5"/>
+              </a:rPr>
+              <a:t>https://github.com/Sihyeon-Ji/trend-interpreter</a:t>
             </a:r>
             <a:endParaRPr>
               <a:latin typeface="Google Sans Flex Medium"/>
@@ -13370,7 +13359,17 @@
                 </a:solidFill>
                 <a:latin typeface="Google Sans Flex"/>
               </a:rPr>
-              <a:t>:  [YouTube / Vimeo / Drive link – under 3 minutes]</a:t>
+              <a:t>:  </a:t>
+            </a:r>
+            <a:r>
+              <a:rPr>
+                <a:solidFill>
+                  <a:srgbClr val="566074"/>
+                </a:solidFill>
+                <a:latin typeface="Google Sans Flex"/>
+                <a:hlinkClick r:id="rId6"/>
+              </a:rPr>
+              <a:t>https://youtu.be/KHXkWvGHFx4</a:t>
             </a:r>
             <a:endParaRPr>
               <a:latin typeface="Google Sans Flex Medium"/>
@@ -13408,7 +13407,16 @@
                 </a:solidFill>
                 <a:latin typeface="Google Sans Flex"/>
               </a:rPr>
-              <a:t>:  [Cloud Run URL]</a:t>
+              <a:t>:  </a:t>
+            </a:r>
+            <a:r>
+              <a:rPr>
+                <a:solidFill>
+                  <a:srgbClr val="566074"/>
+                </a:solidFill>
+                <a:latin typeface="Google Sans Flex"/>
+              </a:rPr>
+              <a:t>given in the submission form</a:t>
             </a:r>
             <a:endParaRPr>
               <a:latin typeface="Google Sans Flex Medium"/>
@@ -24227,7 +24235,7 @@
                 </a:solidFill>
                 <a:latin typeface="Google Sans Flex"/>
               </a:rPr>
-              <a:t>L4 · Gemma, on demand</a:t>
+              <a:t>L4 · Gemma, not deployed</a:t>
             </a:r>
           </a:p>
         </p:txBody>
@@ -25727,7 +25735,7 @@
                 </a:solidFill>
                 <a:latin typeface="Google Sans Flex"/>
               </a:rPr>
-              <a:t> (local, Kaggle, on-demand L4 VM) – classification, translation, evidence labeling, live re-checks for reviewers</a:t>
+              <a:t> (local, Kaggle) – classification, translation, evidence labeling in the batch pipeline</a:t>
             </a:r>
           </a:p>
           <a:p>
@@ -25928,7 +25936,7 @@
                 </a:solidFill>
                 <a:latin typeface="Google Sans Flex"/>
               </a:rPr>
-              <a:t>Vertex AI · Compute Engine L4 GPU</a:t>
+              <a:t>Vertex AI · Cloud Run Jobs · Cloud Storage</a:t>
             </a:r>
           </a:p>
           <a:p>
@@ -27367,7 +27375,7 @@
                 </a:solidFill>
                 <a:latin typeface="Google Sans Flex"/>
               </a:rPr>
-              <a:t>always-on GPU – Gemma runs in the batch; an L4 VM starts only for reviewer demos</a:t>
+              <a:t>always-on GPU – Gemma runs in the batch; no GPU VM runs in production</a:t>
             </a:r>
           </a:p>
         </p:txBody>
@@ -27662,7 +27670,7 @@
                 </a:solidFill>
                 <a:latin typeface="Google Sans Flex"/>
               </a:rPr>
-              <a:t>We run Gemma 4 in the batch pipeline and on an L4 VM that is started only when needed, and keep request-time AI on Gemini, so serving cost follows usage.</a:t>
+              <a:t>We run Gemma 4 in the batch pipeline and keep request-time AI on Gemini, so serving cost follows usage. A reviewer L4 VM is defined in Terraform but not deployed.</a:t>
             </a:r>
           </a:p>
         </p:txBody>
@@ -27701,7 +27709,7 @@
                 </a:solidFill>
                 <a:latin typeface="Google Sans Flex"/>
               </a:rPr>
-              <a:t>*List-price estimate for gemini-3.8-flash (Vertex AI global standard, through 2026-12-31), 1,000 input + 200 output tokens; excludes thinking tokens, grounding, caching and taxes. Cloud SQL runs on a free trial instance until about 2026-10-30; a paid tier is set up before then.</a:t>
+              <a:t>*List-price estimate for gemini-3.8-flash (Vertex AI global standard, through 2026-12-31), 1,000 input + 200 output tokens; excludes thinking tokens, grounding, caching and taxes. Cloud SQL moves from a free trial instance to a small paid instance (db-g1-small) on 2026-10-20.</a:t>
             </a:r>
           </a:p>
         </p:txBody>
@@ -27735,7 +27743,7 @@
                 </a:solidFill>
                 <a:latin typeface="Google Sans Flex"/>
               </a:rPr>
-              <a:t>About $0.0015 per Gemini call, and no GPU running when nobody needs it</a:t>
+              <a:t>About $0.0015 per Gemini call, and no GPU running in production</a:t>
             </a:r>
           </a:p>
         </p:txBody>
